--- a/public/formu_pitch_deck.pptx
+++ b/public/formu_pitch_deck.pptx
@@ -3229,7 +3229,7 @@
         <p:spPr>
           <a:xfrm>
             <a:off x="1234440" y="603504"/>
-            <a:ext cx="2743200" cy="320040"/>
+            <a:ext cx="3657600" cy="320040"/>
           </a:xfrm>
           <a:prstGeom prst="rect">
             <a:avLst/>
@@ -3243,7 +3243,7 @@
           <a:lstStyle/>
           <a:p>
             <a:pPr>
-              <a:defRPr sz="1800" b="1">
+              <a:defRPr sz="1600" b="1">
                 <a:solidFill>
                   <a:srgbClr val="0F172A"/>
                 </a:solidFill>
@@ -3251,7 +3251,7 @@
               </a:defRPr>
             </a:pPr>
             <a:r>
-              <a:t>Formu (포뮤)</a:t>
+              <a:t>Formu (포뮤) · B2B RegTech OS</a:t>
             </a:r>
           </a:p>
         </p:txBody>
@@ -3264,8 +3264,8 @@
         </p:nvSpPr>
         <p:spPr>
           <a:xfrm>
-            <a:off x="8686800" y="603504"/>
-            <a:ext cx="2743200" cy="320040"/>
+            <a:off x="6858000" y="603504"/>
+            <a:ext cx="4572000" cy="320040"/>
           </a:xfrm>
           <a:prstGeom prst="rect">
             <a:avLst/>
@@ -3279,7 +3279,7 @@
           <a:lstStyle/>
           <a:p>
             <a:pPr algn="r">
-              <a:defRPr sz="1000" b="1">
+              <a:defRPr sz="1100" b="1">
                 <a:solidFill>
                   <a:srgbClr val="1E60F2"/>
                 </a:solidFill>
@@ -3287,7 +3287,7 @@
               </a:defRPr>
             </a:pPr>
             <a:r>
-              <a:t>B2B REGTECH OS · 2026</a:t>
+              <a:t>모두의 창업 2기 예비창업자 트랙 (일반/기술분야)</a:t>
             </a:r>
           </a:p>
         </p:txBody>
@@ -3300,8 +3300,8 @@
         </p:nvSpPr>
         <p:spPr>
           <a:xfrm>
-            <a:off x="731520" y="1737360"/>
-            <a:ext cx="6858000" cy="2377440"/>
+            <a:off x="731520" y="1691640"/>
+            <a:ext cx="6583680" cy="2377440"/>
           </a:xfrm>
           <a:prstGeom prst="rect">
             <a:avLst/>
@@ -3315,11 +3315,10 @@
           <a:lstStyle/>
           <a:p>
             <a:pPr>
-              <a:defRPr sz="3800" b="1">
+              <a:defRPr sz="3600" b="1">
                 <a:solidFill>
                   <a:srgbClr val="0F172A"/>
                 </a:solidFill>
-                <a:latin typeface="Pretendard"/>
               </a:defRPr>
             </a:pPr>
             <a:r>
@@ -3328,11 +3327,10 @@
           </a:p>
           <a:p>
             <a:pPr>
-              <a:defRPr sz="3800" b="1">
+              <a:defRPr sz="3600" b="1">
                 <a:solidFill>
                   <a:srgbClr val="0F172A"/>
                 </a:solidFill>
-                <a:latin typeface="Pretendard"/>
               </a:defRPr>
             </a:pPr>
             <a:r>
@@ -3341,11 +3339,10 @@
           </a:p>
           <a:p>
             <a:pPr>
-              <a:defRPr sz="3800" b="1">
+              <a:defRPr sz="3600" b="1">
                 <a:solidFill>
                   <a:srgbClr val="1E60F2"/>
                 </a:solidFill>
-                <a:latin typeface="Pretendard"/>
               </a:defRPr>
             </a:pPr>
             <a:r>
@@ -3362,8 +3359,8 @@
         </p:nvSpPr>
         <p:spPr>
           <a:xfrm>
-            <a:off x="731520" y="4297680"/>
-            <a:ext cx="6583680" cy="1097280"/>
+            <a:off x="731520" y="4251960"/>
+            <a:ext cx="6400800" cy="1005840"/>
           </a:xfrm>
           <a:prstGeom prst="rect">
             <a:avLst/>
@@ -3377,11 +3374,10 @@
           <a:lstStyle/>
           <a:p>
             <a:pPr>
-              <a:defRPr sz="1400">
+              <a:defRPr sz="1350">
                 <a:solidFill>
                   <a:srgbClr val="334155"/>
                 </a:solidFill>
-                <a:latin typeface="Pretendard"/>
               </a:defRPr>
             </a:pPr>
             <a:r>
@@ -3402,14 +3398,14 @@
         </p:nvSpPr>
         <p:spPr>
           <a:xfrm>
-            <a:off x="7772400" y="1737360"/>
-            <a:ext cx="3657600" cy="1051560"/>
+            <a:off x="7498079" y="1691640"/>
+            <a:ext cx="3931920" cy="4023360"/>
           </a:xfrm>
           <a:prstGeom prst="roundRect">
             <a:avLst/>
           </a:prstGeom>
           <a:solidFill>
-            <a:srgbClr val="F6F8FC"/>
+            <a:srgbClr val="F8FAFC"/>
           </a:solidFill>
           <a:ln>
             <a:noFill/>
@@ -3439,95 +3435,25 @@
       </p:sp>
       <p:sp>
         <p:nvSpPr>
-          <p:cNvPr id="10" name="TextBox 9"/>
-          <p:cNvSpPr txBox="1"/>
-          <p:nvPr/>
-        </p:nvSpPr>
-        <p:spPr>
-          <a:xfrm>
-            <a:off x="8046720" y="1901952"/>
-            <a:ext cx="3108960" cy="411480"/>
-          </a:xfrm>
-          <a:prstGeom prst="rect">
-            <a:avLst/>
-          </a:prstGeom>
-          <a:noFill/>
-        </p:spPr>
-        <p:txBody>
-          <a:bodyPr wrap="none">
-            <a:spAutoFit/>
-          </a:bodyPr>
-          <a:lstStyle/>
-          <a:p>
-            <a:pPr>
-              <a:defRPr sz="1800" b="1">
-                <a:solidFill>
-                  <a:srgbClr val="1E60F2"/>
-                </a:solidFill>
-                <a:latin typeface="Pretendard"/>
-              </a:defRPr>
-            </a:pPr>
-            <a:r>
-              <a:t>3,000장 ➔ 0건</a:t>
-            </a:r>
-          </a:p>
-        </p:txBody>
-      </p:sp>
-      <p:sp>
-        <p:nvSpPr>
-          <p:cNvPr id="11" name="TextBox 10"/>
-          <p:cNvSpPr txBox="1"/>
-          <p:nvPr/>
-        </p:nvSpPr>
-        <p:spPr>
-          <a:xfrm>
-            <a:off x="8046720" y="2331720"/>
-            <a:ext cx="3108960" cy="365760"/>
-          </a:xfrm>
-          <a:prstGeom prst="rect">
-            <a:avLst/>
-          </a:prstGeom>
-          <a:noFill/>
-        </p:spPr>
-        <p:txBody>
-          <a:bodyPr wrap="none">
-            <a:spAutoFit/>
-          </a:bodyPr>
-          <a:lstStyle/>
-          <a:p>
-            <a:pPr>
-              <a:defRPr sz="1050">
-                <a:solidFill>
-                  <a:srgbClr val="64748B"/>
-                </a:solidFill>
-                <a:latin typeface="Pretendard"/>
-              </a:defRPr>
-            </a:pPr>
-            <a:r>
-              <a:t>소수점 오타 단상자 전량 폐기 손실 0</a:t>
-            </a:r>
-          </a:p>
-        </p:txBody>
-      </p:sp>
-      <p:sp>
-        <p:nvSpPr>
-          <p:cNvPr id="12" name="Rounded Rectangle 11"/>
+          <p:cNvPr id="10" name="Rounded Rectangle 9"/>
           <p:cNvSpPr/>
           <p:nvPr/>
         </p:nvSpPr>
         <p:spPr>
           <a:xfrm>
-            <a:off x="7772400" y="2971800"/>
-            <a:ext cx="3657600" cy="1051560"/>
+            <a:off x="8046720" y="2926080"/>
+            <a:ext cx="2834640" cy="1463040"/>
           </a:xfrm>
           <a:prstGeom prst="roundRect">
             <a:avLst/>
           </a:prstGeom>
           <a:solidFill>
-            <a:srgbClr val="F6F8FC"/>
+            <a:srgbClr val="FFFFFF"/>
           </a:solidFill>
-          <a:ln>
-            <a:noFill/>
+          <a:ln w="19050">
+            <a:solidFill>
+              <a:srgbClr val="1E60F2"/>
+            </a:solidFill>
           </a:ln>
         </p:spPr>
         <p:style>
@@ -3554,14 +3480,14 @@
       </p:sp>
       <p:sp>
         <p:nvSpPr>
-          <p:cNvPr id="13" name="TextBox 12"/>
+          <p:cNvPr id="11" name="TextBox 10"/>
           <p:cNvSpPr txBox="1"/>
           <p:nvPr/>
         </p:nvSpPr>
         <p:spPr>
           <a:xfrm>
-            <a:off x="8046720" y="3136392"/>
-            <a:ext cx="3108960" cy="411480"/>
+            <a:off x="8046720" y="3108960"/>
+            <a:ext cx="2834640" cy="1097280"/>
           </a:xfrm>
           <a:prstGeom prst="rect">
             <a:avLst/>
@@ -3569,77 +3495,64 @@
           <a:noFill/>
         </p:spPr>
         <p:txBody>
-          <a:bodyPr wrap="none">
+          <a:bodyPr wrap="square">
             <a:spAutoFit/>
           </a:bodyPr>
           <a:lstStyle/>
           <a:p>
-            <a:pPr>
-              <a:defRPr sz="1800" b="1">
+            <a:pPr algn="ctr">
+              <a:defRPr sz="1050" b="1">
                 <a:solidFill>
                   <a:srgbClr val="1E60F2"/>
                 </a:solidFill>
-                <a:latin typeface="Pretendard"/>
-              </a:defRPr>
-            </a:pPr>
-            <a:r>
-              <a:t>2개월 ➔ 1초</a:t>
-            </a:r>
-          </a:p>
-        </p:txBody>
-      </p:sp>
-      <p:sp>
-        <p:nvSpPr>
-          <p:cNvPr id="14" name="TextBox 13"/>
-          <p:cNvSpPr txBox="1"/>
-          <p:nvPr/>
-        </p:nvSpPr>
-        <p:spPr>
-          <a:xfrm>
-            <a:off x="8046720" y="3566160"/>
-            <a:ext cx="3108960" cy="365760"/>
-          </a:xfrm>
-          <a:prstGeom prst="rect">
-            <a:avLst/>
-          </a:prstGeom>
-          <a:noFill/>
-        </p:spPr>
-        <p:txBody>
-          <a:bodyPr wrap="none">
-            <a:spAutoFit/>
-          </a:bodyPr>
-          <a:lstStyle/>
-          <a:p>
-            <a:pPr>
-              <a:defRPr sz="1050">
+              </a:defRPr>
+            </a:pPr>
+            <a:r>
+              <a:t>FORMU REGTECH OS</a:t>
+            </a:r>
+          </a:p>
+          <a:p>
+            <a:pPr algn="ctr">
+              <a:defRPr sz="1600" b="1">
+                <a:solidFill>
+                  <a:srgbClr val="0B132B"/>
+                </a:solidFill>
+              </a:defRPr>
+            </a:pPr>
+            <a:r>
+              <a:t>원클릭 규제 완성</a:t>
+            </a:r>
+          </a:p>
+          <a:p>
+            <a:pPr algn="ctr">
+              <a:defRPr sz="1000">
                 <a:solidFill>
                   <a:srgbClr val="64748B"/>
                 </a:solidFill>
-                <a:latin typeface="Pretendard"/>
-              </a:defRPr>
-            </a:pPr>
-            <a:r>
-              <a:t>식약처·환경부 2개 부처 서식 분기 완성</a:t>
-            </a:r>
-          </a:p>
-        </p:txBody>
-      </p:sp>
-      <p:sp>
-        <p:nvSpPr>
-          <p:cNvPr id="15" name="Rounded Rectangle 14"/>
+              </a:defRPr>
+            </a:pPr>
+            <a:r>
+              <a:t>배합표 즉시 분기 출력</a:t>
+            </a:r>
+          </a:p>
+        </p:txBody>
+      </p:sp>
+      <p:sp>
+        <p:nvSpPr>
+          <p:cNvPr id="12" name="Rounded Rectangle 11"/>
           <p:cNvSpPr/>
           <p:nvPr/>
         </p:nvSpPr>
         <p:spPr>
           <a:xfrm>
-            <a:off x="7772400" y="4206240"/>
-            <a:ext cx="3657600" cy="1051560"/>
+            <a:off x="7772400" y="1920240"/>
+            <a:ext cx="3383280" cy="822960"/>
           </a:xfrm>
           <a:prstGeom prst="roundRect">
             <a:avLst/>
           </a:prstGeom>
           <a:solidFill>
-            <a:srgbClr val="F6F8FC"/>
+            <a:srgbClr val="1E60F2"/>
           </a:solidFill>
           <a:ln>
             <a:noFill/>
@@ -3669,14 +3582,14 @@
       </p:sp>
       <p:sp>
         <p:nvSpPr>
-          <p:cNvPr id="16" name="TextBox 15"/>
+          <p:cNvPr id="13" name="TextBox 12"/>
           <p:cNvSpPr txBox="1"/>
           <p:nvPr/>
         </p:nvSpPr>
         <p:spPr>
           <a:xfrm>
-            <a:off x="8046720" y="4370831"/>
-            <a:ext cx="3108960" cy="411480"/>
+            <a:off x="7955279" y="1965960"/>
+            <a:ext cx="3017520" cy="731520"/>
           </a:xfrm>
           <a:prstGeom prst="rect">
             <a:avLst/>
@@ -3690,29 +3603,85 @@
           <a:lstStyle/>
           <a:p>
             <a:pPr>
-              <a:defRPr sz="1800" b="1">
-                <a:solidFill>
-                  <a:srgbClr val="1E60F2"/>
-                </a:solidFill>
-                <a:latin typeface="Pretendard"/>
-              </a:defRPr>
-            </a:pPr>
-            <a:r>
-              <a:t>21,000+ 건</a:t>
-            </a:r>
-          </a:p>
-        </p:txBody>
-      </p:sp>
-      <p:sp>
-        <p:nvSpPr>
-          <p:cNvPr id="17" name="TextBox 16"/>
+              <a:defRPr sz="2000" b="1">
+                <a:solidFill>
+                  <a:srgbClr val="FFFFFF"/>
+                </a:solidFill>
+              </a:defRPr>
+            </a:pPr>
+            <a:r>
+              <a:t>1초</a:t>
+            </a:r>
+          </a:p>
+          <a:p>
+            <a:pPr>
+              <a:defRPr sz="950">
+                <a:solidFill>
+                  <a:srgbClr val="FFFFFF"/>
+                </a:solidFill>
+              </a:defRPr>
+            </a:pPr>
+            <a:r>
+              <a:t>2개 부처 법정 서식 즉시 분기 완성</a:t>
+            </a:r>
+          </a:p>
+        </p:txBody>
+      </p:sp>
+      <p:sp>
+        <p:nvSpPr>
+          <p:cNvPr id="14" name="Rounded Rectangle 13"/>
+          <p:cNvSpPr/>
+          <p:nvPr/>
+        </p:nvSpPr>
+        <p:spPr>
+          <a:xfrm>
+            <a:off x="7772400" y="4617720"/>
+            <a:ext cx="3383280" cy="822960"/>
+          </a:xfrm>
+          <a:prstGeom prst="roundRect">
+            <a:avLst/>
+          </a:prstGeom>
+          <a:solidFill>
+            <a:srgbClr val="FFFFFF"/>
+          </a:solidFill>
+          <a:ln w="19050">
+            <a:solidFill>
+              <a:srgbClr val="EF4444"/>
+            </a:solidFill>
+          </a:ln>
+        </p:spPr>
+        <p:style>
+          <a:lnRef idx="1">
+            <a:schemeClr val="accent1"/>
+          </a:lnRef>
+          <a:fillRef idx="3">
+            <a:schemeClr val="accent1"/>
+          </a:fillRef>
+          <a:effectRef idx="2">
+            <a:schemeClr val="accent1"/>
+          </a:effectRef>
+          <a:fontRef idx="minor">
+            <a:schemeClr val="lt1"/>
+          </a:fontRef>
+        </p:style>
+        <p:txBody>
+          <a:bodyPr rtlCol="0" anchor="ctr"/>
+          <a:lstStyle/>
+          <a:p>
+            <a:pPr algn="ctr"/>
+          </a:p>
+        </p:txBody>
+      </p:sp>
+      <p:sp>
+        <p:nvSpPr>
+          <p:cNvPr id="15" name="TextBox 14"/>
           <p:cNvSpPr txBox="1"/>
           <p:nvPr/>
         </p:nvSpPr>
         <p:spPr>
           <a:xfrm>
-            <a:off x="8046720" y="4800600"/>
-            <a:ext cx="3108960" cy="365760"/>
+            <a:off x="7955279" y="4663440"/>
+            <a:ext cx="3017520" cy="731520"/>
           </a:xfrm>
           <a:prstGeom prst="rect">
             <a:avLst/>
@@ -3726,28 +3695,39 @@
           <a:lstStyle/>
           <a:p>
             <a:pPr>
-              <a:defRPr sz="1050">
+              <a:defRPr sz="2000" b="1">
+                <a:solidFill>
+                  <a:srgbClr val="EF4444"/>
+                </a:solidFill>
+              </a:defRPr>
+            </a:pPr>
+            <a:r>
+              <a:t>0건</a:t>
+            </a:r>
+          </a:p>
+          <a:p>
+            <a:pPr>
+              <a:defRPr sz="950">
                 <a:solidFill>
                   <a:srgbClr val="64748B"/>
                 </a:solidFill>
-                <a:latin typeface="Pretendard"/>
-              </a:defRPr>
-            </a:pPr>
-            <a:r>
-              <a:t>식약처 공공 원료 화이트리스트 DB 연동</a:t>
-            </a:r>
-          </a:p>
-        </p:txBody>
-      </p:sp>
-      <p:sp>
-        <p:nvSpPr>
-          <p:cNvPr id="18" name="TextBox 17"/>
+              </a:defRPr>
+            </a:pPr>
+            <a:r>
+              <a:t>소수점 오타 단상자 전량 폐기 손실 0</a:t>
+            </a:r>
+          </a:p>
+        </p:txBody>
+      </p:sp>
+      <p:sp>
+        <p:nvSpPr>
+          <p:cNvPr id="16" name="TextBox 15"/>
           <p:cNvSpPr txBox="1"/>
           <p:nvPr/>
         </p:nvSpPr>
         <p:spPr>
           <a:xfrm>
-            <a:off x="731520" y="6217920"/>
+            <a:off x="731520" y="6263640"/>
             <a:ext cx="10698480" cy="320040"/>
           </a:xfrm>
           <a:prstGeom prst="rect">
@@ -3766,11 +3746,10 @@
                 <a:solidFill>
                   <a:srgbClr val="94A3B8"/>
                 </a:solidFill>
-                <a:latin typeface="Pretendard"/>
-              </a:defRPr>
-            </a:pPr>
-            <a:r>
-              <a:t>모두의 창업 2기 예비창업자 트랙 (일반/기술분야)  |  대표자: Matilda C.  |  2026. 09</a:t>
+              </a:defRPr>
+            </a:pPr>
+            <a:r>
+              <a:t>대표자: Matilda C. (16년 차 프로덕트 디렉터)  |  2026. 09</a:t>
             </a:r>
           </a:p>
         </p:txBody>
@@ -3845,7 +3824,7 @@
         <p:spPr>
           <a:xfrm>
             <a:off x="731520" y="420624"/>
-            <a:ext cx="10698480" cy="274320"/>
+            <a:ext cx="10698480" cy="256032"/>
           </a:xfrm>
           <a:prstGeom prst="rect">
             <a:avLst/>
@@ -3867,7 +3846,7 @@
               </a:defRPr>
             </a:pPr>
             <a:r>
-              <a:t>09 · TEAM &amp; EXECUTION PLAN</a:t>
+              <a:t>●  09 · TEAM &amp; EXECUTION PLAN</a:t>
             </a:r>
           </a:p>
         </p:txBody>
@@ -3880,7 +3859,7 @@
         </p:nvSpPr>
         <p:spPr>
           <a:xfrm>
-            <a:off x="731520" y="713232"/>
+            <a:off x="731520" y="694944"/>
             <a:ext cx="10698480" cy="502920"/>
           </a:xfrm>
           <a:prstGeom prst="rect">
@@ -3903,7 +3882,7 @@
               </a:defRPr>
             </a:pPr>
             <a:r>
-              <a:t>전문 실행 팀 역량 및 지원금 5,000만 원 활용 계획</a:t>
+              <a:t>전문 실행 팀 역량 및 사업화 지원금 5,000만 원 집행 계획</a:t>
             </a:r>
           </a:p>
         </p:txBody>
@@ -3939,7 +3918,7 @@
               </a:defRPr>
             </a:pPr>
             <a:r>
-              <a:t>16년 차 디자인 디렉터와 규제·개발 전문가가 지원금을 DB 파이프라인 고도화에 집중 투입합니다.</a:t>
+              <a:t>16년 차 프로덕트 디렉터와 규제·엔지니어링 팀이 지원금을 DB 파이프라인 고도화에 집중 투입합니다.</a:t>
             </a:r>
           </a:p>
         </p:txBody>
@@ -4003,9 +3982,9 @@
           <a:lstStyle/>
           <a:p>
             <a:pPr algn="r">
-              <a:defRPr sz="900" b="1">
-                <a:solidFill>
-                  <a:srgbClr val="94A3B8"/>
+              <a:defRPr sz="950" b="1">
+                <a:solidFill>
+                  <a:srgbClr val="64748B"/>
                 </a:solidFill>
                 <a:latin typeface="Pretendard"/>
               </a:defRPr>
@@ -4031,7 +4010,7 @@
             <a:avLst/>
           </a:prstGeom>
           <a:solidFill>
-            <a:srgbClr val="F6F8FC"/>
+            <a:srgbClr val="F8FAFC"/>
           </a:solidFill>
           <a:ln>
             <a:noFill/>
@@ -4125,7 +4104,7 @@
           <a:lstStyle/>
           <a:p>
             <a:pPr algn="ctr">
-              <a:defRPr sz="1500" b="1">
+              <a:defRPr sz="1600" b="1">
                 <a:solidFill>
                   <a:srgbClr val="FFFFFF"/>
                 </a:solidFill>
@@ -4160,14 +4139,14 @@
           <a:lstStyle/>
           <a:p>
             <a:pPr>
-              <a:defRPr sz="1150" b="1">
+              <a:defRPr sz="1200" b="1">
                 <a:solidFill>
                   <a:srgbClr val="0F172A"/>
                 </a:solidFill>
               </a:defRPr>
             </a:pPr>
             <a:r>
-              <a:t>Matilda C. (대표)  ·  Product Director (16년차 UI/UX)</a:t>
+              <a:t>Matilda C. (대표자)  ·  Product Director (16년 차 UI/UX)</a:t>
             </a:r>
           </a:p>
           <a:p>
@@ -4179,7 +4158,7 @@
               </a:defRPr>
             </a:pPr>
             <a:r>
-              <a:t>B2B 엔터프라이즈 SaaS 총괄 경력 · 복잡한 규제를 1초 UX로 치환</a:t>
+              <a:t>B2B 엔터프라이즈 SaaS 총괄 경력 · 복잡한 규제를 1초 UX로 전환 설계</a:t>
             </a:r>
           </a:p>
         </p:txBody>
@@ -4199,7 +4178,7 @@
             <a:avLst/>
           </a:prstGeom>
           <a:solidFill>
-            <a:srgbClr val="F6F8FC"/>
+            <a:srgbClr val="F8FAFC"/>
           </a:solidFill>
           <a:ln>
             <a:noFill/>
@@ -4293,7 +4272,7 @@
           <a:lstStyle/>
           <a:p>
             <a:pPr algn="ctr">
-              <a:defRPr sz="1500" b="1">
+              <a:defRPr sz="1600" b="1">
                 <a:solidFill>
                   <a:srgbClr val="FFFFFF"/>
                 </a:solidFill>
@@ -4328,7 +4307,7 @@
           <a:lstStyle/>
           <a:p>
             <a:pPr>
-              <a:defRPr sz="1150" b="1">
+              <a:defRPr sz="1200" b="1">
                 <a:solidFill>
                   <a:srgbClr val="0F172A"/>
                 </a:solidFill>
@@ -4367,7 +4346,7 @@
             <a:avLst/>
           </a:prstGeom>
           <a:solidFill>
-            <a:srgbClr val="F6F8FC"/>
+            <a:srgbClr val="F8FAFC"/>
           </a:solidFill>
           <a:ln>
             <a:noFill/>
@@ -4410,7 +4389,7 @@
             <a:avLst/>
           </a:prstGeom>
           <a:solidFill>
-            <a:srgbClr val="039855"/>
+            <a:srgbClr val="10B981"/>
           </a:solidFill>
           <a:ln>
             <a:noFill/>
@@ -4461,7 +4440,7 @@
           <a:lstStyle/>
           <a:p>
             <a:pPr algn="ctr">
-              <a:defRPr sz="1500" b="1">
+              <a:defRPr sz="1600" b="1">
                 <a:solidFill>
                   <a:srgbClr val="FFFFFF"/>
                 </a:solidFill>
@@ -4496,7 +4475,7 @@
           <a:lstStyle/>
           <a:p>
             <a:pPr>
-              <a:defRPr sz="1150" b="1">
+              <a:defRPr sz="1200" b="1">
                 <a:solidFill>
                   <a:srgbClr val="0F172A"/>
                 </a:solidFill>
@@ -4515,7 +4494,7 @@
               </a:defRPr>
             </a:pPr>
             <a:r>
-              <a:t>2.1만 공공 DB 오픈 API 파이프라인 및 고속 연산 엔진 구축</a:t>
+              <a:t>2.1만 공공 DB 오픈 API 파이프라인 구축 및 고속 화학 배합비 연산 엔진 개발</a:t>
             </a:r>
           </a:p>
         </p:txBody>
@@ -4535,7 +4514,7 @@
             <a:avLst/>
           </a:prstGeom>
           <a:solidFill>
-            <a:srgbClr val="F6F8FC"/>
+            <a:srgbClr val="F8FAFC"/>
           </a:solidFill>
           <a:ln>
             <a:noFill/>
@@ -4586,7 +4565,7 @@
           <a:lstStyle/>
           <a:p>
             <a:pPr>
-              <a:defRPr sz="2800" b="1">
+              <a:defRPr sz="3000" b="1">
                 <a:solidFill>
                   <a:srgbClr val="1E60F2"/>
                 </a:solidFill>
@@ -4605,7 +4584,7 @@
               </a:defRPr>
             </a:pPr>
             <a:r>
-              <a:t>모두의 창업 2기 사업화 지원금 전액 배분</a:t>
+              <a:t>모두의 창업 2기 사업화 지원금 전액 배분 계획</a:t>
             </a:r>
             <a:br/>
           </a:p>
@@ -4731,7 +4710,7 @@
         <p:spPr>
           <a:xfrm>
             <a:off x="731520" y="420624"/>
-            <a:ext cx="10698480" cy="274320"/>
+            <a:ext cx="10698480" cy="256032"/>
           </a:xfrm>
           <a:prstGeom prst="rect">
             <a:avLst/>
@@ -4753,7 +4732,7 @@
               </a:defRPr>
             </a:pPr>
             <a:r>
-              <a:t>10 · THE VISION</a:t>
+              <a:t>●  10 · THE VISION</a:t>
             </a:r>
           </a:p>
         </p:txBody>
@@ -4766,7 +4745,7 @@
         </p:nvSpPr>
         <p:spPr>
           <a:xfrm>
-            <a:off x="731520" y="713232"/>
+            <a:off x="731520" y="694944"/>
             <a:ext cx="10698480" cy="502920"/>
           </a:xfrm>
           <a:prstGeom prst="rect">
@@ -4825,7 +4804,7 @@
               </a:defRPr>
             </a:pPr>
             <a:r>
-              <a:t>수천 장의 단상자를 폐기하고 법령 사이트에서 밤을 새우던 비효율을 끝냅니다.</a:t>
+              <a:t>수천 장의 단상자를 폐기하고 법령 사이트에서 밤을 새우던 불필요한 비효율을 끝냅니다.</a:t>
             </a:r>
           </a:p>
         </p:txBody>
@@ -4861,7 +4840,7 @@
               </a:defRPr>
             </a:pPr>
             <a:r>
-              <a:t>※ Formu (포뮤) — 모두의 창업 2기 지원을 마칩니다. 감사합니다.</a:t>
+              <a:t>※ Formu (포뮤) — 모두의 창업 2기 발표를 마칩니다. 감사합니다.</a:t>
             </a:r>
           </a:p>
         </p:txBody>
@@ -4889,9 +4868,9 @@
           <a:lstStyle/>
           <a:p>
             <a:pPr algn="r">
-              <a:defRPr sz="900" b="1">
-                <a:solidFill>
-                  <a:srgbClr val="94A3B8"/>
+              <a:defRPr sz="950" b="1">
+                <a:solidFill>
+                  <a:srgbClr val="64748B"/>
                 </a:solidFill>
                 <a:latin typeface="Pretendard"/>
               </a:defRPr>
@@ -4904,67 +4883,20 @@
       </p:sp>
       <p:sp>
         <p:nvSpPr>
-          <p:cNvPr id="8" name="TextBox 7"/>
-          <p:cNvSpPr txBox="1"/>
-          <p:nvPr/>
-        </p:nvSpPr>
-        <p:spPr>
-          <a:xfrm>
-            <a:off x="731520" y="1737360"/>
-            <a:ext cx="10698480" cy="1645920"/>
-          </a:xfrm>
-          <a:prstGeom prst="rect">
-            <a:avLst/>
-          </a:prstGeom>
-          <a:noFill/>
-        </p:spPr>
-        <p:txBody>
-          <a:bodyPr wrap="square">
-            <a:spAutoFit/>
-          </a:bodyPr>
-          <a:lstStyle/>
-          <a:p>
-            <a:pPr>
-              <a:defRPr sz="3000" b="1">
-                <a:solidFill>
-                  <a:srgbClr val="1E60F2"/>
-                </a:solidFill>
-              </a:defRPr>
-            </a:pPr>
-            <a:r>
-              <a:t>“배합표 한 장으로 끝나는 규제 없는 창작의 시대”</a:t>
-            </a:r>
-          </a:p>
-          <a:p>
-            <a:pPr>
-              <a:defRPr sz="1300">
-                <a:solidFill>
-                  <a:srgbClr val="334155"/>
-                </a:solidFill>
-              </a:defRPr>
-            </a:pPr>
-            <a:r>
-              <a:t>창작자가 복잡한 행정 서류에 에너지를 뺏기지 않고, 오직 향과 제품 본질에만 몰입할 수 있도록 Formu가 모든 규제와 유통 파트너를 원스톱으로 연결합니다.</a:t>
-            </a:r>
-          </a:p>
-        </p:txBody>
-      </p:sp>
-      <p:sp>
-        <p:nvSpPr>
-          <p:cNvPr id="9" name="Rounded Rectangle 8"/>
+          <p:cNvPr id="8" name="Rounded Rectangle 7"/>
           <p:cNvSpPr/>
           <p:nvPr/>
         </p:nvSpPr>
         <p:spPr>
           <a:xfrm>
-            <a:off x="731520" y="3657600"/>
-            <a:ext cx="3328416" cy="2468880"/>
+            <a:off x="731520" y="1691640"/>
+            <a:ext cx="10698480" cy="1737360"/>
           </a:xfrm>
           <a:prstGeom prst="roundRect">
             <a:avLst/>
           </a:prstGeom>
           <a:solidFill>
-            <a:srgbClr val="F6F8FC"/>
+            <a:srgbClr val="0B132B"/>
           </a:solidFill>
           <a:ln>
             <a:noFill/>
@@ -4994,14 +4926,14 @@
       </p:sp>
       <p:sp>
         <p:nvSpPr>
-          <p:cNvPr id="10" name="TextBox 9"/>
+          <p:cNvPr id="9" name="TextBox 8"/>
           <p:cNvSpPr txBox="1"/>
           <p:nvPr/>
         </p:nvSpPr>
         <p:spPr>
           <a:xfrm>
-            <a:off x="960120" y="3931920"/>
-            <a:ext cx="2834640" cy="2011680"/>
+            <a:off x="1005840" y="1828800"/>
+            <a:ext cx="10149840" cy="1463040"/>
           </a:xfrm>
           <a:prstGeom prst="rect">
             <a:avLst/>
@@ -5015,59 +4947,46 @@
           <a:lstStyle/>
           <a:p>
             <a:pPr>
-              <a:defRPr sz="1000" b="1">
-                <a:solidFill>
-                  <a:srgbClr val="1E60F2"/>
-                </a:solidFill>
-              </a:defRPr>
-            </a:pPr>
-            <a:r>
-              <a:t>PILLAR 01</a:t>
-            </a:r>
-          </a:p>
-          <a:p>
-            <a:pPr>
-              <a:defRPr sz="1800" b="1">
-                <a:solidFill>
-                  <a:srgbClr val="0F172A"/>
-                </a:solidFill>
-              </a:defRPr>
-            </a:pPr>
-            <a:r>
-              <a:t>Zero Error</a:t>
-            </a:r>
-          </a:p>
-          <a:p>
-            <a:br/>
-            <a:pPr>
-              <a:defRPr sz="1100">
-                <a:solidFill>
-                  <a:srgbClr val="334155"/>
-                </a:solidFill>
-              </a:defRPr>
-            </a:pPr>
-            <a:r>
-              <a:t>소수점 오타로 인한 제품 폐기 및 과태료 리스크 0건 달성</a:t>
-            </a:r>
-          </a:p>
-        </p:txBody>
-      </p:sp>
-      <p:sp>
-        <p:nvSpPr>
-          <p:cNvPr id="11" name="Rounded Rectangle 10"/>
+              <a:defRPr sz="2600" b="1">
+                <a:solidFill>
+                  <a:srgbClr val="60A5FA"/>
+                </a:solidFill>
+              </a:defRPr>
+            </a:pPr>
+            <a:r>
+              <a:t>“배합표 한 장으로 끝나는 규제 없는 창작의 시대”</a:t>
+            </a:r>
+          </a:p>
+          <a:p>
+            <a:pPr>
+              <a:defRPr sz="1250">
+                <a:solidFill>
+                  <a:srgbClr val="FFFFFF"/>
+                </a:solidFill>
+              </a:defRPr>
+            </a:pPr>
+            <a:r>
+              <a:t>창작자가 복잡한 행정 서류에 에너지를 뺏기지 않고, 오직 향과 제품 본질에만 몰입할 수 있도록 Formu가 모든 규제와 유통 파트너를 원스톱으로 연결합니다.</a:t>
+            </a:r>
+          </a:p>
+        </p:txBody>
+      </p:sp>
+      <p:sp>
+        <p:nvSpPr>
+          <p:cNvPr id="10" name="Rounded Rectangle 9"/>
           <p:cNvSpPr/>
           <p:nvPr/>
         </p:nvSpPr>
         <p:spPr>
           <a:xfrm>
-            <a:off x="4407408" y="3657600"/>
+            <a:off x="731520" y="3657600"/>
             <a:ext cx="3328416" cy="2468880"/>
           </a:xfrm>
           <a:prstGeom prst="roundRect">
             <a:avLst/>
           </a:prstGeom>
           <a:solidFill>
-            <a:srgbClr val="F6F8FC"/>
+            <a:srgbClr val="F8FAFC"/>
           </a:solidFill>
           <a:ln>
             <a:noFill/>
@@ -5097,13 +5016,13 @@
       </p:sp>
       <p:sp>
         <p:nvSpPr>
-          <p:cNvPr id="12" name="TextBox 11"/>
+          <p:cNvPr id="11" name="TextBox 10"/>
           <p:cNvSpPr txBox="1"/>
           <p:nvPr/>
         </p:nvSpPr>
         <p:spPr>
           <a:xfrm>
-            <a:off x="4636008" y="3931920"/>
+            <a:off x="960120" y="3931920"/>
             <a:ext cx="2834640" cy="2011680"/>
           </a:xfrm>
           <a:prstGeom prst="rect">
@@ -5125,7 +5044,7 @@
               </a:defRPr>
             </a:pPr>
             <a:r>
-              <a:t>PILLAR 02</a:t>
+              <a:t>PILLAR 01</a:t>
             </a:r>
           </a:p>
           <a:p>
@@ -5137,7 +5056,7 @@
               </a:defRPr>
             </a:pPr>
             <a:r>
-              <a:t>1-Second Speed</a:t>
+              <a:t>Zero Error</a:t>
             </a:r>
           </a:p>
           <a:p>
@@ -5150,27 +5069,27 @@
               </a:defRPr>
             </a:pPr>
             <a:r>
-              <a:t>2개월 걸리던 규제 인허가 행정을 단 1초의 데이터 연산으로 단축</a:t>
-            </a:r>
-          </a:p>
-        </p:txBody>
-      </p:sp>
-      <p:sp>
-        <p:nvSpPr>
-          <p:cNvPr id="13" name="Rounded Rectangle 12"/>
+              <a:t>소수점 오타로 인한 제품 폐기 및 과태료 리스크 0건 달성</a:t>
+            </a:r>
+          </a:p>
+        </p:txBody>
+      </p:sp>
+      <p:sp>
+        <p:nvSpPr>
+          <p:cNvPr id="12" name="Rounded Rectangle 11"/>
           <p:cNvSpPr/>
           <p:nvPr/>
         </p:nvSpPr>
         <p:spPr>
           <a:xfrm>
-            <a:off x="8083296" y="3657600"/>
+            <a:off x="4407408" y="3657600"/>
             <a:ext cx="3328416" cy="2468880"/>
           </a:xfrm>
           <a:prstGeom prst="roundRect">
             <a:avLst/>
           </a:prstGeom>
           <a:solidFill>
-            <a:srgbClr val="F6F8FC"/>
+            <a:srgbClr val="F8FAFC"/>
           </a:solidFill>
           <a:ln>
             <a:noFill/>
@@ -5200,13 +5119,13 @@
       </p:sp>
       <p:sp>
         <p:nvSpPr>
-          <p:cNvPr id="14" name="TextBox 13"/>
+          <p:cNvPr id="13" name="TextBox 12"/>
           <p:cNvSpPr txBox="1"/>
           <p:nvPr/>
         </p:nvSpPr>
         <p:spPr>
           <a:xfrm>
-            <a:off x="8311896" y="3931920"/>
+            <a:off x="4636008" y="3931920"/>
             <a:ext cx="2834640" cy="2011680"/>
           </a:xfrm>
           <a:prstGeom prst="rect">
@@ -5228,6 +5147,109 @@
               </a:defRPr>
             </a:pPr>
             <a:r>
+              <a:t>PILLAR 02</a:t>
+            </a:r>
+          </a:p>
+          <a:p>
+            <a:pPr>
+              <a:defRPr sz="1800" b="1">
+                <a:solidFill>
+                  <a:srgbClr val="0F172A"/>
+                </a:solidFill>
+              </a:defRPr>
+            </a:pPr>
+            <a:r>
+              <a:t>1-Second Speed</a:t>
+            </a:r>
+          </a:p>
+          <a:p>
+            <a:br/>
+            <a:pPr>
+              <a:defRPr sz="1100">
+                <a:solidFill>
+                  <a:srgbClr val="334155"/>
+                </a:solidFill>
+              </a:defRPr>
+            </a:pPr>
+            <a:r>
+              <a:t>2개월 걸리던 복합 규제 행정을 단 1초의 지능형 데이터 연산으로 단축</a:t>
+            </a:r>
+          </a:p>
+        </p:txBody>
+      </p:sp>
+      <p:sp>
+        <p:nvSpPr>
+          <p:cNvPr id="14" name="Rounded Rectangle 13"/>
+          <p:cNvSpPr/>
+          <p:nvPr/>
+        </p:nvSpPr>
+        <p:spPr>
+          <a:xfrm>
+            <a:off x="8083296" y="3657600"/>
+            <a:ext cx="3328416" cy="2468880"/>
+          </a:xfrm>
+          <a:prstGeom prst="roundRect">
+            <a:avLst/>
+          </a:prstGeom>
+          <a:solidFill>
+            <a:srgbClr val="F8FAFC"/>
+          </a:solidFill>
+          <a:ln>
+            <a:noFill/>
+          </a:ln>
+        </p:spPr>
+        <p:style>
+          <a:lnRef idx="1">
+            <a:schemeClr val="accent1"/>
+          </a:lnRef>
+          <a:fillRef idx="3">
+            <a:schemeClr val="accent1"/>
+          </a:fillRef>
+          <a:effectRef idx="2">
+            <a:schemeClr val="accent1"/>
+          </a:effectRef>
+          <a:fontRef idx="minor">
+            <a:schemeClr val="lt1"/>
+          </a:fontRef>
+        </p:style>
+        <p:txBody>
+          <a:bodyPr rtlCol="0" anchor="ctr"/>
+          <a:lstStyle/>
+          <a:p>
+            <a:pPr algn="ctr"/>
+          </a:p>
+        </p:txBody>
+      </p:sp>
+      <p:sp>
+        <p:nvSpPr>
+          <p:cNvPr id="15" name="TextBox 14"/>
+          <p:cNvSpPr txBox="1"/>
+          <p:nvPr/>
+        </p:nvSpPr>
+        <p:spPr>
+          <a:xfrm>
+            <a:off x="8311896" y="3931920"/>
+            <a:ext cx="2834640" cy="2011680"/>
+          </a:xfrm>
+          <a:prstGeom prst="rect">
+            <a:avLst/>
+          </a:prstGeom>
+          <a:noFill/>
+        </p:spPr>
+        <p:txBody>
+          <a:bodyPr wrap="square">
+            <a:spAutoFit/>
+          </a:bodyPr>
+          <a:lstStyle/>
+          <a:p>
+            <a:pPr>
+              <a:defRPr sz="1000" b="1">
+                <a:solidFill>
+                  <a:srgbClr val="1E60F2"/>
+                </a:solidFill>
+              </a:defRPr>
+            </a:pPr>
+            <a:r>
               <a:t>PILLAR 03</a:t>
             </a:r>
           </a:p>
@@ -5253,7 +5275,7 @@
               </a:defRPr>
             </a:pPr>
             <a:r>
-              <a:t>배합표 입력부터 시험원 접수, 패키지 인쇄까지 한 화면 연결</a:t>
+              <a:t>배합표 입력부터 시험원 시료 접수, 패키지 인쇄까지 한 화면 원스톱 연결</a:t>
             </a:r>
           </a:p>
         </p:txBody>
@@ -5328,7 +5350,7 @@
         <p:spPr>
           <a:xfrm>
             <a:off x="731520" y="420624"/>
-            <a:ext cx="10698480" cy="274320"/>
+            <a:ext cx="10698480" cy="256032"/>
           </a:xfrm>
           <a:prstGeom prst="rect">
             <a:avLst/>
@@ -5350,7 +5372,7 @@
               </a:defRPr>
             </a:pPr>
             <a:r>
-              <a:t>01 · MARKET REALITY</a:t>
+              <a:t>●  01 · MARKET REALITY</a:t>
             </a:r>
           </a:p>
         </p:txBody>
@@ -5363,7 +5385,7 @@
         </p:nvSpPr>
         <p:spPr>
           <a:xfrm>
-            <a:off x="731520" y="713232"/>
+            <a:off x="731520" y="694944"/>
             <a:ext cx="10698480" cy="502920"/>
           </a:xfrm>
           <a:prstGeom prst="rect">
@@ -5386,7 +5408,7 @@
               </a:defRPr>
             </a:pPr>
             <a:r>
-              <a:t>왜 지금 필요한가 — 시장은 2배, 출시는 여전히 복잡</a:t>
+              <a:t>시장은 2배 폭증했지만, 출시는 여전히 5~6개 주체 수작업에 갇혀 있습니다</a:t>
             </a:r>
           </a:p>
         </p:txBody>
@@ -5422,7 +5444,7 @@
               </a:defRPr>
             </a:pPr>
             <a:r>
-              <a:t>향수·디퓨저·방향제 브랜드는 폭증했지만, 규제 출시 과정은 여전히 파편화된 수작업 그대로입니다.</a:t>
+              <a:t>향수·디퓨저 브랜드는 매년 4,000곳씩 진입하지만, 규제 행정은 20년 전 오프라인 대행 방식 그대로입니다.</a:t>
             </a:r>
           </a:p>
         </p:txBody>
@@ -5458,7 +5480,7 @@
               </a:defRPr>
             </a:pPr>
             <a:r>
-              <a:t>※ 근거: 식품의약품안전처 화장품 생산통계 &amp; KEITI 생활화학제품 안전관리 이행 매뉴얼</a:t>
+              <a:t>※ 근거: 식품의약품안전처 화장품 생산통계 &amp; 환경부 화학제품관리시스템(CHEMP)</a:t>
             </a:r>
           </a:p>
         </p:txBody>
@@ -5486,9 +5508,9 @@
           <a:lstStyle/>
           <a:p>
             <a:pPr algn="r">
-              <a:defRPr sz="900" b="1">
-                <a:solidFill>
-                  <a:srgbClr val="94A3B8"/>
+              <a:defRPr sz="950" b="1">
+                <a:solidFill>
+                  <a:srgbClr val="64748B"/>
                 </a:solidFill>
                 <a:latin typeface="Pretendard"/>
               </a:defRPr>
@@ -5508,13 +5530,13 @@
         <p:spPr>
           <a:xfrm>
             <a:off x="731520" y="1691640"/>
-            <a:ext cx="5120640" cy="960120"/>
+            <a:ext cx="5120640" cy="914400"/>
           </a:xfrm>
           <a:prstGeom prst="roundRect">
             <a:avLst/>
           </a:prstGeom>
           <a:solidFill>
-            <a:srgbClr val="F6F8FC"/>
+            <a:srgbClr val="F8FAFC"/>
           </a:solidFill>
           <a:ln>
             <a:noFill/>
@@ -5551,7 +5573,7 @@
         <p:spPr>
           <a:xfrm>
             <a:off x="914400" y="1783080"/>
-            <a:ext cx="4754880" cy="777240"/>
+            <a:ext cx="2926080" cy="731520"/>
           </a:xfrm>
           <a:prstGeom prst="rect">
             <a:avLst/>
@@ -5565,46 +5587,93 @@
           <a:lstStyle/>
           <a:p>
             <a:pPr>
-              <a:defRPr sz="1050">
+              <a:defRPr sz="1100" b="1">
+                <a:solidFill>
+                  <a:srgbClr val="0F172A"/>
+                </a:solidFill>
+              </a:defRPr>
+            </a:pPr>
+            <a:r>
+              <a:t>화장품 책임판매업자 수</a:t>
+            </a:r>
+          </a:p>
+          <a:p>
+            <a:pPr>
+              <a:defRPr sz="950">
                 <a:solidFill>
                   <a:srgbClr val="64748B"/>
                 </a:solidFill>
               </a:defRPr>
             </a:pPr>
             <a:r>
-              <a:t>화장품 책임판매업자 수</a:t>
-            </a:r>
-          </a:p>
-          <a:p>
-            <a:pPr>
-              <a:defRPr sz="1500" b="1">
+              <a:t>식약처 공인 등록 기준</a:t>
+            </a:r>
+          </a:p>
+        </p:txBody>
+      </p:sp>
+      <p:sp>
+        <p:nvSpPr>
+          <p:cNvPr id="10" name="TextBox 9"/>
+          <p:cNvSpPr txBox="1"/>
+          <p:nvPr/>
+        </p:nvSpPr>
+        <p:spPr>
+          <a:xfrm>
+            <a:off x="3840480" y="1783080"/>
+            <a:ext cx="1828800" cy="731520"/>
+          </a:xfrm>
+          <a:prstGeom prst="rect">
+            <a:avLst/>
+          </a:prstGeom>
+          <a:noFill/>
+        </p:spPr>
+        <p:txBody>
+          <a:bodyPr wrap="square">
+            <a:spAutoFit/>
+          </a:bodyPr>
+          <a:lstStyle/>
+          <a:p>
+            <a:pPr algn="r">
+              <a:defRPr sz="1700" b="1">
                 <a:solidFill>
                   <a:srgbClr val="1E60F2"/>
                 </a:solidFill>
               </a:defRPr>
             </a:pPr>
             <a:r>
-              <a:t>15,707  ➔  31,524명 (5년 만에 2배 폭증)</a:t>
-            </a:r>
-          </a:p>
-        </p:txBody>
-      </p:sp>
-      <p:sp>
-        <p:nvSpPr>
-          <p:cNvPr id="10" name="Rounded Rectangle 9"/>
+              <a:t>31,524명</a:t>
+            </a:r>
+          </a:p>
+          <a:p>
+            <a:pPr algn="r">
+              <a:defRPr sz="950" b="1">
+                <a:solidFill>
+                  <a:srgbClr val="10B981"/>
+                </a:solidFill>
+              </a:defRPr>
+            </a:pPr>
+            <a:r>
+              <a:t>+100.7% (5년 만에 2배 폭증)</a:t>
+            </a:r>
+          </a:p>
+        </p:txBody>
+      </p:sp>
+      <p:sp>
+        <p:nvSpPr>
+          <p:cNvPr id="11" name="Rounded Rectangle 10"/>
           <p:cNvSpPr/>
           <p:nvPr/>
         </p:nvSpPr>
         <p:spPr>
           <a:xfrm>
-            <a:off x="731520" y="2788920"/>
-            <a:ext cx="5120640" cy="960120"/>
+            <a:off x="731520" y="2743200"/>
+            <a:ext cx="5120640" cy="914400"/>
           </a:xfrm>
           <a:prstGeom prst="roundRect">
             <a:avLst/>
           </a:prstGeom>
           <a:solidFill>
-            <a:srgbClr val="F6F8FC"/>
+            <a:srgbClr val="F8FAFC"/>
           </a:solidFill>
           <a:ln>
             <a:noFill/>
@@ -5634,14 +5703,14 @@
       </p:sp>
       <p:sp>
         <p:nvSpPr>
-          <p:cNvPr id="11" name="TextBox 10"/>
+          <p:cNvPr id="12" name="TextBox 11"/>
           <p:cNvSpPr txBox="1"/>
           <p:nvPr/>
         </p:nvSpPr>
         <p:spPr>
           <a:xfrm>
-            <a:off x="914400" y="2880360"/>
-            <a:ext cx="4754880" cy="777240"/>
+            <a:off x="914400" y="2834640"/>
+            <a:ext cx="2926080" cy="731520"/>
           </a:xfrm>
           <a:prstGeom prst="rect">
             <a:avLst/>
@@ -5655,46 +5724,93 @@
           <a:lstStyle/>
           <a:p>
             <a:pPr>
-              <a:defRPr sz="1050">
+              <a:defRPr sz="1100" b="1">
+                <a:solidFill>
+                  <a:srgbClr val="0F172A"/>
+                </a:solidFill>
+              </a:defRPr>
+            </a:pPr>
+            <a:r>
+              <a:t>연간 신규 브랜드 진입</a:t>
+            </a:r>
+          </a:p>
+          <a:p>
+            <a:pPr>
+              <a:defRPr sz="950">
                 <a:solidFill>
                   <a:srgbClr val="64748B"/>
                 </a:solidFill>
               </a:defRPr>
             </a:pPr>
             <a:r>
-              <a:t>연간 신규 등록 (2025년 기준)</a:t>
-            </a:r>
-          </a:p>
-          <a:p>
-            <a:pPr>
-              <a:defRPr sz="1500" b="1">
+              <a:t>1인 인디 브랜드 폭증</a:t>
+            </a:r>
+          </a:p>
+        </p:txBody>
+      </p:sp>
+      <p:sp>
+        <p:nvSpPr>
+          <p:cNvPr id="13" name="TextBox 12"/>
+          <p:cNvSpPr txBox="1"/>
+          <p:nvPr/>
+        </p:nvSpPr>
+        <p:spPr>
+          <a:xfrm>
+            <a:off x="3840480" y="2834640"/>
+            <a:ext cx="1828800" cy="731520"/>
+          </a:xfrm>
+          <a:prstGeom prst="rect">
+            <a:avLst/>
+          </a:prstGeom>
+          <a:noFill/>
+        </p:spPr>
+        <p:txBody>
+          <a:bodyPr wrap="square">
+            <a:spAutoFit/>
+          </a:bodyPr>
+          <a:lstStyle/>
+          <a:p>
+            <a:pPr algn="r">
+              <a:defRPr sz="1700" b="1">
                 <a:solidFill>
                   <a:srgbClr val="1E60F2"/>
                 </a:solidFill>
               </a:defRPr>
             </a:pPr>
             <a:r>
-              <a:t>4,071곳 신규 유입 (+57% 폭증)</a:t>
-            </a:r>
-          </a:p>
-        </p:txBody>
-      </p:sp>
-      <p:sp>
-        <p:nvSpPr>
-          <p:cNvPr id="12" name="Rounded Rectangle 11"/>
+              <a:t>4,071곳 / 연</a:t>
+            </a:r>
+          </a:p>
+          <a:p>
+            <a:pPr algn="r">
+              <a:defRPr sz="950" b="1">
+                <a:solidFill>
+                  <a:srgbClr val="10B981"/>
+                </a:solidFill>
+              </a:defRPr>
+            </a:pPr>
+            <a:r>
+              <a:t>+57% 신규 증가율</a:t>
+            </a:r>
+          </a:p>
+        </p:txBody>
+      </p:sp>
+      <p:sp>
+        <p:nvSpPr>
+          <p:cNvPr id="14" name="Rounded Rectangle 13"/>
           <p:cNvSpPr/>
           <p:nvPr/>
         </p:nvSpPr>
         <p:spPr>
           <a:xfrm>
-            <a:off x="731520" y="3886200"/>
-            <a:ext cx="5120640" cy="960120"/>
+            <a:off x="731520" y="3794760"/>
+            <a:ext cx="5120640" cy="914400"/>
           </a:xfrm>
           <a:prstGeom prst="roundRect">
             <a:avLst/>
           </a:prstGeom>
           <a:solidFill>
-            <a:srgbClr val="F6F8FC"/>
+            <a:srgbClr val="F8FAFC"/>
           </a:solidFill>
           <a:ln>
             <a:noFill/>
@@ -5724,14 +5840,14 @@
       </p:sp>
       <p:sp>
         <p:nvSpPr>
-          <p:cNvPr id="13" name="TextBox 12"/>
+          <p:cNvPr id="15" name="TextBox 14"/>
           <p:cNvSpPr txBox="1"/>
           <p:nvPr/>
         </p:nvSpPr>
         <p:spPr>
           <a:xfrm>
-            <a:off x="914400" y="3977639"/>
-            <a:ext cx="4754880" cy="777240"/>
+            <a:off x="914400" y="3886200"/>
+            <a:ext cx="2926080" cy="731520"/>
           </a:xfrm>
           <a:prstGeom prst="rect">
             <a:avLst/>
@@ -5745,46 +5861,93 @@
           <a:lstStyle/>
           <a:p>
             <a:pPr>
-              <a:defRPr sz="1050">
+              <a:defRPr sz="1100" b="1">
+                <a:solidFill>
+                  <a:srgbClr val="0F172A"/>
+                </a:solidFill>
+              </a:defRPr>
+            </a:pPr>
+            <a:r>
+              <a:t>국내 화장품·화학 브랜드</a:t>
+            </a:r>
+          </a:p>
+          <a:p>
+            <a:pPr>
+              <a:defRPr sz="950">
                 <a:solidFill>
                   <a:srgbClr val="64748B"/>
                 </a:solidFill>
               </a:defRPr>
             </a:pPr>
             <a:r>
-              <a:t>국내 화장품 브랜드 수 (추정)</a:t>
-            </a:r>
-          </a:p>
-          <a:p>
-            <a:pPr>
-              <a:defRPr sz="1500" b="1">
+              <a:t>소규모 공방/브랜드 중심</a:t>
+            </a:r>
+          </a:p>
+        </p:txBody>
+      </p:sp>
+      <p:sp>
+        <p:nvSpPr>
+          <p:cNvPr id="16" name="TextBox 15"/>
+          <p:cNvSpPr txBox="1"/>
+          <p:nvPr/>
+        </p:nvSpPr>
+        <p:spPr>
+          <a:xfrm>
+            <a:off x="3840480" y="3886200"/>
+            <a:ext cx="1828800" cy="731520"/>
+          </a:xfrm>
+          <a:prstGeom prst="rect">
+            <a:avLst/>
+          </a:prstGeom>
+          <a:noFill/>
+        </p:spPr>
+        <p:txBody>
+          <a:bodyPr wrap="square">
+            <a:spAutoFit/>
+          </a:bodyPr>
+          <a:lstStyle/>
+          <a:p>
+            <a:pPr algn="r">
+              <a:defRPr sz="1700" b="1">
                 <a:solidFill>
                   <a:srgbClr val="1E60F2"/>
                 </a:solidFill>
               </a:defRPr>
             </a:pPr>
             <a:r>
-              <a:t>3만개+ (영세 인디 브랜드 비중 85%+)</a:t>
-            </a:r>
-          </a:p>
-        </p:txBody>
-      </p:sp>
-      <p:sp>
-        <p:nvSpPr>
-          <p:cNvPr id="14" name="Rounded Rectangle 13"/>
+              <a:t>30,000+ 개</a:t>
+            </a:r>
+          </a:p>
+          <a:p>
+            <a:pPr algn="r">
+              <a:defRPr sz="950" b="1">
+                <a:solidFill>
+                  <a:srgbClr val="10B981"/>
+                </a:solidFill>
+              </a:defRPr>
+            </a:pPr>
+            <a:r>
+              <a:t>85%+ 영세 인디 브랜드</a:t>
+            </a:r>
+          </a:p>
+        </p:txBody>
+      </p:sp>
+      <p:sp>
+        <p:nvSpPr>
+          <p:cNvPr id="17" name="Rounded Rectangle 16"/>
           <p:cNvSpPr/>
           <p:nvPr/>
         </p:nvSpPr>
         <p:spPr>
           <a:xfrm>
             <a:off x="6217920" y="1691640"/>
-            <a:ext cx="5212080" cy="3154680"/>
+            <a:ext cx="5212080" cy="3017520"/>
           </a:xfrm>
           <a:prstGeom prst="roundRect">
             <a:avLst/>
           </a:prstGeom>
           <a:solidFill>
-            <a:srgbClr val="F6F8FC"/>
+            <a:srgbClr val="F8FAFC"/>
           </a:solidFill>
           <a:ln>
             <a:noFill/>
@@ -5814,14 +5977,14 @@
       </p:sp>
       <p:sp>
         <p:nvSpPr>
-          <p:cNvPr id="15" name="TextBox 14"/>
+          <p:cNvPr id="18" name="TextBox 17"/>
           <p:cNvSpPr txBox="1"/>
           <p:nvPr/>
         </p:nvSpPr>
         <p:spPr>
           <a:xfrm>
-            <a:off x="6446520" y="1828800"/>
-            <a:ext cx="4754880" cy="2834640"/>
+            <a:off x="6446520" y="1783080"/>
+            <a:ext cx="4754880" cy="365760"/>
           </a:xfrm>
           <a:prstGeom prst="rect">
             <a:avLst/>
@@ -5829,12 +5992,102 @@
           <a:noFill/>
         </p:spPr>
         <p:txBody>
-          <a:bodyPr wrap="square">
+          <a:bodyPr wrap="none">
             <a:spAutoFit/>
           </a:bodyPr>
           <a:lstStyle/>
           <a:p>
             <a:pPr>
+              <a:defRPr sz="1150" b="1">
+                <a:solidFill>
+                  <a:srgbClr val="0F172A"/>
+                </a:solidFill>
+              </a:defRPr>
+            </a:pPr>
+            <a:r>
+              <a:t>[현행 규제 출시 절차] 1개 제품당 4대 필수 허들</a:t>
+            </a:r>
+          </a:p>
+        </p:txBody>
+      </p:sp>
+      <p:sp>
+        <p:nvSpPr>
+          <p:cNvPr id="19" name="Rounded Rectangle 18"/>
+          <p:cNvSpPr/>
+          <p:nvPr/>
+        </p:nvSpPr>
+        <p:spPr>
+          <a:xfrm>
+            <a:off x="6446520" y="2240280"/>
+            <a:ext cx="1097280" cy="1097280"/>
+          </a:xfrm>
+          <a:prstGeom prst="roundRect">
+            <a:avLst/>
+          </a:prstGeom>
+          <a:solidFill>
+            <a:srgbClr val="FFFFFF"/>
+          </a:solidFill>
+          <a:ln>
+            <a:noFill/>
+          </a:ln>
+        </p:spPr>
+        <p:style>
+          <a:lnRef idx="1">
+            <a:schemeClr val="accent1"/>
+          </a:lnRef>
+          <a:fillRef idx="3">
+            <a:schemeClr val="accent1"/>
+          </a:fillRef>
+          <a:effectRef idx="2">
+            <a:schemeClr val="accent1"/>
+          </a:effectRef>
+          <a:fontRef idx="minor">
+            <a:schemeClr val="lt1"/>
+          </a:fontRef>
+        </p:style>
+        <p:txBody>
+          <a:bodyPr rtlCol="0" anchor="ctr"/>
+          <a:lstStyle/>
+          <a:p>
+            <a:pPr algn="ctr"/>
+          </a:p>
+        </p:txBody>
+      </p:sp>
+      <p:sp>
+        <p:nvSpPr>
+          <p:cNvPr id="20" name="TextBox 19"/>
+          <p:cNvSpPr txBox="1"/>
+          <p:nvPr/>
+        </p:nvSpPr>
+        <p:spPr>
+          <a:xfrm>
+            <a:off x="6446520" y="2304288"/>
+            <a:ext cx="1097280" cy="914400"/>
+          </a:xfrm>
+          <a:prstGeom prst="rect">
+            <a:avLst/>
+          </a:prstGeom>
+          <a:noFill/>
+        </p:spPr>
+        <p:txBody>
+          <a:bodyPr wrap="none">
+            <a:spAutoFit/>
+          </a:bodyPr>
+          <a:lstStyle/>
+          <a:p>
+            <a:pPr algn="ctr">
+              <a:defRPr sz="900" b="1">
+                <a:solidFill>
+                  <a:srgbClr val="1E60F2"/>
+                </a:solidFill>
+              </a:defRPr>
+            </a:pPr>
+            <a:r>
+              <a:t>STEP 01</a:t>
+            </a:r>
+          </a:p>
+          <a:p>
+            <a:pPr algn="ctr">
               <a:defRPr sz="1100" b="1">
                 <a:solidFill>
                   <a:srgbClr val="0F172A"/>
@@ -5842,71 +6095,431 @@
               </a:defRPr>
             </a:pPr>
             <a:r>
-              <a:t>[1개 제품 출시에 필요한 규제 절차]</a:t>
-            </a:r>
-          </a:p>
-          <a:p>
-            <a:pPr>
-              <a:defRPr sz="1150" b="1">
+              <a:t>시험검사</a:t>
+            </a:r>
+          </a:p>
+          <a:p>
+            <a:pPr algn="ctr">
+              <a:defRPr sz="850">
+                <a:solidFill>
+                  <a:srgbClr val="64748B"/>
+                </a:solidFill>
+              </a:defRPr>
+            </a:pPr>
+            <a:r>
+              <a:t>6대 공인기관</a:t>
+            </a:r>
+          </a:p>
+        </p:txBody>
+      </p:sp>
+      <p:sp>
+        <p:nvSpPr>
+          <p:cNvPr id="21" name="Rounded Rectangle 20"/>
+          <p:cNvSpPr/>
+          <p:nvPr/>
+        </p:nvSpPr>
+        <p:spPr>
+          <a:xfrm>
+            <a:off x="7616952" y="2240280"/>
+            <a:ext cx="1097280" cy="1097280"/>
+          </a:xfrm>
+          <a:prstGeom prst="roundRect">
+            <a:avLst/>
+          </a:prstGeom>
+          <a:solidFill>
+            <a:srgbClr val="FFFFFF"/>
+          </a:solidFill>
+          <a:ln>
+            <a:noFill/>
+          </a:ln>
+        </p:spPr>
+        <p:style>
+          <a:lnRef idx="1">
+            <a:schemeClr val="accent1"/>
+          </a:lnRef>
+          <a:fillRef idx="3">
+            <a:schemeClr val="accent1"/>
+          </a:fillRef>
+          <a:effectRef idx="2">
+            <a:schemeClr val="accent1"/>
+          </a:effectRef>
+          <a:fontRef idx="minor">
+            <a:schemeClr val="lt1"/>
+          </a:fontRef>
+        </p:style>
+        <p:txBody>
+          <a:bodyPr rtlCol="0" anchor="ctr"/>
+          <a:lstStyle/>
+          <a:p>
+            <a:pPr algn="ctr"/>
+          </a:p>
+        </p:txBody>
+      </p:sp>
+      <p:sp>
+        <p:nvSpPr>
+          <p:cNvPr id="22" name="TextBox 21"/>
+          <p:cNvSpPr txBox="1"/>
+          <p:nvPr/>
+        </p:nvSpPr>
+        <p:spPr>
+          <a:xfrm>
+            <a:off x="7616952" y="2304288"/>
+            <a:ext cx="1097280" cy="914400"/>
+          </a:xfrm>
+          <a:prstGeom prst="rect">
+            <a:avLst/>
+          </a:prstGeom>
+          <a:noFill/>
+        </p:spPr>
+        <p:txBody>
+          <a:bodyPr wrap="none">
+            <a:spAutoFit/>
+          </a:bodyPr>
+          <a:lstStyle/>
+          <a:p>
+            <a:pPr algn="ctr">
+              <a:defRPr sz="900" b="1">
                 <a:solidFill>
                   <a:srgbClr val="1E60F2"/>
                 </a:solidFill>
               </a:defRPr>
             </a:pPr>
             <a:r>
-              <a:t>시험검사 ➔ 적합확인 ➔ 30일 내 신고 ➔ 25일 내 발급 (유효기간 3년)</a:t>
-            </a:r>
-          </a:p>
-          <a:p>
-            <a:br/>
-            <a:pPr>
-              <a:defRPr sz="1050">
-                <a:solidFill>
-                  <a:srgbClr val="334155"/>
-                </a:solidFill>
-              </a:defRPr>
-            </a:pPr>
-            <a:r>
-              <a:t>[안전확인대상 품목] 14분류 43개 품목 (디퓨저, 캔들, 룸스프레이 전 품목)</a:t>
-            </a:r>
-          </a:p>
-          <a:p>
-            <a:pPr>
-              <a:defRPr sz="1050">
-                <a:solidFill>
-                  <a:srgbClr val="334155"/>
-                </a:solidFill>
-              </a:defRPr>
-            </a:pPr>
-            <a:r>
-              <a:t>[지정 시험검사기관] KCL · KTC · KATRI · KTR · FITI · KOTITI (택1)</a:t>
-            </a:r>
-          </a:p>
-          <a:p>
-            <a:br/>
-            <a:pPr>
+              <a:t>STEP 02</a:t>
+            </a:r>
+          </a:p>
+          <a:p>
+            <a:pPr algn="ctr">
               <a:defRPr sz="1100" b="1">
                 <a:solidFill>
-                  <a:srgbClr val="D92D20"/>
-                </a:solidFill>
-              </a:defRPr>
-            </a:pPr>
-            <a:r>
-              <a:t>[대행 수수료 (시험비 실비 별도)] 건당 22만 원+ (기본 15만 + 신고 7만)</a:t>
-            </a:r>
-          </a:p>
-        </p:txBody>
-      </p:sp>
-      <p:sp>
-        <p:nvSpPr>
-          <p:cNvPr id="16" name="Rounded Rectangle 15"/>
+                  <a:srgbClr val="0F172A"/>
+                </a:solidFill>
+              </a:defRPr>
+            </a:pPr>
+            <a:r>
+              <a:t>적합확인</a:t>
+            </a:r>
+          </a:p>
+          <a:p>
+            <a:pPr algn="ctr">
+              <a:defRPr sz="850">
+                <a:solidFill>
+                  <a:srgbClr val="64748B"/>
+                </a:solidFill>
+              </a:defRPr>
+            </a:pPr>
+            <a:r>
+              <a:t>성적서 수령</a:t>
+            </a:r>
+          </a:p>
+        </p:txBody>
+      </p:sp>
+      <p:sp>
+        <p:nvSpPr>
+          <p:cNvPr id="23" name="Rounded Rectangle 22"/>
           <p:cNvSpPr/>
           <p:nvPr/>
         </p:nvSpPr>
         <p:spPr>
           <a:xfrm>
-            <a:off x="731520" y="4983480"/>
-            <a:ext cx="10698480" cy="1143000"/>
+            <a:off x="8787384" y="2240280"/>
+            <a:ext cx="1097280" cy="1097280"/>
+          </a:xfrm>
+          <a:prstGeom prst="roundRect">
+            <a:avLst/>
+          </a:prstGeom>
+          <a:solidFill>
+            <a:srgbClr val="FFFFFF"/>
+          </a:solidFill>
+          <a:ln>
+            <a:noFill/>
+          </a:ln>
+        </p:spPr>
+        <p:style>
+          <a:lnRef idx="1">
+            <a:schemeClr val="accent1"/>
+          </a:lnRef>
+          <a:fillRef idx="3">
+            <a:schemeClr val="accent1"/>
+          </a:fillRef>
+          <a:effectRef idx="2">
+            <a:schemeClr val="accent1"/>
+          </a:effectRef>
+          <a:fontRef idx="minor">
+            <a:schemeClr val="lt1"/>
+          </a:fontRef>
+        </p:style>
+        <p:txBody>
+          <a:bodyPr rtlCol="0" anchor="ctr"/>
+          <a:lstStyle/>
+          <a:p>
+            <a:pPr algn="ctr"/>
+          </a:p>
+        </p:txBody>
+      </p:sp>
+      <p:sp>
+        <p:nvSpPr>
+          <p:cNvPr id="24" name="TextBox 23"/>
+          <p:cNvSpPr txBox="1"/>
+          <p:nvPr/>
+        </p:nvSpPr>
+        <p:spPr>
+          <a:xfrm>
+            <a:off x="8787384" y="2304288"/>
+            <a:ext cx="1097280" cy="914400"/>
+          </a:xfrm>
+          <a:prstGeom prst="rect">
+            <a:avLst/>
+          </a:prstGeom>
+          <a:noFill/>
+        </p:spPr>
+        <p:txBody>
+          <a:bodyPr wrap="none">
+            <a:spAutoFit/>
+          </a:bodyPr>
+          <a:lstStyle/>
+          <a:p>
+            <a:pPr algn="ctr">
+              <a:defRPr sz="900" b="1">
+                <a:solidFill>
+                  <a:srgbClr val="1E60F2"/>
+                </a:solidFill>
+              </a:defRPr>
+            </a:pPr>
+            <a:r>
+              <a:t>STEP 03</a:t>
+            </a:r>
+          </a:p>
+          <a:p>
+            <a:pPr algn="ctr">
+              <a:defRPr sz="1100" b="1">
+                <a:solidFill>
+                  <a:srgbClr val="0F172A"/>
+                </a:solidFill>
+              </a:defRPr>
+            </a:pPr>
+            <a:r>
+              <a:t>신고접수</a:t>
+            </a:r>
+          </a:p>
+          <a:p>
+            <a:pPr algn="ctr">
+              <a:defRPr sz="850">
+                <a:solidFill>
+                  <a:srgbClr val="64748B"/>
+                </a:solidFill>
+              </a:defRPr>
+            </a:pPr>
+            <a:r>
+              <a:t>30일 내 신청</a:t>
+            </a:r>
+          </a:p>
+        </p:txBody>
+      </p:sp>
+      <p:sp>
+        <p:nvSpPr>
+          <p:cNvPr id="25" name="Rounded Rectangle 24"/>
+          <p:cNvSpPr/>
+          <p:nvPr/>
+        </p:nvSpPr>
+        <p:spPr>
+          <a:xfrm>
+            <a:off x="9957816" y="2240280"/>
+            <a:ext cx="1097280" cy="1097280"/>
+          </a:xfrm>
+          <a:prstGeom prst="roundRect">
+            <a:avLst/>
+          </a:prstGeom>
+          <a:solidFill>
+            <a:srgbClr val="FFFFFF"/>
+          </a:solidFill>
+          <a:ln>
+            <a:noFill/>
+          </a:ln>
+        </p:spPr>
+        <p:style>
+          <a:lnRef idx="1">
+            <a:schemeClr val="accent1"/>
+          </a:lnRef>
+          <a:fillRef idx="3">
+            <a:schemeClr val="accent1"/>
+          </a:fillRef>
+          <a:effectRef idx="2">
+            <a:schemeClr val="accent1"/>
+          </a:effectRef>
+          <a:fontRef idx="minor">
+            <a:schemeClr val="lt1"/>
+          </a:fontRef>
+        </p:style>
+        <p:txBody>
+          <a:bodyPr rtlCol="0" anchor="ctr"/>
+          <a:lstStyle/>
+          <a:p>
+            <a:pPr algn="ctr"/>
+          </a:p>
+        </p:txBody>
+      </p:sp>
+      <p:sp>
+        <p:nvSpPr>
+          <p:cNvPr id="26" name="TextBox 25"/>
+          <p:cNvSpPr txBox="1"/>
+          <p:nvPr/>
+        </p:nvSpPr>
+        <p:spPr>
+          <a:xfrm>
+            <a:off x="9957816" y="2304288"/>
+            <a:ext cx="1097280" cy="914400"/>
+          </a:xfrm>
+          <a:prstGeom prst="rect">
+            <a:avLst/>
+          </a:prstGeom>
+          <a:noFill/>
+        </p:spPr>
+        <p:txBody>
+          <a:bodyPr wrap="none">
+            <a:spAutoFit/>
+          </a:bodyPr>
+          <a:lstStyle/>
+          <a:p>
+            <a:pPr algn="ctr">
+              <a:defRPr sz="900" b="1">
+                <a:solidFill>
+                  <a:srgbClr val="1E60F2"/>
+                </a:solidFill>
+              </a:defRPr>
+            </a:pPr>
+            <a:r>
+              <a:t>STEP 04</a:t>
+            </a:r>
+          </a:p>
+          <a:p>
+            <a:pPr algn="ctr">
+              <a:defRPr sz="1100" b="1">
+                <a:solidFill>
+                  <a:srgbClr val="0F172A"/>
+                </a:solidFill>
+              </a:defRPr>
+            </a:pPr>
+            <a:r>
+              <a:t>신고증발급</a:t>
+            </a:r>
+          </a:p>
+          <a:p>
+            <a:pPr algn="ctr">
+              <a:defRPr sz="850">
+                <a:solidFill>
+                  <a:srgbClr val="64748B"/>
+                </a:solidFill>
+              </a:defRPr>
+            </a:pPr>
+            <a:r>
+              <a:t>3년 유효기간</a:t>
+            </a:r>
+          </a:p>
+        </p:txBody>
+      </p:sp>
+      <p:sp>
+        <p:nvSpPr>
+          <p:cNvPr id="27" name="Rounded Rectangle 26"/>
+          <p:cNvSpPr/>
+          <p:nvPr/>
+        </p:nvSpPr>
+        <p:spPr>
+          <a:xfrm>
+            <a:off x="6446520" y="3520440"/>
+            <a:ext cx="4754880" cy="914400"/>
+          </a:xfrm>
+          <a:prstGeom prst="roundRect">
+            <a:avLst/>
+          </a:prstGeom>
+          <a:solidFill>
+            <a:srgbClr val="FEF2F2"/>
+          </a:solidFill>
+          <a:ln w="19050">
+            <a:solidFill>
+              <a:srgbClr val="EF4444"/>
+            </a:solidFill>
+          </a:ln>
+        </p:spPr>
+        <p:style>
+          <a:lnRef idx="1">
+            <a:schemeClr val="accent1"/>
+          </a:lnRef>
+          <a:fillRef idx="3">
+            <a:schemeClr val="accent1"/>
+          </a:fillRef>
+          <a:effectRef idx="2">
+            <a:schemeClr val="accent1"/>
+          </a:effectRef>
+          <a:fontRef idx="minor">
+            <a:schemeClr val="lt1"/>
+          </a:fontRef>
+        </p:style>
+        <p:txBody>
+          <a:bodyPr rtlCol="0" anchor="ctr"/>
+          <a:lstStyle/>
+          <a:p>
+            <a:pPr algn="ctr"/>
+          </a:p>
+        </p:txBody>
+      </p:sp>
+      <p:sp>
+        <p:nvSpPr>
+          <p:cNvPr id="28" name="TextBox 27"/>
+          <p:cNvSpPr txBox="1"/>
+          <p:nvPr/>
+        </p:nvSpPr>
+        <p:spPr>
+          <a:xfrm>
+            <a:off x="6583680" y="3584448"/>
+            <a:ext cx="4480560" cy="777240"/>
+          </a:xfrm>
+          <a:prstGeom prst="rect">
+            <a:avLst/>
+          </a:prstGeom>
+          <a:noFill/>
+        </p:spPr>
+        <p:txBody>
+          <a:bodyPr wrap="none">
+            <a:spAutoFit/>
+          </a:bodyPr>
+          <a:lstStyle/>
+          <a:p>
+            <a:pPr>
+              <a:defRPr sz="1000" b="1">
+                <a:solidFill>
+                  <a:srgbClr val="EF4444"/>
+                </a:solidFill>
+              </a:defRPr>
+            </a:pPr>
+            <a:r>
+              <a:t>기존 오프라인 행정사 대행 수수료 (시험비 실비 별도)</a:t>
+            </a:r>
+          </a:p>
+          <a:p>
+            <a:pPr>
+              <a:defRPr sz="1400" b="1">
+                <a:solidFill>
+                  <a:srgbClr val="EF4444"/>
+                </a:solidFill>
+              </a:defRPr>
+            </a:pPr>
+            <a:r>
+              <a:t>건당 22만~100만 원+ (소요 기간 2~4주)</a:t>
+            </a:r>
+          </a:p>
+        </p:txBody>
+      </p:sp>
+      <p:sp>
+        <p:nvSpPr>
+          <p:cNvPr id="29" name="Rounded Rectangle 28"/>
+          <p:cNvSpPr/>
+          <p:nvPr/>
+        </p:nvSpPr>
+        <p:spPr>
+          <a:xfrm>
+            <a:off x="731520" y="4892040"/>
+            <a:ext cx="10698480" cy="1234440"/>
           </a:xfrm>
           <a:prstGeom prst="roundRect">
             <a:avLst/>
@@ -5942,14 +6555,14 @@
       </p:sp>
       <p:sp>
         <p:nvSpPr>
-          <p:cNvPr id="17" name="TextBox 16"/>
+          <p:cNvPr id="30" name="TextBox 29"/>
           <p:cNvSpPr txBox="1"/>
           <p:nvPr/>
         </p:nvSpPr>
         <p:spPr>
           <a:xfrm>
-            <a:off x="914400" y="5074920"/>
-            <a:ext cx="10332720" cy="960120"/>
+            <a:off x="960120" y="4983480"/>
+            <a:ext cx="10241280" cy="1051560"/>
           </a:xfrm>
           <a:prstGeom prst="rect">
             <a:avLst/>
@@ -5963,14 +6576,14 @@
           <a:lstStyle/>
           <a:p>
             <a:pPr>
-              <a:defRPr sz="1250" b="1">
+              <a:defRPr sz="1200" b="1">
                 <a:solidFill>
                   <a:srgbClr val="FFFFFF"/>
                 </a:solidFill>
               </a:defRPr>
             </a:pPr>
             <a:r>
-              <a:t>브랜드는 매년 4,000곳 넘게 생겨나는데, 제품 하나 출시할 때마다 5~6개 주체를 직접 조율해야 합니다.</a:t>
+              <a:t>브랜드는 매년 4,000곳 넘게 생겨나지만, 제품 하나 출시할 때마다 5~6개 주체를 직접 조율해야 합니다.</a:t>
             </a:r>
           </a:p>
           <a:p>
@@ -5982,7 +6595,7 @@
               </a:defRPr>
             </a:pPr>
             <a:r>
-              <a:t>원료사 · 시험기관 · 신고대행 · 디자이너 · 인쇄소 — 각각 따로 문의하고 서류를 수동으로 정리하는 비효율이 Formu의 출발점입니다.</a:t>
+              <a:t>원료사 · 시험기관 · 행정사 · 디자이너 · 인쇄소 — 각각 따로 소통하고 종이 서류를 수기로 정리하는 비효율 해소가 Formu의 출발점입니다.</a:t>
             </a:r>
           </a:p>
         </p:txBody>
@@ -6057,7 +6670,7 @@
         <p:spPr>
           <a:xfrm>
             <a:off x="731520" y="420624"/>
-            <a:ext cx="10698480" cy="274320"/>
+            <a:ext cx="10698480" cy="256032"/>
           </a:xfrm>
           <a:prstGeom prst="rect">
             <a:avLst/>
@@ -6079,7 +6692,7 @@
               </a:defRPr>
             </a:pPr>
             <a:r>
-              <a:t>02 · PROBLEM BREAKDOWN</a:t>
+              <a:t>●  02 · PROBLEM BREAKDOWN</a:t>
             </a:r>
           </a:p>
         </p:txBody>
@@ -6092,7 +6705,7 @@
         </p:nvSpPr>
         <p:spPr>
           <a:xfrm>
-            <a:off x="731520" y="713232"/>
+            <a:off x="731520" y="694944"/>
             <a:ext cx="10698480" cy="502920"/>
           </a:xfrm>
           <a:prstGeom prst="rect">
@@ -6187,7 +6800,7 @@
               </a:defRPr>
             </a:pPr>
             <a:r>
-              <a:t>※ 출처: 화장품법 제10조(화장품의 기재사항) 및 화학제품안전법 제10조(안전기준의 적합확인)</a:t>
+              <a:t>※ 출처: 화장품법 제10조(기재사항) 및 화학제품안전법 제10조(안전기준의 적합확인)</a:t>
             </a:r>
           </a:p>
         </p:txBody>
@@ -6215,9 +6828,9 @@
           <a:lstStyle/>
           <a:p>
             <a:pPr algn="r">
-              <a:defRPr sz="900" b="1">
-                <a:solidFill>
-                  <a:srgbClr val="94A3B8"/>
+              <a:defRPr sz="950" b="1">
+                <a:solidFill>
+                  <a:srgbClr val="64748B"/>
                 </a:solidFill>
                 <a:latin typeface="Pretendard"/>
               </a:defRPr>
@@ -6243,10 +6856,12 @@
             <a:avLst/>
           </a:prstGeom>
           <a:solidFill>
-            <a:srgbClr val="F6F8FC"/>
+            <a:srgbClr val="FFFFFF"/>
           </a:solidFill>
-          <a:ln>
-            <a:noFill/>
+          <a:ln w="19050">
+            <a:solidFill>
+              <a:srgbClr val="1E60F2"/>
+            </a:solidFill>
           </a:ln>
         </p:spPr>
         <p:style>
@@ -6279,7 +6894,7 @@
         </p:nvSpPr>
         <p:spPr>
           <a:xfrm>
-            <a:off x="960120" y="2011680"/>
+            <a:off x="960120" y="1920240"/>
             <a:ext cx="2834640" cy="3931920"/>
           </a:xfrm>
           <a:prstGeom prst="rect">
@@ -6294,7 +6909,7 @@
           <a:lstStyle/>
           <a:p>
             <a:pPr>
-              <a:defRPr sz="2600" b="1">
+              <a:defRPr sz="2800" b="1">
                 <a:solidFill>
                   <a:srgbClr val="1E60F2"/>
                 </a:solidFill>
@@ -6306,9 +6921,9 @@
           </a:p>
           <a:p>
             <a:pPr>
-              <a:defRPr sz="950" b="1">
-                <a:solidFill>
-                  <a:srgbClr val="D92D20"/>
+              <a:defRPr sz="1000" b="1">
+                <a:solidFill>
+                  <a:srgbClr val="64748B"/>
                 </a:solidFill>
               </a:defRPr>
             </a:pPr>
@@ -6321,7 +6936,7 @@
             <a:pPr>
               <a:defRPr sz="1400" b="1">
                 <a:solidFill>
-                  <a:srgbClr val="0F172A"/>
+                  <a:srgbClr val="1E60F2"/>
                 </a:solidFill>
               </a:defRPr>
             </a:pPr>
@@ -6349,14 +6964,14 @@
           <a:p>
             <a:br/>
             <a:pPr>
-              <a:defRPr sz="1000" b="1">
-                <a:solidFill>
-                  <a:srgbClr val="D92D20"/>
-                </a:solidFill>
-              </a:defRPr>
-            </a:pPr>
-            <a:r>
-              <a:t>위험: 단상자 전량 폐기 &amp; 과태료</a:t>
+              <a:defRPr sz="1050" b="1">
+                <a:solidFill>
+                  <a:srgbClr val="EF4444"/>
+                </a:solidFill>
+              </a:defRPr>
+            </a:pPr>
+            <a:r>
+              <a:t>⚠️ 위험: 단상자 3,000장 폐기 &amp; 과태료</a:t>
             </a:r>
           </a:p>
         </p:txBody>
@@ -6376,7 +6991,7 @@
             <a:avLst/>
           </a:prstGeom>
           <a:solidFill>
-            <a:srgbClr val="F6F8FC"/>
+            <a:srgbClr val="0B132B"/>
           </a:solidFill>
           <a:ln>
             <a:noFill/>
@@ -6412,7 +7027,7 @@
         </p:nvSpPr>
         <p:spPr>
           <a:xfrm>
-            <a:off x="4636008" y="2011680"/>
+            <a:off x="4636008" y="1920240"/>
             <a:ext cx="2834640" cy="3931920"/>
           </a:xfrm>
           <a:prstGeom prst="rect">
@@ -6427,9 +7042,9 @@
           <a:lstStyle/>
           <a:p>
             <a:pPr>
-              <a:defRPr sz="2600" b="1">
-                <a:solidFill>
-                  <a:srgbClr val="1E60F2"/>
+              <a:defRPr sz="2800" b="1">
+                <a:solidFill>
+                  <a:srgbClr val="60A5FA"/>
                 </a:solidFill>
               </a:defRPr>
             </a:pPr>
@@ -6439,14 +7054,14 @@
           </a:p>
           <a:p>
             <a:pPr>
-              <a:defRPr sz="950" b="1">
-                <a:solidFill>
-                  <a:srgbClr val="D92D20"/>
-                </a:solidFill>
-              </a:defRPr>
-            </a:pPr>
-            <a:r>
-              <a:t>환경부 생활화학제품법</a:t>
+              <a:defRPr sz="1000" b="1">
+                <a:solidFill>
+                  <a:srgbClr val="94A3B8"/>
+                </a:solidFill>
+              </a:defRPr>
+            </a:pPr>
+            <a:r>
+              <a:t>환경부 화학제품법</a:t>
             </a:r>
           </a:p>
           <a:p>
@@ -6454,7 +7069,7 @@
             <a:pPr>
               <a:defRPr sz="1400" b="1">
                 <a:solidFill>
-                  <a:srgbClr val="0F172A"/>
+                  <a:srgbClr val="FFFFFF"/>
                 </a:solidFill>
               </a:defRPr>
             </a:pPr>
@@ -6471,7 +7086,7 @@
             <a:pPr>
               <a:defRPr sz="1100">
                 <a:solidFill>
-                  <a:srgbClr val="334155"/>
+                  <a:srgbClr val="94A3B8"/>
                 </a:solidFill>
               </a:defRPr>
             </a:pPr>
@@ -6482,14 +7097,14 @@
           <a:p>
             <a:br/>
             <a:pPr>
-              <a:defRPr sz="1000" b="1">
-                <a:solidFill>
-                  <a:srgbClr val="D92D20"/>
-                </a:solidFill>
-              </a:defRPr>
-            </a:pPr>
-            <a:r>
-              <a:t>위험: 최대 3년 징역 / 3천만 원 벌금</a:t>
+              <a:defRPr sz="1050" b="1">
+                <a:solidFill>
+                  <a:srgbClr val="EF4444"/>
+                </a:solidFill>
+              </a:defRPr>
+            </a:pPr>
+            <a:r>
+              <a:t>🚨 위험: 최대 3년 징역 / 3천만 원 벌금</a:t>
             </a:r>
           </a:p>
         </p:txBody>
@@ -6509,7 +7124,7 @@
             <a:avLst/>
           </a:prstGeom>
           <a:solidFill>
-            <a:srgbClr val="F6F8FC"/>
+            <a:srgbClr val="FFFFFF"/>
           </a:solidFill>
           <a:ln>
             <a:noFill/>
@@ -6545,7 +7160,7 @@
         </p:nvSpPr>
         <p:spPr>
           <a:xfrm>
-            <a:off x="8311896" y="2011680"/>
+            <a:off x="8311896" y="1920240"/>
             <a:ext cx="2834640" cy="3931920"/>
           </a:xfrm>
           <a:prstGeom prst="rect">
@@ -6560,7 +7175,7 @@
           <a:lstStyle/>
           <a:p>
             <a:pPr>
-              <a:defRPr sz="2600" b="1">
+              <a:defRPr sz="2800" b="1">
                 <a:solidFill>
                   <a:srgbClr val="1E60F2"/>
                 </a:solidFill>
@@ -6572,9 +7187,9 @@
           </a:p>
           <a:p>
             <a:pPr>
-              <a:defRPr sz="950" b="1">
-                <a:solidFill>
-                  <a:srgbClr val="D92D20"/>
+              <a:defRPr sz="1000" b="1">
+                <a:solidFill>
+                  <a:srgbClr val="64748B"/>
                 </a:solidFill>
               </a:defRPr>
             </a:pPr>
@@ -6596,7 +7211,7 @@
             </a:r>
             <a:br/>
             <a:r>
-              <a:t>이중 규제 장벽</a:t>
+              <a:t>이중 규제 행정 장벽</a:t>
             </a:r>
             <a:br/>
           </a:p>
@@ -6609,20 +7224,20 @@
               </a:defRPr>
             </a:pPr>
             <a:r>
-              <a:t>1인 브랜드가 2개 부처의 서로 다른 법령과 서식을 개별 학습·대응. 오프라인 대행은 건당 100만원+으로 영세 브랜드는 접근조차 불가능.</a:t>
+              <a:t>1인 브랜드가 2개 부처의 서로 다른 법령과 서식을 개별 학습·대응 불가. 오프라인 대행료는 건당 100만 원 이상으로 영세 브랜드는 접근조차 불가능.</a:t>
             </a:r>
           </a:p>
           <a:p>
             <a:br/>
             <a:pPr>
-              <a:defRPr sz="1000" b="1">
-                <a:solidFill>
-                  <a:srgbClr val="D92D20"/>
-                </a:solidFill>
-              </a:defRPr>
-            </a:pPr>
-            <a:r>
-              <a:t>손실: 신제품 출시 2개월 지연</a:t>
+              <a:defRPr sz="1050" b="1">
+                <a:solidFill>
+                  <a:srgbClr val="EF4444"/>
+                </a:solidFill>
+              </a:defRPr>
+            </a:pPr>
+            <a:r>
+              <a:t>⏳ 손실: 신제품 출시 2개월 지연</a:t>
             </a:r>
           </a:p>
         </p:txBody>
@@ -6697,7 +7312,7 @@
         <p:spPr>
           <a:xfrm>
             <a:off x="731520" y="420624"/>
-            <a:ext cx="10698480" cy="274320"/>
+            <a:ext cx="10698480" cy="256032"/>
           </a:xfrm>
           <a:prstGeom prst="rect">
             <a:avLst/>
@@ -6719,7 +7334,7 @@
               </a:defRPr>
             </a:pPr>
             <a:r>
-              <a:t>03 · CORE VALUE PROPOSITION</a:t>
+              <a:t>●  03 · CORE VALUE PROPOSITION</a:t>
             </a:r>
           </a:p>
         </p:txBody>
@@ -6732,7 +7347,7 @@
         </p:nvSpPr>
         <p:spPr>
           <a:xfrm>
-            <a:off x="731520" y="713232"/>
+            <a:off x="731520" y="694944"/>
             <a:ext cx="10698480" cy="502920"/>
           </a:xfrm>
           <a:prstGeom prst="rect">
@@ -6755,7 +7370,7 @@
               </a:defRPr>
             </a:pPr>
             <a:r>
-              <a:t>Before / After — 접점을 5개에서 1개로</a:t>
+              <a:t>Before / After — 접점을 5개에서 1개로, 출시 시간을 2주에서 1초로</a:t>
             </a:r>
           </a:p>
         </p:txBody>
@@ -6791,7 +7406,7 @@
               </a:defRPr>
             </a:pPr>
             <a:r>
-              <a:t>고객이 직접 조율하던 5~6개 주체를 Formu 단 하나의 화면으로 통합합니다.</a:t>
+              <a:t>고객이 직접 조율하던 5~6개 주체를 Formu 단 하나의 화면으로 완전 통합합니다.</a:t>
             </a:r>
           </a:p>
         </p:txBody>
@@ -6855,9 +7470,9 @@
           <a:lstStyle/>
           <a:p>
             <a:pPr algn="r">
-              <a:defRPr sz="900" b="1">
-                <a:solidFill>
-                  <a:srgbClr val="94A3B8"/>
+              <a:defRPr sz="950" b="1">
+                <a:solidFill>
+                  <a:srgbClr val="64748B"/>
                 </a:solidFill>
                 <a:latin typeface="Pretendard"/>
               </a:defRPr>
@@ -6876,14 +7491,14 @@
         </p:nvSpPr>
         <p:spPr>
           <a:xfrm>
-            <a:off x="731520" y="1737360"/>
-            <a:ext cx="4754880" cy="4389120"/>
+            <a:off x="731520" y="1691640"/>
+            <a:ext cx="10698480" cy="3108960"/>
           </a:xfrm>
           <a:prstGeom prst="roundRect">
             <a:avLst/>
           </a:prstGeom>
           <a:solidFill>
-            <a:srgbClr val="F6F8FC"/>
+            <a:srgbClr val="F8FAFC"/>
           </a:solidFill>
           <a:ln>
             <a:noFill/>
@@ -6913,23 +7528,25 @@
       </p:sp>
       <p:sp>
         <p:nvSpPr>
-          <p:cNvPr id="9" name="Rounded Rectangle 8"/>
+          <p:cNvPr id="9" name="Oval 8"/>
           <p:cNvSpPr/>
           <p:nvPr/>
         </p:nvSpPr>
         <p:spPr>
           <a:xfrm>
-            <a:off x="731520" y="1737360"/>
-            <a:ext cx="4754880" cy="457200"/>
-          </a:xfrm>
-          <a:prstGeom prst="roundRect">
+            <a:off x="1097280" y="2011680"/>
+            <a:ext cx="2468880" cy="2468880"/>
+          </a:xfrm>
+          <a:prstGeom prst="ellipse">
             <a:avLst/>
           </a:prstGeom>
           <a:solidFill>
-            <a:srgbClr val="8C3B19"/>
+            <a:srgbClr val="FFFFFF"/>
           </a:solidFill>
-          <a:ln>
-            <a:noFill/>
+          <a:ln w="31750">
+            <a:solidFill>
+              <a:srgbClr val="DC2626"/>
+            </a:solidFill>
           </a:ln>
         </p:spPr>
         <p:style>
@@ -6962,8 +7579,8 @@
         </p:nvSpPr>
         <p:spPr>
           <a:xfrm>
-            <a:off x="731520" y="1783080"/>
-            <a:ext cx="4754880" cy="365760"/>
+            <a:off x="1097280" y="2194560"/>
+            <a:ext cx="2468880" cy="2103120"/>
           </a:xfrm>
           <a:prstGeom prst="rect">
             <a:avLst/>
@@ -6971,543 +7588,64 @@
           <a:noFill/>
         </p:spPr>
         <p:txBody>
-          <a:bodyPr wrap="none">
+          <a:bodyPr wrap="square">
             <a:spAutoFit/>
           </a:bodyPr>
           <a:lstStyle/>
           <a:p>
             <a:pPr algn="ctr">
-              <a:defRPr sz="1150" b="1">
-                <a:solidFill>
-                  <a:srgbClr val="FFFFFF"/>
-                </a:solidFill>
-              </a:defRPr>
-            </a:pPr>
-            <a:r>
-              <a:t>Before — 고객이 직접 5~6개 주체 조율</a:t>
-            </a:r>
-          </a:p>
-        </p:txBody>
-      </p:sp>
-      <p:sp>
-        <p:nvSpPr>
-          <p:cNvPr id="11" name="Rounded Rectangle 10"/>
+              <a:defRPr sz="1200" b="1">
+                <a:solidFill>
+                  <a:srgbClr val="EF4444"/>
+                </a:solidFill>
+              </a:defRPr>
+            </a:pPr>
+            <a:r>
+              <a:t>AS - IS</a:t>
+            </a:r>
+          </a:p>
+          <a:p>
+            <a:pPr algn="ctr">
+              <a:defRPr sz="4000" b="1">
+                <a:solidFill>
+                  <a:srgbClr val="0F172A"/>
+                </a:solidFill>
+              </a:defRPr>
+            </a:pPr>
+            <a:r>
+              <a:t>5개</a:t>
+            </a:r>
+          </a:p>
+          <a:p>
+            <a:pPr algn="ctr">
+              <a:defRPr sz="950" b="1">
+                <a:solidFill>
+                  <a:srgbClr val="64748B"/>
+                </a:solidFill>
+              </a:defRPr>
+            </a:pPr>
+            <a:r>
+              <a:t>직접 소통 주체</a:t>
+            </a:r>
+            <a:br/>
+            <a:r>
+              <a:t>(소요 2~4주 · 22만~100만 원)</a:t>
+            </a:r>
+          </a:p>
+        </p:txBody>
+      </p:sp>
+      <p:sp>
+        <p:nvSpPr>
+          <p:cNvPr id="11" name="Right Arrow 10"/>
           <p:cNvSpPr/>
           <p:nvPr/>
         </p:nvSpPr>
         <p:spPr>
           <a:xfrm>
-            <a:off x="1005840" y="2331720"/>
-            <a:ext cx="4206240" cy="475488"/>
-          </a:xfrm>
-          <a:prstGeom prst="roundRect">
-            <a:avLst/>
-          </a:prstGeom>
-          <a:solidFill>
-            <a:srgbClr val="FFFFFF"/>
-          </a:solidFill>
-          <a:ln>
-            <a:noFill/>
-          </a:ln>
-        </p:spPr>
-        <p:style>
-          <a:lnRef idx="1">
-            <a:schemeClr val="accent1"/>
-          </a:lnRef>
-          <a:fillRef idx="3">
-            <a:schemeClr val="accent1"/>
-          </a:fillRef>
-          <a:effectRef idx="2">
-            <a:schemeClr val="accent1"/>
-          </a:effectRef>
-          <a:fontRef idx="minor">
-            <a:schemeClr val="lt1"/>
-          </a:fontRef>
-        </p:style>
-        <p:txBody>
-          <a:bodyPr rtlCol="0" anchor="ctr"/>
-          <a:lstStyle/>
-          <a:p>
-            <a:pPr algn="ctr"/>
-          </a:p>
-        </p:txBody>
-      </p:sp>
-      <p:sp>
-        <p:nvSpPr>
-          <p:cNvPr id="12" name="TextBox 11"/>
-          <p:cNvSpPr txBox="1"/>
-          <p:nvPr/>
-        </p:nvSpPr>
-        <p:spPr>
-          <a:xfrm>
-            <a:off x="1097280" y="2377440"/>
-            <a:ext cx="4023360" cy="384048"/>
-          </a:xfrm>
-          <a:prstGeom prst="rect">
-            <a:avLst/>
-          </a:prstGeom>
-          <a:noFill/>
-        </p:spPr>
-        <p:txBody>
-          <a:bodyPr wrap="none">
-            <a:spAutoFit/>
-          </a:bodyPr>
-          <a:lstStyle/>
-          <a:p>
-            <a:pPr>
-              <a:defRPr sz="1050" b="1">
-                <a:solidFill>
-                  <a:srgbClr val="0F172A"/>
-                </a:solidFill>
-              </a:defRPr>
-            </a:pPr>
-            <a:r>
-              <a:t>원료사  ➔  MSDS · IFRA 성적서 요청</a:t>
-            </a:r>
-          </a:p>
-        </p:txBody>
-      </p:sp>
-      <p:sp>
-        <p:nvSpPr>
-          <p:cNvPr id="13" name="Rounded Rectangle 12"/>
-          <p:cNvSpPr/>
-          <p:nvPr/>
-        </p:nvSpPr>
-        <p:spPr>
-          <a:xfrm>
-            <a:off x="1005840" y="2898648"/>
-            <a:ext cx="4206240" cy="475488"/>
-          </a:xfrm>
-          <a:prstGeom prst="roundRect">
-            <a:avLst/>
-          </a:prstGeom>
-          <a:solidFill>
-            <a:srgbClr val="FFFFFF"/>
-          </a:solidFill>
-          <a:ln>
-            <a:noFill/>
-          </a:ln>
-        </p:spPr>
-        <p:style>
-          <a:lnRef idx="1">
-            <a:schemeClr val="accent1"/>
-          </a:lnRef>
-          <a:fillRef idx="3">
-            <a:schemeClr val="accent1"/>
-          </a:fillRef>
-          <a:effectRef idx="2">
-            <a:schemeClr val="accent1"/>
-          </a:effectRef>
-          <a:fontRef idx="minor">
-            <a:schemeClr val="lt1"/>
-          </a:fontRef>
-        </p:style>
-        <p:txBody>
-          <a:bodyPr rtlCol="0" anchor="ctr"/>
-          <a:lstStyle/>
-          <a:p>
-            <a:pPr algn="ctr"/>
-          </a:p>
-        </p:txBody>
-      </p:sp>
-      <p:sp>
-        <p:nvSpPr>
-          <p:cNvPr id="14" name="TextBox 13"/>
-          <p:cNvSpPr txBox="1"/>
-          <p:nvPr/>
-        </p:nvSpPr>
-        <p:spPr>
-          <a:xfrm>
-            <a:off x="1097280" y="2944368"/>
-            <a:ext cx="4023360" cy="384048"/>
-          </a:xfrm>
-          <a:prstGeom prst="rect">
-            <a:avLst/>
-          </a:prstGeom>
-          <a:noFill/>
-        </p:spPr>
-        <p:txBody>
-          <a:bodyPr wrap="none">
-            <a:spAutoFit/>
-          </a:bodyPr>
-          <a:lstStyle/>
-          <a:p>
-            <a:pPr>
-              <a:defRPr sz="1050" b="1">
-                <a:solidFill>
-                  <a:srgbClr val="0F172A"/>
-                </a:solidFill>
-              </a:defRPr>
-            </a:pPr>
-            <a:r>
-              <a:t>시험기관 (6곳 중 택1)  ➔  견적 · 시료 택배 · 성적서 개별</a:t>
-            </a:r>
-          </a:p>
-        </p:txBody>
-      </p:sp>
-      <p:sp>
-        <p:nvSpPr>
-          <p:cNvPr id="15" name="Rounded Rectangle 14"/>
-          <p:cNvSpPr/>
-          <p:nvPr/>
-        </p:nvSpPr>
-        <p:spPr>
-          <a:xfrm>
-            <a:off x="1005840" y="3465576"/>
-            <a:ext cx="4206240" cy="475488"/>
-          </a:xfrm>
-          <a:prstGeom prst="roundRect">
-            <a:avLst/>
-          </a:prstGeom>
-          <a:solidFill>
-            <a:srgbClr val="FFFFFF"/>
-          </a:solidFill>
-          <a:ln>
-            <a:noFill/>
-          </a:ln>
-        </p:spPr>
-        <p:style>
-          <a:lnRef idx="1">
-            <a:schemeClr val="accent1"/>
-          </a:lnRef>
-          <a:fillRef idx="3">
-            <a:schemeClr val="accent1"/>
-          </a:fillRef>
-          <a:effectRef idx="2">
-            <a:schemeClr val="accent1"/>
-          </a:effectRef>
-          <a:fontRef idx="minor">
-            <a:schemeClr val="lt1"/>
-          </a:fontRef>
-        </p:style>
-        <p:txBody>
-          <a:bodyPr rtlCol="0" anchor="ctr"/>
-          <a:lstStyle/>
-          <a:p>
-            <a:pPr algn="ctr"/>
-          </a:p>
-        </p:txBody>
-      </p:sp>
-      <p:sp>
-        <p:nvSpPr>
-          <p:cNvPr id="16" name="TextBox 15"/>
-          <p:cNvSpPr txBox="1"/>
-          <p:nvPr/>
-        </p:nvSpPr>
-        <p:spPr>
-          <a:xfrm>
-            <a:off x="1097280" y="3511296"/>
-            <a:ext cx="4023360" cy="384048"/>
-          </a:xfrm>
-          <a:prstGeom prst="rect">
-            <a:avLst/>
-          </a:prstGeom>
-          <a:noFill/>
-        </p:spPr>
-        <p:txBody>
-          <a:bodyPr wrap="none">
-            <a:spAutoFit/>
-          </a:bodyPr>
-          <a:lstStyle/>
-          <a:p>
-            <a:pPr>
-              <a:defRPr sz="1050" b="1">
-                <a:solidFill>
-                  <a:srgbClr val="0F172A"/>
-                </a:solidFill>
-              </a:defRPr>
-            </a:pPr>
-            <a:r>
-              <a:t>신고대행사  ➔  서류 수동 재정리 외주 소통</a:t>
-            </a:r>
-          </a:p>
-        </p:txBody>
-      </p:sp>
-      <p:sp>
-        <p:nvSpPr>
-          <p:cNvPr id="17" name="Rounded Rectangle 16"/>
-          <p:cNvSpPr/>
-          <p:nvPr/>
-        </p:nvSpPr>
-        <p:spPr>
-          <a:xfrm>
-            <a:off x="1005840" y="4032504"/>
-            <a:ext cx="4206240" cy="475488"/>
-          </a:xfrm>
-          <a:prstGeom prst="roundRect">
-            <a:avLst/>
-          </a:prstGeom>
-          <a:solidFill>
-            <a:srgbClr val="FFFFFF"/>
-          </a:solidFill>
-          <a:ln>
-            <a:noFill/>
-          </a:ln>
-        </p:spPr>
-        <p:style>
-          <a:lnRef idx="1">
-            <a:schemeClr val="accent1"/>
-          </a:lnRef>
-          <a:fillRef idx="3">
-            <a:schemeClr val="accent1"/>
-          </a:fillRef>
-          <a:effectRef idx="2">
-            <a:schemeClr val="accent1"/>
-          </a:effectRef>
-          <a:fontRef idx="minor">
-            <a:schemeClr val="lt1"/>
-          </a:fontRef>
-        </p:style>
-        <p:txBody>
-          <a:bodyPr rtlCol="0" anchor="ctr"/>
-          <a:lstStyle/>
-          <a:p>
-            <a:pPr algn="ctr"/>
-          </a:p>
-        </p:txBody>
-      </p:sp>
-      <p:sp>
-        <p:nvSpPr>
-          <p:cNvPr id="18" name="TextBox 17"/>
-          <p:cNvSpPr txBox="1"/>
-          <p:nvPr/>
-        </p:nvSpPr>
-        <p:spPr>
-          <a:xfrm>
-            <a:off x="1097280" y="4078224"/>
-            <a:ext cx="4023360" cy="384048"/>
-          </a:xfrm>
-          <a:prstGeom prst="rect">
-            <a:avLst/>
-          </a:prstGeom>
-          <a:noFill/>
-        </p:spPr>
-        <p:txBody>
-          <a:bodyPr wrap="none">
-            <a:spAutoFit/>
-          </a:bodyPr>
-          <a:lstStyle/>
-          <a:p>
-            <a:pPr>
-              <a:defRPr sz="1050" b="1">
-                <a:solidFill>
-                  <a:srgbClr val="0F172A"/>
-                </a:solidFill>
-              </a:defRPr>
-            </a:pPr>
-            <a:r>
-              <a:t>디자이너  ➔  규제 라벨 문구 따로 전달</a:t>
-            </a:r>
-          </a:p>
-        </p:txBody>
-      </p:sp>
-      <p:sp>
-        <p:nvSpPr>
-          <p:cNvPr id="19" name="Rounded Rectangle 18"/>
-          <p:cNvSpPr/>
-          <p:nvPr/>
-        </p:nvSpPr>
-        <p:spPr>
-          <a:xfrm>
-            <a:off x="1005840" y="4599431"/>
-            <a:ext cx="4206240" cy="475488"/>
-          </a:xfrm>
-          <a:prstGeom prst="roundRect">
-            <a:avLst/>
-          </a:prstGeom>
-          <a:solidFill>
-            <a:srgbClr val="FFFFFF"/>
-          </a:solidFill>
-          <a:ln>
-            <a:noFill/>
-          </a:ln>
-        </p:spPr>
-        <p:style>
-          <a:lnRef idx="1">
-            <a:schemeClr val="accent1"/>
-          </a:lnRef>
-          <a:fillRef idx="3">
-            <a:schemeClr val="accent1"/>
-          </a:fillRef>
-          <a:effectRef idx="2">
-            <a:schemeClr val="accent1"/>
-          </a:effectRef>
-          <a:fontRef idx="minor">
-            <a:schemeClr val="lt1"/>
-          </a:fontRef>
-        </p:style>
-        <p:txBody>
-          <a:bodyPr rtlCol="0" anchor="ctr"/>
-          <a:lstStyle/>
-          <a:p>
-            <a:pPr algn="ctr"/>
-          </a:p>
-        </p:txBody>
-      </p:sp>
-      <p:sp>
-        <p:nvSpPr>
-          <p:cNvPr id="20" name="TextBox 19"/>
-          <p:cNvSpPr txBox="1"/>
-          <p:nvPr/>
-        </p:nvSpPr>
-        <p:spPr>
-          <a:xfrm>
-            <a:off x="1097280" y="4645152"/>
-            <a:ext cx="4023360" cy="384048"/>
-          </a:xfrm>
-          <a:prstGeom prst="rect">
-            <a:avLst/>
-          </a:prstGeom>
-          <a:noFill/>
-        </p:spPr>
-        <p:txBody>
-          <a:bodyPr wrap="none">
-            <a:spAutoFit/>
-          </a:bodyPr>
-          <a:lstStyle/>
-          <a:p>
-            <a:pPr>
-              <a:defRPr sz="1050" b="1">
-                <a:solidFill>
-                  <a:srgbClr val="0F172A"/>
-                </a:solidFill>
-              </a:defRPr>
-            </a:pPr>
-            <a:r>
-              <a:t>인쇄소  ➔  폰트·필수 기재 규격 또 조율</a:t>
-            </a:r>
-          </a:p>
-        </p:txBody>
-      </p:sp>
-      <p:sp>
-        <p:nvSpPr>
-          <p:cNvPr id="21" name="TextBox 20"/>
-          <p:cNvSpPr txBox="1"/>
-          <p:nvPr/>
-        </p:nvSpPr>
-        <p:spPr>
-          <a:xfrm>
-            <a:off x="914400" y="5257800"/>
-            <a:ext cx="4389120" cy="731520"/>
-          </a:xfrm>
-          <a:prstGeom prst="rect">
-            <a:avLst/>
-          </a:prstGeom>
-          <a:noFill/>
-        </p:spPr>
-        <p:txBody>
-          <a:bodyPr wrap="none">
-            <a:spAutoFit/>
-          </a:bodyPr>
-          <a:lstStyle/>
-          <a:p>
-            <a:pPr>
-              <a:defRPr sz="1000" b="1">
-                <a:solidFill>
-                  <a:srgbClr val="D92D20"/>
-                </a:solidFill>
-              </a:defRPr>
-            </a:pPr>
-            <a:r>
-              <a:t>접점 5~6개 · 서류 중복 정리 · 진행 상태 분산</a:t>
-            </a:r>
-            <a:br/>
-            <a:r>
-              <a:t>각 주체가 다른 양식 사용 ➔ CAS 누락 시 신고 반려 사이클</a:t>
-            </a:r>
-          </a:p>
-        </p:txBody>
-      </p:sp>
-      <p:sp>
-        <p:nvSpPr>
-          <p:cNvPr id="22" name="TextBox 21"/>
-          <p:cNvSpPr txBox="1"/>
-          <p:nvPr/>
-        </p:nvSpPr>
-        <p:spPr>
-          <a:xfrm>
-            <a:off x="5623560" y="3566160"/>
-            <a:ext cx="914400" cy="731520"/>
-          </a:xfrm>
-          <a:prstGeom prst="rect">
-            <a:avLst/>
-          </a:prstGeom>
-          <a:noFill/>
-        </p:spPr>
-        <p:txBody>
-          <a:bodyPr wrap="none">
-            <a:spAutoFit/>
-          </a:bodyPr>
-          <a:lstStyle/>
-          <a:p>
-            <a:pPr algn="ctr">
-              <a:defRPr sz="3200" b="1">
-                <a:solidFill>
-                  <a:srgbClr val="1E60F2"/>
-                </a:solidFill>
-              </a:defRPr>
-            </a:pPr>
-            <a:r>
-              <a:t>➔</a:t>
-            </a:r>
-          </a:p>
-        </p:txBody>
-      </p:sp>
-      <p:sp>
-        <p:nvSpPr>
-          <p:cNvPr id="23" name="Rounded Rectangle 22"/>
-          <p:cNvSpPr/>
-          <p:nvPr/>
-        </p:nvSpPr>
-        <p:spPr>
-          <a:xfrm>
-            <a:off x="6675120" y="1737360"/>
-            <a:ext cx="4754880" cy="4389120"/>
-          </a:xfrm>
-          <a:prstGeom prst="roundRect">
-            <a:avLst/>
-          </a:prstGeom>
-          <a:solidFill>
-            <a:srgbClr val="F6F8FC"/>
-          </a:solidFill>
-          <a:ln>
-            <a:noFill/>
-          </a:ln>
-        </p:spPr>
-        <p:style>
-          <a:lnRef idx="1">
-            <a:schemeClr val="accent1"/>
-          </a:lnRef>
-          <a:fillRef idx="3">
-            <a:schemeClr val="accent1"/>
-          </a:fillRef>
-          <a:effectRef idx="2">
-            <a:schemeClr val="accent1"/>
-          </a:effectRef>
-          <a:fontRef idx="minor">
-            <a:schemeClr val="lt1"/>
-          </a:fontRef>
-        </p:style>
-        <p:txBody>
-          <a:bodyPr rtlCol="0" anchor="ctr"/>
-          <a:lstStyle/>
-          <a:p>
-            <a:pPr algn="ctr"/>
-          </a:p>
-        </p:txBody>
-      </p:sp>
-      <p:sp>
-        <p:nvSpPr>
-          <p:cNvPr id="24" name="Rounded Rectangle 23"/>
-          <p:cNvSpPr/>
-          <p:nvPr/>
-        </p:nvSpPr>
-        <p:spPr>
-          <a:xfrm>
-            <a:off x="6675120" y="1737360"/>
-            <a:ext cx="4754880" cy="457200"/>
-          </a:xfrm>
-          <a:prstGeom prst="roundRect">
+            <a:off x="3931920" y="2880360"/>
+            <a:ext cx="4114800" cy="777240"/>
+          </a:xfrm>
+          <a:prstGeom prst="rightArrow">
             <a:avLst/>
           </a:prstGeom>
           <a:solidFill>
@@ -7541,14 +7679,14 @@
       </p:sp>
       <p:sp>
         <p:nvSpPr>
-          <p:cNvPr id="25" name="TextBox 24"/>
+          <p:cNvPr id="12" name="TextBox 11"/>
           <p:cNvSpPr txBox="1"/>
           <p:nvPr/>
         </p:nvSpPr>
         <p:spPr>
           <a:xfrm>
-            <a:off x="6675120" y="1783080"/>
-            <a:ext cx="4754880" cy="365760"/>
+            <a:off x="3931920" y="3017520"/>
+            <a:ext cx="3840480" cy="548640"/>
           </a:xfrm>
           <a:prstGeom prst="rect">
             <a:avLst/>
@@ -7562,34 +7700,34 @@
           <a:lstStyle/>
           <a:p>
             <a:pPr algn="ctr">
-              <a:defRPr sz="1150" b="1">
+              <a:defRPr sz="1300" b="1">
                 <a:solidFill>
                   <a:srgbClr val="FFFFFF"/>
                 </a:solidFill>
               </a:defRPr>
             </a:pPr>
             <a:r>
-              <a:t>After — Formu (포뮤) 단일 화면</a:t>
-            </a:r>
-          </a:p>
-        </p:txBody>
-      </p:sp>
-      <p:sp>
-        <p:nvSpPr>
-          <p:cNvPr id="26" name="Rounded Rectangle 25"/>
+              <a:t>접점 5개 ➔ 1개 / 소요시간 98% 절감</a:t>
+            </a:r>
+          </a:p>
+        </p:txBody>
+      </p:sp>
+      <p:sp>
+        <p:nvSpPr>
+          <p:cNvPr id="13" name="Oval 12"/>
           <p:cNvSpPr/>
           <p:nvPr/>
         </p:nvSpPr>
         <p:spPr>
           <a:xfrm>
-            <a:off x="6949440" y="2423160"/>
-            <a:ext cx="4206240" cy="566928"/>
-          </a:xfrm>
-          <a:prstGeom prst="roundRect">
+            <a:off x="8412480" y="1874519"/>
+            <a:ext cx="2743200" cy="2743200"/>
+          </a:xfrm>
+          <a:prstGeom prst="ellipse">
             <a:avLst/>
           </a:prstGeom>
           <a:solidFill>
-            <a:srgbClr val="EEF4FF"/>
+            <a:srgbClr val="1E60F2"/>
           </a:solidFill>
           <a:ln>
             <a:noFill/>
@@ -7619,14 +7757,14 @@
       </p:sp>
       <p:sp>
         <p:nvSpPr>
-          <p:cNvPr id="27" name="TextBox 26"/>
+          <p:cNvPr id="14" name="TextBox 13"/>
           <p:cNvSpPr txBox="1"/>
           <p:nvPr/>
         </p:nvSpPr>
         <p:spPr>
           <a:xfrm>
-            <a:off x="7086600" y="2487168"/>
-            <a:ext cx="3931920" cy="457200"/>
+            <a:off x="8412480" y="2103120"/>
+            <a:ext cx="2743200" cy="2286000"/>
           </a:xfrm>
           <a:prstGeom prst="rect">
             <a:avLst/>
@@ -7634,55 +7772,73 @@
           <a:noFill/>
         </p:spPr>
         <p:txBody>
-          <a:bodyPr wrap="none">
+          <a:bodyPr wrap="square">
             <a:spAutoFit/>
           </a:bodyPr>
           <a:lstStyle/>
           <a:p>
-            <a:pPr>
-              <a:defRPr sz="1100" b="1">
-                <a:solidFill>
-                  <a:srgbClr val="1E60F2"/>
-                </a:solidFill>
-              </a:defRPr>
-            </a:pPr>
-            <a:r>
-              <a:t>1. 배합표 1회 업로드</a:t>
-            </a:r>
-          </a:p>
-          <a:p>
-            <a:pPr>
-              <a:defRPr sz="950">
-                <a:solidFill>
-                  <a:srgbClr val="1E60F2"/>
-                </a:solidFill>
-              </a:defRPr>
-            </a:pPr>
-            <a:r>
-              <a:t>XLSX · CSV · PDF + MSDS 즉시 인식</a:t>
-            </a:r>
-          </a:p>
-        </p:txBody>
-      </p:sp>
-      <p:sp>
-        <p:nvSpPr>
-          <p:cNvPr id="28" name="Rounded Rectangle 27"/>
+            <a:pPr algn="ctr">
+              <a:defRPr sz="1300" b="1">
+                <a:solidFill>
+                  <a:srgbClr val="BAE6FD"/>
+                </a:solidFill>
+              </a:defRPr>
+            </a:pPr>
+            <a:r>
+              <a:t>TO - BE</a:t>
+            </a:r>
+          </a:p>
+          <a:p>
+            <a:pPr algn="ctr">
+              <a:defRPr sz="4800" b="1">
+                <a:solidFill>
+                  <a:srgbClr val="FFFFFF"/>
+                </a:solidFill>
+              </a:defRPr>
+            </a:pPr>
+            <a:r>
+              <a:t>1개</a:t>
+            </a:r>
+          </a:p>
+          <a:p>
+            <a:pPr algn="ctr">
+              <a:defRPr sz="1050" b="1">
+                <a:solidFill>
+                  <a:srgbClr val="FFFFFF"/>
+                </a:solidFill>
+              </a:defRPr>
+            </a:pPr>
+            <a:r>
+              <a:t>Formu 단일 통합 화면</a:t>
+            </a:r>
+            <a:br/>
+            <a:r>
+              <a:t>(1초 완성 · 건당 1.9만 원)</a:t>
+            </a:r>
+          </a:p>
+        </p:txBody>
+      </p:sp>
+      <p:sp>
+        <p:nvSpPr>
+          <p:cNvPr id="15" name="Rounded Rectangle 14"/>
           <p:cNvSpPr/>
           <p:nvPr/>
         </p:nvSpPr>
         <p:spPr>
           <a:xfrm>
-            <a:off x="6949440" y="3108960"/>
-            <a:ext cx="4206240" cy="566928"/>
+            <a:off x="731520" y="4937760"/>
+            <a:ext cx="5212080" cy="1188720"/>
           </a:xfrm>
           <a:prstGeom prst="roundRect">
             <a:avLst/>
           </a:prstGeom>
           <a:solidFill>
-            <a:srgbClr val="EEF4FF"/>
+            <a:srgbClr val="FFFFFF"/>
           </a:solidFill>
-          <a:ln>
-            <a:noFill/>
+          <a:ln w="19050">
+            <a:solidFill>
+              <a:srgbClr val="EF4444"/>
+            </a:solidFill>
           </a:ln>
         </p:spPr>
         <p:style>
@@ -7709,14 +7865,14 @@
       </p:sp>
       <p:sp>
         <p:nvSpPr>
-          <p:cNvPr id="29" name="TextBox 28"/>
+          <p:cNvPr id="16" name="TextBox 15"/>
           <p:cNvSpPr txBox="1"/>
           <p:nvPr/>
         </p:nvSpPr>
         <p:spPr>
           <a:xfrm>
-            <a:off x="7086600" y="3172968"/>
-            <a:ext cx="3931920" cy="457200"/>
+            <a:off x="914400" y="4983480"/>
+            <a:ext cx="4846320" cy="1051560"/>
           </a:xfrm>
           <a:prstGeom prst="rect">
             <a:avLst/>
@@ -7724,46 +7880,58 @@
           <a:noFill/>
         </p:spPr>
         <p:txBody>
-          <a:bodyPr wrap="none">
+          <a:bodyPr wrap="square">
             <a:spAutoFit/>
           </a:bodyPr>
           <a:lstStyle/>
           <a:p>
             <a:pPr>
-              <a:defRPr sz="1100" b="1">
-                <a:solidFill>
-                  <a:srgbClr val="1E60F2"/>
-                </a:solidFill>
-              </a:defRPr>
-            </a:pPr>
-            <a:r>
-              <a:t>2. 4개 산출물 자동 생성</a:t>
-            </a:r>
-          </a:p>
-          <a:p>
-            <a:pPr>
-              <a:defRPr sz="950">
-                <a:solidFill>
-                  <a:srgbClr val="1E60F2"/>
-                </a:solidFill>
-              </a:defRPr>
-            </a:pPr>
-            <a:r>
-              <a:t>신고용 엑셀 · 라벨 문구 · 검토표 · 인쇄 PDF</a:t>
-            </a:r>
-          </a:p>
-        </p:txBody>
-      </p:sp>
-      <p:sp>
-        <p:nvSpPr>
-          <p:cNvPr id="30" name="Rounded Rectangle 29"/>
+              <a:defRPr sz="1050">
+                <a:solidFill>
+                  <a:srgbClr val="334155"/>
+                </a:solidFill>
+              </a:defRPr>
+            </a:pPr>
+            <a:r>
+              <a:t>✕ 원료사: MSDS · IFRA 분석 성적서 개별 요청 및 누락 빈발</a:t>
+            </a:r>
+          </a:p>
+          <a:p>
+            <a:pPr>
+              <a:defRPr sz="1050">
+                <a:solidFill>
+                  <a:srgbClr val="334155"/>
+                </a:solidFill>
+              </a:defRPr>
+            </a:pPr>
+            <a:r>
+              <a:t>✕ 시험기관 (6곳 택1): 견적서 비교, 시료 택배 발송, 종이 성적서 수령</a:t>
+            </a:r>
+          </a:p>
+          <a:p>
+            <a:pPr>
+              <a:defRPr sz="1050">
+                <a:solidFill>
+                  <a:srgbClr val="334155"/>
+                </a:solidFill>
+              </a:defRPr>
+            </a:pPr>
+            <a:r>
+              <a:t>✕ 행정사 &amp; 인쇄소: 서식 재작성 소통, 폰트/표기 오류로 인한 인쇄 재작업</a:t>
+            </a:r>
+          </a:p>
+        </p:txBody>
+      </p:sp>
+      <p:sp>
+        <p:nvSpPr>
+          <p:cNvPr id="17" name="Rounded Rectangle 16"/>
           <p:cNvSpPr/>
           <p:nvPr/>
         </p:nvSpPr>
         <p:spPr>
           <a:xfrm>
-            <a:off x="6949440" y="3794760"/>
-            <a:ext cx="4206240" cy="566928"/>
+            <a:off x="6217920" y="4937760"/>
+            <a:ext cx="5212080" cy="1188720"/>
           </a:xfrm>
           <a:prstGeom prst="roundRect">
             <a:avLst/>
@@ -7771,8 +7939,10 @@
           <a:solidFill>
             <a:srgbClr val="EEF4FF"/>
           </a:solidFill>
-          <a:ln>
-            <a:noFill/>
+          <a:ln w="19050">
+            <a:solidFill>
+              <a:srgbClr val="1E60F2"/>
+            </a:solidFill>
           </a:ln>
         </p:spPr>
         <p:style>
@@ -7799,14 +7969,14 @@
       </p:sp>
       <p:sp>
         <p:nvSpPr>
-          <p:cNvPr id="31" name="TextBox 30"/>
+          <p:cNvPr id="18" name="TextBox 17"/>
           <p:cNvSpPr txBox="1"/>
           <p:nvPr/>
         </p:nvSpPr>
         <p:spPr>
           <a:xfrm>
-            <a:off x="7086600" y="3858768"/>
-            <a:ext cx="3931920" cy="457200"/>
+            <a:off x="6400800" y="4983480"/>
+            <a:ext cx="4846320" cy="1051560"/>
           </a:xfrm>
           <a:prstGeom prst="rect">
             <a:avLst/>
@@ -7814,161 +7984,44 @@
           <a:noFill/>
         </p:spPr>
         <p:txBody>
-          <a:bodyPr wrap="none">
+          <a:bodyPr wrap="square">
             <a:spAutoFit/>
           </a:bodyPr>
           <a:lstStyle/>
           <a:p>
             <a:pPr>
-              <a:defRPr sz="1100" b="1">
+              <a:defRPr sz="1050" b="1">
+                <a:solidFill>
+                  <a:srgbClr val="0F172A"/>
+                </a:solidFill>
+              </a:defRPr>
+            </a:pPr>
+            <a:r>
+              <a:t>✓ 배합표 1회 업로드: XLSX · CSV · PDF 즉시 인식 및 CAS 자동 매핑</a:t>
+            </a:r>
+          </a:p>
+          <a:p>
+            <a:pPr>
+              <a:defRPr sz="1050" b="1">
                 <a:solidFill>
                   <a:srgbClr val="1E60F2"/>
                 </a:solidFill>
               </a:defRPr>
             </a:pPr>
             <a:r>
-              <a:t>3. 5개 파트너 연결</a:t>
-            </a:r>
-          </a:p>
-          <a:p>
-            <a:pPr>
-              <a:defRPr sz="950">
-                <a:solidFill>
-                  <a:srgbClr val="1E60F2"/>
-                </a:solidFill>
-              </a:defRPr>
-            </a:pPr>
-            <a:r>
-              <a:t>전문가 · 공인시험원 · 신고 · 디자인 · 인쇄</a:t>
-            </a:r>
-          </a:p>
-        </p:txBody>
-      </p:sp>
-      <p:sp>
-        <p:nvSpPr>
-          <p:cNvPr id="32" name="Rounded Rectangle 31"/>
-          <p:cNvSpPr/>
-          <p:nvPr/>
-        </p:nvSpPr>
-        <p:spPr>
-          <a:xfrm>
-            <a:off x="6949440" y="4480560"/>
-            <a:ext cx="4206240" cy="566928"/>
-          </a:xfrm>
-          <a:prstGeom prst="roundRect">
-            <a:avLst/>
-          </a:prstGeom>
-          <a:solidFill>
-            <a:srgbClr val="0B132B"/>
-          </a:solidFill>
-          <a:ln>
-            <a:noFill/>
-          </a:ln>
-        </p:spPr>
-        <p:style>
-          <a:lnRef idx="1">
-            <a:schemeClr val="accent1"/>
-          </a:lnRef>
-          <a:fillRef idx="3">
-            <a:schemeClr val="accent1"/>
-          </a:fillRef>
-          <a:effectRef idx="2">
-            <a:schemeClr val="accent1"/>
-          </a:effectRef>
-          <a:fontRef idx="minor">
-            <a:schemeClr val="lt1"/>
-          </a:fontRef>
-        </p:style>
-        <p:txBody>
-          <a:bodyPr rtlCol="0" anchor="ctr"/>
-          <a:lstStyle/>
-          <a:p>
-            <a:pPr algn="ctr"/>
-          </a:p>
-        </p:txBody>
-      </p:sp>
-      <p:sp>
-        <p:nvSpPr>
-          <p:cNvPr id="33" name="TextBox 32"/>
-          <p:cNvSpPr txBox="1"/>
-          <p:nvPr/>
-        </p:nvSpPr>
-        <p:spPr>
-          <a:xfrm>
-            <a:off x="7086600" y="4544568"/>
-            <a:ext cx="3931920" cy="457200"/>
-          </a:xfrm>
-          <a:prstGeom prst="rect">
-            <a:avLst/>
-          </a:prstGeom>
-          <a:noFill/>
-        </p:spPr>
-        <p:txBody>
-          <a:bodyPr wrap="none">
-            <a:spAutoFit/>
-          </a:bodyPr>
-          <a:lstStyle/>
-          <a:p>
-            <a:pPr>
-              <a:defRPr sz="1100" b="1">
-                <a:solidFill>
-                  <a:srgbClr val="FFFFFF"/>
-                </a:solidFill>
-              </a:defRPr>
-            </a:pPr>
-            <a:r>
-              <a:t>4. 1개 진행 보드</a:t>
-            </a:r>
-          </a:p>
-          <a:p>
-            <a:pPr>
-              <a:defRPr sz="950">
-                <a:solidFill>
-                  <a:srgbClr val="FFFFFF"/>
-                </a:solidFill>
-              </a:defRPr>
-            </a:pPr>
-            <a:r>
-              <a:t>상태 · 승인 · 버전 이력을 한 화면에 통합</a:t>
-            </a:r>
-          </a:p>
-        </p:txBody>
-      </p:sp>
-      <p:sp>
-        <p:nvSpPr>
-          <p:cNvPr id="34" name="TextBox 33"/>
-          <p:cNvSpPr txBox="1"/>
-          <p:nvPr/>
-        </p:nvSpPr>
-        <p:spPr>
-          <a:xfrm>
-            <a:off x="6858000" y="5257800"/>
-            <a:ext cx="4389120" cy="731520"/>
-          </a:xfrm>
-          <a:prstGeom prst="rect">
-            <a:avLst/>
-          </a:prstGeom>
-          <a:noFill/>
-        </p:spPr>
-        <p:txBody>
-          <a:bodyPr wrap="none">
-            <a:spAutoFit/>
-          </a:bodyPr>
-          <a:lstStyle/>
-          <a:p>
-            <a:pPr>
-              <a:defRPr sz="1000" b="1">
-                <a:solidFill>
-                  <a:srgbClr val="1E60F2"/>
-                </a:solidFill>
-              </a:defRPr>
-            </a:pPr>
-            <a:r>
-              <a:t>접점 1개 · 1초 자동 정리 · 진행 상황 한눈에</a:t>
-            </a:r>
-            <a:br/>
-            <a:r>
-              <a:t>알고리즘이 누락을 먼저 탐지 ➔ 반려 사이클 사전 차단</a:t>
+              <a:t>✓ 4대 산출물 1초 생성: 신고용 엑셀 · 라벨 문구 · 검토표 · 인쇄용 도안</a:t>
+            </a:r>
+          </a:p>
+          <a:p>
+            <a:pPr>
+              <a:defRPr sz="1050" b="1">
+                <a:solidFill>
+                  <a:srgbClr val="0F172A"/>
+                </a:solidFill>
+              </a:defRPr>
+            </a:pPr>
+            <a:r>
+              <a:t>✓ 5개 파트너 원스톱: 공인시험원 시료 접수 연동 &amp; 제휴 패키지 인쇄 1클릭</a:t>
             </a:r>
           </a:p>
         </p:txBody>
@@ -8043,7 +8096,7 @@
         <p:spPr>
           <a:xfrm>
             <a:off x="731520" y="420624"/>
-            <a:ext cx="10698480" cy="274320"/>
+            <a:ext cx="10698480" cy="256032"/>
           </a:xfrm>
           <a:prstGeom prst="rect">
             <a:avLst/>
@@ -8065,7 +8118,7 @@
               </a:defRPr>
             </a:pPr>
             <a:r>
-              <a:t>04 · PROPRIETARY ENGINE</a:t>
+              <a:t>●  04 · PROPRIETARY ENGINE</a:t>
             </a:r>
           </a:p>
         </p:txBody>
@@ -8078,7 +8131,7 @@
         </p:nvSpPr>
         <p:spPr>
           <a:xfrm>
-            <a:off x="731520" y="713232"/>
+            <a:off x="731520" y="694944"/>
             <a:ext cx="10698480" cy="502920"/>
           </a:xfrm>
           <a:prstGeom prst="rect">
@@ -8137,7 +8190,7 @@
               </a:defRPr>
             </a:pPr>
             <a:r>
-              <a:t>원료 이름만 검색하면 2.1만 공공 DB 매핑부터 부처별 서식 분기 출력까지 1초 만에 처리합니다.</a:t>
+              <a:t>원료 이름만 검색하면 2.1만 공공 DB 매핑부터 부처별 서식 분기 출력까지 1초 만에 연산합니다.</a:t>
             </a:r>
           </a:p>
         </p:txBody>
@@ -8201,9 +8254,9 @@
           <a:lstStyle/>
           <a:p>
             <a:pPr algn="r">
-              <a:defRPr sz="900" b="1">
-                <a:solidFill>
-                  <a:srgbClr val="94A3B8"/>
+              <a:defRPr sz="950" b="1">
+                <a:solidFill>
+                  <a:srgbClr val="64748B"/>
                 </a:solidFill>
                 <a:latin typeface="Pretendard"/>
               </a:defRPr>
@@ -8223,13 +8276,13 @@
         <p:spPr>
           <a:xfrm>
             <a:off x="731520" y="1737360"/>
-            <a:ext cx="5120640" cy="1280160"/>
+            <a:ext cx="5120640" cy="2103120"/>
           </a:xfrm>
           <a:prstGeom prst="roundRect">
             <a:avLst/>
           </a:prstGeom>
           <a:solidFill>
-            <a:srgbClr val="F6F8FC"/>
+            <a:srgbClr val="F8FAFC"/>
           </a:solidFill>
           <a:ln>
             <a:noFill/>
@@ -8259,67 +8312,20 @@
       </p:sp>
       <p:sp>
         <p:nvSpPr>
-          <p:cNvPr id="9" name="TextBox 8"/>
-          <p:cNvSpPr txBox="1"/>
-          <p:nvPr/>
-        </p:nvSpPr>
-        <p:spPr>
-          <a:xfrm>
-            <a:off x="960120" y="1874519"/>
-            <a:ext cx="4663440" cy="1005840"/>
-          </a:xfrm>
-          <a:prstGeom prst="rect">
-            <a:avLst/>
-          </a:prstGeom>
-          <a:noFill/>
-        </p:spPr>
-        <p:txBody>
-          <a:bodyPr wrap="square">
-            <a:spAutoFit/>
-          </a:bodyPr>
-          <a:lstStyle/>
-          <a:p>
-            <a:pPr>
-              <a:defRPr sz="1200" b="1">
-                <a:solidFill>
-                  <a:srgbClr val="0F172A"/>
-                </a:solidFill>
-              </a:defRPr>
-            </a:pPr>
-            <a:r>
-              <a:t>[화이트리스트 DB] 2.1만 공공 DB 자동 매핑</a:t>
-            </a:r>
-          </a:p>
-          <a:p>
-            <a:pPr>
-              <a:defRPr sz="1000">
-                <a:solidFill>
-                  <a:srgbClr val="334155"/>
-                </a:solidFill>
-              </a:defRPr>
-            </a:pPr>
-            <a:r>
-              <a:t>CAS 번호를 몰라도 원료명 검색 즉시 알레르기 25/26종 해당 여부와 법정 배합한도를 1:1 매칭하여 사용자 데이터 입력 장벽을 원천 제거.</a:t>
-            </a:r>
-          </a:p>
-        </p:txBody>
-      </p:sp>
-      <p:sp>
-        <p:nvSpPr>
-          <p:cNvPr id="10" name="Rounded Rectangle 9"/>
+          <p:cNvPr id="9" name="Rounded Rectangle 8"/>
           <p:cNvSpPr/>
           <p:nvPr/>
         </p:nvSpPr>
         <p:spPr>
           <a:xfrm>
-            <a:off x="731520" y="3154680"/>
-            <a:ext cx="5120640" cy="1280160"/>
+            <a:off x="731520" y="1737360"/>
+            <a:ext cx="5120640" cy="457200"/>
           </a:xfrm>
           <a:prstGeom prst="roundRect">
             <a:avLst/>
           </a:prstGeom>
           <a:solidFill>
-            <a:srgbClr val="F6F8FC"/>
+            <a:srgbClr val="1E60F2"/>
           </a:solidFill>
           <a:ln>
             <a:noFill/>
@@ -8349,14 +8355,49 @@
       </p:sp>
       <p:sp>
         <p:nvSpPr>
+          <p:cNvPr id="10" name="TextBox 9"/>
+          <p:cNvSpPr txBox="1"/>
+          <p:nvPr/>
+        </p:nvSpPr>
+        <p:spPr>
+          <a:xfrm>
+            <a:off x="914400" y="1783080"/>
+            <a:ext cx="4754880" cy="365760"/>
+          </a:xfrm>
+          <a:prstGeom prst="rect">
+            <a:avLst/>
+          </a:prstGeom>
+          <a:noFill/>
+        </p:spPr>
+        <p:txBody>
+          <a:bodyPr wrap="none">
+            <a:spAutoFit/>
+          </a:bodyPr>
+          <a:lstStyle/>
+          <a:p>
+            <a:pPr>
+              <a:defRPr sz="1150" b="1">
+                <a:solidFill>
+                  <a:srgbClr val="FFFFFF"/>
+                </a:solidFill>
+              </a:defRPr>
+            </a:pPr>
+            <a:r>
+              <a:t>[1] 화이트리스트 DB 2.1만 건 자동 매핑</a:t>
+            </a:r>
+          </a:p>
+        </p:txBody>
+      </p:sp>
+      <p:sp>
+        <p:nvSpPr>
           <p:cNvPr id="11" name="TextBox 10"/>
           <p:cNvSpPr txBox="1"/>
           <p:nvPr/>
         </p:nvSpPr>
         <p:spPr>
           <a:xfrm>
-            <a:off x="960120" y="3291840"/>
-            <a:ext cx="4663440" cy="1005840"/>
+            <a:off x="914400" y="2286000"/>
+            <a:ext cx="4754880" cy="1371600"/>
           </a:xfrm>
           <a:prstGeom prst="rect">
             <a:avLst/>
@@ -8370,26 +8411,38 @@
           <a:lstStyle/>
           <a:p>
             <a:pPr>
-              <a:defRPr sz="1200" b="1">
-                <a:solidFill>
-                  <a:srgbClr val="0F172A"/>
-                </a:solidFill>
-              </a:defRPr>
-            </a:pPr>
-            <a:r>
-              <a:t>[원스톱 분기] 단일 배합표로 2개 부처 서식 완성</a:t>
-            </a:r>
-          </a:p>
-          <a:p>
-            <a:pPr>
-              <a:defRPr sz="1000">
+              <a:defRPr sz="1100">
                 <a:solidFill>
                   <a:srgbClr val="334155"/>
                 </a:solidFill>
               </a:defRPr>
             </a:pPr>
             <a:r>
-              <a:t>식약처 단상자 라벨 문구(0.001% 초과)와 환경부 CHEMP 100% 화학 배합비율표(.xlsx)를 1초 만에 자동 분기 렌더링.</a:t>
+              <a:t>• 식약처 2.1만 공공 DB 실시간 동기화로 CAS 번호 자동 매칭</a:t>
+            </a:r>
+          </a:p>
+          <a:p>
+            <a:pPr>
+              <a:defRPr sz="1100">
+                <a:solidFill>
+                  <a:srgbClr val="334155"/>
+                </a:solidFill>
+              </a:defRPr>
+            </a:pPr>
+            <a:r>
+              <a:t>• 원료명 검색 즉시 알레르기 25/26종 해당 여부 및 법정 배합한도 1:1 판정</a:t>
+            </a:r>
+          </a:p>
+          <a:p>
+            <a:pPr>
+              <a:defRPr sz="1100" b="1">
+                <a:solidFill>
+                  <a:srgbClr val="1E60F2"/>
+                </a:solidFill>
+              </a:defRPr>
+            </a:pPr>
+            <a:r>
+              <a:t>• 비전문가도 오기재 없이 10초 만에 완벽한 배합비율 검증</a:t>
             </a:r>
           </a:p>
         </p:txBody>
@@ -8402,14 +8455,14 @@
         </p:nvSpPr>
         <p:spPr>
           <a:xfrm>
-            <a:off x="731520" y="4572000"/>
-            <a:ext cx="5120640" cy="1280160"/>
+            <a:off x="731520" y="4023360"/>
+            <a:ext cx="5120640" cy="2103120"/>
           </a:xfrm>
           <a:prstGeom prst="roundRect">
             <a:avLst/>
           </a:prstGeom>
           <a:solidFill>
-            <a:srgbClr val="F6F8FC"/>
+            <a:srgbClr val="F8FAFC"/>
           </a:solidFill>
           <a:ln>
             <a:noFill/>
@@ -8439,67 +8492,20 @@
       </p:sp>
       <p:sp>
         <p:nvSpPr>
-          <p:cNvPr id="13" name="TextBox 12"/>
-          <p:cNvSpPr txBox="1"/>
-          <p:nvPr/>
-        </p:nvSpPr>
-        <p:spPr>
-          <a:xfrm>
-            <a:off x="960120" y="4709160"/>
-            <a:ext cx="4663440" cy="1005840"/>
-          </a:xfrm>
-          <a:prstGeom prst="rect">
-            <a:avLst/>
-          </a:prstGeom>
-          <a:noFill/>
-        </p:spPr>
-        <p:txBody>
-          <a:bodyPr wrap="square">
-            <a:spAutoFit/>
-          </a:bodyPr>
-          <a:lstStyle/>
-          <a:p>
-            <a:pPr>
-              <a:defRPr sz="1200" b="1">
-                <a:solidFill>
-                  <a:srgbClr val="0F172A"/>
-                </a:solidFill>
-              </a:defRPr>
-            </a:pPr>
-            <a:r>
-              <a:t>[실비 절감] 중복 시험비 20~30만 원 절감</a:t>
-            </a:r>
-          </a:p>
-          <a:p>
-            <a:pPr>
-              <a:defRPr sz="1000">
-                <a:solidFill>
-                  <a:srgbClr val="334155"/>
-                </a:solidFill>
-              </a:defRPr>
-            </a:pPr>
-            <a:r>
-              <a:t>정부 고시 면제 요건을 자동 계산하여 불필요한 시험원 재검사를 방지하고, 검증 완료 도안을 인쇄소로 다이렉트 전송.</a:t>
-            </a:r>
-          </a:p>
-        </p:txBody>
-      </p:sp>
-      <p:sp>
-        <p:nvSpPr>
-          <p:cNvPr id="14" name="Rounded Rectangle 13"/>
+          <p:cNvPr id="13" name="Rounded Rectangle 12"/>
           <p:cNvSpPr/>
           <p:nvPr/>
         </p:nvSpPr>
         <p:spPr>
           <a:xfrm>
-            <a:off x="6217920" y="1737360"/>
-            <a:ext cx="5212080" cy="4389120"/>
+            <a:off x="731520" y="4023360"/>
+            <a:ext cx="5120640" cy="457200"/>
           </a:xfrm>
           <a:prstGeom prst="roundRect">
             <a:avLst/>
           </a:prstGeom>
           <a:solidFill>
-            <a:srgbClr val="F6F8FC"/>
+            <a:srgbClr val="1E60F2"/>
           </a:solidFill>
           <a:ln>
             <a:noFill/>
@@ -8529,20 +8535,114 @@
       </p:sp>
       <p:sp>
         <p:nvSpPr>
-          <p:cNvPr id="15" name="Rounded Rectangle 14"/>
+          <p:cNvPr id="14" name="TextBox 13"/>
+          <p:cNvSpPr txBox="1"/>
+          <p:nvPr/>
+        </p:nvSpPr>
+        <p:spPr>
+          <a:xfrm>
+            <a:off x="914400" y="4069080"/>
+            <a:ext cx="4754880" cy="365760"/>
+          </a:xfrm>
+          <a:prstGeom prst="rect">
+            <a:avLst/>
+          </a:prstGeom>
+          <a:noFill/>
+        </p:spPr>
+        <p:txBody>
+          <a:bodyPr wrap="none">
+            <a:spAutoFit/>
+          </a:bodyPr>
+          <a:lstStyle/>
+          <a:p>
+            <a:pPr>
+              <a:defRPr sz="1150" b="1">
+                <a:solidFill>
+                  <a:srgbClr val="FFFFFF"/>
+                </a:solidFill>
+              </a:defRPr>
+            </a:pPr>
+            <a:r>
+              <a:t>[2] 단일 배합표로 2개 부처 서식 1초 분기</a:t>
+            </a:r>
+          </a:p>
+        </p:txBody>
+      </p:sp>
+      <p:sp>
+        <p:nvSpPr>
+          <p:cNvPr id="15" name="TextBox 14"/>
+          <p:cNvSpPr txBox="1"/>
+          <p:nvPr/>
+        </p:nvSpPr>
+        <p:spPr>
+          <a:xfrm>
+            <a:off x="914400" y="4572000"/>
+            <a:ext cx="4754880" cy="1371600"/>
+          </a:xfrm>
+          <a:prstGeom prst="rect">
+            <a:avLst/>
+          </a:prstGeom>
+          <a:noFill/>
+        </p:spPr>
+        <p:txBody>
+          <a:bodyPr wrap="square">
+            <a:spAutoFit/>
+          </a:bodyPr>
+          <a:lstStyle/>
+          <a:p>
+            <a:pPr>
+              <a:defRPr sz="1100">
+                <a:solidFill>
+                  <a:srgbClr val="334155"/>
+                </a:solidFill>
+              </a:defRPr>
+            </a:pPr>
+            <a:r>
+              <a:t>• [식약처] 단상자 필수 기재 라벨 문구 (0.001% 초과 성분 자동 추출)</a:t>
+            </a:r>
+          </a:p>
+          <a:p>
+            <a:pPr>
+              <a:defRPr sz="1100">
+                <a:solidFill>
+                  <a:srgbClr val="334155"/>
+                </a:solidFill>
+              </a:defRPr>
+            </a:pPr>
+            <a:r>
+              <a:t>• [환경부] CHEMP 안전확인대상 100% 화학 배합비율표 (.xlsx) 렌더링</a:t>
+            </a:r>
+          </a:p>
+          <a:p>
+            <a:pPr>
+              <a:defRPr sz="1100" b="1">
+                <a:solidFill>
+                  <a:srgbClr val="10B981"/>
+                </a:solidFill>
+              </a:defRPr>
+            </a:pPr>
+            <a:r>
+              <a:t>• 면제 기준 자동 판정으로 불필요한 시험비 20~30만 원 즉시 절감</a:t>
+            </a:r>
+          </a:p>
+        </p:txBody>
+      </p:sp>
+      <p:sp>
+        <p:nvSpPr>
+          <p:cNvPr id="16" name="Rounded Rectangle 15"/>
           <p:cNvSpPr/>
           <p:nvPr/>
         </p:nvSpPr>
         <p:spPr>
           <a:xfrm>
             <a:off x="6217920" y="1737360"/>
-            <a:ext cx="5212080" cy="502920"/>
+            <a:ext cx="5212080" cy="4389120"/>
           </a:xfrm>
           <a:prstGeom prst="roundRect">
             <a:avLst/>
           </a:prstGeom>
           <a:solidFill>
-            <a:srgbClr val="EEF4FF"/>
+            <a:srgbClr val="0F172A"/>
           </a:solidFill>
           <a:ln>
             <a:noFill/>
@@ -8572,55 +8672,20 @@
       </p:sp>
       <p:sp>
         <p:nvSpPr>
-          <p:cNvPr id="16" name="TextBox 15"/>
-          <p:cNvSpPr txBox="1"/>
-          <p:nvPr/>
-        </p:nvSpPr>
-        <p:spPr>
-          <a:xfrm>
-            <a:off x="6492240" y="1828800"/>
-            <a:ext cx="4572000" cy="320040"/>
-          </a:xfrm>
-          <a:prstGeom prst="rect">
-            <a:avLst/>
-          </a:prstGeom>
-          <a:noFill/>
-        </p:spPr>
-        <p:txBody>
-          <a:bodyPr wrap="none">
-            <a:spAutoFit/>
-          </a:bodyPr>
-          <a:lstStyle/>
-          <a:p>
-            <a:pPr>
-              <a:defRPr sz="1000" b="1">
-                <a:solidFill>
-                  <a:srgbClr val="1E60F2"/>
-                </a:solidFill>
-              </a:defRPr>
-            </a:pPr>
-            <a:r>
-              <a:t>FORMU REGULATION ENGINE · REAL-TIME AUDIT (PASS)</a:t>
-            </a:r>
-          </a:p>
-        </p:txBody>
-      </p:sp>
-      <p:sp>
-        <p:nvSpPr>
           <p:cNvPr id="17" name="Rounded Rectangle 16"/>
           <p:cNvSpPr/>
           <p:nvPr/>
         </p:nvSpPr>
         <p:spPr>
           <a:xfrm>
-            <a:off x="6492240" y="2423160"/>
-            <a:ext cx="4663440" cy="1417320"/>
+            <a:off x="6217920" y="1737360"/>
+            <a:ext cx="5212080" cy="457200"/>
           </a:xfrm>
           <a:prstGeom prst="roundRect">
             <a:avLst/>
           </a:prstGeom>
           <a:solidFill>
-            <a:srgbClr val="FFFFFF"/>
+            <a:srgbClr val="1E293B"/>
           </a:solidFill>
           <a:ln>
             <a:noFill/>
@@ -8656,8 +8721,8 @@
         </p:nvSpPr>
         <p:spPr>
           <a:xfrm>
-            <a:off x="6629400" y="2514600"/>
-            <a:ext cx="4389120" cy="1234440"/>
+            <a:off x="6492240" y="1783080"/>
+            <a:ext cx="4663440" cy="365760"/>
           </a:xfrm>
           <a:prstGeom prst="rect">
             <a:avLst/>
@@ -8671,96 +8736,28 @@
           <a:lstStyle/>
           <a:p>
             <a:pPr>
-              <a:defRPr sz="950" b="1">
-                <a:solidFill>
-                  <a:srgbClr val="64748B"/>
-                </a:solidFill>
-              </a:defRPr>
-            </a:pPr>
-            <a:r>
-              <a:t>INPUT FORMULA DATA</a:t>
-            </a:r>
-          </a:p>
-          <a:p>
-            <a:pPr>
-              <a:defRPr sz="950">
-                <a:solidFill>
-                  <a:srgbClr val="334155"/>
-                </a:solidFill>
-                <a:latin typeface="Consolas"/>
-              </a:defRPr>
-            </a:pPr>
-            <a:r>
-              <a:t>• 라벤더 오일 (CAS 8000-28-0): 12.50%</a:t>
-            </a:r>
-            <a:br/>
-            <a:r>
-              <a:t>• 리날룰 (Linalool, CAS 78-70-6): 2.40%</a:t>
-            </a:r>
-            <a:br/>
-            <a:r>
-              <a:t>• 리모넨 (Limonene, CAS 5989-27-5): 0.80%</a:t>
-            </a:r>
-            <a:br/>
-            <a:r>
-              <a:t>• 발효주정 에탄올 (CAS 64-17-5): 84.30%</a:t>
-            </a:r>
-          </a:p>
-        </p:txBody>
-      </p:sp>
-      <p:sp>
-        <p:nvSpPr>
-          <p:cNvPr id="19" name="Rounded Rectangle 18"/>
-          <p:cNvSpPr/>
-          <p:nvPr/>
-        </p:nvSpPr>
-        <p:spPr>
-          <a:xfrm>
-            <a:off x="6492240" y="4023360"/>
-            <a:ext cx="4663440" cy="914400"/>
-          </a:xfrm>
-          <a:prstGeom prst="roundRect">
-            <a:avLst/>
-          </a:prstGeom>
-          <a:solidFill>
-            <a:srgbClr val="EEF4FF"/>
-          </a:solidFill>
-          <a:ln>
-            <a:noFill/>
-          </a:ln>
-        </p:spPr>
-        <p:style>
-          <a:lnRef idx="1">
-            <a:schemeClr val="accent1"/>
-          </a:lnRef>
-          <a:fillRef idx="3">
-            <a:schemeClr val="accent1"/>
-          </a:fillRef>
-          <a:effectRef idx="2">
-            <a:schemeClr val="accent1"/>
-          </a:effectRef>
-          <a:fontRef idx="minor">
-            <a:schemeClr val="lt1"/>
-          </a:fontRef>
-        </p:style>
-        <p:txBody>
-          <a:bodyPr rtlCol="0" anchor="ctr"/>
-          <a:lstStyle/>
-          <a:p>
-            <a:pPr algn="ctr"/>
-          </a:p>
-        </p:txBody>
-      </p:sp>
-      <p:sp>
-        <p:nvSpPr>
-          <p:cNvPr id="20" name="TextBox 19"/>
+              <a:defRPr sz="1000" b="1">
+                <a:solidFill>
+                  <a:srgbClr val="10B981"/>
+                </a:solidFill>
+              </a:defRPr>
+            </a:pPr>
+            <a:r>
+              <a:t>FORMU_REGULATION_ENGINE · REAL-TIME AUDIT: PASS</a:t>
+            </a:r>
+          </a:p>
+        </p:txBody>
+      </p:sp>
+      <p:sp>
+        <p:nvSpPr>
+          <p:cNvPr id="19" name="TextBox 18"/>
           <p:cNvSpPr txBox="1"/>
           <p:nvPr/>
         </p:nvSpPr>
         <p:spPr>
           <a:xfrm>
-            <a:off x="6629400" y="4114800"/>
-            <a:ext cx="4389120" cy="731520"/>
+            <a:off x="6492240" y="2331720"/>
+            <a:ext cx="4663440" cy="3566160"/>
           </a:xfrm>
           <a:prstGeom prst="rect">
             <a:avLst/>
@@ -8768,122 +8765,79 @@
           <a:noFill/>
         </p:spPr>
         <p:txBody>
-          <a:bodyPr wrap="none">
+          <a:bodyPr wrap="square">
             <a:spAutoFit/>
           </a:bodyPr>
           <a:lstStyle/>
           <a:p>
             <a:pPr>
+              <a:defRPr sz="950" b="1">
+                <a:solidFill>
+                  <a:srgbClr val="94A3B8"/>
+                </a:solidFill>
+              </a:defRPr>
+            </a:pPr>
+            <a:r>
+              <a:t>[INPUT FORMULA DATA]</a:t>
+            </a:r>
+          </a:p>
+          <a:p>
+            <a:pPr>
+              <a:defRPr sz="1000">
+                <a:solidFill>
+                  <a:srgbClr val="FFFFFF"/>
+                </a:solidFill>
+                <a:latin typeface="Consolas"/>
+              </a:defRPr>
+            </a:pPr>
+            <a:r>
+              <a:t>• 라벤더 오일 (CAS 8000-28-0): 12.50%</a:t>
+            </a:r>
+            <a:br/>
+            <a:r>
+              <a:t>• 리날룰 (Linalool, CAS 78-70-6): 2.40%</a:t>
+            </a:r>
+            <a:br/>
+            <a:r>
+              <a:t>• 리모넨 (Limonene, CAS 5989-27-5): 0.80%</a:t>
+            </a:r>
+            <a:br/>
+            <a:r>
+              <a:t>• 발효주정 에탄올 (CAS 64-17-5): 84.30%</a:t>
+            </a:r>
+          </a:p>
+          <a:p>
+            <a:br/>
+            <a:pPr>
               <a:defRPr sz="1050" b="1">
                 <a:solidFill>
-                  <a:srgbClr val="1E60F2"/>
-                </a:solidFill>
-              </a:defRPr>
-            </a:pPr>
-            <a:r>
-              <a:t>식약처 알레르기 25/26종 판정 결과</a:t>
-            </a:r>
-          </a:p>
-          <a:p>
-            <a:pPr>
-              <a:defRPr sz="950">
-                <a:solidFill>
-                  <a:srgbClr val="D92D20"/>
-                </a:solidFill>
-              </a:defRPr>
-            </a:pPr>
-            <a:r>
-              <a:t>➔ 리날룰 2.40%, 리모넨 0.80% (0.001% 초과 검출 ➔ 라벨 표기 필수 추출)</a:t>
-            </a:r>
-          </a:p>
-        </p:txBody>
-      </p:sp>
-      <p:sp>
-        <p:nvSpPr>
-          <p:cNvPr id="21" name="Rounded Rectangle 20"/>
-          <p:cNvSpPr/>
-          <p:nvPr/>
-        </p:nvSpPr>
-        <p:spPr>
-          <a:xfrm>
-            <a:off x="6492240" y="5074920"/>
-            <a:ext cx="4663440" cy="868680"/>
-          </a:xfrm>
-          <a:prstGeom prst="roundRect">
-            <a:avLst/>
-          </a:prstGeom>
-          <a:solidFill>
-            <a:srgbClr val="FFFFFF"/>
-          </a:solidFill>
-          <a:ln>
-            <a:noFill/>
-          </a:ln>
-        </p:spPr>
-        <p:style>
-          <a:lnRef idx="1">
-            <a:schemeClr val="accent1"/>
-          </a:lnRef>
-          <a:fillRef idx="3">
-            <a:schemeClr val="accent1"/>
-          </a:fillRef>
-          <a:effectRef idx="2">
-            <a:schemeClr val="accent1"/>
-          </a:effectRef>
-          <a:fontRef idx="minor">
-            <a:schemeClr val="lt1"/>
-          </a:fontRef>
-        </p:style>
-        <p:txBody>
-          <a:bodyPr rtlCol="0" anchor="ctr"/>
-          <a:lstStyle/>
-          <a:p>
-            <a:pPr algn="ctr"/>
-          </a:p>
-        </p:txBody>
-      </p:sp>
-      <p:sp>
-        <p:nvSpPr>
-          <p:cNvPr id="22" name="TextBox 21"/>
-          <p:cNvSpPr txBox="1"/>
-          <p:nvPr/>
-        </p:nvSpPr>
-        <p:spPr>
-          <a:xfrm>
-            <a:off x="6629400" y="5166360"/>
-            <a:ext cx="4389120" cy="685800"/>
-          </a:xfrm>
-          <a:prstGeom prst="rect">
-            <a:avLst/>
-          </a:prstGeom>
-          <a:noFill/>
-        </p:spPr>
-        <p:txBody>
-          <a:bodyPr wrap="none">
-            <a:spAutoFit/>
-          </a:bodyPr>
-          <a:lstStyle/>
-          <a:p>
+                  <a:srgbClr val="60A5FA"/>
+                </a:solidFill>
+              </a:defRPr>
+            </a:pPr>
+            <a:r>
+              <a:t>[식약처 알레르기 25/26종 판정 결과]</a:t>
+            </a:r>
+            <a:br/>
+            <a:r>
+              <a:t>➔ 리날룰 2.40%, 리모넨 0.80% (0.001% 초과 검출 ➔ 라벨 표기 의무 추출)</a:t>
+            </a:r>
+          </a:p>
+          <a:p>
+            <a:br/>
             <a:pPr>
               <a:defRPr sz="1050" b="1">
                 <a:solidFill>
-                  <a:srgbClr val="0F172A"/>
-                </a:solidFill>
-              </a:defRPr>
-            </a:pPr>
-            <a:r>
-              <a:t>환경부 CHEMP 안전기준 배합비율표 (.xlsx)</a:t>
-            </a:r>
-          </a:p>
-          <a:p>
-            <a:pPr>
-              <a:defRPr sz="950">
-                <a:solidFill>
-                  <a:srgbClr val="039855"/>
-                </a:solidFill>
-              </a:defRPr>
-            </a:pPr>
-            <a:r>
-              <a:t>➔ CAS 번호 기준 100% 비율 정합성 검증 완료 · 서식 1초 엑셀 다운로드</a:t>
+                  <a:srgbClr val="34D399"/>
+                </a:solidFill>
+              </a:defRPr>
+            </a:pPr>
+            <a:r>
+              <a:t>[환경부 CHEMP 안전기준 배합비율표 (.xlsx)]</a:t>
+            </a:r>
+            <a:br/>
+            <a:r>
+              <a:t>➔ 100% 비율 정합성 검증 완료 · CHEMP 업로드 표준 서식 즉시 다운로드</a:t>
             </a:r>
           </a:p>
         </p:txBody>
@@ -8958,7 +8912,7 @@
         <p:spPr>
           <a:xfrm>
             <a:off x="731520" y="420624"/>
-            <a:ext cx="10698480" cy="274320"/>
+            <a:ext cx="10698480" cy="256032"/>
           </a:xfrm>
           <a:prstGeom prst="rect">
             <a:avLst/>
@@ -8980,7 +8934,7 @@
               </a:defRPr>
             </a:pPr>
             <a:r>
-              <a:t>05 · MARKET OPPORTUNITY</a:t>
+              <a:t>●  05 · MARKET OPPORTUNITY</a:t>
             </a:r>
           </a:p>
         </p:txBody>
@@ -8993,7 +8947,7 @@
         </p:nvSpPr>
         <p:spPr>
           <a:xfrm>
-            <a:off x="731520" y="713232"/>
+            <a:off x="731520" y="694944"/>
             <a:ext cx="10698480" cy="502920"/>
           </a:xfrm>
           <a:prstGeom prst="rect">
@@ -9016,7 +8970,7 @@
               </a:defRPr>
             </a:pPr>
             <a:r>
-              <a:t>연 5.8조 원 K-화장품·향기 시장과 4,000개 인디 브랜드</a:t>
+              <a:t>연 5.8조 원 K-뷰티·향기 시장과 4,000개 인디 브랜드</a:t>
             </a:r>
           </a:p>
         </p:txBody>
@@ -9052,7 +9006,7 @@
               </a:defRPr>
             </a:pPr>
             <a:r>
-              <a:t>제조 OEM/ODM 대중화로 1인 브랜드 진입은 늘었으나, 규제 행정 장벽은 심화되었습니다.</a:t>
+              <a:t>제조 OEM/ODM 대중화로 1인 브랜드 진입은 폭증했으나, 규제 행정 장벽이 병목을 낳고 있습니다.</a:t>
             </a:r>
           </a:p>
         </p:txBody>
@@ -9088,7 +9042,7 @@
               </a:defRPr>
             </a:pPr>
             <a:r>
-              <a:t>※ 출처: 식약처 2024 화장품 생산통계 &amp; 환경부 생활화학제품 신고 현황 분석</a:t>
+              <a:t>※ 출처: 식약처 화장품 생산통계 &amp; 중기부 1인 창조기업 실태조사</a:t>
             </a:r>
           </a:p>
         </p:txBody>
@@ -9116,9 +9070,9 @@
           <a:lstStyle/>
           <a:p>
             <a:pPr algn="r">
-              <a:defRPr sz="900" b="1">
-                <a:solidFill>
-                  <a:srgbClr val="94A3B8"/>
+              <a:defRPr sz="950" b="1">
+                <a:solidFill>
+                  <a:srgbClr val="64748B"/>
                 </a:solidFill>
                 <a:latin typeface="Pretendard"/>
               </a:defRPr>
@@ -9138,13 +9092,13 @@
         <p:spPr>
           <a:xfrm>
             <a:off x="731520" y="1737360"/>
-            <a:ext cx="5120640" cy="4389120"/>
+            <a:ext cx="5669280" cy="4389120"/>
           </a:xfrm>
           <a:prstGeom prst="roundRect">
             <a:avLst/>
           </a:prstGeom>
           <a:solidFill>
-            <a:srgbClr val="F6F8FC"/>
+            <a:srgbClr val="F8FAFC"/>
           </a:solidFill>
           <a:ln>
             <a:noFill/>
@@ -9174,70 +9128,25 @@
       </p:sp>
       <p:sp>
         <p:nvSpPr>
-          <p:cNvPr id="9" name="TextBox 8"/>
-          <p:cNvSpPr txBox="1"/>
-          <p:nvPr/>
-        </p:nvSpPr>
-        <p:spPr>
-          <a:xfrm>
-            <a:off x="1097280" y="3017520"/>
-            <a:ext cx="4389120" cy="1371600"/>
-          </a:xfrm>
-          <a:prstGeom prst="rect">
-            <a:avLst/>
-          </a:prstGeom>
-          <a:noFill/>
-        </p:spPr>
-        <p:txBody>
-          <a:bodyPr wrap="none">
-            <a:spAutoFit/>
-          </a:bodyPr>
-          <a:lstStyle/>
-          <a:p>
-            <a:pPr algn="ctr">
-              <a:defRPr sz="4000" b="1">
-                <a:solidFill>
-                  <a:srgbClr val="1E60F2"/>
-                </a:solidFill>
-              </a:defRPr>
-            </a:pPr>
-            <a:r>
-              <a:t>5.8조 원</a:t>
-            </a:r>
-          </a:p>
-          <a:p>
-            <a:pPr algn="ctr">
-              <a:defRPr sz="1100">
-                <a:solidFill>
-                  <a:srgbClr val="64748B"/>
-                </a:solidFill>
-              </a:defRPr>
-            </a:pPr>
-            <a:r>
-              <a:t>TAM (국내 화장품·생활화학제품 총 시장)</a:t>
-            </a:r>
-          </a:p>
-        </p:txBody>
-      </p:sp>
-      <p:sp>
-        <p:nvSpPr>
-          <p:cNvPr id="10" name="Rounded Rectangle 9"/>
+          <p:cNvPr id="9" name="Oval 8"/>
           <p:cNvSpPr/>
           <p:nvPr/>
         </p:nvSpPr>
         <p:spPr>
           <a:xfrm>
-            <a:off x="6217920" y="1737360"/>
-            <a:ext cx="5212080" cy="1280160"/>
-          </a:xfrm>
-          <a:prstGeom prst="roundRect">
+            <a:off x="2194560" y="2468880"/>
+            <a:ext cx="2743200" cy="2743200"/>
+          </a:xfrm>
+          <a:prstGeom prst="ellipse">
             <a:avLst/>
           </a:prstGeom>
           <a:solidFill>
-            <a:srgbClr val="F6F8FC"/>
+            <a:srgbClr val="FFFFFF"/>
           </a:solidFill>
-          <a:ln>
-            <a:noFill/>
+          <a:ln w="228600">
+            <a:solidFill>
+              <a:srgbClr val="1E60F2"/>
+            </a:solidFill>
           </a:ln>
         </p:spPr>
         <p:style>
@@ -9264,14 +9173,14 @@
       </p:sp>
       <p:sp>
         <p:nvSpPr>
-          <p:cNvPr id="11" name="TextBox 10"/>
+          <p:cNvPr id="10" name="TextBox 9"/>
           <p:cNvSpPr txBox="1"/>
           <p:nvPr/>
         </p:nvSpPr>
         <p:spPr>
           <a:xfrm>
-            <a:off x="6492240" y="1901952"/>
-            <a:ext cx="4663440" cy="960120"/>
+            <a:off x="2286000" y="3200400"/>
+            <a:ext cx="2560320" cy="1280160"/>
           </a:xfrm>
           <a:prstGeom prst="rect">
             <a:avLst/>
@@ -9279,52 +9188,52 @@
           <a:noFill/>
         </p:spPr>
         <p:txBody>
-          <a:bodyPr wrap="none">
+          <a:bodyPr wrap="square">
             <a:spAutoFit/>
           </a:bodyPr>
           <a:lstStyle/>
           <a:p>
-            <a:pPr>
-              <a:defRPr sz="1400" b="1">
-                <a:solidFill>
-                  <a:srgbClr val="0F172A"/>
-                </a:solidFill>
-              </a:defRPr>
-            </a:pPr>
-            <a:r>
-              <a:t>TAM · 전체 시장  ➔  5.8조 원</a:t>
-            </a:r>
-          </a:p>
-          <a:p>
-            <a:pPr>
+            <a:pPr algn="ctr">
+              <a:defRPr sz="3200" b="1">
+                <a:solidFill>
+                  <a:srgbClr val="0B132B"/>
+                </a:solidFill>
+              </a:defRPr>
+            </a:pPr>
+            <a:r>
+              <a:t>5.8조 원</a:t>
+            </a:r>
+          </a:p>
+          <a:p>
+            <a:pPr algn="ctr">
               <a:defRPr sz="1050">
                 <a:solidFill>
-                  <a:srgbClr val="334155"/>
-                </a:solidFill>
-              </a:defRPr>
-            </a:pPr>
-            <a:r>
-              <a:t>국내 화장품 및 안전확인대상 생활화학제품 총 시장 규모</a:t>
-            </a:r>
-          </a:p>
-        </p:txBody>
-      </p:sp>
-      <p:sp>
-        <p:nvSpPr>
-          <p:cNvPr id="12" name="Rounded Rectangle 11"/>
+                  <a:srgbClr val="64748B"/>
+                </a:solidFill>
+              </a:defRPr>
+            </a:pPr>
+            <a:r>
+              <a:t>총 시장 규모 (TAM)</a:t>
+            </a:r>
+          </a:p>
+        </p:txBody>
+      </p:sp>
+      <p:sp>
+        <p:nvSpPr>
+          <p:cNvPr id="11" name="Rounded Rectangle 10"/>
           <p:cNvSpPr/>
           <p:nvPr/>
         </p:nvSpPr>
         <p:spPr>
           <a:xfrm>
-            <a:off x="6217920" y="3154680"/>
-            <a:ext cx="5212080" cy="1280160"/>
+            <a:off x="914400" y="1874519"/>
+            <a:ext cx="1828800" cy="685800"/>
           </a:xfrm>
           <a:prstGeom prst="roundRect">
             <a:avLst/>
           </a:prstGeom>
           <a:solidFill>
-            <a:srgbClr val="F6F8FC"/>
+            <a:srgbClr val="FFFFFF"/>
           </a:solidFill>
           <a:ln>
             <a:noFill/>
@@ -9354,14 +9263,14 @@
       </p:sp>
       <p:sp>
         <p:nvSpPr>
-          <p:cNvPr id="13" name="TextBox 12"/>
+          <p:cNvPr id="12" name="TextBox 11"/>
           <p:cNvSpPr txBox="1"/>
           <p:nvPr/>
         </p:nvSpPr>
         <p:spPr>
           <a:xfrm>
-            <a:off x="6492240" y="3319272"/>
-            <a:ext cx="4663440" cy="960120"/>
+            <a:off x="914400" y="1920240"/>
+            <a:ext cx="1828800" cy="594360"/>
           </a:xfrm>
           <a:prstGeom prst="rect">
             <a:avLst/>
@@ -9375,46 +9284,46 @@
           <a:lstStyle/>
           <a:p>
             <a:pPr>
+              <a:defRPr sz="950">
+                <a:solidFill>
+                  <a:srgbClr val="64748B"/>
+                </a:solidFill>
+              </a:defRPr>
+            </a:pPr>
+            <a:r>
+              <a:t>TAM 전체 시장</a:t>
+            </a:r>
+          </a:p>
+          <a:p>
+            <a:pPr>
               <a:defRPr sz="1400" b="1">
                 <a:solidFill>
-                  <a:srgbClr val="1E60F2"/>
-                </a:solidFill>
-              </a:defRPr>
-            </a:pPr>
-            <a:r>
-              <a:t>SAM · 유효 시장  ➔  1,200억 원</a:t>
-            </a:r>
-          </a:p>
-          <a:p>
-            <a:pPr>
-              <a:defRPr sz="1050">
-                <a:solidFill>
-                  <a:srgbClr val="334155"/>
-                </a:solidFill>
-              </a:defRPr>
-            </a:pPr>
-            <a:r>
-              <a:t>소규모 화장품·향기 브랜드 연간 인허가/규제 행정 지출 시장</a:t>
-            </a:r>
-          </a:p>
-        </p:txBody>
-      </p:sp>
-      <p:sp>
-        <p:nvSpPr>
-          <p:cNvPr id="14" name="Rounded Rectangle 13"/>
+                  <a:srgbClr val="0F172A"/>
+                </a:solidFill>
+              </a:defRPr>
+            </a:pPr>
+            <a:r>
+              <a:t>5.8조 원</a:t>
+            </a:r>
+          </a:p>
+        </p:txBody>
+      </p:sp>
+      <p:sp>
+        <p:nvSpPr>
+          <p:cNvPr id="13" name="Rounded Rectangle 12"/>
           <p:cNvSpPr/>
           <p:nvPr/>
         </p:nvSpPr>
         <p:spPr>
           <a:xfrm>
-            <a:off x="6217920" y="4572000"/>
-            <a:ext cx="5212080" cy="1280160"/>
+            <a:off x="4389120" y="1874519"/>
+            <a:ext cx="1828800" cy="685800"/>
           </a:xfrm>
           <a:prstGeom prst="roundRect">
             <a:avLst/>
           </a:prstGeom>
           <a:solidFill>
-            <a:srgbClr val="F6F8FC"/>
+            <a:srgbClr val="FFFFFF"/>
           </a:solidFill>
           <a:ln>
             <a:noFill/>
@@ -9444,14 +9353,14 @@
       </p:sp>
       <p:sp>
         <p:nvSpPr>
-          <p:cNvPr id="15" name="TextBox 14"/>
+          <p:cNvPr id="14" name="TextBox 13"/>
           <p:cNvSpPr txBox="1"/>
           <p:nvPr/>
         </p:nvSpPr>
         <p:spPr>
           <a:xfrm>
-            <a:off x="6492240" y="4736592"/>
-            <a:ext cx="4663440" cy="960120"/>
+            <a:off x="4389120" y="1920240"/>
+            <a:ext cx="1828800" cy="594360"/>
           </a:xfrm>
           <a:prstGeom prst="rect">
             <a:avLst/>
@@ -9465,14 +9374,299 @@
           <a:lstStyle/>
           <a:p>
             <a:pPr>
+              <a:defRPr sz="950">
+                <a:solidFill>
+                  <a:srgbClr val="64748B"/>
+                </a:solidFill>
+              </a:defRPr>
+            </a:pPr>
+            <a:r>
+              <a:t>SAM 유효 시장</a:t>
+            </a:r>
+          </a:p>
+          <a:p>
+            <a:pPr>
               <a:defRPr sz="1400" b="1">
                 <a:solidFill>
-                  <a:srgbClr val="039855"/>
-                </a:solidFill>
-              </a:defRPr>
-            </a:pPr>
-            <a:r>
-              <a:t>SOM · 초기 타깃  ➔  48억 원</a:t>
+                  <a:srgbClr val="1E60F2"/>
+                </a:solidFill>
+              </a:defRPr>
+            </a:pPr>
+            <a:r>
+              <a:t>1,200억 원</a:t>
+            </a:r>
+          </a:p>
+        </p:txBody>
+      </p:sp>
+      <p:sp>
+        <p:nvSpPr>
+          <p:cNvPr id="15" name="Rounded Rectangle 14"/>
+          <p:cNvSpPr/>
+          <p:nvPr/>
+        </p:nvSpPr>
+        <p:spPr>
+          <a:xfrm>
+            <a:off x="914400" y="5257800"/>
+            <a:ext cx="1828800" cy="685800"/>
+          </a:xfrm>
+          <a:prstGeom prst="roundRect">
+            <a:avLst/>
+          </a:prstGeom>
+          <a:solidFill>
+            <a:srgbClr val="FFFFFF"/>
+          </a:solidFill>
+          <a:ln>
+            <a:noFill/>
+          </a:ln>
+        </p:spPr>
+        <p:style>
+          <a:lnRef idx="1">
+            <a:schemeClr val="accent1"/>
+          </a:lnRef>
+          <a:fillRef idx="3">
+            <a:schemeClr val="accent1"/>
+          </a:fillRef>
+          <a:effectRef idx="2">
+            <a:schemeClr val="accent1"/>
+          </a:effectRef>
+          <a:fontRef idx="minor">
+            <a:schemeClr val="lt1"/>
+          </a:fontRef>
+        </p:style>
+        <p:txBody>
+          <a:bodyPr rtlCol="0" anchor="ctr"/>
+          <a:lstStyle/>
+          <a:p>
+            <a:pPr algn="ctr"/>
+          </a:p>
+        </p:txBody>
+      </p:sp>
+      <p:sp>
+        <p:nvSpPr>
+          <p:cNvPr id="16" name="TextBox 15"/>
+          <p:cNvSpPr txBox="1"/>
+          <p:nvPr/>
+        </p:nvSpPr>
+        <p:spPr>
+          <a:xfrm>
+            <a:off x="914400" y="5303520"/>
+            <a:ext cx="1828800" cy="594360"/>
+          </a:xfrm>
+          <a:prstGeom prst="rect">
+            <a:avLst/>
+          </a:prstGeom>
+          <a:noFill/>
+        </p:spPr>
+        <p:txBody>
+          <a:bodyPr wrap="none">
+            <a:spAutoFit/>
+          </a:bodyPr>
+          <a:lstStyle/>
+          <a:p>
+            <a:pPr>
+              <a:defRPr sz="950">
+                <a:solidFill>
+                  <a:srgbClr val="64748B"/>
+                </a:solidFill>
+              </a:defRPr>
+            </a:pPr>
+            <a:r>
+              <a:t>국내 브랜드 수</a:t>
+            </a:r>
+          </a:p>
+          <a:p>
+            <a:pPr>
+              <a:defRPr sz="1400" b="1">
+                <a:solidFill>
+                  <a:srgbClr val="0F172A"/>
+                </a:solidFill>
+              </a:defRPr>
+            </a:pPr>
+            <a:r>
+              <a:t>30,000+ 곳</a:t>
+            </a:r>
+          </a:p>
+        </p:txBody>
+      </p:sp>
+      <p:sp>
+        <p:nvSpPr>
+          <p:cNvPr id="17" name="Rounded Rectangle 16"/>
+          <p:cNvSpPr/>
+          <p:nvPr/>
+        </p:nvSpPr>
+        <p:spPr>
+          <a:xfrm>
+            <a:off x="4389120" y="5257800"/>
+            <a:ext cx="1828800" cy="685800"/>
+          </a:xfrm>
+          <a:prstGeom prst="roundRect">
+            <a:avLst/>
+          </a:prstGeom>
+          <a:solidFill>
+            <a:srgbClr val="EEF4FF"/>
+          </a:solidFill>
+          <a:ln w="19050">
+            <a:solidFill>
+              <a:srgbClr val="1E60F2"/>
+            </a:solidFill>
+          </a:ln>
+        </p:spPr>
+        <p:style>
+          <a:lnRef idx="1">
+            <a:schemeClr val="accent1"/>
+          </a:lnRef>
+          <a:fillRef idx="3">
+            <a:schemeClr val="accent1"/>
+          </a:fillRef>
+          <a:effectRef idx="2">
+            <a:schemeClr val="accent1"/>
+          </a:effectRef>
+          <a:fontRef idx="minor">
+            <a:schemeClr val="lt1"/>
+          </a:fontRef>
+        </p:style>
+        <p:txBody>
+          <a:bodyPr rtlCol="0" anchor="ctr"/>
+          <a:lstStyle/>
+          <a:p>
+            <a:pPr algn="ctr"/>
+          </a:p>
+        </p:txBody>
+      </p:sp>
+      <p:sp>
+        <p:nvSpPr>
+          <p:cNvPr id="18" name="TextBox 17"/>
+          <p:cNvSpPr txBox="1"/>
+          <p:nvPr/>
+        </p:nvSpPr>
+        <p:spPr>
+          <a:xfrm>
+            <a:off x="4389120" y="5303520"/>
+            <a:ext cx="1828800" cy="594360"/>
+          </a:xfrm>
+          <a:prstGeom prst="rect">
+            <a:avLst/>
+          </a:prstGeom>
+          <a:noFill/>
+        </p:spPr>
+        <p:txBody>
+          <a:bodyPr wrap="none">
+            <a:spAutoFit/>
+          </a:bodyPr>
+          <a:lstStyle/>
+          <a:p>
+            <a:pPr>
+              <a:defRPr sz="950" b="1">
+                <a:solidFill>
+                  <a:srgbClr val="1E60F2"/>
+                </a:solidFill>
+              </a:defRPr>
+            </a:pPr>
+            <a:r>
+              <a:t>SOM 초기 타깃</a:t>
+            </a:r>
+          </a:p>
+          <a:p>
+            <a:pPr>
+              <a:defRPr sz="1400" b="1">
+                <a:solidFill>
+                  <a:srgbClr val="1E60F2"/>
+                </a:solidFill>
+              </a:defRPr>
+            </a:pPr>
+            <a:r>
+              <a:t>48억 원 (4천곳)</a:t>
+            </a:r>
+          </a:p>
+        </p:txBody>
+      </p:sp>
+      <p:sp>
+        <p:nvSpPr>
+          <p:cNvPr id="19" name="Rounded Rectangle 18"/>
+          <p:cNvSpPr/>
+          <p:nvPr/>
+        </p:nvSpPr>
+        <p:spPr>
+          <a:xfrm>
+            <a:off x="6675120" y="1737360"/>
+            <a:ext cx="4754880" cy="4389120"/>
+          </a:xfrm>
+          <a:prstGeom prst="roundRect">
+            <a:avLst/>
+          </a:prstGeom>
+          <a:solidFill>
+            <a:srgbClr val="F8FAFC"/>
+          </a:solidFill>
+          <a:ln>
+            <a:noFill/>
+          </a:ln>
+        </p:spPr>
+        <p:style>
+          <a:lnRef idx="1">
+            <a:schemeClr val="accent1"/>
+          </a:lnRef>
+          <a:fillRef idx="3">
+            <a:schemeClr val="accent1"/>
+          </a:fillRef>
+          <a:effectRef idx="2">
+            <a:schemeClr val="accent1"/>
+          </a:effectRef>
+          <a:fontRef idx="minor">
+            <a:schemeClr val="lt1"/>
+          </a:fontRef>
+        </p:style>
+        <p:txBody>
+          <a:bodyPr rtlCol="0" anchor="ctr"/>
+          <a:lstStyle/>
+          <a:p>
+            <a:pPr algn="ctr"/>
+          </a:p>
+        </p:txBody>
+      </p:sp>
+      <p:sp>
+        <p:nvSpPr>
+          <p:cNvPr id="20" name="TextBox 19"/>
+          <p:cNvSpPr txBox="1"/>
+          <p:nvPr/>
+        </p:nvSpPr>
+        <p:spPr>
+          <a:xfrm>
+            <a:off x="6949440" y="1920240"/>
+            <a:ext cx="4206240" cy="3931920"/>
+          </a:xfrm>
+          <a:prstGeom prst="rect">
+            <a:avLst/>
+          </a:prstGeom>
+          <a:noFill/>
+        </p:spPr>
+        <p:txBody>
+          <a:bodyPr wrap="square">
+            <a:spAutoFit/>
+          </a:bodyPr>
+          <a:lstStyle/>
+          <a:p>
+            <a:pPr>
+              <a:defRPr sz="1600" b="1">
+                <a:solidFill>
+                  <a:srgbClr val="0F172A"/>
+                </a:solidFill>
+              </a:defRPr>
+            </a:pPr>
+            <a:r>
+              <a:t>핵심 시장 기회 요약</a:t>
+            </a:r>
+          </a:p>
+          <a:p>
+            <a:br/>
+            <a:pPr>
+              <a:defRPr sz="1250" b="1">
+                <a:solidFill>
+                  <a:srgbClr val="1E60F2"/>
+                </a:solidFill>
+              </a:defRPr>
+            </a:pPr>
+            <a:r>
+              <a:t>● 1인 인디 브랜드 급증세</a:t>
             </a:r>
           </a:p>
           <a:p>
@@ -9484,7 +9678,57 @@
               </a:defRPr>
             </a:pPr>
             <a:r>
-              <a:t>국내 1인 인디 향수·디퓨저 브랜드 4,000개사 초기 선점 목표</a:t>
+              <a:t>K-뷰티 인디 브랜드 열풍으로 연간 4,071개 제조판매업체가 신규 진입하며 전문 규제 인력 부재 문제 심각.</a:t>
+            </a:r>
+          </a:p>
+          <a:p>
+            <a:br/>
+            <a:pPr>
+              <a:defRPr sz="1250" b="1">
+                <a:solidFill>
+                  <a:srgbClr val="1E60F2"/>
+                </a:solidFill>
+              </a:defRPr>
+            </a:pPr>
+            <a:r>
+              <a:t>● 규제 행정 지출 1,200억 원</a:t>
+            </a:r>
+          </a:p>
+          <a:p>
+            <a:pPr>
+              <a:defRPr sz="1050">
+                <a:solidFill>
+                  <a:srgbClr val="334155"/>
+                </a:solidFill>
+              </a:defRPr>
+            </a:pPr>
+            <a:r>
+              <a:t>브랜드당 연간 신제품 5~10종 출시로 매년 수백만 원의 서류 대행 및 인쇄 비용 지출 발생.</a:t>
+            </a:r>
+          </a:p>
+          <a:p>
+            <a:br/>
+            <a:pPr>
+              <a:defRPr sz="1250" b="1">
+                <a:solidFill>
+                  <a:srgbClr val="1E60F2"/>
+                </a:solidFill>
+              </a:defRPr>
+            </a:pPr>
+            <a:r>
+              <a:t>● 초기 SOM 48억 원 선점</a:t>
+            </a:r>
+          </a:p>
+          <a:p>
+            <a:pPr>
+              <a:defRPr sz="1050">
+                <a:solidFill>
+                  <a:srgbClr val="334155"/>
+                </a:solidFill>
+              </a:defRPr>
+            </a:pPr>
+            <a:r>
+              <a:t>향수·디퓨저 1인 공방 4,000개사를 1.9만 원 건당 과금 및 인쇄 패키지로 락인하여 초기 매출 극대화.</a:t>
             </a:r>
           </a:p>
         </p:txBody>
@@ -9559,7 +9803,7 @@
         <p:spPr>
           <a:xfrm>
             <a:off x="731520" y="420624"/>
-            <a:ext cx="10698480" cy="274320"/>
+            <a:ext cx="10698480" cy="256032"/>
           </a:xfrm>
           <a:prstGeom prst="rect">
             <a:avLst/>
@@ -9581,7 +9825,7 @@
               </a:defRPr>
             </a:pPr>
             <a:r>
-              <a:t>06 · BUSINESS MODEL</a:t>
+              <a:t>●  06 · BUSINESS MODEL</a:t>
             </a:r>
           </a:p>
         </p:txBody>
@@ -9594,7 +9838,7 @@
         </p:nvSpPr>
         <p:spPr>
           <a:xfrm>
-            <a:off x="731520" y="713232"/>
+            <a:off x="731520" y="694944"/>
             <a:ext cx="10698480" cy="502920"/>
           </a:xfrm>
           <a:prstGeom prst="rect">
@@ -9617,7 +9861,7 @@
               </a:defRPr>
             </a:pPr>
             <a:r>
-              <a:t>건당 과금과 파트너 오케스트레이션의 고마진 수익 구조</a:t>
+              <a:t>건당 과금과 파트너 오케스트레이션의 고마진 84% 수익 구조</a:t>
             </a:r>
           </a:p>
         </p:txBody>
@@ -9653,7 +9897,7 @@
               </a:defRPr>
             </a:pPr>
             <a:r>
-              <a:t>진입 장벽 없는 건당 과금(SaaS)으로 고객을 획득하고, 패키지 인쇄와 행정사 연결로 LTV를 극대화합니다.</a:t>
+              <a:t>진입 장벽 없는 1.9만 원 건당 과금으로 고객을 유입시키고, 패키지 인쇄와 행정사 연결로 LTV를 극대화합니다.</a:t>
             </a:r>
           </a:p>
         </p:txBody>
@@ -9689,7 +9933,7 @@
               </a:defRPr>
             </a:pPr>
             <a:r>
-              <a:t>※ Unit Economics: 건당 원가 1,200원 (서버/API) ➔ 건당 순공헌이익 17,800원 (84%+)</a:t>
+              <a:t>※ Unit Economics: 건당 원가 1,200원 (서버/API) ➔ 건당 순공헌이익 17,800원 (84.2%)</a:t>
             </a:r>
           </a:p>
         </p:txBody>
@@ -9717,9 +9961,9 @@
           <a:lstStyle/>
           <a:p>
             <a:pPr algn="r">
-              <a:defRPr sz="900" b="1">
-                <a:solidFill>
-                  <a:srgbClr val="94A3B8"/>
+              <a:defRPr sz="950" b="1">
+                <a:solidFill>
+                  <a:srgbClr val="64748B"/>
                 </a:solidFill>
                 <a:latin typeface="Pretendard"/>
               </a:defRPr>
@@ -9747,8 +9991,10 @@
           <a:solidFill>
             <a:srgbClr val="EEF4FF"/>
           </a:solidFill>
-          <a:ln>
-            <a:noFill/>
+          <a:ln w="19050">
+            <a:solidFill>
+              <a:srgbClr val="1E60F2"/>
+            </a:solidFill>
           </a:ln>
         </p:spPr>
         <p:style>
@@ -9808,7 +10054,7 @@
           </a:p>
           <a:p>
             <a:pPr>
-              <a:defRPr sz="1800" b="1">
+              <a:defRPr sz="2200" b="1">
                 <a:solidFill>
                   <a:srgbClr val="0F172A"/>
                 </a:solidFill>
@@ -9837,14 +10083,14 @@
           <a:p>
             <a:br/>
             <a:pPr>
-              <a:defRPr sz="1000" b="1">
-                <a:solidFill>
-                  <a:srgbClr val="039855"/>
-                </a:solidFill>
-              </a:defRPr>
-            </a:pPr>
-            <a:r>
-              <a:t>영업마진율 90%+ (순수 소프트웨어)</a:t>
+              <a:defRPr sz="1050" b="1">
+                <a:solidFill>
+                  <a:srgbClr val="10B981"/>
+                </a:solidFill>
+              </a:defRPr>
+            </a:pPr>
+            <a:r>
+              <a:t>★ 영업마진율 90%+ (순수 소프트웨어)</a:t>
             </a:r>
           </a:p>
         </p:txBody>
@@ -9864,7 +10110,7 @@
             <a:avLst/>
           </a:prstGeom>
           <a:solidFill>
-            <a:srgbClr val="F6F8FC"/>
+            <a:srgbClr val="F8FAFC"/>
           </a:solidFill>
           <a:ln>
             <a:noFill/>
@@ -9927,7 +10173,7 @@
           </a:p>
           <a:p>
             <a:pPr>
-              <a:defRPr sz="1800" b="1">
+              <a:defRPr sz="2200" b="1">
                 <a:solidFill>
                   <a:srgbClr val="0F172A"/>
                 </a:solidFill>
@@ -9956,14 +10202,14 @@
           <a:p>
             <a:br/>
             <a:pPr>
-              <a:defRPr sz="1000" b="1">
-                <a:solidFill>
-                  <a:srgbClr val="039855"/>
-                </a:solidFill>
-              </a:defRPr>
-            </a:pPr>
-            <a:r>
-              <a:t>인쇄 1회당 20~40만 원 수수료</a:t>
+              <a:defRPr sz="1050" b="1">
+                <a:solidFill>
+                  <a:srgbClr val="1E60F2"/>
+                </a:solidFill>
+              </a:defRPr>
+            </a:pPr>
+            <a:r>
+              <a:t>인쇄 1회당 20~40만 원 수수료 발생</a:t>
             </a:r>
           </a:p>
         </p:txBody>
@@ -9983,7 +10229,7 @@
             <a:avLst/>
           </a:prstGeom>
           <a:solidFill>
-            <a:srgbClr val="F6F8FC"/>
+            <a:srgbClr val="F8FAFC"/>
           </a:solidFill>
           <a:ln>
             <a:noFill/>
@@ -10046,7 +10292,7 @@
           </a:p>
           <a:p>
             <a:pPr>
-              <a:defRPr sz="1800" b="1">
+              <a:defRPr sz="2200" b="1">
                 <a:solidFill>
                   <a:srgbClr val="0F172A"/>
                 </a:solidFill>
@@ -10065,24 +10311,24 @@
               </a:defRPr>
             </a:pPr>
             <a:r>
-              <a:t>[제휴 공인 행정사 연결]</a:t>
+              <a:t>[제휴 공인 행정사 리퍼럴]</a:t>
             </a:r>
             <a:br/>
             <a:r>
-              <a:t>수출용 인허가, 복합 제형 등 전문 행정사의 정밀 검토가 필요한 건을 법적 안전하게 중개.</a:t>
+              <a:t>수출용 인허가, 복합 제형 등 전문 행정사의 정밀 검토가 필요한 복잡 건을 적법하게 중개.</a:t>
             </a:r>
           </a:p>
           <a:p>
             <a:br/>
             <a:pPr>
-              <a:defRPr sz="1000" b="1">
-                <a:solidFill>
-                  <a:srgbClr val="039855"/>
-                </a:solidFill>
-              </a:defRPr>
-            </a:pPr>
-            <a:r>
-              <a:t>복잡 건 1회당 5~10만 원 리퍼럴</a:t>
+              <a:defRPr sz="1050" b="1">
+                <a:solidFill>
+                  <a:srgbClr val="1E60F2"/>
+                </a:solidFill>
+              </a:defRPr>
+            </a:pPr>
+            <a:r>
+              <a:t>복잡 건 1회당 5~10만 원 리퍼럴 수익</a:t>
             </a:r>
           </a:p>
         </p:txBody>
@@ -10102,7 +10348,7 @@
             <a:avLst/>
           </a:prstGeom>
           <a:solidFill>
-            <a:srgbClr val="F6F8FC"/>
+            <a:srgbClr val="F8FAFC"/>
           </a:solidFill>
           <a:ln>
             <a:noFill/>
@@ -10160,7 +10406,7 @@
               </a:defRPr>
             </a:pPr>
             <a:r>
-              <a:t>[투명성 원칙] 공인시험기관(KTR, KCL 등) 협력: 공익기관 회계규정에 따라 시험기관으로부터는 일체의 수수료를 받지 않으며, 시료 접수 및 전자 성적서 API 연동 파트너로만 협력합니다.</a:t>
+              <a:t>🛡️ [투명성 원칙] 공인시험기관(KTR, KCL 등) 협력 원칙: 공익기관 회계규정에 따라 시험기관으로부터는 일체의 중개 수수료를 수취하지 않으며, 시료 접수 및 전자 성적서 API 연동 파트너로만 협력합니다.</a:t>
             </a:r>
           </a:p>
         </p:txBody>
@@ -10235,7 +10481,7 @@
         <p:spPr>
           <a:xfrm>
             <a:off x="731520" y="420624"/>
-            <a:ext cx="10698480" cy="274320"/>
+            <a:ext cx="10698480" cy="256032"/>
           </a:xfrm>
           <a:prstGeom prst="rect">
             <a:avLst/>
@@ -10257,7 +10503,7 @@
               </a:defRPr>
             </a:pPr>
             <a:r>
-              <a:t>07 · SERVICE BLUEPRINT</a:t>
+              <a:t>●  07 · SERVICE BLUEPRINT</a:t>
             </a:r>
           </a:p>
         </p:txBody>
@@ -10270,7 +10516,7 @@
         </p:nvSpPr>
         <p:spPr>
           <a:xfrm>
-            <a:off x="731520" y="713232"/>
+            <a:off x="731520" y="694944"/>
             <a:ext cx="10698480" cy="502920"/>
           </a:xfrm>
           <a:prstGeom prst="rect">
@@ -10293,7 +10539,7 @@
               </a:defRPr>
             </a:pPr>
             <a:r>
-              <a:t>MVP 및 90일 실행계획 &amp; 확장 로드맵</a:t>
+              <a:t>MVP 90일 실행계획 및 4단계 플랫폼 확장 로드맵</a:t>
             </a:r>
           </a:p>
         </p:txBody>
@@ -10329,7 +10575,7 @@
               </a:defRPr>
             </a:pPr>
             <a:r>
-              <a:t>AI-assisted concierge ➔ 반복 업무 제품화 ➔ SaaS 구독 전환으로 7~10주 차 첫 매출을 창출합니다.</a:t>
+              <a:t>AI-assisted 컨시어지 ➔ 반복 업무 제품화 ➔ SaaS 구독 전환으로 7~10주 차에 첫 매출을 달성합니다.</a:t>
             </a:r>
           </a:p>
         </p:txBody>
@@ -10393,9 +10639,9 @@
           <a:lstStyle/>
           <a:p>
             <a:pPr algn="r">
-              <a:defRPr sz="900" b="1">
-                <a:solidFill>
-                  <a:srgbClr val="94A3B8"/>
+              <a:defRPr sz="950" b="1">
+                <a:solidFill>
+                  <a:srgbClr val="64748B"/>
                 </a:solidFill>
                 <a:latin typeface="Pretendard"/>
               </a:defRPr>
@@ -10421,7 +10667,7 @@
             <a:avLst/>
           </a:prstGeom>
           <a:solidFill>
-            <a:srgbClr val="F6F8FC"/>
+            <a:srgbClr val="F8FAFC"/>
           </a:solidFill>
           <a:ln>
             <a:noFill/>
@@ -10472,14 +10718,14 @@
           <a:lstStyle/>
           <a:p>
             <a:pPr>
-              <a:defRPr sz="1100" b="1">
+              <a:defRPr sz="1150" b="1">
                 <a:solidFill>
                   <a:srgbClr val="0F172A"/>
                 </a:solidFill>
               </a:defRPr>
             </a:pPr>
             <a:r>
-              <a:t>1~4주</a:t>
+              <a:t>1~4주 차</a:t>
             </a:r>
           </a:p>
           <a:p>
@@ -10513,8 +10759,10 @@
           <a:solidFill>
             <a:srgbClr val="EEF4FF"/>
           </a:solidFill>
-          <a:ln>
-            <a:noFill/>
+          <a:ln w="19050">
+            <a:solidFill>
+              <a:srgbClr val="1E60F2"/>
+            </a:solidFill>
           </a:ln>
         </p:spPr>
         <p:style>
@@ -10569,7 +10817,7 @@
               </a:defRPr>
             </a:pPr>
             <a:r>
-              <a:t>파트너 3~5곳 수동 섭외</a:t>
+              <a:t>파트너 3~5곳 수동 섭외 &amp; 엔진 프로토타입</a:t>
             </a:r>
           </a:p>
         </p:txBody>
@@ -10597,14 +10845,14 @@
           <a:lstStyle/>
           <a:p>
             <a:pPr>
-              <a:defRPr sz="1100" b="1">
+              <a:defRPr sz="1150" b="1">
                 <a:solidFill>
                   <a:srgbClr val="0F172A"/>
                 </a:solidFill>
               </a:defRPr>
             </a:pPr>
             <a:r>
-              <a:t>5~8주</a:t>
+              <a:t>5~8주 차</a:t>
             </a:r>
           </a:p>
           <a:p>
@@ -10638,8 +10886,10 @@
           <a:solidFill>
             <a:srgbClr val="EEF4FF"/>
           </a:solidFill>
-          <a:ln>
-            <a:noFill/>
+          <a:ln w="19050">
+            <a:solidFill>
+              <a:srgbClr val="1E60F2"/>
+            </a:solidFill>
           </a:ln>
         </p:spPr>
         <p:style>
@@ -10694,7 +10944,7 @@
               </a:defRPr>
             </a:pPr>
             <a:r>
-              <a:t>사례 · 검증 데이터 확보</a:t>
+              <a:t>공방 커뮤니티 50개사 진단 사례 &amp; 검증 DB 확보</a:t>
             </a:r>
           </a:p>
         </p:txBody>
@@ -10722,14 +10972,14 @@
           <a:lstStyle/>
           <a:p>
             <a:pPr>
-              <a:defRPr sz="1100" b="1">
-                <a:solidFill>
-                  <a:srgbClr val="1E60F2"/>
-                </a:solidFill>
-              </a:defRPr>
-            </a:pPr>
-            <a:r>
-              <a:t>7~10주</a:t>
+              <a:defRPr sz="1150" b="1">
+                <a:solidFill>
+                  <a:srgbClr val="10B981"/>
+                </a:solidFill>
+              </a:defRPr>
+            </a:pPr>
+            <a:r>
+              <a:t>7~10주 차</a:t>
             </a:r>
           </a:p>
           <a:p>
@@ -10741,7 +10991,7 @@
               </a:defRPr>
             </a:pPr>
             <a:r>
-              <a:t>유료 패키지 상품화</a:t>
+              <a:t>★ 첫 매출 달성 (유료 진단)</a:t>
             </a:r>
           </a:p>
         </p:txBody>
@@ -10761,10 +11011,12 @@
             <a:avLst/>
           </a:prstGeom>
           <a:solidFill>
-            <a:srgbClr val="ECFDF3"/>
+            <a:srgbClr val="ECFDF5"/>
           </a:solidFill>
-          <a:ln>
-            <a:noFill/>
+          <a:ln w="19050">
+            <a:solidFill>
+              <a:srgbClr val="10B981"/>
+            </a:solidFill>
           </a:ln>
         </p:spPr>
         <p:style>
@@ -10814,12 +11066,12 @@
             <a:pPr algn="ctr">
               <a:defRPr sz="1000" b="1">
                 <a:solidFill>
-                  <a:srgbClr val="039855"/>
-                </a:solidFill>
-              </a:defRPr>
-            </a:pPr>
-            <a:r>
-              <a:t>★ 첫 매출 달성 (유료 진단)</a:t>
+                  <a:srgbClr val="10B981"/>
+                </a:solidFill>
+              </a:defRPr>
+            </a:pPr>
+            <a:r>
+              <a:t>유료 패키지 상품화 (건당 1.9만 원 첫 유료 결제 창출)</a:t>
             </a:r>
           </a:p>
         </p:txBody>
@@ -10847,14 +11099,14 @@
           <a:lstStyle/>
           <a:p>
             <a:pPr>
-              <a:defRPr sz="1100" b="1">
+              <a:defRPr sz="1150" b="1">
                 <a:solidFill>
                   <a:srgbClr val="0F172A"/>
                 </a:solidFill>
               </a:defRPr>
             </a:pPr>
             <a:r>
-              <a:t>10~12주</a:t>
+              <a:t>10~12주 차</a:t>
             </a:r>
           </a:p>
           <a:p>
@@ -10888,8 +11140,10 @@
           <a:solidFill>
             <a:srgbClr val="EEF4FF"/>
           </a:solidFill>
-          <a:ln>
-            <a:noFill/>
+          <a:ln w="19050">
+            <a:solidFill>
+              <a:srgbClr val="1E60F2"/>
+            </a:solidFill>
           </a:ln>
         </p:spPr>
         <p:style>
@@ -10944,7 +11198,7 @@
               </a:defRPr>
             </a:pPr>
             <a:r>
-              <a:t>SaaS 구독 전환 검증</a:t>
+              <a:t>SaaS 구독 전환 모델 검증</a:t>
             </a:r>
           </a:p>
         </p:txBody>
@@ -10966,8 +11220,10 @@
           <a:solidFill>
             <a:srgbClr val="FFFFFF"/>
           </a:solidFill>
-          <a:ln>
-            <a:noFill/>
+          <a:ln w="19050">
+            <a:solidFill>
+              <a:srgbClr val="1E60F2"/>
+            </a:solidFill>
           </a:ln>
         </p:spPr>
         <p:style>
@@ -11001,7 +11257,7 @@
         <p:spPr>
           <a:xfrm>
             <a:off x="914400" y="5623560"/>
-            <a:ext cx="1371600" cy="320040"/>
+            <a:ext cx="1645920" cy="320040"/>
           </a:xfrm>
           <a:prstGeom prst="rect">
             <a:avLst/>
@@ -11015,14 +11271,14 @@
           <a:lstStyle/>
           <a:p>
             <a:pPr>
-              <a:defRPr sz="1150" b="1">
+              <a:defRPr sz="1100" b="1">
                 <a:solidFill>
                   <a:srgbClr val="0F172A"/>
                 </a:solidFill>
               </a:defRPr>
             </a:pPr>
             <a:r>
-              <a:t>확장 로드맵</a:t>
+              <a:t>4단계 플랫폼 확장:</a:t>
             </a:r>
           </a:p>
         </p:txBody>
@@ -11035,14 +11291,14 @@
         </p:nvSpPr>
         <p:spPr>
           <a:xfrm>
-            <a:off x="2377440" y="5486400"/>
+            <a:off x="2651760" y="5486400"/>
             <a:ext cx="1920240" cy="594360"/>
           </a:xfrm>
           <a:prstGeom prst="roundRect">
             <a:avLst/>
           </a:prstGeom>
           <a:solidFill>
-            <a:srgbClr val="F6F8FC"/>
+            <a:srgbClr val="1E60F2"/>
           </a:solidFill>
           <a:ln>
             <a:noFill/>
@@ -11078,7 +11334,7 @@
         </p:nvSpPr>
         <p:spPr>
           <a:xfrm>
-            <a:off x="2377440" y="5577840"/>
+            <a:off x="2651760" y="5577840"/>
             <a:ext cx="1920240" cy="411480"/>
           </a:xfrm>
           <a:prstGeom prst="rect">
@@ -11093,14 +11349,14 @@
           <a:lstStyle/>
           <a:p>
             <a:pPr algn="ctr">
-              <a:defRPr sz="1100" b="1">
-                <a:solidFill>
-                  <a:srgbClr val="0F172A"/>
-                </a:solidFill>
-              </a:defRPr>
-            </a:pPr>
-            <a:r>
-              <a:t>추천 · 연결</a:t>
+              <a:defRPr sz="1050" b="1">
+                <a:solidFill>
+                  <a:srgbClr val="FFFFFF"/>
+                </a:solidFill>
+              </a:defRPr>
+            </a:pPr>
+            <a:r>
+              <a:t>1단계: 추천 · 연결</a:t>
             </a:r>
           </a:p>
         </p:txBody>
@@ -11113,14 +11369,14 @@
         </p:nvSpPr>
         <p:spPr>
           <a:xfrm>
-            <a:off x="4617720" y="5486400"/>
+            <a:off x="4800600" y="5486400"/>
             <a:ext cx="1920240" cy="594360"/>
           </a:xfrm>
           <a:prstGeom prst="roundRect">
             <a:avLst/>
           </a:prstGeom>
           <a:solidFill>
-            <a:srgbClr val="F6F8FC"/>
+            <a:srgbClr val="F8FAFC"/>
           </a:solidFill>
           <a:ln>
             <a:noFill/>
@@ -11156,7 +11412,7 @@
         </p:nvSpPr>
         <p:spPr>
           <a:xfrm>
-            <a:off x="4617720" y="5577840"/>
+            <a:off x="4800600" y="5577840"/>
             <a:ext cx="1920240" cy="411480"/>
           </a:xfrm>
           <a:prstGeom prst="rect">
@@ -11171,14 +11427,14 @@
           <a:lstStyle/>
           <a:p>
             <a:pPr algn="ctr">
-              <a:defRPr sz="1100" b="1">
+              <a:defRPr sz="1050" b="1">
                 <a:solidFill>
                   <a:srgbClr val="0F172A"/>
                 </a:solidFill>
               </a:defRPr>
             </a:pPr>
             <a:r>
-              <a:t>진행 관리</a:t>
+              <a:t>2단계: 진행 관리</a:t>
             </a:r>
           </a:p>
         </p:txBody>
@@ -11191,14 +11447,14 @@
         </p:nvSpPr>
         <p:spPr>
           <a:xfrm>
-            <a:off x="6858000" y="5486400"/>
+            <a:off x="6949440" y="5486400"/>
             <a:ext cx="1920240" cy="594360"/>
           </a:xfrm>
           <a:prstGeom prst="roundRect">
             <a:avLst/>
           </a:prstGeom>
           <a:solidFill>
-            <a:srgbClr val="F6F8FC"/>
+            <a:srgbClr val="F8FAFC"/>
           </a:solidFill>
           <a:ln>
             <a:noFill/>
@@ -11234,7 +11490,7 @@
         </p:nvSpPr>
         <p:spPr>
           <a:xfrm>
-            <a:off x="6858000" y="5577840"/>
+            <a:off x="6949440" y="5577840"/>
             <a:ext cx="1920240" cy="411480"/>
           </a:xfrm>
           <a:prstGeom prst="rect">
@@ -11249,14 +11505,14 @@
           <a:lstStyle/>
           <a:p>
             <a:pPr algn="ctr">
-              <a:defRPr sz="1100" b="1">
+              <a:defRPr sz="1050" b="1">
                 <a:solidFill>
                   <a:srgbClr val="0F172A"/>
                 </a:solidFill>
               </a:defRPr>
             </a:pPr>
             <a:r>
-              <a:t>원스톱 패키지</a:t>
+              <a:t>3단계: 원스톱 패키지</a:t>
             </a:r>
           </a:p>
         </p:txBody>
@@ -11327,14 +11583,14 @@
           <a:lstStyle/>
           <a:p>
             <a:pPr algn="ctr">
-              <a:defRPr sz="1100" b="1">
+              <a:defRPr sz="1050" b="1">
                 <a:solidFill>
                   <a:srgbClr val="FFFFFF"/>
                 </a:solidFill>
               </a:defRPr>
             </a:pPr>
             <a:r>
-              <a:t>Enterprise OS</a:t>
+              <a:t>4단계: Enterprise OS</a:t>
             </a:r>
           </a:p>
         </p:txBody>
@@ -11409,7 +11665,7 @@
         <p:spPr>
           <a:xfrm>
             <a:off x="731520" y="420624"/>
-            <a:ext cx="10698480" cy="274320"/>
+            <a:ext cx="10698480" cy="256032"/>
           </a:xfrm>
           <a:prstGeom prst="rect">
             <a:avLst/>
@@ -11431,7 +11687,7 @@
               </a:defRPr>
             </a:pPr>
             <a:r>
-              <a:t>08 · FINANCIAL PROJECTIONS</a:t>
+              <a:t>●  08 · FINANCIAL PROJECTIONS</a:t>
             </a:r>
           </a:p>
         </p:txBody>
@@ -11444,7 +11700,7 @@
         </p:nvSpPr>
         <p:spPr>
           <a:xfrm>
-            <a:off x="731520" y="713232"/>
+            <a:off x="731520" y="694944"/>
             <a:ext cx="10698480" cy="502920"/>
           </a:xfrm>
           <a:prstGeom prst="rect">
@@ -11503,7 +11759,7 @@
               </a:defRPr>
             </a:pPr>
             <a:r>
-              <a:t>순수 소프트웨어 기반의 고공헌이익률(84%) 구조로 1년 차 조기 손익분기점 돌파가 가능합니다.</a:t>
+              <a:t>순수 소프트웨어 기반의 고공헌이익률(84.2%) 구조로 1년 차에 월 손익분기점을 조기 돌파합니다.</a:t>
             </a:r>
           </a:p>
         </p:txBody>
@@ -11567,9 +11823,9 @@
           <a:lstStyle/>
           <a:p>
             <a:pPr algn="r">
-              <a:defRPr sz="900" b="1">
-                <a:solidFill>
-                  <a:srgbClr val="94A3B8"/>
+              <a:defRPr sz="950" b="1">
+                <a:solidFill>
+                  <a:srgbClr val="64748B"/>
                 </a:solidFill>
                 <a:latin typeface="Pretendard"/>
               </a:defRPr>
@@ -11595,7 +11851,7 @@
             <a:avLst/>
           </a:prstGeom>
           <a:solidFill>
-            <a:srgbClr val="F6F8FC"/>
+            <a:srgbClr val="F8FAFC"/>
           </a:solidFill>
           <a:ln>
             <a:noFill/>
@@ -11659,14 +11915,14 @@
           <a:p>
             <a:br/>
             <a:pPr>
-              <a:defRPr sz="1200" b="1">
+              <a:defRPr sz="1250" b="1">
                 <a:solidFill>
                   <a:srgbClr val="1E60F2"/>
                 </a:solidFill>
               </a:defRPr>
             </a:pPr>
             <a:r>
-              <a:t>1년 차 (2026) · 4,500건</a:t>
+              <a:t>1년 차 (2026) · 연 4,500건</a:t>
             </a:r>
             <a:br/>
             <a:r>
@@ -11680,14 +11936,14 @@
           <a:p>
             <a:br/>
             <a:pPr>
-              <a:defRPr sz="1200" b="1">
+              <a:defRPr sz="1250" b="1">
                 <a:solidFill>
                   <a:srgbClr val="1E60F2"/>
                 </a:solidFill>
               </a:defRPr>
             </a:pPr>
             <a:r>
-              <a:t>2년 차 (2027) · 18,000건</a:t>
+              <a:t>2년 차 (2027) · 연 18,000건</a:t>
             </a:r>
             <a:br/>
             <a:r>
@@ -11701,14 +11957,14 @@
           <a:p>
             <a:br/>
             <a:pPr>
-              <a:defRPr sz="1200" b="1">
+              <a:defRPr sz="1250" b="1">
                 <a:solidFill>
                   <a:srgbClr val="0B132B"/>
                 </a:solidFill>
               </a:defRPr>
             </a:pPr>
             <a:r>
-              <a:t>3년 차 (2028) · 58,000건</a:t>
+              <a:t>3년 차 (2028) · 연 58,000건</a:t>
             </a:r>
             <a:br/>
             <a:r>
@@ -11736,10 +11992,12 @@
             <a:avLst/>
           </a:prstGeom>
           <a:solidFill>
-            <a:srgbClr val="F6F8FC"/>
+            <a:srgbClr val="FFFFFF"/>
           </a:solidFill>
-          <a:ln>
-            <a:noFill/>
+          <a:ln w="19050">
+            <a:solidFill>
+              <a:srgbClr val="1E60F2"/>
+            </a:solidFill>
           </a:ln>
         </p:spPr>
         <p:style>
@@ -11787,7 +12045,7 @@
           <a:lstStyle/>
           <a:p>
             <a:pPr>
-              <a:defRPr sz="2800" b="1">
+              <a:defRPr sz="3200" b="1">
                 <a:solidFill>
                   <a:srgbClr val="1E60F2"/>
                 </a:solidFill>
@@ -11799,7 +12057,7 @@
           </a:p>
           <a:p>
             <a:pPr>
-              <a:defRPr sz="1050">
+              <a:defRPr sz="1100">
                 <a:solidFill>
                   <a:srgbClr val="334155"/>
                 </a:solidFill>
@@ -11830,10 +12088,12 @@
             <a:avLst/>
           </a:prstGeom>
           <a:solidFill>
-            <a:srgbClr val="F6F8FC"/>
+            <a:srgbClr val="FFFFFF"/>
           </a:solidFill>
-          <a:ln>
-            <a:noFill/>
+          <a:ln w="19050">
+            <a:solidFill>
+              <a:srgbClr val="10B981"/>
+            </a:solidFill>
           </a:ln>
         </p:spPr>
         <p:style>
@@ -11881,9 +12141,9 @@
           <a:lstStyle/>
           <a:p>
             <a:pPr>
-              <a:defRPr sz="2800" b="1">
-                <a:solidFill>
-                  <a:srgbClr val="039855"/>
+              <a:defRPr sz="3200" b="1">
+                <a:solidFill>
+                  <a:srgbClr val="10B981"/>
                 </a:solidFill>
               </a:defRPr>
             </a:pPr>
@@ -11893,7 +12153,7 @@
           </a:p>
           <a:p>
             <a:pPr>
-              <a:defRPr sz="1050">
+              <a:defRPr sz="1100">
                 <a:solidFill>
                   <a:srgbClr val="334155"/>
                 </a:solidFill>
@@ -11904,7 +12164,7 @@
             </a:r>
             <a:br/>
             <a:r>
-              <a:t>재고 및 물류 부담이 없는 클라우드 연산 엔진으로 매출 성장이 영업이익으로 직결.</a:t>
+              <a:t>건당 원가 1,200원을 제외한 순공헌이익 17,800원으로 매출 성장이 영업이익으로 직결.</a:t>
             </a:r>
           </a:p>
         </p:txBody>

--- a/public/formu_pitch_deck.pptx
+++ b/public/formu_pitch_deck.pptx
@@ -3433,120 +3433,40 @@
           </a:p>
         </p:txBody>
       </p:sp>
-      <p:sp>
-        <p:nvSpPr>
-          <p:cNvPr id="10" name="Rounded Rectangle 9"/>
+      <p:pic>
+        <p:nvPicPr>
+          <p:cNvPr id="10" name="Picture 9" descr="glass_bottle.jpg"/>
+          <p:cNvPicPr>
+            <a:picLocks noChangeAspect="1"/>
+          </p:cNvPicPr>
+          <p:nvPr/>
+        </p:nvPicPr>
+        <p:blipFill>
+          <a:blip r:embed="rId2"/>
+          <a:stretch>
+            <a:fillRect/>
+          </a:stretch>
+        </p:blipFill>
+        <p:spPr>
+          <a:xfrm>
+            <a:off x="8458200" y="2514600"/>
+            <a:ext cx="2011680" cy="2011680"/>
+          </a:xfrm>
+          <a:prstGeom prst="rect">
+            <a:avLst/>
+          </a:prstGeom>
+        </p:spPr>
+      </p:pic>
+      <p:sp>
+        <p:nvSpPr>
+          <p:cNvPr id="11" name="Rounded Rectangle 10"/>
           <p:cNvSpPr/>
           <p:nvPr/>
         </p:nvSpPr>
         <p:spPr>
           <a:xfrm>
-            <a:off x="8046720" y="2926080"/>
-            <a:ext cx="2834640" cy="1463040"/>
-          </a:xfrm>
-          <a:prstGeom prst="roundRect">
-            <a:avLst/>
-          </a:prstGeom>
-          <a:solidFill>
-            <a:srgbClr val="FFFFFF"/>
-          </a:solidFill>
-          <a:ln w="19050">
-            <a:solidFill>
-              <a:srgbClr val="1E60F2"/>
-            </a:solidFill>
-          </a:ln>
-        </p:spPr>
-        <p:style>
-          <a:lnRef idx="1">
-            <a:schemeClr val="accent1"/>
-          </a:lnRef>
-          <a:fillRef idx="3">
-            <a:schemeClr val="accent1"/>
-          </a:fillRef>
-          <a:effectRef idx="2">
-            <a:schemeClr val="accent1"/>
-          </a:effectRef>
-          <a:fontRef idx="minor">
-            <a:schemeClr val="lt1"/>
-          </a:fontRef>
-        </p:style>
-        <p:txBody>
-          <a:bodyPr rtlCol="0" anchor="ctr"/>
-          <a:lstStyle/>
-          <a:p>
-            <a:pPr algn="ctr"/>
-          </a:p>
-        </p:txBody>
-      </p:sp>
-      <p:sp>
-        <p:nvSpPr>
-          <p:cNvPr id="11" name="TextBox 10"/>
-          <p:cNvSpPr txBox="1"/>
-          <p:nvPr/>
-        </p:nvSpPr>
-        <p:spPr>
-          <a:xfrm>
-            <a:off x="8046720" y="3108960"/>
-            <a:ext cx="2834640" cy="1097280"/>
-          </a:xfrm>
-          <a:prstGeom prst="rect">
-            <a:avLst/>
-          </a:prstGeom>
-          <a:noFill/>
-        </p:spPr>
-        <p:txBody>
-          <a:bodyPr wrap="square">
-            <a:spAutoFit/>
-          </a:bodyPr>
-          <a:lstStyle/>
-          <a:p>
-            <a:pPr algn="ctr">
-              <a:defRPr sz="1050" b="1">
-                <a:solidFill>
-                  <a:srgbClr val="1E60F2"/>
-                </a:solidFill>
-              </a:defRPr>
-            </a:pPr>
-            <a:r>
-              <a:t>FORMU REGTECH OS</a:t>
-            </a:r>
-          </a:p>
-          <a:p>
-            <a:pPr algn="ctr">
-              <a:defRPr sz="1600" b="1">
-                <a:solidFill>
-                  <a:srgbClr val="0B132B"/>
-                </a:solidFill>
-              </a:defRPr>
-            </a:pPr>
-            <a:r>
-              <a:t>원클릭 규제 완성</a:t>
-            </a:r>
-          </a:p>
-          <a:p>
-            <a:pPr algn="ctr">
-              <a:defRPr sz="1000">
-                <a:solidFill>
-                  <a:srgbClr val="64748B"/>
-                </a:solidFill>
-              </a:defRPr>
-            </a:pPr>
-            <a:r>
-              <a:t>배합표 즉시 분기 출력</a:t>
-            </a:r>
-          </a:p>
-        </p:txBody>
-      </p:sp>
-      <p:sp>
-        <p:nvSpPr>
-          <p:cNvPr id="12" name="Rounded Rectangle 11"/>
-          <p:cNvSpPr/>
-          <p:nvPr/>
-        </p:nvSpPr>
-        <p:spPr>
-          <a:xfrm>
-            <a:off x="7772400" y="1920240"/>
-            <a:ext cx="3383280" cy="822960"/>
+            <a:off x="7772400" y="1874519"/>
+            <a:ext cx="3383280" cy="777240"/>
           </a:xfrm>
           <a:prstGeom prst="roundRect">
             <a:avLst/>
@@ -3582,14 +3502,14 @@
       </p:sp>
       <p:sp>
         <p:nvSpPr>
-          <p:cNvPr id="13" name="TextBox 12"/>
+          <p:cNvPr id="12" name="TextBox 11"/>
           <p:cNvSpPr txBox="1"/>
           <p:nvPr/>
         </p:nvSpPr>
         <p:spPr>
           <a:xfrm>
-            <a:off x="7955279" y="1965960"/>
-            <a:ext cx="3017520" cy="731520"/>
+            <a:off x="7955279" y="1920240"/>
+            <a:ext cx="3017520" cy="685800"/>
           </a:xfrm>
           <a:prstGeom prst="rect">
             <a:avLst/>
@@ -3603,7 +3523,7 @@
           <a:lstStyle/>
           <a:p>
             <a:pPr>
-              <a:defRPr sz="2000" b="1">
+              <a:defRPr sz="1900" b="1">
                 <a:solidFill>
                   <a:srgbClr val="FFFFFF"/>
                 </a:solidFill>
@@ -3629,14 +3549,14 @@
       </p:sp>
       <p:sp>
         <p:nvSpPr>
-          <p:cNvPr id="14" name="Rounded Rectangle 13"/>
+          <p:cNvPr id="13" name="Rounded Rectangle 12"/>
           <p:cNvSpPr/>
           <p:nvPr/>
         </p:nvSpPr>
         <p:spPr>
           <a:xfrm>
-            <a:off x="7772400" y="4617720"/>
-            <a:ext cx="3383280" cy="822960"/>
+            <a:off x="7772400" y="4709160"/>
+            <a:ext cx="3383280" cy="777240"/>
           </a:xfrm>
           <a:prstGeom prst="roundRect">
             <a:avLst/>
@@ -3674,14 +3594,14 @@
       </p:sp>
       <p:sp>
         <p:nvSpPr>
-          <p:cNvPr id="15" name="TextBox 14"/>
+          <p:cNvPr id="14" name="TextBox 13"/>
           <p:cNvSpPr txBox="1"/>
           <p:nvPr/>
         </p:nvSpPr>
         <p:spPr>
           <a:xfrm>
-            <a:off x="7955279" y="4663440"/>
-            <a:ext cx="3017520" cy="731520"/>
+            <a:off x="7955279" y="4754880"/>
+            <a:ext cx="3017520" cy="685800"/>
           </a:xfrm>
           <a:prstGeom prst="rect">
             <a:avLst/>
@@ -3695,7 +3615,7 @@
           <a:lstStyle/>
           <a:p>
             <a:pPr>
-              <a:defRPr sz="2000" b="1">
+              <a:defRPr sz="1900" b="1">
                 <a:solidFill>
                   <a:srgbClr val="EF4444"/>
                 </a:solidFill>
@@ -3721,7 +3641,7 @@
       </p:sp>
       <p:sp>
         <p:nvSpPr>
-          <p:cNvPr id="16" name="TextBox 15"/>
+          <p:cNvPr id="15" name="TextBox 14"/>
           <p:cNvSpPr txBox="1"/>
           <p:nvPr/>
         </p:nvSpPr>
@@ -6800,7 +6720,7 @@
               </a:defRPr>
             </a:pPr>
             <a:r>
-              <a:t>※ 출처: 화장품법 제10조(기재사항) 및 화학제품안전법 제10조(안전기준의 적합확인)</a:t>
+              <a:t>※ 출처: 화장품법 제10조 및 화학제품안전법 제10조</a:t>
             </a:r>
           </a:p>
         </p:txBody>
@@ -7534,8 +7454,8 @@
         </p:nvSpPr>
         <p:spPr>
           <a:xfrm>
-            <a:off x="1097280" y="2011680"/>
-            <a:ext cx="2468880" cy="2468880"/>
+            <a:off x="1005840" y="2011680"/>
+            <a:ext cx="2377440" cy="2377440"/>
           </a:xfrm>
           <a:prstGeom prst="ellipse">
             <a:avLst/>
@@ -7579,8 +7499,8 @@
         </p:nvSpPr>
         <p:spPr>
           <a:xfrm>
-            <a:off x="1097280" y="2194560"/>
-            <a:ext cx="2468880" cy="2103120"/>
+            <a:off x="1005840" y="2194560"/>
+            <a:ext cx="2377440" cy="2011680"/>
           </a:xfrm>
           <a:prstGeom prst="rect">
             <a:avLst/>
@@ -7606,7 +7526,7 @@
           </a:p>
           <a:p>
             <a:pPr algn="ctr">
-              <a:defRPr sz="4000" b="1">
+              <a:defRPr sz="3800" b="1">
                 <a:solidFill>
                   <a:srgbClr val="0F172A"/>
                 </a:solidFill>
@@ -7618,7 +7538,7 @@
           </a:p>
           <a:p>
             <a:pPr algn="ctr">
-              <a:defRPr sz="950" b="1">
+              <a:defRPr sz="900" b="1">
                 <a:solidFill>
                   <a:srgbClr val="64748B"/>
                 </a:solidFill>
@@ -7629,7 +7549,7 @@
             </a:r>
             <a:br/>
             <a:r>
-              <a:t>(소요 2~4주 · 22만~100만 원)</a:t>
+              <a:t>(2~4주 · 22만~100만 원)</a:t>
             </a:r>
           </a:p>
         </p:txBody>
@@ -7642,8 +7562,8 @@
         </p:nvSpPr>
         <p:spPr>
           <a:xfrm>
-            <a:off x="3931920" y="2880360"/>
-            <a:ext cx="4114800" cy="777240"/>
+            <a:off x="3566160" y="2834640"/>
+            <a:ext cx="3108960" cy="731520"/>
           </a:xfrm>
           <a:prstGeom prst="rightArrow">
             <a:avLst/>
@@ -7685,8 +7605,8 @@
         </p:nvSpPr>
         <p:spPr>
           <a:xfrm>
-            <a:off x="3931920" y="3017520"/>
-            <a:ext cx="3840480" cy="548640"/>
+            <a:off x="3566160" y="2971800"/>
+            <a:ext cx="2926080" cy="457200"/>
           </a:xfrm>
           <a:prstGeom prst="rect">
             <a:avLst/>
@@ -7700,14 +7620,18 @@
           <a:lstStyle/>
           <a:p>
             <a:pPr algn="ctr">
-              <a:defRPr sz="1300" b="1">
+              <a:defRPr sz="1100" b="1">
                 <a:solidFill>
                   <a:srgbClr val="FFFFFF"/>
                 </a:solidFill>
               </a:defRPr>
             </a:pPr>
             <a:r>
-              <a:t>접점 5개 ➔ 1개 / 소요시간 98% 절감</a:t>
+              <a:t>접점 5개 ➔ 1개</a:t>
+            </a:r>
+            <a:br/>
+            <a:r>
+              <a:t>소요시간 98% 절감</a:t>
             </a:r>
           </a:p>
         </p:txBody>
@@ -7720,8 +7644,8 @@
         </p:nvSpPr>
         <p:spPr>
           <a:xfrm>
-            <a:off x="8412480" y="1874519"/>
-            <a:ext cx="2743200" cy="2743200"/>
+            <a:off x="6858000" y="1920240"/>
+            <a:ext cx="2560320" cy="2560320"/>
           </a:xfrm>
           <a:prstGeom prst="ellipse">
             <a:avLst/>
@@ -7763,8 +7687,8 @@
         </p:nvSpPr>
         <p:spPr>
           <a:xfrm>
-            <a:off x="8412480" y="2103120"/>
-            <a:ext cx="2743200" cy="2286000"/>
+            <a:off x="6858000" y="2148840"/>
+            <a:ext cx="2560320" cy="2103120"/>
           </a:xfrm>
           <a:prstGeom prst="rect">
             <a:avLst/>
@@ -7778,7 +7702,7 @@
           <a:lstStyle/>
           <a:p>
             <a:pPr algn="ctr">
-              <a:defRPr sz="1300" b="1">
+              <a:defRPr sz="1250" b="1">
                 <a:solidFill>
                   <a:srgbClr val="BAE6FD"/>
                 </a:solidFill>
@@ -7790,7 +7714,7 @@
           </a:p>
           <a:p>
             <a:pPr algn="ctr">
-              <a:defRPr sz="4800" b="1">
+              <a:defRPr sz="4400" b="1">
                 <a:solidFill>
                   <a:srgbClr val="FFFFFF"/>
                 </a:solidFill>
@@ -7802,7 +7726,7 @@
           </a:p>
           <a:p>
             <a:pPr algn="ctr">
-              <a:defRPr sz="1050" b="1">
+              <a:defRPr sz="1000" b="1">
                 <a:solidFill>
                   <a:srgbClr val="FFFFFF"/>
                 </a:solidFill>
@@ -7813,14 +7737,73 @@
             </a:r>
             <a:br/>
             <a:r>
-              <a:t>(1초 완성 · 건당 1.9만 원)</a:t>
-            </a:r>
-          </a:p>
-        </p:txBody>
-      </p:sp>
-      <p:sp>
-        <p:nvSpPr>
-          <p:cNvPr id="15" name="Rounded Rectangle 14"/>
+              <a:t>(1초 완성 · 1.9만 원)</a:t>
+            </a:r>
+          </a:p>
+        </p:txBody>
+      </p:sp>
+      <p:pic>
+        <p:nvPicPr>
+          <p:cNvPr id="15" name="Picture 14" descr="glass_growth.jpg"/>
+          <p:cNvPicPr>
+            <a:picLocks noChangeAspect="1"/>
+          </p:cNvPicPr>
+          <p:nvPr/>
+        </p:nvPicPr>
+        <p:blipFill>
+          <a:blip r:embed="rId2"/>
+          <a:stretch>
+            <a:fillRect/>
+          </a:stretch>
+        </p:blipFill>
+        <p:spPr>
+          <a:xfrm>
+            <a:off x="9601200" y="2011680"/>
+            <a:ext cx="1645920" cy="1645920"/>
+          </a:xfrm>
+          <a:prstGeom prst="rect">
+            <a:avLst/>
+          </a:prstGeom>
+        </p:spPr>
+      </p:pic>
+      <p:sp>
+        <p:nvSpPr>
+          <p:cNvPr id="16" name="TextBox 15"/>
+          <p:cNvSpPr txBox="1"/>
+          <p:nvPr/>
+        </p:nvSpPr>
+        <p:spPr>
+          <a:xfrm>
+            <a:off x="9601200" y="3749039"/>
+            <a:ext cx="1645920" cy="365760"/>
+          </a:xfrm>
+          <a:prstGeom prst="rect">
+            <a:avLst/>
+          </a:prstGeom>
+          <a:noFill/>
+        </p:spPr>
+        <p:txBody>
+          <a:bodyPr wrap="none">
+            <a:spAutoFit/>
+          </a:bodyPr>
+          <a:lstStyle/>
+          <a:p>
+            <a:pPr algn="ctr">
+              <a:defRPr sz="950" b="1">
+                <a:solidFill>
+                  <a:srgbClr val="1E60F2"/>
+                </a:solidFill>
+              </a:defRPr>
+            </a:pPr>
+            <a:r>
+              <a:t>+98% 공정 시간 단축</a:t>
+            </a:r>
+          </a:p>
+        </p:txBody>
+      </p:sp>
+      <p:sp>
+        <p:nvSpPr>
+          <p:cNvPr id="17" name="Rounded Rectangle 16"/>
           <p:cNvSpPr/>
           <p:nvPr/>
         </p:nvSpPr>
@@ -7865,7 +7848,7 @@
       </p:sp>
       <p:sp>
         <p:nvSpPr>
-          <p:cNvPr id="16" name="TextBox 15"/>
+          <p:cNvPr id="18" name="TextBox 17"/>
           <p:cNvSpPr txBox="1"/>
           <p:nvPr/>
         </p:nvSpPr>
@@ -7924,7 +7907,7 @@
       </p:sp>
       <p:sp>
         <p:nvSpPr>
-          <p:cNvPr id="17" name="Rounded Rectangle 16"/>
+          <p:cNvPr id="19" name="Rounded Rectangle 18"/>
           <p:cNvSpPr/>
           <p:nvPr/>
         </p:nvSpPr>
@@ -7969,7 +7952,7 @@
       </p:sp>
       <p:sp>
         <p:nvSpPr>
-          <p:cNvPr id="18" name="TextBox 17"/>
+          <p:cNvPr id="20" name="TextBox 19"/>
           <p:cNvSpPr txBox="1"/>
           <p:nvPr/>
         </p:nvSpPr>
@@ -9556,7 +9539,7 @@
           <a:lstStyle/>
           <a:p>
             <a:pPr>
-              <a:defRPr sz="950" b="1">
+              <a:defRPr sz="950">
                 <a:solidFill>
                   <a:srgbClr val="1E60F2"/>
                 </a:solidFill>
@@ -9623,16 +9606,40 @@
           </a:p>
         </p:txBody>
       </p:sp>
-      <p:sp>
-        <p:nvSpPr>
-          <p:cNvPr id="20" name="TextBox 19"/>
+      <p:pic>
+        <p:nvPicPr>
+          <p:cNvPr id="20" name="Picture 19" descr="glass_cart.jpg"/>
+          <p:cNvPicPr>
+            <a:picLocks noChangeAspect="1"/>
+          </p:cNvPicPr>
+          <p:nvPr/>
+        </p:nvPicPr>
+        <p:blipFill>
+          <a:blip r:embed="rId2"/>
+          <a:stretch>
+            <a:fillRect/>
+          </a:stretch>
+        </p:blipFill>
+        <p:spPr>
+          <a:xfrm>
+            <a:off x="10241280" y="1874519"/>
+            <a:ext cx="960120" cy="960120"/>
+          </a:xfrm>
+          <a:prstGeom prst="rect">
+            <a:avLst/>
+          </a:prstGeom>
+        </p:spPr>
+      </p:pic>
+      <p:sp>
+        <p:nvSpPr>
+          <p:cNvPr id="21" name="TextBox 20"/>
           <p:cNvSpPr txBox="1"/>
           <p:nvPr/>
         </p:nvSpPr>
         <p:spPr>
           <a:xfrm>
             <a:off x="6949440" y="1920240"/>
-            <a:ext cx="4206240" cy="3931920"/>
+            <a:ext cx="3291840" cy="731520"/>
           </a:xfrm>
           <a:prstGeom prst="rect">
             <a:avLst/>
@@ -9657,71 +9664,105 @@
             </a:r>
           </a:p>
           <a:p>
+            <a:pPr>
+              <a:defRPr sz="1050">
+                <a:solidFill>
+                  <a:srgbClr val="64748B"/>
+                </a:solidFill>
+              </a:defRPr>
+            </a:pPr>
+            <a:r>
+              <a:t>인디 뷰티 &amp; 향기 커머스 유통 분석</a:t>
+            </a:r>
+          </a:p>
+        </p:txBody>
+      </p:sp>
+      <p:sp>
+        <p:nvSpPr>
+          <p:cNvPr id="22" name="TextBox 21"/>
+          <p:cNvSpPr txBox="1"/>
+          <p:nvPr/>
+        </p:nvSpPr>
+        <p:spPr>
+          <a:xfrm>
+            <a:off x="6949440" y="2834640"/>
+            <a:ext cx="4206240" cy="3017520"/>
+          </a:xfrm>
+          <a:prstGeom prst="rect">
+            <a:avLst/>
+          </a:prstGeom>
+          <a:noFill/>
+        </p:spPr>
+        <p:txBody>
+          <a:bodyPr wrap="square">
+            <a:spAutoFit/>
+          </a:bodyPr>
+          <a:lstStyle/>
+          <a:p>
+            <a:pPr>
+              <a:defRPr sz="1200" b="1">
+                <a:solidFill>
+                  <a:srgbClr val="1E60F2"/>
+                </a:solidFill>
+              </a:defRPr>
+            </a:pPr>
+            <a:r>
+              <a:t>● 1인 인디 브랜드 급증세</a:t>
+            </a:r>
+          </a:p>
+          <a:p>
+            <a:pPr>
+              <a:defRPr sz="1000">
+                <a:solidFill>
+                  <a:srgbClr val="334155"/>
+                </a:solidFill>
+              </a:defRPr>
+            </a:pPr>
+            <a:r>
+              <a:t>K-뷰티 인디 브랜드 열풍으로 연간 4,071개 제조판매업체가 신규 진입하며 전문 규제 인력 부재 문제 심각.</a:t>
+            </a:r>
+          </a:p>
+          <a:p>
             <a:br/>
             <a:pPr>
-              <a:defRPr sz="1250" b="1">
+              <a:defRPr sz="1200" b="1">
                 <a:solidFill>
                   <a:srgbClr val="1E60F2"/>
                 </a:solidFill>
               </a:defRPr>
             </a:pPr>
             <a:r>
-              <a:t>● 1인 인디 브랜드 급증세</a:t>
-            </a:r>
-          </a:p>
-          <a:p>
-            <a:pPr>
-              <a:defRPr sz="1050">
+              <a:t>● 규제 행정 지출 1,200억 원</a:t>
+            </a:r>
+          </a:p>
+          <a:p>
+            <a:pPr>
+              <a:defRPr sz="1000">
                 <a:solidFill>
                   <a:srgbClr val="334155"/>
                 </a:solidFill>
               </a:defRPr>
             </a:pPr>
             <a:r>
-              <a:t>K-뷰티 인디 브랜드 열풍으로 연간 4,071개 제조판매업체가 신규 진입하며 전문 규제 인력 부재 문제 심각.</a:t>
+              <a:t>브랜드당 연간 신제품 5~10종 출시로 매년 수백만 원의 서류 대행 및 인쇄 비용 지출 발생.</a:t>
             </a:r>
           </a:p>
           <a:p>
             <a:br/>
             <a:pPr>
-              <a:defRPr sz="1250" b="1">
+              <a:defRPr sz="1200" b="1">
                 <a:solidFill>
                   <a:srgbClr val="1E60F2"/>
                 </a:solidFill>
               </a:defRPr>
             </a:pPr>
             <a:r>
-              <a:t>● 규제 행정 지출 1,200억 원</a:t>
-            </a:r>
-          </a:p>
-          <a:p>
-            <a:pPr>
-              <a:defRPr sz="1050">
-                <a:solidFill>
-                  <a:srgbClr val="334155"/>
-                </a:solidFill>
-              </a:defRPr>
-            </a:pPr>
-            <a:r>
-              <a:t>브랜드당 연간 신제품 5~10종 출시로 매년 수백만 원의 서류 대행 및 인쇄 비용 지출 발생.</a:t>
-            </a:r>
-          </a:p>
-          <a:p>
-            <a:br/>
-            <a:pPr>
-              <a:defRPr sz="1250" b="1">
-                <a:solidFill>
-                  <a:srgbClr val="1E60F2"/>
-                </a:solidFill>
-              </a:defRPr>
-            </a:pPr>
-            <a:r>
               <a:t>● 초기 SOM 48억 원 선점</a:t>
             </a:r>
           </a:p>
           <a:p>
             <a:pPr>
-              <a:defRPr sz="1050">
+              <a:defRPr sz="1000">
                 <a:solidFill>
                   <a:srgbClr val="334155"/>
                 </a:solidFill>
@@ -10376,16 +10417,40 @@
           </a:p>
         </p:txBody>
       </p:sp>
-      <p:sp>
-        <p:nvSpPr>
-          <p:cNvPr id="15" name="TextBox 14"/>
+      <p:pic>
+        <p:nvPicPr>
+          <p:cNvPr id="15" name="Picture 14" descr="glass_shield.jpg"/>
+          <p:cNvPicPr>
+            <a:picLocks noChangeAspect="1"/>
+          </p:cNvPicPr>
+          <p:nvPr/>
+        </p:nvPicPr>
+        <p:blipFill>
+          <a:blip r:embed="rId2"/>
+          <a:stretch>
+            <a:fillRect/>
+          </a:stretch>
+        </p:blipFill>
+        <p:spPr>
+          <a:xfrm>
+            <a:off x="914400" y="5440680"/>
+            <a:ext cx="658368" cy="658368"/>
+          </a:xfrm>
+          <a:prstGeom prst="rect">
+            <a:avLst/>
+          </a:prstGeom>
+        </p:spPr>
+      </p:pic>
+      <p:sp>
+        <p:nvSpPr>
+          <p:cNvPr id="16" name="TextBox 15"/>
           <p:cNvSpPr txBox="1"/>
           <p:nvPr/>
         </p:nvSpPr>
         <p:spPr>
           <a:xfrm>
-            <a:off x="914400" y="5486400"/>
-            <a:ext cx="10332720" cy="594360"/>
+            <a:off x="1691640" y="5486400"/>
+            <a:ext cx="9509760" cy="594360"/>
           </a:xfrm>
           <a:prstGeom prst="rect">
             <a:avLst/>

--- a/public/formu_pitch_deck.pptx
+++ b/public/formu_pitch_deck.pptx
@@ -6994,11 +6994,11 @@
               </a:defRPr>
             </a:pPr>
             <a:r>
-              <a:t>CHEMP 배합비율표</a:t>
+              <a:t>CHEMP 100% 배합비율표</a:t>
             </a:r>
             <a:br/>
             <a:r>
-              <a:t>수기 엑셀 지옥</a:t>
+              <a:t>수기 연산 및 오기재 리스크</a:t>
             </a:r>
             <a:br/>
           </a:p>

--- a/public/formu_pitch_deck.pptx
+++ b/public/formu_pitch_deck.pptx
@@ -3113,7 +3113,7 @@
             <a:avLst/>
           </a:prstGeom>
           <a:solidFill>
-            <a:srgbClr val="F8FAFC"/>
+            <a:srgbClr val="F4F4F6"/>
           </a:solidFill>
           <a:ln>
             <a:noFill/>
@@ -3156,7 +3156,7 @@
             <a:avLst/>
           </a:prstGeom>
           <a:solidFill>
-            <a:srgbClr val="F3E8FF"/>
+            <a:srgbClr val="EBEBFC"/>
           </a:solidFill>
           <a:ln w="15240">
             <a:solidFill>
@@ -3246,7 +3246,7 @@
             <a:pPr>
               <a:defRPr sz="5000" b="1">
                 <a:solidFill>
-                  <a:srgbClr val="0F172A"/>
+                  <a:srgbClr val="0A0A0A"/>
                 </a:solidFill>
               </a:defRPr>
             </a:pPr>
@@ -3258,7 +3258,7 @@
             <a:pPr>
               <a:defRPr sz="2200" b="1">
                 <a:solidFill>
-                  <a:srgbClr val="3182F6"/>
+                  <a:srgbClr val="585ECE"/>
                 </a:solidFill>
               </a:defRPr>
             </a:pPr>
@@ -3296,7 +3296,7 @@
               </a:lnSpc>
               <a:defRPr sz="1400">
                 <a:solidFill>
-                  <a:srgbClr val="475569"/>
+                  <a:srgbClr val="52525B"/>
                 </a:solidFill>
               </a:defRPr>
             </a:pPr>
@@ -3335,7 +3335,7 @@
             <a:pPr>
               <a:defRPr sz="1100" b="1">
                 <a:solidFill>
-                  <a:srgbClr val="64748B"/>
+                  <a:srgbClr val="71717A"/>
                 </a:solidFill>
               </a:defRPr>
             </a:pPr>
@@ -3364,7 +3364,7 @@
           </a:solidFill>
           <a:ln w="22860">
             <a:solidFill>
-              <a:srgbClr val="3182F6"/>
+              <a:srgbClr val="585ECE"/>
             </a:solidFill>
           </a:ln>
         </p:spPr>
@@ -3409,7 +3409,7 @@
           </a:solidFill>
           <a:ln w="19050">
             <a:solidFill>
-              <a:srgbClr val="3182F6"/>
+              <a:srgbClr val="585ECE"/>
             </a:solidFill>
           </a:ln>
         </p:spPr>
@@ -3460,7 +3460,7 @@
             <a:pPr>
               <a:defRPr sz="1350" b="1">
                 <a:solidFill>
-                  <a:srgbClr val="3182F6"/>
+                  <a:srgbClr val="585ECE"/>
                 </a:solidFill>
               </a:defRPr>
             </a:pPr>
@@ -3472,7 +3472,7 @@
             <a:pPr>
               <a:defRPr sz="1050">
                 <a:solidFill>
-                  <a:srgbClr val="475569"/>
+                  <a:srgbClr val="52525B"/>
                 </a:solidFill>
               </a:defRPr>
             </a:pPr>
@@ -3564,7 +3564,7 @@
             <a:pPr>
               <a:defRPr sz="1050">
                 <a:solidFill>
-                  <a:srgbClr val="475569"/>
+                  <a:srgbClr val="52525B"/>
                 </a:solidFill>
               </a:defRPr>
             </a:pPr>
@@ -3656,7 +3656,7 @@
             <a:pPr>
               <a:defRPr sz="1050">
                 <a:solidFill>
-                  <a:srgbClr val="475569"/>
+                  <a:srgbClr val="52525B"/>
                 </a:solidFill>
               </a:defRPr>
             </a:pPr>
@@ -3691,7 +3691,7 @@
             <a:pPr>
               <a:defRPr sz="900">
                 <a:solidFill>
-                  <a:srgbClr val="64748B"/>
+                  <a:srgbClr val="71717A"/>
                 </a:solidFill>
                 <a:latin typeface="Pretendard"/>
               </a:defRPr>
@@ -3727,7 +3727,7 @@
             <a:pPr algn="r">
               <a:defRPr sz="1000" b="1">
                 <a:solidFill>
-                  <a:srgbClr val="3182F6"/>
+                  <a:srgbClr val="585ECE"/>
                 </a:solidFill>
                 <a:latin typeface="Pretendard"/>
               </a:defRPr>
@@ -3771,7 +3771,7 @@
             <a:avLst/>
           </a:prstGeom>
           <a:solidFill>
-            <a:srgbClr val="F8FAFC"/>
+            <a:srgbClr val="F4F4F6"/>
           </a:solidFill>
           <a:ln>
             <a:noFill/>
@@ -3814,11 +3814,11 @@
             <a:avLst/>
           </a:prstGeom>
           <a:solidFill>
-            <a:srgbClr val="EEF4FF"/>
+            <a:srgbClr val="F4F5FF"/>
           </a:solidFill>
           <a:ln w="12700">
             <a:solidFill>
-              <a:srgbClr val="3182F6"/>
+              <a:srgbClr val="585ECE"/>
             </a:solidFill>
           </a:ln>
         </p:spPr>
@@ -3869,7 +3869,7 @@
             <a:pPr>
               <a:defRPr sz="1000" b="1">
                 <a:solidFill>
-                  <a:srgbClr val="3182F6"/>
+                  <a:srgbClr val="585ECE"/>
                 </a:solidFill>
                 <a:latin typeface="Pretendard"/>
               </a:defRPr>
@@ -3905,7 +3905,7 @@
             <a:pPr>
               <a:defRPr sz="2300" b="1">
                 <a:solidFill>
-                  <a:srgbClr val="0F172A"/>
+                  <a:srgbClr val="0A0A0A"/>
                 </a:solidFill>
                 <a:latin typeface="Pretendard"/>
               </a:defRPr>
@@ -3941,7 +3941,7 @@
             <a:pPr>
               <a:defRPr sz="1200">
                 <a:solidFill>
-                  <a:srgbClr val="475569"/>
+                  <a:srgbClr val="52525B"/>
                 </a:solidFill>
                 <a:latin typeface="Pretendard"/>
               </a:defRPr>
@@ -3977,7 +3977,7 @@
             <a:pPr>
               <a:defRPr sz="900">
                 <a:solidFill>
-                  <a:srgbClr val="64748B"/>
+                  <a:srgbClr val="71717A"/>
                 </a:solidFill>
                 <a:latin typeface="Pretendard"/>
               </a:defRPr>
@@ -4013,7 +4013,7 @@
             <a:pPr algn="r">
               <a:defRPr sz="1000" b="1">
                 <a:solidFill>
-                  <a:srgbClr val="3182F6"/>
+                  <a:srgbClr val="585ECE"/>
                 </a:solidFill>
                 <a:latin typeface="Pretendard"/>
               </a:defRPr>
@@ -4172,7 +4172,7 @@
             <a:pPr>
               <a:defRPr sz="1500" b="1">
                 <a:solidFill>
-                  <a:srgbClr val="0F172A"/>
+                  <a:srgbClr val="0A0A0A"/>
                 </a:solidFill>
               </a:defRPr>
             </a:pPr>
@@ -4210,7 +4210,7 @@
               </a:lnSpc>
               <a:defRPr sz="1100">
                 <a:solidFill>
-                  <a:srgbClr val="475569"/>
+                  <a:srgbClr val="52525B"/>
                 </a:solidFill>
               </a:defRPr>
             </a:pPr>
@@ -4243,7 +4243,7 @@
           </a:solidFill>
           <a:ln w="22860">
             <a:solidFill>
-              <a:srgbClr val="3182F6"/>
+              <a:srgbClr val="585ECE"/>
             </a:solidFill>
           </a:ln>
         </p:spPr>
@@ -4284,7 +4284,7 @@
             <a:avLst/>
           </a:prstGeom>
           <a:solidFill>
-            <a:srgbClr val="3182F6"/>
+            <a:srgbClr val="585ECE"/>
           </a:solidFill>
           <a:ln>
             <a:noFill/>
@@ -4372,7 +4372,7 @@
             <a:pPr>
               <a:defRPr sz="1500" b="1">
                 <a:solidFill>
-                  <a:srgbClr val="0F172A"/>
+                  <a:srgbClr val="0A0A0A"/>
                 </a:solidFill>
               </a:defRPr>
             </a:pPr>
@@ -4410,7 +4410,7 @@
               </a:lnSpc>
               <a:defRPr sz="1100">
                 <a:solidFill>
-                  <a:srgbClr val="475569"/>
+                  <a:srgbClr val="52525B"/>
                 </a:solidFill>
               </a:defRPr>
             </a:pPr>
@@ -4568,7 +4568,7 @@
             <a:pPr>
               <a:defRPr sz="1500" b="1">
                 <a:solidFill>
-                  <a:srgbClr val="0F172A"/>
+                  <a:srgbClr val="0A0A0A"/>
                 </a:solidFill>
               </a:defRPr>
             </a:pPr>
@@ -4606,7 +4606,7 @@
               </a:lnSpc>
               <a:defRPr sz="1100">
                 <a:solidFill>
-                  <a:srgbClr val="475569"/>
+                  <a:srgbClr val="52525B"/>
                 </a:solidFill>
               </a:defRPr>
             </a:pPr>
@@ -4635,7 +4635,7 @@
           </a:solidFill>
           <a:ln w="19050">
             <a:solidFill>
-              <a:srgbClr val="3182F6"/>
+              <a:srgbClr val="585ECE"/>
             </a:solidFill>
           </a:ln>
         </p:spPr>
@@ -4686,7 +4686,7 @@
             <a:pPr>
               <a:defRPr sz="1100" b="1">
                 <a:solidFill>
-                  <a:srgbClr val="3182F6"/>
+                  <a:srgbClr val="585ECE"/>
                 </a:solidFill>
               </a:defRPr>
             </a:pPr>
@@ -4698,7 +4698,7 @@
             <a:pPr>
               <a:defRPr sz="950">
                 <a:solidFill>
-                  <a:srgbClr val="475569"/>
+                  <a:srgbClr val="52525B"/>
                 </a:solidFill>
               </a:defRPr>
             </a:pPr>
@@ -4745,7 +4745,7 @@
             <a:avLst/>
           </a:prstGeom>
           <a:solidFill>
-            <a:srgbClr val="F8FAFC"/>
+            <a:srgbClr val="F4F4F6"/>
           </a:solidFill>
           <a:ln>
             <a:noFill/>
@@ -4788,11 +4788,11 @@
             <a:avLst/>
           </a:prstGeom>
           <a:solidFill>
-            <a:srgbClr val="EEF4FF"/>
+            <a:srgbClr val="F4F5FF"/>
           </a:solidFill>
           <a:ln w="12700">
             <a:solidFill>
-              <a:srgbClr val="3182F6"/>
+              <a:srgbClr val="585ECE"/>
             </a:solidFill>
           </a:ln>
         </p:spPr>
@@ -4843,7 +4843,7 @@
             <a:pPr>
               <a:defRPr sz="1000" b="1">
                 <a:solidFill>
-                  <a:srgbClr val="3182F6"/>
+                  <a:srgbClr val="585ECE"/>
                 </a:solidFill>
                 <a:latin typeface="Pretendard"/>
               </a:defRPr>
@@ -4879,7 +4879,7 @@
             <a:pPr>
               <a:defRPr sz="2300" b="1">
                 <a:solidFill>
-                  <a:srgbClr val="0F172A"/>
+                  <a:srgbClr val="0A0A0A"/>
                 </a:solidFill>
                 <a:latin typeface="Pretendard"/>
               </a:defRPr>
@@ -4915,7 +4915,7 @@
             <a:pPr>
               <a:defRPr sz="1200">
                 <a:solidFill>
-                  <a:srgbClr val="475569"/>
+                  <a:srgbClr val="52525B"/>
                 </a:solidFill>
                 <a:latin typeface="Pretendard"/>
               </a:defRPr>
@@ -4951,7 +4951,7 @@
             <a:pPr>
               <a:defRPr sz="900">
                 <a:solidFill>
-                  <a:srgbClr val="64748B"/>
+                  <a:srgbClr val="71717A"/>
                 </a:solidFill>
                 <a:latin typeface="Pretendard"/>
               </a:defRPr>
@@ -4987,7 +4987,7 @@
             <a:pPr algn="r">
               <a:defRPr sz="1000" b="1">
                 <a:solidFill>
-                  <a:srgbClr val="3182F6"/>
+                  <a:srgbClr val="585ECE"/>
                 </a:solidFill>
                 <a:latin typeface="Pretendard"/>
               </a:defRPr>
@@ -5013,11 +5013,11 @@
             <a:avLst/>
           </a:prstGeom>
           <a:solidFill>
-            <a:srgbClr val="0F172A"/>
+            <a:srgbClr val="0A0A0A"/>
           </a:solidFill>
           <a:ln w="25400">
             <a:solidFill>
-              <a:srgbClr val="3182F6"/>
+              <a:srgbClr val="585ECE"/>
             </a:solidFill>
           </a:ln>
         </p:spPr>
@@ -5116,7 +5116,7 @@
           </a:solidFill>
           <a:ln w="22860">
             <a:solidFill>
-              <a:srgbClr val="3182F6"/>
+              <a:srgbClr val="585ECE"/>
             </a:solidFill>
           </a:ln>
         </p:spPr>
@@ -5167,7 +5167,7 @@
             <a:pPr>
               <a:defRPr sz="1100" b="1">
                 <a:solidFill>
-                  <a:srgbClr val="3182F6"/>
+                  <a:srgbClr val="585ECE"/>
                 </a:solidFill>
               </a:defRPr>
             </a:pPr>
@@ -5202,7 +5202,7 @@
             <a:pPr>
               <a:defRPr sz="1600" b="1">
                 <a:solidFill>
-                  <a:srgbClr val="0F172A"/>
+                  <a:srgbClr val="0A0A0A"/>
                 </a:solidFill>
               </a:defRPr>
             </a:pPr>
@@ -5240,7 +5240,7 @@
               </a:lnSpc>
               <a:defRPr sz="1100">
                 <a:solidFill>
-                  <a:srgbClr val="475569"/>
+                  <a:srgbClr val="52525B"/>
                 </a:solidFill>
               </a:defRPr>
             </a:pPr>
@@ -5355,7 +5355,7 @@
             <a:pPr>
               <a:defRPr sz="1600" b="1">
                 <a:solidFill>
-                  <a:srgbClr val="0F172A"/>
+                  <a:srgbClr val="0A0A0A"/>
                 </a:solidFill>
               </a:defRPr>
             </a:pPr>
@@ -5393,7 +5393,7 @@
               </a:lnSpc>
               <a:defRPr sz="1100">
                 <a:solidFill>
-                  <a:srgbClr val="475569"/>
+                  <a:srgbClr val="52525B"/>
                 </a:solidFill>
               </a:defRPr>
             </a:pPr>
@@ -5422,7 +5422,7 @@
           </a:solidFill>
           <a:ln w="22860">
             <a:solidFill>
-              <a:srgbClr val="03C75A"/>
+              <a:srgbClr val="10B981"/>
             </a:solidFill>
           </a:ln>
         </p:spPr>
@@ -5473,7 +5473,7 @@
             <a:pPr>
               <a:defRPr sz="1100" b="1">
                 <a:solidFill>
-                  <a:srgbClr val="03C75A"/>
+                  <a:srgbClr val="10B981"/>
                 </a:solidFill>
               </a:defRPr>
             </a:pPr>
@@ -5508,7 +5508,7 @@
             <a:pPr>
               <a:defRPr sz="1600" b="1">
                 <a:solidFill>
-                  <a:srgbClr val="0F172A"/>
+                  <a:srgbClr val="0A0A0A"/>
                 </a:solidFill>
               </a:defRPr>
             </a:pPr>
@@ -5546,7 +5546,7 @@
               </a:lnSpc>
               <a:defRPr sz="1100">
                 <a:solidFill>
-                  <a:srgbClr val="475569"/>
+                  <a:srgbClr val="52525B"/>
                 </a:solidFill>
               </a:defRPr>
             </a:pPr>
@@ -5589,7 +5589,7 @@
             <a:avLst/>
           </a:prstGeom>
           <a:solidFill>
-            <a:srgbClr val="F8FAFC"/>
+            <a:srgbClr val="F4F4F6"/>
           </a:solidFill>
           <a:ln>
             <a:noFill/>
@@ -5632,11 +5632,11 @@
             <a:avLst/>
           </a:prstGeom>
           <a:solidFill>
-            <a:srgbClr val="EEF4FF"/>
+            <a:srgbClr val="F4F5FF"/>
           </a:solidFill>
           <a:ln w="12700">
             <a:solidFill>
-              <a:srgbClr val="3182F6"/>
+              <a:srgbClr val="585ECE"/>
             </a:solidFill>
           </a:ln>
         </p:spPr>
@@ -5687,7 +5687,7 @@
             <a:pPr>
               <a:defRPr sz="1000" b="1">
                 <a:solidFill>
-                  <a:srgbClr val="3182F6"/>
+                  <a:srgbClr val="585ECE"/>
                 </a:solidFill>
                 <a:latin typeface="Pretendard"/>
               </a:defRPr>
@@ -5723,7 +5723,7 @@
             <a:pPr>
               <a:defRPr sz="2300" b="1">
                 <a:solidFill>
-                  <a:srgbClr val="0F172A"/>
+                  <a:srgbClr val="0A0A0A"/>
                 </a:solidFill>
                 <a:latin typeface="Pretendard"/>
               </a:defRPr>
@@ -5759,7 +5759,7 @@
             <a:pPr>
               <a:defRPr sz="1200">
                 <a:solidFill>
-                  <a:srgbClr val="475569"/>
+                  <a:srgbClr val="52525B"/>
                 </a:solidFill>
                 <a:latin typeface="Pretendard"/>
               </a:defRPr>
@@ -5795,7 +5795,7 @@
             <a:pPr>
               <a:defRPr sz="900">
                 <a:solidFill>
-                  <a:srgbClr val="64748B"/>
+                  <a:srgbClr val="71717A"/>
                 </a:solidFill>
                 <a:latin typeface="Pretendard"/>
               </a:defRPr>
@@ -5831,7 +5831,7 @@
             <a:pPr algn="r">
               <a:defRPr sz="1000" b="1">
                 <a:solidFill>
-                  <a:srgbClr val="3182F6"/>
+                  <a:srgbClr val="585ECE"/>
                 </a:solidFill>
                 <a:latin typeface="Pretendard"/>
               </a:defRPr>
@@ -5861,7 +5861,7 @@
           </a:solidFill>
           <a:ln w="15240">
             <a:solidFill>
-              <a:srgbClr val="3182F6"/>
+              <a:srgbClr val="585ECE"/>
             </a:solidFill>
           </a:ln>
         </p:spPr>
@@ -5902,7 +5902,7 @@
             <a:avLst/>
           </a:prstGeom>
           <a:solidFill>
-            <a:srgbClr val="3182F6"/>
+            <a:srgbClr val="585ECE"/>
           </a:solidFill>
           <a:ln>
             <a:noFill/>
@@ -5990,7 +5990,7 @@
             <a:pPr>
               <a:defRPr sz="1300" b="1">
                 <a:solidFill>
-                  <a:srgbClr val="3182F6"/>
+                  <a:srgbClr val="585ECE"/>
                 </a:solidFill>
               </a:defRPr>
             </a:pPr>
@@ -6002,7 +6002,7 @@
             <a:pPr>
               <a:defRPr sz="1000">
                 <a:solidFill>
-                  <a:srgbClr val="475569"/>
+                  <a:srgbClr val="52525B"/>
                 </a:solidFill>
               </a:defRPr>
             </a:pPr>
@@ -6031,7 +6031,7 @@
           </a:solidFill>
           <a:ln w="15240">
             <a:solidFill>
-              <a:srgbClr val="3182F6"/>
+              <a:srgbClr val="585ECE"/>
             </a:solidFill>
           </a:ln>
         </p:spPr>
@@ -6072,7 +6072,7 @@
             <a:avLst/>
           </a:prstGeom>
           <a:solidFill>
-            <a:srgbClr val="3182F6"/>
+            <a:srgbClr val="585ECE"/>
           </a:solidFill>
           <a:ln>
             <a:noFill/>
@@ -6160,7 +6160,7 @@
             <a:pPr>
               <a:defRPr sz="1300" b="1">
                 <a:solidFill>
-                  <a:srgbClr val="3182F6"/>
+                  <a:srgbClr val="585ECE"/>
                 </a:solidFill>
               </a:defRPr>
             </a:pPr>
@@ -6172,7 +6172,7 @@
             <a:pPr>
               <a:defRPr sz="1000">
                 <a:solidFill>
-                  <a:srgbClr val="475569"/>
+                  <a:srgbClr val="52525B"/>
                 </a:solidFill>
               </a:defRPr>
             </a:pPr>
@@ -6201,7 +6201,7 @@
           </a:solidFill>
           <a:ln w="15240">
             <a:solidFill>
-              <a:srgbClr val="3182F6"/>
+              <a:srgbClr val="585ECE"/>
             </a:solidFill>
           </a:ln>
         </p:spPr>
@@ -6242,7 +6242,7 @@
             <a:avLst/>
           </a:prstGeom>
           <a:solidFill>
-            <a:srgbClr val="3182F6"/>
+            <a:srgbClr val="585ECE"/>
           </a:solidFill>
           <a:ln>
             <a:noFill/>
@@ -6330,7 +6330,7 @@
             <a:pPr>
               <a:defRPr sz="1300" b="1">
                 <a:solidFill>
-                  <a:srgbClr val="3182F6"/>
+                  <a:srgbClr val="585ECE"/>
                 </a:solidFill>
               </a:defRPr>
             </a:pPr>
@@ -6342,7 +6342,7 @@
             <a:pPr>
               <a:defRPr sz="1000">
                 <a:solidFill>
-                  <a:srgbClr val="475569"/>
+                  <a:srgbClr val="52525B"/>
                 </a:solidFill>
               </a:defRPr>
             </a:pPr>
@@ -6371,7 +6371,7 @@
           </a:solidFill>
           <a:ln w="15240">
             <a:solidFill>
-              <a:srgbClr val="3182F6"/>
+              <a:srgbClr val="585ECE"/>
             </a:solidFill>
           </a:ln>
         </p:spPr>
@@ -6412,7 +6412,7 @@
             <a:avLst/>
           </a:prstGeom>
           <a:solidFill>
-            <a:srgbClr val="3182F6"/>
+            <a:srgbClr val="585ECE"/>
           </a:solidFill>
           <a:ln>
             <a:noFill/>
@@ -6500,7 +6500,7 @@
             <a:pPr>
               <a:defRPr sz="1300" b="1">
                 <a:solidFill>
-                  <a:srgbClr val="3182F6"/>
+                  <a:srgbClr val="585ECE"/>
                 </a:solidFill>
               </a:defRPr>
             </a:pPr>
@@ -6512,7 +6512,7 @@
             <a:pPr>
               <a:defRPr sz="1000">
                 <a:solidFill>
-                  <a:srgbClr val="475569"/>
+                  <a:srgbClr val="52525B"/>
                 </a:solidFill>
               </a:defRPr>
             </a:pPr>
@@ -6682,7 +6682,7 @@
             <a:pPr>
               <a:defRPr sz="1000">
                 <a:solidFill>
-                  <a:srgbClr val="475569"/>
+                  <a:srgbClr val="52525B"/>
                 </a:solidFill>
               </a:defRPr>
             </a:pPr>
@@ -6852,7 +6852,7 @@
             <a:pPr>
               <a:defRPr sz="1000">
                 <a:solidFill>
-                  <a:srgbClr val="475569"/>
+                  <a:srgbClr val="52525B"/>
                 </a:solidFill>
               </a:defRPr>
             </a:pPr>
@@ -6944,7 +6944,7 @@
             <a:pPr>
               <a:defRPr sz="1200" b="1">
                 <a:solidFill>
-                  <a:srgbClr val="1E293B"/>
+                  <a:srgbClr val="18181B"/>
                 </a:solidFill>
               </a:defRPr>
             </a:pPr>
@@ -6957,7 +6957,7 @@
             <a:pPr>
               <a:defRPr sz="1050">
                 <a:solidFill>
-                  <a:srgbClr val="475569"/>
+                  <a:srgbClr val="52525B"/>
                 </a:solidFill>
               </a:defRPr>
             </a:pPr>
@@ -7035,7 +7035,7 @@
             <a:pPr>
               <a:defRPr sz="1050" b="1">
                 <a:solidFill>
-                  <a:srgbClr val="1E293B"/>
+                  <a:srgbClr val="18181B"/>
                 </a:solidFill>
               </a:defRPr>
             </a:pPr>
@@ -7113,7 +7113,7 @@
             <a:pPr>
               <a:defRPr sz="1050" b="1">
                 <a:solidFill>
-                  <a:srgbClr val="1E293B"/>
+                  <a:srgbClr val="18181B"/>
                 </a:solidFill>
               </a:defRPr>
             </a:pPr>
@@ -7191,7 +7191,7 @@
             <a:pPr>
               <a:defRPr sz="1050" b="1">
                 <a:solidFill>
-                  <a:srgbClr val="1E293B"/>
+                  <a:srgbClr val="18181B"/>
                 </a:solidFill>
               </a:defRPr>
             </a:pPr>
@@ -7234,7 +7234,7 @@
             <a:avLst/>
           </a:prstGeom>
           <a:solidFill>
-            <a:srgbClr val="F8FAFC"/>
+            <a:srgbClr val="F4F4F6"/>
           </a:solidFill>
           <a:ln>
             <a:noFill/>
@@ -7277,11 +7277,11 @@
             <a:avLst/>
           </a:prstGeom>
           <a:solidFill>
-            <a:srgbClr val="EEF4FF"/>
+            <a:srgbClr val="F4F5FF"/>
           </a:solidFill>
           <a:ln w="12700">
             <a:solidFill>
-              <a:srgbClr val="3182F6"/>
+              <a:srgbClr val="585ECE"/>
             </a:solidFill>
           </a:ln>
         </p:spPr>
@@ -7332,7 +7332,7 @@
             <a:pPr>
               <a:defRPr sz="1000" b="1">
                 <a:solidFill>
-                  <a:srgbClr val="3182F6"/>
+                  <a:srgbClr val="585ECE"/>
                 </a:solidFill>
                 <a:latin typeface="Pretendard"/>
               </a:defRPr>
@@ -7368,7 +7368,7 @@
             <a:pPr>
               <a:defRPr sz="2300" b="1">
                 <a:solidFill>
-                  <a:srgbClr val="0F172A"/>
+                  <a:srgbClr val="0A0A0A"/>
                 </a:solidFill>
                 <a:latin typeface="Pretendard"/>
               </a:defRPr>
@@ -7404,7 +7404,7 @@
             <a:pPr>
               <a:defRPr sz="1200">
                 <a:solidFill>
-                  <a:srgbClr val="475569"/>
+                  <a:srgbClr val="52525B"/>
                 </a:solidFill>
                 <a:latin typeface="Pretendard"/>
               </a:defRPr>
@@ -7440,7 +7440,7 @@
             <a:pPr>
               <a:defRPr sz="900">
                 <a:solidFill>
-                  <a:srgbClr val="64748B"/>
+                  <a:srgbClr val="71717A"/>
                 </a:solidFill>
                 <a:latin typeface="Pretendard"/>
               </a:defRPr>
@@ -7476,7 +7476,7 @@
             <a:pPr algn="r">
               <a:defRPr sz="1000" b="1">
                 <a:solidFill>
-                  <a:srgbClr val="3182F6"/>
+                  <a:srgbClr val="585ECE"/>
                 </a:solidFill>
                 <a:latin typeface="Pretendard"/>
               </a:defRPr>
@@ -7506,7 +7506,7 @@
           </a:solidFill>
           <a:ln w="15240">
             <a:solidFill>
-              <a:srgbClr val="E2E8F0"/>
+              <a:srgbClr val="E4E4E7"/>
             </a:solidFill>
           </a:ln>
         </p:spPr>
@@ -7557,7 +7557,7 @@
             <a:pPr>
               <a:defRPr sz="1200" b="1">
                 <a:solidFill>
-                  <a:srgbClr val="64748B"/>
+                  <a:srgbClr val="71717A"/>
                 </a:solidFill>
               </a:defRPr>
             </a:pPr>
@@ -7582,11 +7582,11 @@
             <a:avLst/>
           </a:prstGeom>
           <a:solidFill>
-            <a:srgbClr val="F8FAFC"/>
+            <a:srgbClr val="F4F4F6"/>
           </a:solidFill>
           <a:ln w="15240">
             <a:solidFill>
-              <a:srgbClr val="E2E8F0"/>
+              <a:srgbClr val="E4E4E7"/>
             </a:solidFill>
           </a:ln>
         </p:spPr>
@@ -7637,7 +7637,7 @@
             <a:pPr>
               <a:defRPr sz="1100" b="1">
                 <a:solidFill>
-                  <a:srgbClr val="1E293B"/>
+                  <a:srgbClr val="18181B"/>
                 </a:solidFill>
               </a:defRPr>
             </a:pPr>
@@ -7649,7 +7649,7 @@
             <a:pPr>
               <a:defRPr sz="950">
                 <a:solidFill>
-                  <a:srgbClr val="64748B"/>
+                  <a:srgbClr val="71717A"/>
                 </a:solidFill>
               </a:defRPr>
             </a:pPr>
@@ -7674,11 +7674,11 @@
             <a:avLst/>
           </a:prstGeom>
           <a:solidFill>
-            <a:srgbClr val="F8FAFC"/>
+            <a:srgbClr val="F4F4F6"/>
           </a:solidFill>
           <a:ln w="15240">
             <a:solidFill>
-              <a:srgbClr val="E2E8F0"/>
+              <a:srgbClr val="E4E4E7"/>
             </a:solidFill>
           </a:ln>
         </p:spPr>
@@ -7729,7 +7729,7 @@
             <a:pPr>
               <a:defRPr sz="1100" b="1">
                 <a:solidFill>
-                  <a:srgbClr val="1E293B"/>
+                  <a:srgbClr val="18181B"/>
                 </a:solidFill>
               </a:defRPr>
             </a:pPr>
@@ -7741,7 +7741,7 @@
             <a:pPr>
               <a:defRPr sz="950">
                 <a:solidFill>
-                  <a:srgbClr val="64748B"/>
+                  <a:srgbClr val="71717A"/>
                 </a:solidFill>
               </a:defRPr>
             </a:pPr>
@@ -7766,11 +7766,11 @@
             <a:avLst/>
           </a:prstGeom>
           <a:solidFill>
-            <a:srgbClr val="F8FAFC"/>
+            <a:srgbClr val="F4F4F6"/>
           </a:solidFill>
           <a:ln w="15240">
             <a:solidFill>
-              <a:srgbClr val="E2E8F0"/>
+              <a:srgbClr val="E4E4E7"/>
             </a:solidFill>
           </a:ln>
         </p:spPr>
@@ -7821,7 +7821,7 @@
             <a:pPr>
               <a:defRPr sz="1100" b="1">
                 <a:solidFill>
-                  <a:srgbClr val="1E293B"/>
+                  <a:srgbClr val="18181B"/>
                 </a:solidFill>
               </a:defRPr>
             </a:pPr>
@@ -7833,7 +7833,7 @@
             <a:pPr>
               <a:defRPr sz="950">
                 <a:solidFill>
-                  <a:srgbClr val="64748B"/>
+                  <a:srgbClr val="71717A"/>
                 </a:solidFill>
               </a:defRPr>
             </a:pPr>
@@ -7858,11 +7858,11 @@
             <a:avLst/>
           </a:prstGeom>
           <a:solidFill>
-            <a:srgbClr val="F8FAFC"/>
+            <a:srgbClr val="F4F4F6"/>
           </a:solidFill>
           <a:ln w="15240">
             <a:solidFill>
-              <a:srgbClr val="E2E8F0"/>
+              <a:srgbClr val="E4E4E7"/>
             </a:solidFill>
           </a:ln>
         </p:spPr>
@@ -7913,7 +7913,7 @@
             <a:pPr>
               <a:defRPr sz="1100" b="1">
                 <a:solidFill>
-                  <a:srgbClr val="1E293B"/>
+                  <a:srgbClr val="18181B"/>
                 </a:solidFill>
               </a:defRPr>
             </a:pPr>
@@ -7925,7 +7925,7 @@
             <a:pPr>
               <a:defRPr sz="950">
                 <a:solidFill>
-                  <a:srgbClr val="64748B"/>
+                  <a:srgbClr val="71717A"/>
                 </a:solidFill>
               </a:defRPr>
             </a:pPr>
@@ -7950,11 +7950,11 @@
             <a:avLst/>
           </a:prstGeom>
           <a:solidFill>
-            <a:srgbClr val="F8FAFC"/>
+            <a:srgbClr val="F4F4F6"/>
           </a:solidFill>
           <a:ln w="15240">
             <a:solidFill>
-              <a:srgbClr val="E2E8F0"/>
+              <a:srgbClr val="E4E4E7"/>
             </a:solidFill>
           </a:ln>
         </p:spPr>
@@ -8005,7 +8005,7 @@
             <a:pPr>
               <a:defRPr sz="1100" b="1">
                 <a:solidFill>
-                  <a:srgbClr val="1E293B"/>
+                  <a:srgbClr val="18181B"/>
                 </a:solidFill>
               </a:defRPr>
             </a:pPr>
@@ -8017,7 +8017,7 @@
             <a:pPr>
               <a:defRPr sz="950">
                 <a:solidFill>
-                  <a:srgbClr val="64748B"/>
+                  <a:srgbClr val="71717A"/>
                 </a:solidFill>
               </a:defRPr>
             </a:pPr>
@@ -8046,7 +8046,7 @@
           </a:solidFill>
           <a:ln w="27940">
             <a:solidFill>
-              <a:srgbClr val="3182F6"/>
+              <a:srgbClr val="585ECE"/>
             </a:solidFill>
           </a:ln>
         </p:spPr>
@@ -8097,7 +8097,7 @@
             <a:pPr>
               <a:defRPr sz="1250" b="1">
                 <a:solidFill>
-                  <a:srgbClr val="3182F6"/>
+                  <a:srgbClr val="585ECE"/>
                 </a:solidFill>
               </a:defRPr>
             </a:pPr>
@@ -8122,11 +8122,11 @@
             <a:avLst/>
           </a:prstGeom>
           <a:solidFill>
-            <a:srgbClr val="EEF4FF"/>
+            <a:srgbClr val="F4F5FF"/>
           </a:solidFill>
           <a:ln w="15240">
             <a:solidFill>
-              <a:srgbClr val="3182F6"/>
+              <a:srgbClr val="585ECE"/>
             </a:solidFill>
           </a:ln>
         </p:spPr>
@@ -8177,7 +8177,7 @@
             <a:pPr>
               <a:defRPr sz="1100" b="1">
                 <a:solidFill>
-                  <a:srgbClr val="3182F6"/>
+                  <a:srgbClr val="585ECE"/>
                 </a:solidFill>
               </a:defRPr>
             </a:pPr>
@@ -8189,7 +8189,7 @@
             <a:pPr>
               <a:defRPr sz="950">
                 <a:solidFill>
-                  <a:srgbClr val="1E293B"/>
+                  <a:srgbClr val="18181B"/>
                 </a:solidFill>
               </a:defRPr>
             </a:pPr>
@@ -8214,11 +8214,11 @@
             <a:avLst/>
           </a:prstGeom>
           <a:solidFill>
-            <a:srgbClr val="EEF4FF"/>
+            <a:srgbClr val="F4F5FF"/>
           </a:solidFill>
           <a:ln w="15240">
             <a:solidFill>
-              <a:srgbClr val="3182F6"/>
+              <a:srgbClr val="585ECE"/>
             </a:solidFill>
           </a:ln>
         </p:spPr>
@@ -8269,7 +8269,7 @@
             <a:pPr>
               <a:defRPr sz="1100" b="1">
                 <a:solidFill>
-                  <a:srgbClr val="3182F6"/>
+                  <a:srgbClr val="585ECE"/>
                 </a:solidFill>
               </a:defRPr>
             </a:pPr>
@@ -8281,7 +8281,7 @@
             <a:pPr>
               <a:defRPr sz="950">
                 <a:solidFill>
-                  <a:srgbClr val="1E293B"/>
+                  <a:srgbClr val="18181B"/>
                 </a:solidFill>
               </a:defRPr>
             </a:pPr>
@@ -8306,7 +8306,7 @@
             <a:avLst/>
           </a:prstGeom>
           <a:solidFill>
-            <a:srgbClr val="F3E8FF"/>
+            <a:srgbClr val="EBEBFC"/>
           </a:solidFill>
           <a:ln w="15240">
             <a:solidFill>
@@ -8373,7 +8373,7 @@
             <a:pPr>
               <a:defRPr sz="950">
                 <a:solidFill>
-                  <a:srgbClr val="1E293B"/>
+                  <a:srgbClr val="18181B"/>
                 </a:solidFill>
               </a:defRPr>
             </a:pPr>
@@ -8402,7 +8402,7 @@
           </a:solidFill>
           <a:ln w="15240">
             <a:solidFill>
-              <a:srgbClr val="03C75A"/>
+              <a:srgbClr val="10B981"/>
             </a:solidFill>
           </a:ln>
         </p:spPr>
@@ -8453,7 +8453,7 @@
             <a:pPr>
               <a:defRPr sz="1100" b="1">
                 <a:solidFill>
-                  <a:srgbClr val="03C75A"/>
+                  <a:srgbClr val="10B981"/>
                 </a:solidFill>
               </a:defRPr>
             </a:pPr>
@@ -8465,7 +8465,7 @@
             <a:pPr>
               <a:defRPr sz="950">
                 <a:solidFill>
-                  <a:srgbClr val="1E293B"/>
+                  <a:srgbClr val="18181B"/>
                 </a:solidFill>
               </a:defRPr>
             </a:pPr>
@@ -8557,7 +8557,7 @@
             <a:pPr>
               <a:defRPr sz="950">
                 <a:solidFill>
-                  <a:srgbClr val="1E293B"/>
+                  <a:srgbClr val="18181B"/>
                 </a:solidFill>
               </a:defRPr>
             </a:pPr>
@@ -8600,7 +8600,7 @@
             <a:avLst/>
           </a:prstGeom>
           <a:solidFill>
-            <a:srgbClr val="F8FAFC"/>
+            <a:srgbClr val="F4F4F6"/>
           </a:solidFill>
           <a:ln>
             <a:noFill/>
@@ -8643,11 +8643,11 @@
             <a:avLst/>
           </a:prstGeom>
           <a:solidFill>
-            <a:srgbClr val="EEF4FF"/>
+            <a:srgbClr val="F4F5FF"/>
           </a:solidFill>
           <a:ln w="12700">
             <a:solidFill>
-              <a:srgbClr val="3182F6"/>
+              <a:srgbClr val="585ECE"/>
             </a:solidFill>
           </a:ln>
         </p:spPr>
@@ -8698,7 +8698,7 @@
             <a:pPr>
               <a:defRPr sz="1000" b="1">
                 <a:solidFill>
-                  <a:srgbClr val="3182F6"/>
+                  <a:srgbClr val="585ECE"/>
                 </a:solidFill>
                 <a:latin typeface="Pretendard"/>
               </a:defRPr>
@@ -8734,7 +8734,7 @@
             <a:pPr>
               <a:defRPr sz="2300" b="1">
                 <a:solidFill>
-                  <a:srgbClr val="0F172A"/>
+                  <a:srgbClr val="0A0A0A"/>
                 </a:solidFill>
                 <a:latin typeface="Pretendard"/>
               </a:defRPr>
@@ -8770,7 +8770,7 @@
             <a:pPr>
               <a:defRPr sz="1200">
                 <a:solidFill>
-                  <a:srgbClr val="475569"/>
+                  <a:srgbClr val="52525B"/>
                 </a:solidFill>
                 <a:latin typeface="Pretendard"/>
               </a:defRPr>
@@ -8806,7 +8806,7 @@
             <a:pPr>
               <a:defRPr sz="900">
                 <a:solidFill>
-                  <a:srgbClr val="64748B"/>
+                  <a:srgbClr val="71717A"/>
                 </a:solidFill>
                 <a:latin typeface="Pretendard"/>
               </a:defRPr>
@@ -8842,7 +8842,7 @@
             <a:pPr algn="r">
               <a:defRPr sz="1000" b="1">
                 <a:solidFill>
-                  <a:srgbClr val="3182F6"/>
+                  <a:srgbClr val="585ECE"/>
                 </a:solidFill>
                 <a:latin typeface="Pretendard"/>
               </a:defRPr>
@@ -8872,7 +8872,7 @@
           </a:solidFill>
           <a:ln w="19050">
             <a:solidFill>
-              <a:srgbClr val="3182F6"/>
+              <a:srgbClr val="585ECE"/>
             </a:solidFill>
           </a:ln>
         </p:spPr>
@@ -8923,7 +8923,7 @@
             <a:pPr>
               <a:defRPr sz="1200" b="1">
                 <a:solidFill>
-                  <a:srgbClr val="0F172A"/>
+                  <a:srgbClr val="0A0A0A"/>
                 </a:solidFill>
               </a:defRPr>
             </a:pPr>
@@ -8948,7 +8948,7 @@
             <a:avLst/>
           </a:prstGeom>
           <a:solidFill>
-            <a:srgbClr val="F8FAFC"/>
+            <a:srgbClr val="F4F4F6"/>
           </a:solidFill>
           <a:ln>
             <a:noFill/>
@@ -9001,7 +9001,7 @@
             <a:pPr>
               <a:defRPr sz="1100" b="1">
                 <a:solidFill>
-                  <a:srgbClr val="64748B"/>
+                  <a:srgbClr val="71717A"/>
                 </a:solidFill>
               </a:defRPr>
             </a:pPr>
@@ -9026,7 +9026,7 @@
             <a:avLst/>
           </a:prstGeom>
           <a:solidFill>
-            <a:srgbClr val="64748B"/>
+            <a:srgbClr val="71717A"/>
           </a:solidFill>
           <a:ln>
             <a:noFill/>
@@ -9069,7 +9069,7 @@
             <a:avLst/>
           </a:prstGeom>
           <a:solidFill>
-            <a:srgbClr val="EEF4FF"/>
+            <a:srgbClr val="F4F5FF"/>
           </a:solidFill>
           <a:ln>
             <a:noFill/>
@@ -9122,7 +9122,7 @@
             <a:pPr>
               <a:defRPr sz="1150" b="1">
                 <a:solidFill>
-                  <a:srgbClr val="3182F6"/>
+                  <a:srgbClr val="585ECE"/>
                 </a:solidFill>
               </a:defRPr>
             </a:pPr>
@@ -9147,7 +9147,7 @@
             <a:avLst/>
           </a:prstGeom>
           <a:solidFill>
-            <a:srgbClr val="3182F6"/>
+            <a:srgbClr val="585ECE"/>
           </a:solidFill>
           <a:ln>
             <a:noFill/>
@@ -9225,7 +9225,7 @@
             <a:avLst/>
           </a:prstGeom>
           <a:solidFill>
-            <a:srgbClr val="F3E8FF"/>
+            <a:srgbClr val="EBEBFC"/>
           </a:solidFill>
           <a:ln w="15240">
             <a:solidFill>
@@ -9292,7 +9292,7 @@
             <a:pPr>
               <a:defRPr sz="1000">
                 <a:solidFill>
-                  <a:srgbClr val="475569"/>
+                  <a:srgbClr val="52525B"/>
                 </a:solidFill>
               </a:defRPr>
             </a:pPr>
@@ -9384,7 +9384,7 @@
             <a:pPr>
               <a:defRPr sz="1250" b="1">
                 <a:solidFill>
-                  <a:srgbClr val="0F172A"/>
+                  <a:srgbClr val="0A0A0A"/>
                 </a:solidFill>
               </a:defRPr>
             </a:pPr>
@@ -9396,7 +9396,7 @@
             <a:pPr>
               <a:defRPr sz="1000">
                 <a:solidFill>
-                  <a:srgbClr val="475569"/>
+                  <a:srgbClr val="52525B"/>
                 </a:solidFill>
               </a:defRPr>
             </a:pPr>
@@ -9488,7 +9488,7 @@
             <a:pPr>
               <a:defRPr sz="1250" b="1">
                 <a:solidFill>
-                  <a:srgbClr val="0F172A"/>
+                  <a:srgbClr val="0A0A0A"/>
                 </a:solidFill>
               </a:defRPr>
             </a:pPr>
@@ -9500,7 +9500,7 @@
             <a:pPr>
               <a:defRPr sz="1000">
                 <a:solidFill>
-                  <a:srgbClr val="475569"/>
+                  <a:srgbClr val="52525B"/>
                 </a:solidFill>
               </a:defRPr>
             </a:pPr>
@@ -9529,7 +9529,7 @@
           </a:solidFill>
           <a:ln w="19050">
             <a:solidFill>
-              <a:srgbClr val="03C75A"/>
+              <a:srgbClr val="10B981"/>
             </a:solidFill>
           </a:ln>
         </p:spPr>
@@ -9580,7 +9580,7 @@
             <a:pPr>
               <a:defRPr sz="2400" b="1">
                 <a:solidFill>
-                  <a:srgbClr val="03C75A"/>
+                  <a:srgbClr val="10B981"/>
                 </a:solidFill>
               </a:defRPr>
             </a:pPr>
@@ -9592,7 +9592,7 @@
             <a:pPr>
               <a:defRPr sz="1250" b="1">
                 <a:solidFill>
-                  <a:srgbClr val="0F172A"/>
+                  <a:srgbClr val="0A0A0A"/>
                 </a:solidFill>
               </a:defRPr>
             </a:pPr>
@@ -9604,7 +9604,7 @@
             <a:pPr>
               <a:defRPr sz="1000">
                 <a:solidFill>
-                  <a:srgbClr val="475569"/>
+                  <a:srgbClr val="52525B"/>
                 </a:solidFill>
               </a:defRPr>
             </a:pPr>
@@ -9647,7 +9647,7 @@
             <a:avLst/>
           </a:prstGeom>
           <a:solidFill>
-            <a:srgbClr val="F8FAFC"/>
+            <a:srgbClr val="F4F4F6"/>
           </a:solidFill>
           <a:ln>
             <a:noFill/>
@@ -9690,11 +9690,11 @@
             <a:avLst/>
           </a:prstGeom>
           <a:solidFill>
-            <a:srgbClr val="EEF4FF"/>
+            <a:srgbClr val="F4F5FF"/>
           </a:solidFill>
           <a:ln w="12700">
             <a:solidFill>
-              <a:srgbClr val="3182F6"/>
+              <a:srgbClr val="585ECE"/>
             </a:solidFill>
           </a:ln>
         </p:spPr>
@@ -9745,7 +9745,7 @@
             <a:pPr>
               <a:defRPr sz="1000" b="1">
                 <a:solidFill>
-                  <a:srgbClr val="3182F6"/>
+                  <a:srgbClr val="585ECE"/>
                 </a:solidFill>
                 <a:latin typeface="Pretendard"/>
               </a:defRPr>
@@ -9781,7 +9781,7 @@
             <a:pPr>
               <a:defRPr sz="2300" b="1">
                 <a:solidFill>
-                  <a:srgbClr val="0F172A"/>
+                  <a:srgbClr val="0A0A0A"/>
                 </a:solidFill>
                 <a:latin typeface="Pretendard"/>
               </a:defRPr>
@@ -9817,7 +9817,7 @@
             <a:pPr>
               <a:defRPr sz="1200">
                 <a:solidFill>
-                  <a:srgbClr val="475569"/>
+                  <a:srgbClr val="52525B"/>
                 </a:solidFill>
                 <a:latin typeface="Pretendard"/>
               </a:defRPr>
@@ -9853,7 +9853,7 @@
             <a:pPr>
               <a:defRPr sz="900">
                 <a:solidFill>
-                  <a:srgbClr val="64748B"/>
+                  <a:srgbClr val="71717A"/>
                 </a:solidFill>
                 <a:latin typeface="Pretendard"/>
               </a:defRPr>
@@ -9889,7 +9889,7 @@
             <a:pPr algn="r">
               <a:defRPr sz="1000" b="1">
                 <a:solidFill>
-                  <a:srgbClr val="3182F6"/>
+                  <a:srgbClr val="585ECE"/>
                 </a:solidFill>
                 <a:latin typeface="Pretendard"/>
               </a:defRPr>
@@ -9919,7 +9919,7 @@
           </a:solidFill>
           <a:ln w="22860">
             <a:solidFill>
-              <a:srgbClr val="3182F6"/>
+              <a:srgbClr val="585ECE"/>
             </a:solidFill>
           </a:ln>
         </p:spPr>
@@ -9960,7 +9960,7 @@
             <a:avLst/>
           </a:prstGeom>
           <a:solidFill>
-            <a:srgbClr val="3182F6"/>
+            <a:srgbClr val="585ECE"/>
           </a:solidFill>
           <a:ln>
             <a:noFill/>
@@ -10048,7 +10048,7 @@
             <a:pPr>
               <a:defRPr sz="1500" b="1">
                 <a:solidFill>
-                  <a:srgbClr val="0F172A"/>
+                  <a:srgbClr val="0A0A0A"/>
                 </a:solidFill>
               </a:defRPr>
             </a:pPr>
@@ -10063,7 +10063,7 @@
               </a:lnSpc>
               <a:defRPr sz="1100">
                 <a:solidFill>
-                  <a:srgbClr val="475569"/>
+                  <a:srgbClr val="52525B"/>
                 </a:solidFill>
               </a:defRPr>
             </a:pPr>
@@ -10225,7 +10225,7 @@
             <a:pPr>
               <a:defRPr sz="1500" b="1">
                 <a:solidFill>
-                  <a:srgbClr val="0F172A"/>
+                  <a:srgbClr val="0A0A0A"/>
                 </a:solidFill>
               </a:defRPr>
             </a:pPr>
@@ -10240,7 +10240,7 @@
               </a:lnSpc>
               <a:defRPr sz="1100">
                 <a:solidFill>
-                  <a:srgbClr val="475569"/>
+                  <a:srgbClr val="52525B"/>
                 </a:solidFill>
               </a:defRPr>
             </a:pPr>
@@ -10398,7 +10398,7 @@
             <a:pPr>
               <a:defRPr sz="1500" b="1">
                 <a:solidFill>
-                  <a:srgbClr val="0F172A"/>
+                  <a:srgbClr val="0A0A0A"/>
                 </a:solidFill>
               </a:defRPr>
             </a:pPr>
@@ -10413,7 +10413,7 @@
               </a:lnSpc>
               <a:defRPr sz="1100">
                 <a:solidFill>
-                  <a:srgbClr val="475569"/>
+                  <a:srgbClr val="52525B"/>
                 </a:solidFill>
               </a:defRPr>
             </a:pPr>
@@ -10442,7 +10442,7 @@
           </a:solidFill>
           <a:ln w="22860">
             <a:solidFill>
-              <a:srgbClr val="03C75A"/>
+              <a:srgbClr val="10B981"/>
             </a:solidFill>
           </a:ln>
         </p:spPr>
@@ -10483,7 +10483,7 @@
             <a:avLst/>
           </a:prstGeom>
           <a:solidFill>
-            <a:srgbClr val="03C75A"/>
+            <a:srgbClr val="10B981"/>
           </a:solidFill>
           <a:ln>
             <a:noFill/>
@@ -10571,7 +10571,7 @@
             <a:pPr>
               <a:defRPr sz="1500" b="1">
                 <a:solidFill>
-                  <a:srgbClr val="0F172A"/>
+                  <a:srgbClr val="0A0A0A"/>
                 </a:solidFill>
               </a:defRPr>
             </a:pPr>
@@ -10586,7 +10586,7 @@
               </a:lnSpc>
               <a:defRPr sz="1100">
                 <a:solidFill>
-                  <a:srgbClr val="475569"/>
+                  <a:srgbClr val="52525B"/>
                 </a:solidFill>
               </a:defRPr>
             </a:pPr>
@@ -10629,7 +10629,7 @@
             <a:avLst/>
           </a:prstGeom>
           <a:solidFill>
-            <a:srgbClr val="F8FAFC"/>
+            <a:srgbClr val="F4F4F6"/>
           </a:solidFill>
           <a:ln>
             <a:noFill/>
@@ -10672,11 +10672,11 @@
             <a:avLst/>
           </a:prstGeom>
           <a:solidFill>
-            <a:srgbClr val="EEF4FF"/>
+            <a:srgbClr val="F4F5FF"/>
           </a:solidFill>
           <a:ln w="12700">
             <a:solidFill>
-              <a:srgbClr val="3182F6"/>
+              <a:srgbClr val="585ECE"/>
             </a:solidFill>
           </a:ln>
         </p:spPr>
@@ -10727,7 +10727,7 @@
             <a:pPr>
               <a:defRPr sz="1000" b="1">
                 <a:solidFill>
-                  <a:srgbClr val="3182F6"/>
+                  <a:srgbClr val="585ECE"/>
                 </a:solidFill>
                 <a:latin typeface="Pretendard"/>
               </a:defRPr>
@@ -10763,7 +10763,7 @@
             <a:pPr>
               <a:defRPr sz="2300" b="1">
                 <a:solidFill>
-                  <a:srgbClr val="0F172A"/>
+                  <a:srgbClr val="0A0A0A"/>
                 </a:solidFill>
                 <a:latin typeface="Pretendard"/>
               </a:defRPr>
@@ -10799,7 +10799,7 @@
             <a:pPr>
               <a:defRPr sz="1200">
                 <a:solidFill>
-                  <a:srgbClr val="475569"/>
+                  <a:srgbClr val="52525B"/>
                 </a:solidFill>
                 <a:latin typeface="Pretendard"/>
               </a:defRPr>
@@ -10835,7 +10835,7 @@
             <a:pPr>
               <a:defRPr sz="900">
                 <a:solidFill>
-                  <a:srgbClr val="64748B"/>
+                  <a:srgbClr val="71717A"/>
                 </a:solidFill>
                 <a:latin typeface="Pretendard"/>
               </a:defRPr>
@@ -10871,7 +10871,7 @@
             <a:pPr algn="r">
               <a:defRPr sz="1000" b="1">
                 <a:solidFill>
-                  <a:srgbClr val="3182F6"/>
+                  <a:srgbClr val="585ECE"/>
                 </a:solidFill>
                 <a:latin typeface="Pretendard"/>
               </a:defRPr>
@@ -10901,7 +10901,7 @@
           </a:solidFill>
           <a:ln w="15240">
             <a:solidFill>
-              <a:srgbClr val="E2E8F0"/>
+              <a:srgbClr val="E4E4E7"/>
             </a:solidFill>
           </a:ln>
         </p:spPr>
@@ -10942,7 +10942,7 @@
             <a:avLst/>
           </a:prstGeom>
           <a:solidFill>
-            <a:srgbClr val="F8FAFC"/>
+            <a:srgbClr val="F4F4F6"/>
           </a:solidFill>
           <a:ln>
             <a:noFill/>
@@ -10995,7 +10995,7 @@
             <a:pPr algn="ctr">
               <a:defRPr sz="1100" b="1">
                 <a:solidFill>
-                  <a:srgbClr val="0F172A"/>
+                  <a:srgbClr val="0A0A0A"/>
                 </a:solidFill>
               </a:defRPr>
             </a:pPr>
@@ -11030,7 +11030,7 @@
             <a:pPr algn="ctr">
               <a:defRPr sz="1100" b="1">
                 <a:solidFill>
-                  <a:srgbClr val="0F172A"/>
+                  <a:srgbClr val="0A0A0A"/>
                 </a:solidFill>
               </a:defRPr>
             </a:pPr>
@@ -11065,7 +11065,7 @@
             <a:pPr algn="ctr">
               <a:defRPr sz="1100" b="1">
                 <a:solidFill>
-                  <a:srgbClr val="0F172A"/>
+                  <a:srgbClr val="0A0A0A"/>
                 </a:solidFill>
               </a:defRPr>
             </a:pPr>
@@ -11100,7 +11100,7 @@
             <a:pPr algn="ctr">
               <a:defRPr sz="1100" b="1">
                 <a:solidFill>
-                  <a:srgbClr val="0F172A"/>
+                  <a:srgbClr val="0A0A0A"/>
                 </a:solidFill>
               </a:defRPr>
             </a:pPr>
@@ -11135,7 +11135,7 @@
             <a:pPr algn="ctr">
               <a:defRPr sz="1100" b="1">
                 <a:solidFill>
-                  <a:srgbClr val="3182F6"/>
+                  <a:srgbClr val="585ECE"/>
                 </a:solidFill>
               </a:defRPr>
             </a:pPr>
@@ -11160,11 +11160,11 @@
             <a:avLst/>
           </a:prstGeom>
           <a:solidFill>
-            <a:srgbClr val="EEF4FF"/>
+            <a:srgbClr val="F4F5FF"/>
           </a:solidFill>
           <a:ln w="15240">
             <a:solidFill>
-              <a:srgbClr val="3182F6"/>
+              <a:srgbClr val="585ECE"/>
             </a:solidFill>
           </a:ln>
         </p:spPr>
@@ -11215,7 +11215,7 @@
             <a:pPr algn="l">
               <a:defRPr sz="1050" b="1">
                 <a:solidFill>
-                  <a:srgbClr val="1E293B"/>
+                  <a:srgbClr val="18181B"/>
                 </a:solidFill>
               </a:defRPr>
             </a:pPr>
@@ -11250,7 +11250,7 @@
             <a:pPr algn="ctr">
               <a:defRPr sz="1050">
                 <a:solidFill>
-                  <a:srgbClr val="475569"/>
+                  <a:srgbClr val="52525B"/>
                 </a:solidFill>
               </a:defRPr>
             </a:pPr>
@@ -11285,7 +11285,7 @@
             <a:pPr algn="ctr">
               <a:defRPr sz="1050">
                 <a:solidFill>
-                  <a:srgbClr val="475569"/>
+                  <a:srgbClr val="52525B"/>
                 </a:solidFill>
               </a:defRPr>
             </a:pPr>
@@ -11320,7 +11320,7 @@
             <a:pPr algn="ctr">
               <a:defRPr sz="1050">
                 <a:solidFill>
-                  <a:srgbClr val="475569"/>
+                  <a:srgbClr val="52525B"/>
                 </a:solidFill>
               </a:defRPr>
             </a:pPr>
@@ -11355,7 +11355,7 @@
             <a:pPr algn="ctr">
               <a:defRPr sz="1050" b="1">
                 <a:solidFill>
-                  <a:srgbClr val="3182F6"/>
+                  <a:srgbClr val="585ECE"/>
                 </a:solidFill>
               </a:defRPr>
             </a:pPr>
@@ -11380,11 +11380,11 @@
             <a:avLst/>
           </a:prstGeom>
           <a:solidFill>
-            <a:srgbClr val="EEF4FF"/>
+            <a:srgbClr val="F4F5FF"/>
           </a:solidFill>
           <a:ln w="15240">
             <a:solidFill>
-              <a:srgbClr val="3182F6"/>
+              <a:srgbClr val="585ECE"/>
             </a:solidFill>
           </a:ln>
         </p:spPr>
@@ -11435,7 +11435,7 @@
             <a:pPr algn="l">
               <a:defRPr sz="1050" b="1">
                 <a:solidFill>
-                  <a:srgbClr val="1E293B"/>
+                  <a:srgbClr val="18181B"/>
                 </a:solidFill>
               </a:defRPr>
             </a:pPr>
@@ -11470,7 +11470,7 @@
             <a:pPr algn="ctr">
               <a:defRPr sz="1050">
                 <a:solidFill>
-                  <a:srgbClr val="475569"/>
+                  <a:srgbClr val="52525B"/>
                 </a:solidFill>
               </a:defRPr>
             </a:pPr>
@@ -11505,7 +11505,7 @@
             <a:pPr algn="ctr">
               <a:defRPr sz="1050">
                 <a:solidFill>
-                  <a:srgbClr val="475569"/>
+                  <a:srgbClr val="52525B"/>
                 </a:solidFill>
               </a:defRPr>
             </a:pPr>
@@ -11540,7 +11540,7 @@
             <a:pPr algn="ctr">
               <a:defRPr sz="1050">
                 <a:solidFill>
-                  <a:srgbClr val="475569"/>
+                  <a:srgbClr val="52525B"/>
                 </a:solidFill>
               </a:defRPr>
             </a:pPr>
@@ -11575,7 +11575,7 @@
             <a:pPr algn="ctr">
               <a:defRPr sz="1050" b="1">
                 <a:solidFill>
-                  <a:srgbClr val="3182F6"/>
+                  <a:srgbClr val="585ECE"/>
                 </a:solidFill>
               </a:defRPr>
             </a:pPr>
@@ -11600,11 +11600,11 @@
             <a:avLst/>
           </a:prstGeom>
           <a:solidFill>
-            <a:srgbClr val="EEF4FF"/>
+            <a:srgbClr val="F4F5FF"/>
           </a:solidFill>
           <a:ln w="15240">
             <a:solidFill>
-              <a:srgbClr val="3182F6"/>
+              <a:srgbClr val="585ECE"/>
             </a:solidFill>
           </a:ln>
         </p:spPr>
@@ -11655,7 +11655,7 @@
             <a:pPr algn="l">
               <a:defRPr sz="1050" b="1">
                 <a:solidFill>
-                  <a:srgbClr val="1E293B"/>
+                  <a:srgbClr val="18181B"/>
                 </a:solidFill>
               </a:defRPr>
             </a:pPr>
@@ -11690,7 +11690,7 @@
             <a:pPr algn="ctr">
               <a:defRPr sz="1050">
                 <a:solidFill>
-                  <a:srgbClr val="475569"/>
+                  <a:srgbClr val="52525B"/>
                 </a:solidFill>
               </a:defRPr>
             </a:pPr>
@@ -11725,7 +11725,7 @@
             <a:pPr algn="ctr">
               <a:defRPr sz="1050">
                 <a:solidFill>
-                  <a:srgbClr val="475569"/>
+                  <a:srgbClr val="52525B"/>
                 </a:solidFill>
               </a:defRPr>
             </a:pPr>
@@ -11760,7 +11760,7 @@
             <a:pPr algn="ctr">
               <a:defRPr sz="1050">
                 <a:solidFill>
-                  <a:srgbClr val="475569"/>
+                  <a:srgbClr val="52525B"/>
                 </a:solidFill>
               </a:defRPr>
             </a:pPr>
@@ -11795,7 +11795,7 @@
             <a:pPr algn="ctr">
               <a:defRPr sz="1050" b="1">
                 <a:solidFill>
-                  <a:srgbClr val="3182F6"/>
+                  <a:srgbClr val="585ECE"/>
                 </a:solidFill>
               </a:defRPr>
             </a:pPr>
@@ -11820,11 +11820,11 @@
             <a:avLst/>
           </a:prstGeom>
           <a:solidFill>
-            <a:srgbClr val="EEF4FF"/>
+            <a:srgbClr val="F4F5FF"/>
           </a:solidFill>
           <a:ln w="15240">
             <a:solidFill>
-              <a:srgbClr val="3182F6"/>
+              <a:srgbClr val="585ECE"/>
             </a:solidFill>
           </a:ln>
         </p:spPr>
@@ -11875,7 +11875,7 @@
             <a:pPr algn="l">
               <a:defRPr sz="1050" b="1">
                 <a:solidFill>
-                  <a:srgbClr val="1E293B"/>
+                  <a:srgbClr val="18181B"/>
                 </a:solidFill>
               </a:defRPr>
             </a:pPr>
@@ -11910,7 +11910,7 @@
             <a:pPr algn="ctr">
               <a:defRPr sz="1050">
                 <a:solidFill>
-                  <a:srgbClr val="475569"/>
+                  <a:srgbClr val="52525B"/>
                 </a:solidFill>
               </a:defRPr>
             </a:pPr>
@@ -11945,7 +11945,7 @@
             <a:pPr algn="ctr">
               <a:defRPr sz="1050">
                 <a:solidFill>
-                  <a:srgbClr val="475569"/>
+                  <a:srgbClr val="52525B"/>
                 </a:solidFill>
               </a:defRPr>
             </a:pPr>
@@ -11980,7 +11980,7 @@
             <a:pPr algn="ctr">
               <a:defRPr sz="1050">
                 <a:solidFill>
-                  <a:srgbClr val="475569"/>
+                  <a:srgbClr val="52525B"/>
                 </a:solidFill>
               </a:defRPr>
             </a:pPr>
@@ -12015,7 +12015,7 @@
             <a:pPr algn="ctr">
               <a:defRPr sz="1050" b="1">
                 <a:solidFill>
-                  <a:srgbClr val="3182F6"/>
+                  <a:srgbClr val="585ECE"/>
                 </a:solidFill>
               </a:defRPr>
             </a:pPr>
@@ -12040,11 +12040,11 @@
             <a:avLst/>
           </a:prstGeom>
           <a:solidFill>
-            <a:srgbClr val="EEF4FF"/>
+            <a:srgbClr val="F4F5FF"/>
           </a:solidFill>
           <a:ln w="15240">
             <a:solidFill>
-              <a:srgbClr val="3182F6"/>
+              <a:srgbClr val="585ECE"/>
             </a:solidFill>
           </a:ln>
         </p:spPr>
@@ -12095,7 +12095,7 @@
             <a:pPr algn="l">
               <a:defRPr sz="1050" b="1">
                 <a:solidFill>
-                  <a:srgbClr val="1E293B"/>
+                  <a:srgbClr val="18181B"/>
                 </a:solidFill>
               </a:defRPr>
             </a:pPr>
@@ -12130,7 +12130,7 @@
             <a:pPr algn="ctr">
               <a:defRPr sz="1050">
                 <a:solidFill>
-                  <a:srgbClr val="475569"/>
+                  <a:srgbClr val="52525B"/>
                 </a:solidFill>
               </a:defRPr>
             </a:pPr>
@@ -12165,7 +12165,7 @@
             <a:pPr algn="ctr">
               <a:defRPr sz="1050">
                 <a:solidFill>
-                  <a:srgbClr val="475569"/>
+                  <a:srgbClr val="52525B"/>
                 </a:solidFill>
               </a:defRPr>
             </a:pPr>
@@ -12200,7 +12200,7 @@
             <a:pPr algn="ctr">
               <a:defRPr sz="1050">
                 <a:solidFill>
-                  <a:srgbClr val="475569"/>
+                  <a:srgbClr val="52525B"/>
                 </a:solidFill>
               </a:defRPr>
             </a:pPr>
@@ -12235,7 +12235,7 @@
             <a:pPr algn="ctr">
               <a:defRPr sz="1050" b="1">
                 <a:solidFill>
-                  <a:srgbClr val="3182F6"/>
+                  <a:srgbClr val="585ECE"/>
                 </a:solidFill>
               </a:defRPr>
             </a:pPr>
@@ -12278,7 +12278,7 @@
             <a:avLst/>
           </a:prstGeom>
           <a:solidFill>
-            <a:srgbClr val="F8FAFC"/>
+            <a:srgbClr val="F4F4F6"/>
           </a:solidFill>
           <a:ln>
             <a:noFill/>
@@ -12321,11 +12321,11 @@
             <a:avLst/>
           </a:prstGeom>
           <a:solidFill>
-            <a:srgbClr val="EEF4FF"/>
+            <a:srgbClr val="F4F5FF"/>
           </a:solidFill>
           <a:ln w="12700">
             <a:solidFill>
-              <a:srgbClr val="3182F6"/>
+              <a:srgbClr val="585ECE"/>
             </a:solidFill>
           </a:ln>
         </p:spPr>
@@ -12376,7 +12376,7 @@
             <a:pPr>
               <a:defRPr sz="1000" b="1">
                 <a:solidFill>
-                  <a:srgbClr val="3182F6"/>
+                  <a:srgbClr val="585ECE"/>
                 </a:solidFill>
                 <a:latin typeface="Pretendard"/>
               </a:defRPr>
@@ -12412,7 +12412,7 @@
             <a:pPr>
               <a:defRPr sz="2300" b="1">
                 <a:solidFill>
-                  <a:srgbClr val="0F172A"/>
+                  <a:srgbClr val="0A0A0A"/>
                 </a:solidFill>
                 <a:latin typeface="Pretendard"/>
               </a:defRPr>
@@ -12448,7 +12448,7 @@
             <a:pPr>
               <a:defRPr sz="1200">
                 <a:solidFill>
-                  <a:srgbClr val="475569"/>
+                  <a:srgbClr val="52525B"/>
                 </a:solidFill>
                 <a:latin typeface="Pretendard"/>
               </a:defRPr>
@@ -12484,7 +12484,7 @@
             <a:pPr>
               <a:defRPr sz="900">
                 <a:solidFill>
-                  <a:srgbClr val="64748B"/>
+                  <a:srgbClr val="71717A"/>
                 </a:solidFill>
                 <a:latin typeface="Pretendard"/>
               </a:defRPr>
@@ -12520,7 +12520,7 @@
             <a:pPr algn="r">
               <a:defRPr sz="1000" b="1">
                 <a:solidFill>
-                  <a:srgbClr val="3182F6"/>
+                  <a:srgbClr val="585ECE"/>
                 </a:solidFill>
                 <a:latin typeface="Pretendard"/>
               </a:defRPr>
@@ -12550,7 +12550,7 @@
           </a:solidFill>
           <a:ln w="22860">
             <a:solidFill>
-              <a:srgbClr val="3182F6"/>
+              <a:srgbClr val="585ECE"/>
             </a:solidFill>
           </a:ln>
         </p:spPr>
@@ -12591,7 +12591,7 @@
             <a:avLst/>
           </a:prstGeom>
           <a:solidFill>
-            <a:srgbClr val="3182F6"/>
+            <a:srgbClr val="585ECE"/>
           </a:solidFill>
           <a:ln>
             <a:noFill/>
@@ -12679,7 +12679,7 @@
             <a:pPr>
               <a:defRPr sz="1600" b="1">
                 <a:solidFill>
-                  <a:srgbClr val="0F172A"/>
+                  <a:srgbClr val="0A0A0A"/>
                 </a:solidFill>
               </a:defRPr>
             </a:pPr>
@@ -12714,7 +12714,7 @@
             <a:pPr>
               <a:defRPr sz="1200" b="1">
                 <a:solidFill>
-                  <a:srgbClr val="3182F6"/>
+                  <a:srgbClr val="585ECE"/>
                 </a:solidFill>
               </a:defRPr>
             </a:pPr>
@@ -12752,7 +12752,7 @@
               </a:lnSpc>
               <a:defRPr sz="1100">
                 <a:solidFill>
-                  <a:srgbClr val="475569"/>
+                  <a:srgbClr val="52525B"/>
                 </a:solidFill>
               </a:defRPr>
             </a:pPr>
@@ -12910,7 +12910,7 @@
             <a:pPr>
               <a:defRPr sz="1600" b="1">
                 <a:solidFill>
-                  <a:srgbClr val="0F172A"/>
+                  <a:srgbClr val="0A0A0A"/>
                 </a:solidFill>
               </a:defRPr>
             </a:pPr>
@@ -12983,7 +12983,7 @@
               </a:lnSpc>
               <a:defRPr sz="1100">
                 <a:solidFill>
-                  <a:srgbClr val="475569"/>
+                  <a:srgbClr val="52525B"/>
                 </a:solidFill>
               </a:defRPr>
             </a:pPr>
@@ -13012,7 +13012,7 @@
           </a:solidFill>
           <a:ln w="22860">
             <a:solidFill>
-              <a:srgbClr val="03C75A"/>
+              <a:srgbClr val="10B981"/>
             </a:solidFill>
           </a:ln>
         </p:spPr>
@@ -13053,7 +13053,7 @@
             <a:avLst/>
           </a:prstGeom>
           <a:solidFill>
-            <a:srgbClr val="03C75A"/>
+            <a:srgbClr val="10B981"/>
           </a:solidFill>
           <a:ln>
             <a:noFill/>
@@ -13141,7 +13141,7 @@
             <a:pPr>
               <a:defRPr sz="1600" b="1">
                 <a:solidFill>
-                  <a:srgbClr val="0F172A"/>
+                  <a:srgbClr val="0A0A0A"/>
                 </a:solidFill>
               </a:defRPr>
             </a:pPr>
@@ -13176,7 +13176,7 @@
             <a:pPr>
               <a:defRPr sz="1200" b="1">
                 <a:solidFill>
-                  <a:srgbClr val="03C75A"/>
+                  <a:srgbClr val="10B981"/>
                 </a:solidFill>
               </a:defRPr>
             </a:pPr>
@@ -13214,7 +13214,7 @@
               </a:lnSpc>
               <a:defRPr sz="1100">
                 <a:solidFill>
-                  <a:srgbClr val="475569"/>
+                  <a:srgbClr val="52525B"/>
                 </a:solidFill>
               </a:defRPr>
             </a:pPr>
@@ -13243,7 +13243,7 @@
           </a:solidFill>
           <a:ln w="19050">
             <a:solidFill>
-              <a:srgbClr val="3182F6"/>
+              <a:srgbClr val="585ECE"/>
             </a:solidFill>
           </a:ln>
         </p:spPr>
@@ -13294,7 +13294,7 @@
             <a:pPr>
               <a:defRPr sz="1100" b="1">
                 <a:solidFill>
-                  <a:srgbClr val="3182F6"/>
+                  <a:srgbClr val="585ECE"/>
                 </a:solidFill>
               </a:defRPr>
             </a:pPr>
@@ -13306,7 +13306,7 @@
             <a:pPr>
               <a:defRPr sz="950">
                 <a:solidFill>
-                  <a:srgbClr val="475569"/>
+                  <a:srgbClr val="52525B"/>
                 </a:solidFill>
               </a:defRPr>
             </a:pPr>
@@ -13353,7 +13353,7 @@
             <a:avLst/>
           </a:prstGeom>
           <a:solidFill>
-            <a:srgbClr val="F8FAFC"/>
+            <a:srgbClr val="F4F4F6"/>
           </a:solidFill>
           <a:ln>
             <a:noFill/>
@@ -13396,11 +13396,11 @@
             <a:avLst/>
           </a:prstGeom>
           <a:solidFill>
-            <a:srgbClr val="EEF4FF"/>
+            <a:srgbClr val="F4F5FF"/>
           </a:solidFill>
           <a:ln w="12700">
             <a:solidFill>
-              <a:srgbClr val="3182F6"/>
+              <a:srgbClr val="585ECE"/>
             </a:solidFill>
           </a:ln>
         </p:spPr>
@@ -13451,7 +13451,7 @@
             <a:pPr>
               <a:defRPr sz="1000" b="1">
                 <a:solidFill>
-                  <a:srgbClr val="3182F6"/>
+                  <a:srgbClr val="585ECE"/>
                 </a:solidFill>
                 <a:latin typeface="Pretendard"/>
               </a:defRPr>
@@ -13487,7 +13487,7 @@
             <a:pPr>
               <a:defRPr sz="2300" b="1">
                 <a:solidFill>
-                  <a:srgbClr val="0F172A"/>
+                  <a:srgbClr val="0A0A0A"/>
                 </a:solidFill>
                 <a:latin typeface="Pretendard"/>
               </a:defRPr>
@@ -13523,7 +13523,7 @@
             <a:pPr>
               <a:defRPr sz="1200">
                 <a:solidFill>
-                  <a:srgbClr val="475569"/>
+                  <a:srgbClr val="52525B"/>
                 </a:solidFill>
                 <a:latin typeface="Pretendard"/>
               </a:defRPr>
@@ -13559,7 +13559,7 @@
             <a:pPr>
               <a:defRPr sz="900">
                 <a:solidFill>
-                  <a:srgbClr val="64748B"/>
+                  <a:srgbClr val="71717A"/>
                 </a:solidFill>
                 <a:latin typeface="Pretendard"/>
               </a:defRPr>
@@ -13595,7 +13595,7 @@
             <a:pPr algn="r">
               <a:defRPr sz="1000" b="1">
                 <a:solidFill>
-                  <a:srgbClr val="3182F6"/>
+                  <a:srgbClr val="585ECE"/>
                 </a:solidFill>
                 <a:latin typeface="Pretendard"/>
               </a:defRPr>
@@ -13625,7 +13625,7 @@
           </a:solidFill>
           <a:ln w="15240">
             <a:solidFill>
-              <a:srgbClr val="3182F6"/>
+              <a:srgbClr val="585ECE"/>
             </a:solidFill>
           </a:ln>
         </p:spPr>
@@ -13666,7 +13666,7 @@
             <a:avLst/>
           </a:prstGeom>
           <a:solidFill>
-            <a:srgbClr val="3182F6"/>
+            <a:srgbClr val="585ECE"/>
           </a:solidFill>
           <a:ln>
             <a:noFill/>
@@ -13754,7 +13754,7 @@
             <a:pPr>
               <a:defRPr sz="1300" b="1">
                 <a:solidFill>
-                  <a:srgbClr val="0F172A"/>
+                  <a:srgbClr val="0A0A0A"/>
                 </a:solidFill>
               </a:defRPr>
             </a:pPr>
@@ -13766,7 +13766,7 @@
             <a:pPr>
               <a:defRPr sz="1000">
                 <a:solidFill>
-                  <a:srgbClr val="64748B"/>
+                  <a:srgbClr val="71717A"/>
                 </a:solidFill>
               </a:defRPr>
             </a:pPr>
@@ -13791,11 +13791,11 @@
             <a:avLst/>
           </a:prstGeom>
           <a:solidFill>
-            <a:srgbClr val="EEF4FF"/>
+            <a:srgbClr val="F4F5FF"/>
           </a:solidFill>
           <a:ln w="12700">
             <a:solidFill>
-              <a:srgbClr val="3182F6"/>
+              <a:srgbClr val="585ECE"/>
             </a:solidFill>
           </a:ln>
         </p:spPr>
@@ -13846,7 +13846,7 @@
             <a:pPr algn="ctr">
               <a:defRPr sz="1100" b="1">
                 <a:solidFill>
-                  <a:srgbClr val="3182F6"/>
+                  <a:srgbClr val="585ECE"/>
                 </a:solidFill>
               </a:defRPr>
             </a:pPr>
@@ -13871,7 +13871,7 @@
             <a:avLst/>
           </a:prstGeom>
           <a:solidFill>
-            <a:srgbClr val="F8FAFC"/>
+            <a:srgbClr val="F4F4F6"/>
           </a:solidFill>
           <a:ln>
             <a:noFill/>
@@ -13924,7 +13924,7 @@
             <a:pPr algn="ctr">
               <a:defRPr sz="950" b="1">
                 <a:solidFill>
-                  <a:srgbClr val="3182F6"/>
+                  <a:srgbClr val="585ECE"/>
                 </a:solidFill>
               </a:defRPr>
             </a:pPr>
@@ -13962,7 +13962,7 @@
               </a:lnSpc>
               <a:defRPr sz="1000">
                 <a:solidFill>
-                  <a:srgbClr val="475569"/>
+                  <a:srgbClr val="52525B"/>
                 </a:solidFill>
               </a:defRPr>
             </a:pPr>
@@ -14124,7 +14124,7 @@
             <a:pPr>
               <a:defRPr sz="1300" b="1">
                 <a:solidFill>
-                  <a:srgbClr val="0F172A"/>
+                  <a:srgbClr val="0A0A0A"/>
                 </a:solidFill>
               </a:defRPr>
             </a:pPr>
@@ -14136,7 +14136,7 @@
             <a:pPr>
               <a:defRPr sz="1000">
                 <a:solidFill>
-                  <a:srgbClr val="64748B"/>
+                  <a:srgbClr val="71717A"/>
                 </a:solidFill>
               </a:defRPr>
             </a:pPr>
@@ -14161,7 +14161,7 @@
             <a:avLst/>
           </a:prstGeom>
           <a:solidFill>
-            <a:srgbClr val="F3E8FF"/>
+            <a:srgbClr val="EBEBFC"/>
           </a:solidFill>
           <a:ln w="12700">
             <a:solidFill>
@@ -14241,7 +14241,7 @@
             <a:avLst/>
           </a:prstGeom>
           <a:solidFill>
-            <a:srgbClr val="F8FAFC"/>
+            <a:srgbClr val="F4F4F6"/>
           </a:solidFill>
           <a:ln>
             <a:noFill/>
@@ -14332,7 +14332,7 @@
               </a:lnSpc>
               <a:defRPr sz="1000">
                 <a:solidFill>
-                  <a:srgbClr val="475569"/>
+                  <a:srgbClr val="52525B"/>
                 </a:solidFill>
               </a:defRPr>
             </a:pPr>
@@ -14365,7 +14365,7 @@
           </a:solidFill>
           <a:ln w="22860">
             <a:solidFill>
-              <a:srgbClr val="03C75A"/>
+              <a:srgbClr val="10B981"/>
             </a:solidFill>
           </a:ln>
         </p:spPr>
@@ -14406,7 +14406,7 @@
             <a:avLst/>
           </a:prstGeom>
           <a:solidFill>
-            <a:srgbClr val="03C75A"/>
+            <a:srgbClr val="10B981"/>
           </a:solidFill>
           <a:ln>
             <a:noFill/>
@@ -14494,7 +14494,7 @@
             <a:pPr>
               <a:defRPr sz="1300" b="1">
                 <a:solidFill>
-                  <a:srgbClr val="0F172A"/>
+                  <a:srgbClr val="0A0A0A"/>
                 </a:solidFill>
               </a:defRPr>
             </a:pPr>
@@ -14506,7 +14506,7 @@
             <a:pPr>
               <a:defRPr sz="1000">
                 <a:solidFill>
-                  <a:srgbClr val="64748B"/>
+                  <a:srgbClr val="71717A"/>
                 </a:solidFill>
               </a:defRPr>
             </a:pPr>
@@ -14535,7 +14535,7 @@
           </a:solidFill>
           <a:ln w="12700">
             <a:solidFill>
-              <a:srgbClr val="03C75A"/>
+              <a:srgbClr val="10B981"/>
             </a:solidFill>
           </a:ln>
         </p:spPr>
@@ -14586,7 +14586,7 @@
             <a:pPr algn="ctr">
               <a:defRPr sz="1100" b="1">
                 <a:solidFill>
-                  <a:srgbClr val="03C75A"/>
+                  <a:srgbClr val="10B981"/>
                 </a:solidFill>
               </a:defRPr>
             </a:pPr>
@@ -14611,7 +14611,7 @@
             <a:avLst/>
           </a:prstGeom>
           <a:solidFill>
-            <a:srgbClr val="F8FAFC"/>
+            <a:srgbClr val="F4F4F6"/>
           </a:solidFill>
           <a:ln>
             <a:noFill/>
@@ -14664,7 +14664,7 @@
             <a:pPr algn="ctr">
               <a:defRPr sz="950" b="1">
                 <a:solidFill>
-                  <a:srgbClr val="03C75A"/>
+                  <a:srgbClr val="10B981"/>
                 </a:solidFill>
               </a:defRPr>
             </a:pPr>
@@ -14702,7 +14702,7 @@
               </a:lnSpc>
               <a:defRPr sz="1000">
                 <a:solidFill>
-                  <a:srgbClr val="475569"/>
+                  <a:srgbClr val="52525B"/>
                 </a:solidFill>
               </a:defRPr>
             </a:pPr>
@@ -14864,7 +14864,7 @@
             <a:pPr>
               <a:defRPr sz="1300" b="1">
                 <a:solidFill>
-                  <a:srgbClr val="0F172A"/>
+                  <a:srgbClr val="0A0A0A"/>
                 </a:solidFill>
               </a:defRPr>
             </a:pPr>
@@ -14876,7 +14876,7 @@
             <a:pPr>
               <a:defRPr sz="1000">
                 <a:solidFill>
-                  <a:srgbClr val="64748B"/>
+                  <a:srgbClr val="71717A"/>
                 </a:solidFill>
               </a:defRPr>
             </a:pPr>
@@ -14901,7 +14901,7 @@
             <a:avLst/>
           </a:prstGeom>
           <a:solidFill>
-            <a:srgbClr val="F3E8FF"/>
+            <a:srgbClr val="EBEBFC"/>
           </a:solidFill>
           <a:ln w="12700">
             <a:solidFill>
@@ -14981,7 +14981,7 @@
             <a:avLst/>
           </a:prstGeom>
           <a:solidFill>
-            <a:srgbClr val="F8FAFC"/>
+            <a:srgbClr val="F4F4F6"/>
           </a:solidFill>
           <a:ln>
             <a:noFill/>
@@ -15072,7 +15072,7 @@
               </a:lnSpc>
               <a:defRPr sz="1000">
                 <a:solidFill>
-                  <a:srgbClr val="475569"/>
+                  <a:srgbClr val="52525B"/>
                 </a:solidFill>
               </a:defRPr>
             </a:pPr>
@@ -15105,7 +15105,7 @@
           </a:solidFill>
           <a:ln w="15240">
             <a:solidFill>
-              <a:srgbClr val="64748B"/>
+              <a:srgbClr val="71717A"/>
             </a:solidFill>
           </a:ln>
         </p:spPr>
@@ -15146,7 +15146,7 @@
             <a:avLst/>
           </a:prstGeom>
           <a:solidFill>
-            <a:srgbClr val="64748B"/>
+            <a:srgbClr val="71717A"/>
           </a:solidFill>
           <a:ln>
             <a:noFill/>
@@ -15234,7 +15234,7 @@
             <a:pPr>
               <a:defRPr sz="1300" b="1">
                 <a:solidFill>
-                  <a:srgbClr val="0F172A"/>
+                  <a:srgbClr val="0A0A0A"/>
                 </a:solidFill>
               </a:defRPr>
             </a:pPr>
@@ -15246,7 +15246,7 @@
             <a:pPr>
               <a:defRPr sz="1000">
                 <a:solidFill>
-                  <a:srgbClr val="64748B"/>
+                  <a:srgbClr val="71717A"/>
                 </a:solidFill>
               </a:defRPr>
             </a:pPr>
@@ -15271,11 +15271,11 @@
             <a:avLst/>
           </a:prstGeom>
           <a:solidFill>
-            <a:srgbClr val="F3E8FF"/>
+            <a:srgbClr val="EBEBFC"/>
           </a:solidFill>
           <a:ln w="12700">
             <a:solidFill>
-              <a:srgbClr val="64748B"/>
+              <a:srgbClr val="71717A"/>
             </a:solidFill>
           </a:ln>
         </p:spPr>
@@ -15326,7 +15326,7 @@
             <a:pPr algn="ctr">
               <a:defRPr sz="1100" b="1">
                 <a:solidFill>
-                  <a:srgbClr val="64748B"/>
+                  <a:srgbClr val="71717A"/>
                 </a:solidFill>
               </a:defRPr>
             </a:pPr>
@@ -15351,7 +15351,7 @@
             <a:avLst/>
           </a:prstGeom>
           <a:solidFill>
-            <a:srgbClr val="F8FAFC"/>
+            <a:srgbClr val="F4F4F6"/>
           </a:solidFill>
           <a:ln>
             <a:noFill/>
@@ -15404,7 +15404,7 @@
             <a:pPr algn="ctr">
               <a:defRPr sz="950" b="1">
                 <a:solidFill>
-                  <a:srgbClr val="64748B"/>
+                  <a:srgbClr val="71717A"/>
                 </a:solidFill>
               </a:defRPr>
             </a:pPr>
@@ -15442,7 +15442,7 @@
               </a:lnSpc>
               <a:defRPr sz="1000">
                 <a:solidFill>
-                  <a:srgbClr val="475569"/>
+                  <a:srgbClr val="52525B"/>
                 </a:solidFill>
               </a:defRPr>
             </a:pPr>
@@ -15489,7 +15489,7 @@
             <a:avLst/>
           </a:prstGeom>
           <a:solidFill>
-            <a:srgbClr val="F8FAFC"/>
+            <a:srgbClr val="F4F4F6"/>
           </a:solidFill>
           <a:ln>
             <a:noFill/>
@@ -15532,11 +15532,11 @@
             <a:avLst/>
           </a:prstGeom>
           <a:solidFill>
-            <a:srgbClr val="EEF4FF"/>
+            <a:srgbClr val="F4F5FF"/>
           </a:solidFill>
           <a:ln w="12700">
             <a:solidFill>
-              <a:srgbClr val="3182F6"/>
+              <a:srgbClr val="585ECE"/>
             </a:solidFill>
           </a:ln>
         </p:spPr>
@@ -15587,7 +15587,7 @@
             <a:pPr>
               <a:defRPr sz="1000" b="1">
                 <a:solidFill>
-                  <a:srgbClr val="3182F6"/>
+                  <a:srgbClr val="585ECE"/>
                 </a:solidFill>
                 <a:latin typeface="Pretendard"/>
               </a:defRPr>
@@ -15623,7 +15623,7 @@
             <a:pPr>
               <a:defRPr sz="2300" b="1">
                 <a:solidFill>
-                  <a:srgbClr val="0F172A"/>
+                  <a:srgbClr val="0A0A0A"/>
                 </a:solidFill>
                 <a:latin typeface="Pretendard"/>
               </a:defRPr>
@@ -15659,7 +15659,7 @@
             <a:pPr>
               <a:defRPr sz="1200">
                 <a:solidFill>
-                  <a:srgbClr val="475569"/>
+                  <a:srgbClr val="52525B"/>
                 </a:solidFill>
                 <a:latin typeface="Pretendard"/>
               </a:defRPr>
@@ -15695,7 +15695,7 @@
             <a:pPr>
               <a:defRPr sz="900">
                 <a:solidFill>
-                  <a:srgbClr val="64748B"/>
+                  <a:srgbClr val="71717A"/>
                 </a:solidFill>
                 <a:latin typeface="Pretendard"/>
               </a:defRPr>
@@ -15731,7 +15731,7 @@
             <a:pPr algn="r">
               <a:defRPr sz="1000" b="1">
                 <a:solidFill>
-                  <a:srgbClr val="3182F6"/>
+                  <a:srgbClr val="585ECE"/>
                 </a:solidFill>
                 <a:latin typeface="Pretendard"/>
               </a:defRPr>
@@ -15761,7 +15761,7 @@
           </a:solidFill>
           <a:ln w="22860">
             <a:solidFill>
-              <a:srgbClr val="3182F6"/>
+              <a:srgbClr val="585ECE"/>
             </a:solidFill>
           </a:ln>
         </p:spPr>
@@ -15802,7 +15802,7 @@
             <a:avLst/>
           </a:prstGeom>
           <a:solidFill>
-            <a:srgbClr val="3182F6"/>
+            <a:srgbClr val="585ECE"/>
           </a:solidFill>
           <a:ln>
             <a:noFill/>
@@ -15890,7 +15890,7 @@
             <a:pPr>
               <a:defRPr sz="1700" b="1">
                 <a:solidFill>
-                  <a:srgbClr val="0F172A"/>
+                  <a:srgbClr val="0A0A0A"/>
                 </a:solidFill>
               </a:defRPr>
             </a:pPr>
@@ -15925,7 +15925,7 @@
             <a:pPr>
               <a:defRPr sz="1200" b="1">
                 <a:solidFill>
-                  <a:srgbClr val="3182F6"/>
+                  <a:srgbClr val="585ECE"/>
                 </a:solidFill>
               </a:defRPr>
             </a:pPr>
@@ -15963,7 +15963,7 @@
               </a:lnSpc>
               <a:defRPr sz="1150">
                 <a:solidFill>
-                  <a:srgbClr val="475569"/>
+                  <a:srgbClr val="52525B"/>
                 </a:solidFill>
               </a:defRPr>
             </a:pPr>
@@ -16126,7 +16126,7 @@
             <a:pPr>
               <a:defRPr sz="1700" b="1">
                 <a:solidFill>
-                  <a:srgbClr val="0F172A"/>
+                  <a:srgbClr val="0A0A0A"/>
                 </a:solidFill>
               </a:defRPr>
             </a:pPr>
@@ -16199,7 +16199,7 @@
               </a:lnSpc>
               <a:defRPr sz="1150">
                 <a:solidFill>
-                  <a:srgbClr val="475569"/>
+                  <a:srgbClr val="52525B"/>
                 </a:solidFill>
               </a:defRPr>
             </a:pPr>
@@ -16233,7 +16233,7 @@
           </a:solidFill>
           <a:ln w="22860">
             <a:solidFill>
-              <a:srgbClr val="03C75A"/>
+              <a:srgbClr val="10B981"/>
             </a:solidFill>
           </a:ln>
         </p:spPr>
@@ -16274,7 +16274,7 @@
             <a:avLst/>
           </a:prstGeom>
           <a:solidFill>
-            <a:srgbClr val="03C75A"/>
+            <a:srgbClr val="10B981"/>
           </a:solidFill>
           <a:ln>
             <a:noFill/>
@@ -16362,7 +16362,7 @@
             <a:pPr>
               <a:defRPr sz="1700" b="1">
                 <a:solidFill>
-                  <a:srgbClr val="0F172A"/>
+                  <a:srgbClr val="0A0A0A"/>
                 </a:solidFill>
               </a:defRPr>
             </a:pPr>
@@ -16397,7 +16397,7 @@
             <a:pPr>
               <a:defRPr sz="1200" b="1">
                 <a:solidFill>
-                  <a:srgbClr val="03C75A"/>
+                  <a:srgbClr val="10B981"/>
                 </a:solidFill>
               </a:defRPr>
             </a:pPr>
@@ -16435,7 +16435,7 @@
               </a:lnSpc>
               <a:defRPr sz="1150">
                 <a:solidFill>
-                  <a:srgbClr val="475569"/>
+                  <a:srgbClr val="52525B"/>
                 </a:solidFill>
               </a:defRPr>
             </a:pPr>

--- a/public/formu_pitch_deck.pptx
+++ b/public/formu_pitch_deck.pptx
@@ -3113,7 +3113,7 @@
             <a:avLst/>
           </a:prstGeom>
           <a:solidFill>
-            <a:srgbClr val="F4F4F6"/>
+            <a:srgbClr val="F8FAFC"/>
           </a:solidFill>
           <a:ln>
             <a:noFill/>
@@ -3156,7 +3156,7 @@
             <a:avLst/>
           </a:prstGeom>
           <a:solidFill>
-            <a:srgbClr val="EBEBFC"/>
+            <a:srgbClr val="F5F3FF"/>
           </a:solidFill>
           <a:ln w="15240">
             <a:solidFill>
@@ -3246,7 +3246,7 @@
             <a:pPr>
               <a:defRPr sz="5000" b="1">
                 <a:solidFill>
-                  <a:srgbClr val="0A0A0A"/>
+                  <a:srgbClr val="0F172A"/>
                 </a:solidFill>
               </a:defRPr>
             </a:pPr>
@@ -3258,7 +3258,7 @@
             <a:pPr>
               <a:defRPr sz="2200" b="1">
                 <a:solidFill>
-                  <a:srgbClr val="585ECE"/>
+                  <a:srgbClr val="3182F6"/>
                 </a:solidFill>
               </a:defRPr>
             </a:pPr>
@@ -3296,7 +3296,7 @@
               </a:lnSpc>
               <a:defRPr sz="1400">
                 <a:solidFill>
-                  <a:srgbClr val="52525B"/>
+                  <a:srgbClr val="475569"/>
                 </a:solidFill>
               </a:defRPr>
             </a:pPr>
@@ -3335,7 +3335,7 @@
             <a:pPr>
               <a:defRPr sz="1100" b="1">
                 <a:solidFill>
-                  <a:srgbClr val="71717A"/>
+                  <a:srgbClr val="64748B"/>
                 </a:solidFill>
               </a:defRPr>
             </a:pPr>
@@ -3364,7 +3364,7 @@
           </a:solidFill>
           <a:ln w="22860">
             <a:solidFill>
-              <a:srgbClr val="585ECE"/>
+              <a:srgbClr val="3182F6"/>
             </a:solidFill>
           </a:ln>
         </p:spPr>
@@ -3409,7 +3409,7 @@
           </a:solidFill>
           <a:ln w="19050">
             <a:solidFill>
-              <a:srgbClr val="585ECE"/>
+              <a:srgbClr val="3182F6"/>
             </a:solidFill>
           </a:ln>
         </p:spPr>
@@ -3460,7 +3460,7 @@
             <a:pPr>
               <a:defRPr sz="1350" b="1">
                 <a:solidFill>
-                  <a:srgbClr val="585ECE"/>
+                  <a:srgbClr val="3182F6"/>
                 </a:solidFill>
               </a:defRPr>
             </a:pPr>
@@ -3472,7 +3472,7 @@
             <a:pPr>
               <a:defRPr sz="1050">
                 <a:solidFill>
-                  <a:srgbClr val="52525B"/>
+                  <a:srgbClr val="475569"/>
                 </a:solidFill>
               </a:defRPr>
             </a:pPr>
@@ -3564,7 +3564,7 @@
             <a:pPr>
               <a:defRPr sz="1050">
                 <a:solidFill>
-                  <a:srgbClr val="52525B"/>
+                  <a:srgbClr val="475569"/>
                 </a:solidFill>
               </a:defRPr>
             </a:pPr>
@@ -3656,7 +3656,7 @@
             <a:pPr>
               <a:defRPr sz="1050">
                 <a:solidFill>
-                  <a:srgbClr val="52525B"/>
+                  <a:srgbClr val="475569"/>
                 </a:solidFill>
               </a:defRPr>
             </a:pPr>
@@ -3691,7 +3691,7 @@
             <a:pPr>
               <a:defRPr sz="900">
                 <a:solidFill>
-                  <a:srgbClr val="71717A"/>
+                  <a:srgbClr val="64748B"/>
                 </a:solidFill>
                 <a:latin typeface="Pretendard"/>
               </a:defRPr>
@@ -3727,7 +3727,7 @@
             <a:pPr algn="r">
               <a:defRPr sz="1000" b="1">
                 <a:solidFill>
-                  <a:srgbClr val="585ECE"/>
+                  <a:srgbClr val="3182F6"/>
                 </a:solidFill>
                 <a:latin typeface="Pretendard"/>
               </a:defRPr>
@@ -3771,7 +3771,7 @@
             <a:avLst/>
           </a:prstGeom>
           <a:solidFill>
-            <a:srgbClr val="F4F4F6"/>
+            <a:srgbClr val="F8FAFC"/>
           </a:solidFill>
           <a:ln>
             <a:noFill/>
@@ -3814,11 +3814,11 @@
             <a:avLst/>
           </a:prstGeom>
           <a:solidFill>
-            <a:srgbClr val="F4F5FF"/>
+            <a:srgbClr val="EEF4FF"/>
           </a:solidFill>
           <a:ln w="12700">
             <a:solidFill>
-              <a:srgbClr val="585ECE"/>
+              <a:srgbClr val="3182F6"/>
             </a:solidFill>
           </a:ln>
         </p:spPr>
@@ -3869,7 +3869,7 @@
             <a:pPr>
               <a:defRPr sz="1000" b="1">
                 <a:solidFill>
-                  <a:srgbClr val="585ECE"/>
+                  <a:srgbClr val="3182F6"/>
                 </a:solidFill>
                 <a:latin typeface="Pretendard"/>
               </a:defRPr>
@@ -3905,7 +3905,7 @@
             <a:pPr>
               <a:defRPr sz="2300" b="1">
                 <a:solidFill>
-                  <a:srgbClr val="0A0A0A"/>
+                  <a:srgbClr val="0F172A"/>
                 </a:solidFill>
                 <a:latin typeface="Pretendard"/>
               </a:defRPr>
@@ -3941,7 +3941,7 @@
             <a:pPr>
               <a:defRPr sz="1200">
                 <a:solidFill>
-                  <a:srgbClr val="52525B"/>
+                  <a:srgbClr val="475569"/>
                 </a:solidFill>
                 <a:latin typeface="Pretendard"/>
               </a:defRPr>
@@ -3977,7 +3977,7 @@
             <a:pPr>
               <a:defRPr sz="900">
                 <a:solidFill>
-                  <a:srgbClr val="71717A"/>
+                  <a:srgbClr val="64748B"/>
                 </a:solidFill>
                 <a:latin typeface="Pretendard"/>
               </a:defRPr>
@@ -4013,7 +4013,7 @@
             <a:pPr algn="r">
               <a:defRPr sz="1000" b="1">
                 <a:solidFill>
-                  <a:srgbClr val="585ECE"/>
+                  <a:srgbClr val="3182F6"/>
                 </a:solidFill>
                 <a:latin typeface="Pretendard"/>
               </a:defRPr>
@@ -4172,7 +4172,7 @@
             <a:pPr>
               <a:defRPr sz="1500" b="1">
                 <a:solidFill>
-                  <a:srgbClr val="0A0A0A"/>
+                  <a:srgbClr val="0F172A"/>
                 </a:solidFill>
               </a:defRPr>
             </a:pPr>
@@ -4210,7 +4210,7 @@
               </a:lnSpc>
               <a:defRPr sz="1100">
                 <a:solidFill>
-                  <a:srgbClr val="52525B"/>
+                  <a:srgbClr val="475569"/>
                 </a:solidFill>
               </a:defRPr>
             </a:pPr>
@@ -4243,7 +4243,7 @@
           </a:solidFill>
           <a:ln w="22860">
             <a:solidFill>
-              <a:srgbClr val="585ECE"/>
+              <a:srgbClr val="3182F6"/>
             </a:solidFill>
           </a:ln>
         </p:spPr>
@@ -4284,7 +4284,7 @@
             <a:avLst/>
           </a:prstGeom>
           <a:solidFill>
-            <a:srgbClr val="585ECE"/>
+            <a:srgbClr val="3182F6"/>
           </a:solidFill>
           <a:ln>
             <a:noFill/>
@@ -4372,7 +4372,7 @@
             <a:pPr>
               <a:defRPr sz="1500" b="1">
                 <a:solidFill>
-                  <a:srgbClr val="0A0A0A"/>
+                  <a:srgbClr val="0F172A"/>
                 </a:solidFill>
               </a:defRPr>
             </a:pPr>
@@ -4410,7 +4410,7 @@
               </a:lnSpc>
               <a:defRPr sz="1100">
                 <a:solidFill>
-                  <a:srgbClr val="52525B"/>
+                  <a:srgbClr val="475569"/>
                 </a:solidFill>
               </a:defRPr>
             </a:pPr>
@@ -4568,7 +4568,7 @@
             <a:pPr>
               <a:defRPr sz="1500" b="1">
                 <a:solidFill>
-                  <a:srgbClr val="0A0A0A"/>
+                  <a:srgbClr val="0F172A"/>
                 </a:solidFill>
               </a:defRPr>
             </a:pPr>
@@ -4606,7 +4606,7 @@
               </a:lnSpc>
               <a:defRPr sz="1100">
                 <a:solidFill>
-                  <a:srgbClr val="52525B"/>
+                  <a:srgbClr val="475569"/>
                 </a:solidFill>
               </a:defRPr>
             </a:pPr>
@@ -4635,7 +4635,7 @@
           </a:solidFill>
           <a:ln w="19050">
             <a:solidFill>
-              <a:srgbClr val="585ECE"/>
+              <a:srgbClr val="3182F6"/>
             </a:solidFill>
           </a:ln>
         </p:spPr>
@@ -4686,7 +4686,7 @@
             <a:pPr>
               <a:defRPr sz="1100" b="1">
                 <a:solidFill>
-                  <a:srgbClr val="585ECE"/>
+                  <a:srgbClr val="3182F6"/>
                 </a:solidFill>
               </a:defRPr>
             </a:pPr>
@@ -4698,7 +4698,7 @@
             <a:pPr>
               <a:defRPr sz="950">
                 <a:solidFill>
-                  <a:srgbClr val="52525B"/>
+                  <a:srgbClr val="475569"/>
                 </a:solidFill>
               </a:defRPr>
             </a:pPr>
@@ -4745,7 +4745,7 @@
             <a:avLst/>
           </a:prstGeom>
           <a:solidFill>
-            <a:srgbClr val="F4F4F6"/>
+            <a:srgbClr val="F8FAFC"/>
           </a:solidFill>
           <a:ln>
             <a:noFill/>
@@ -4788,11 +4788,11 @@
             <a:avLst/>
           </a:prstGeom>
           <a:solidFill>
-            <a:srgbClr val="F4F5FF"/>
+            <a:srgbClr val="EEF4FF"/>
           </a:solidFill>
           <a:ln w="12700">
             <a:solidFill>
-              <a:srgbClr val="585ECE"/>
+              <a:srgbClr val="3182F6"/>
             </a:solidFill>
           </a:ln>
         </p:spPr>
@@ -4843,7 +4843,7 @@
             <a:pPr>
               <a:defRPr sz="1000" b="1">
                 <a:solidFill>
-                  <a:srgbClr val="585ECE"/>
+                  <a:srgbClr val="3182F6"/>
                 </a:solidFill>
                 <a:latin typeface="Pretendard"/>
               </a:defRPr>
@@ -4879,7 +4879,7 @@
             <a:pPr>
               <a:defRPr sz="2300" b="1">
                 <a:solidFill>
-                  <a:srgbClr val="0A0A0A"/>
+                  <a:srgbClr val="0F172A"/>
                 </a:solidFill>
                 <a:latin typeface="Pretendard"/>
               </a:defRPr>
@@ -4915,7 +4915,7 @@
             <a:pPr>
               <a:defRPr sz="1200">
                 <a:solidFill>
-                  <a:srgbClr val="52525B"/>
+                  <a:srgbClr val="475569"/>
                 </a:solidFill>
                 <a:latin typeface="Pretendard"/>
               </a:defRPr>
@@ -4951,7 +4951,7 @@
             <a:pPr>
               <a:defRPr sz="900">
                 <a:solidFill>
-                  <a:srgbClr val="71717A"/>
+                  <a:srgbClr val="64748B"/>
                 </a:solidFill>
                 <a:latin typeface="Pretendard"/>
               </a:defRPr>
@@ -4987,7 +4987,7 @@
             <a:pPr algn="r">
               <a:defRPr sz="1000" b="1">
                 <a:solidFill>
-                  <a:srgbClr val="585ECE"/>
+                  <a:srgbClr val="3182F6"/>
                 </a:solidFill>
                 <a:latin typeface="Pretendard"/>
               </a:defRPr>
@@ -5013,11 +5013,11 @@
             <a:avLst/>
           </a:prstGeom>
           <a:solidFill>
-            <a:srgbClr val="0A0A0A"/>
+            <a:srgbClr val="0F172A"/>
           </a:solidFill>
           <a:ln w="25400">
             <a:solidFill>
-              <a:srgbClr val="585ECE"/>
+              <a:srgbClr val="3182F6"/>
             </a:solidFill>
           </a:ln>
         </p:spPr>
@@ -5116,7 +5116,7 @@
           </a:solidFill>
           <a:ln w="22860">
             <a:solidFill>
-              <a:srgbClr val="585ECE"/>
+              <a:srgbClr val="3182F6"/>
             </a:solidFill>
           </a:ln>
         </p:spPr>
@@ -5167,7 +5167,7 @@
             <a:pPr>
               <a:defRPr sz="1100" b="1">
                 <a:solidFill>
-                  <a:srgbClr val="585ECE"/>
+                  <a:srgbClr val="3182F6"/>
                 </a:solidFill>
               </a:defRPr>
             </a:pPr>
@@ -5202,7 +5202,7 @@
             <a:pPr>
               <a:defRPr sz="1600" b="1">
                 <a:solidFill>
-                  <a:srgbClr val="0A0A0A"/>
+                  <a:srgbClr val="0F172A"/>
                 </a:solidFill>
               </a:defRPr>
             </a:pPr>
@@ -5240,7 +5240,7 @@
               </a:lnSpc>
               <a:defRPr sz="1100">
                 <a:solidFill>
-                  <a:srgbClr val="52525B"/>
+                  <a:srgbClr val="475569"/>
                 </a:solidFill>
               </a:defRPr>
             </a:pPr>
@@ -5355,7 +5355,7 @@
             <a:pPr>
               <a:defRPr sz="1600" b="1">
                 <a:solidFill>
-                  <a:srgbClr val="0A0A0A"/>
+                  <a:srgbClr val="0F172A"/>
                 </a:solidFill>
               </a:defRPr>
             </a:pPr>
@@ -5393,7 +5393,7 @@
               </a:lnSpc>
               <a:defRPr sz="1100">
                 <a:solidFill>
-                  <a:srgbClr val="52525B"/>
+                  <a:srgbClr val="475569"/>
                 </a:solidFill>
               </a:defRPr>
             </a:pPr>
@@ -5508,7 +5508,7 @@
             <a:pPr>
               <a:defRPr sz="1600" b="1">
                 <a:solidFill>
-                  <a:srgbClr val="0A0A0A"/>
+                  <a:srgbClr val="0F172A"/>
                 </a:solidFill>
               </a:defRPr>
             </a:pPr>
@@ -5546,7 +5546,7 @@
               </a:lnSpc>
               <a:defRPr sz="1100">
                 <a:solidFill>
-                  <a:srgbClr val="52525B"/>
+                  <a:srgbClr val="475569"/>
                 </a:solidFill>
               </a:defRPr>
             </a:pPr>
@@ -5589,7 +5589,7 @@
             <a:avLst/>
           </a:prstGeom>
           <a:solidFill>
-            <a:srgbClr val="F4F4F6"/>
+            <a:srgbClr val="F8FAFC"/>
           </a:solidFill>
           <a:ln>
             <a:noFill/>
@@ -5632,11 +5632,11 @@
             <a:avLst/>
           </a:prstGeom>
           <a:solidFill>
-            <a:srgbClr val="F4F5FF"/>
+            <a:srgbClr val="EEF4FF"/>
           </a:solidFill>
           <a:ln w="12700">
             <a:solidFill>
-              <a:srgbClr val="585ECE"/>
+              <a:srgbClr val="3182F6"/>
             </a:solidFill>
           </a:ln>
         </p:spPr>
@@ -5687,7 +5687,7 @@
             <a:pPr>
               <a:defRPr sz="1000" b="1">
                 <a:solidFill>
-                  <a:srgbClr val="585ECE"/>
+                  <a:srgbClr val="3182F6"/>
                 </a:solidFill>
                 <a:latin typeface="Pretendard"/>
               </a:defRPr>
@@ -5723,7 +5723,7 @@
             <a:pPr>
               <a:defRPr sz="2300" b="1">
                 <a:solidFill>
-                  <a:srgbClr val="0A0A0A"/>
+                  <a:srgbClr val="0F172A"/>
                 </a:solidFill>
                 <a:latin typeface="Pretendard"/>
               </a:defRPr>
@@ -5759,7 +5759,7 @@
             <a:pPr>
               <a:defRPr sz="1200">
                 <a:solidFill>
-                  <a:srgbClr val="52525B"/>
+                  <a:srgbClr val="475569"/>
                 </a:solidFill>
                 <a:latin typeface="Pretendard"/>
               </a:defRPr>
@@ -5795,7 +5795,7 @@
             <a:pPr>
               <a:defRPr sz="900">
                 <a:solidFill>
-                  <a:srgbClr val="71717A"/>
+                  <a:srgbClr val="64748B"/>
                 </a:solidFill>
                 <a:latin typeface="Pretendard"/>
               </a:defRPr>
@@ -5831,7 +5831,7 @@
             <a:pPr algn="r">
               <a:defRPr sz="1000" b="1">
                 <a:solidFill>
-                  <a:srgbClr val="585ECE"/>
+                  <a:srgbClr val="3182F6"/>
                 </a:solidFill>
                 <a:latin typeface="Pretendard"/>
               </a:defRPr>
@@ -5861,7 +5861,7 @@
           </a:solidFill>
           <a:ln w="15240">
             <a:solidFill>
-              <a:srgbClr val="585ECE"/>
+              <a:srgbClr val="3182F6"/>
             </a:solidFill>
           </a:ln>
         </p:spPr>
@@ -5902,7 +5902,7 @@
             <a:avLst/>
           </a:prstGeom>
           <a:solidFill>
-            <a:srgbClr val="585ECE"/>
+            <a:srgbClr val="3182F6"/>
           </a:solidFill>
           <a:ln>
             <a:noFill/>
@@ -5990,7 +5990,7 @@
             <a:pPr>
               <a:defRPr sz="1300" b="1">
                 <a:solidFill>
-                  <a:srgbClr val="585ECE"/>
+                  <a:srgbClr val="3182F6"/>
                 </a:solidFill>
               </a:defRPr>
             </a:pPr>
@@ -6002,7 +6002,7 @@
             <a:pPr>
               <a:defRPr sz="1000">
                 <a:solidFill>
-                  <a:srgbClr val="52525B"/>
+                  <a:srgbClr val="475569"/>
                 </a:solidFill>
               </a:defRPr>
             </a:pPr>
@@ -6031,7 +6031,7 @@
           </a:solidFill>
           <a:ln w="15240">
             <a:solidFill>
-              <a:srgbClr val="585ECE"/>
+              <a:srgbClr val="3182F6"/>
             </a:solidFill>
           </a:ln>
         </p:spPr>
@@ -6072,7 +6072,7 @@
             <a:avLst/>
           </a:prstGeom>
           <a:solidFill>
-            <a:srgbClr val="585ECE"/>
+            <a:srgbClr val="3182F6"/>
           </a:solidFill>
           <a:ln>
             <a:noFill/>
@@ -6160,7 +6160,7 @@
             <a:pPr>
               <a:defRPr sz="1300" b="1">
                 <a:solidFill>
-                  <a:srgbClr val="585ECE"/>
+                  <a:srgbClr val="3182F6"/>
                 </a:solidFill>
               </a:defRPr>
             </a:pPr>
@@ -6172,7 +6172,7 @@
             <a:pPr>
               <a:defRPr sz="1000">
                 <a:solidFill>
-                  <a:srgbClr val="52525B"/>
+                  <a:srgbClr val="475569"/>
                 </a:solidFill>
               </a:defRPr>
             </a:pPr>
@@ -6201,7 +6201,7 @@
           </a:solidFill>
           <a:ln w="15240">
             <a:solidFill>
-              <a:srgbClr val="585ECE"/>
+              <a:srgbClr val="3182F6"/>
             </a:solidFill>
           </a:ln>
         </p:spPr>
@@ -6242,7 +6242,7 @@
             <a:avLst/>
           </a:prstGeom>
           <a:solidFill>
-            <a:srgbClr val="585ECE"/>
+            <a:srgbClr val="3182F6"/>
           </a:solidFill>
           <a:ln>
             <a:noFill/>
@@ -6330,7 +6330,7 @@
             <a:pPr>
               <a:defRPr sz="1300" b="1">
                 <a:solidFill>
-                  <a:srgbClr val="585ECE"/>
+                  <a:srgbClr val="3182F6"/>
                 </a:solidFill>
               </a:defRPr>
             </a:pPr>
@@ -6342,7 +6342,7 @@
             <a:pPr>
               <a:defRPr sz="1000">
                 <a:solidFill>
-                  <a:srgbClr val="52525B"/>
+                  <a:srgbClr val="475569"/>
                 </a:solidFill>
               </a:defRPr>
             </a:pPr>
@@ -6371,7 +6371,7 @@
           </a:solidFill>
           <a:ln w="15240">
             <a:solidFill>
-              <a:srgbClr val="585ECE"/>
+              <a:srgbClr val="3182F6"/>
             </a:solidFill>
           </a:ln>
         </p:spPr>
@@ -6412,7 +6412,7 @@
             <a:avLst/>
           </a:prstGeom>
           <a:solidFill>
-            <a:srgbClr val="585ECE"/>
+            <a:srgbClr val="3182F6"/>
           </a:solidFill>
           <a:ln>
             <a:noFill/>
@@ -6500,7 +6500,7 @@
             <a:pPr>
               <a:defRPr sz="1300" b="1">
                 <a:solidFill>
-                  <a:srgbClr val="585ECE"/>
+                  <a:srgbClr val="3182F6"/>
                 </a:solidFill>
               </a:defRPr>
             </a:pPr>
@@ -6512,7 +6512,7 @@
             <a:pPr>
               <a:defRPr sz="1000">
                 <a:solidFill>
-                  <a:srgbClr val="52525B"/>
+                  <a:srgbClr val="475569"/>
                 </a:solidFill>
               </a:defRPr>
             </a:pPr>
@@ -6682,7 +6682,7 @@
             <a:pPr>
               <a:defRPr sz="1000">
                 <a:solidFill>
-                  <a:srgbClr val="52525B"/>
+                  <a:srgbClr val="475569"/>
                 </a:solidFill>
               </a:defRPr>
             </a:pPr>
@@ -6852,7 +6852,7 @@
             <a:pPr>
               <a:defRPr sz="1000">
                 <a:solidFill>
-                  <a:srgbClr val="52525B"/>
+                  <a:srgbClr val="475569"/>
                 </a:solidFill>
               </a:defRPr>
             </a:pPr>
@@ -6944,7 +6944,7 @@
             <a:pPr>
               <a:defRPr sz="1200" b="1">
                 <a:solidFill>
-                  <a:srgbClr val="18181B"/>
+                  <a:srgbClr val="1E293B"/>
                 </a:solidFill>
               </a:defRPr>
             </a:pPr>
@@ -6957,7 +6957,7 @@
             <a:pPr>
               <a:defRPr sz="1050">
                 <a:solidFill>
-                  <a:srgbClr val="52525B"/>
+                  <a:srgbClr val="475569"/>
                 </a:solidFill>
               </a:defRPr>
             </a:pPr>
@@ -7035,7 +7035,7 @@
             <a:pPr>
               <a:defRPr sz="1050" b="1">
                 <a:solidFill>
-                  <a:srgbClr val="18181B"/>
+                  <a:srgbClr val="1E293B"/>
                 </a:solidFill>
               </a:defRPr>
             </a:pPr>
@@ -7113,7 +7113,7 @@
             <a:pPr>
               <a:defRPr sz="1050" b="1">
                 <a:solidFill>
-                  <a:srgbClr val="18181B"/>
+                  <a:srgbClr val="1E293B"/>
                 </a:solidFill>
               </a:defRPr>
             </a:pPr>
@@ -7191,7 +7191,7 @@
             <a:pPr>
               <a:defRPr sz="1050" b="1">
                 <a:solidFill>
-                  <a:srgbClr val="18181B"/>
+                  <a:srgbClr val="1E293B"/>
                 </a:solidFill>
               </a:defRPr>
             </a:pPr>
@@ -7234,7 +7234,7 @@
             <a:avLst/>
           </a:prstGeom>
           <a:solidFill>
-            <a:srgbClr val="F4F4F6"/>
+            <a:srgbClr val="F8FAFC"/>
           </a:solidFill>
           <a:ln>
             <a:noFill/>
@@ -7277,11 +7277,11 @@
             <a:avLst/>
           </a:prstGeom>
           <a:solidFill>
-            <a:srgbClr val="F4F5FF"/>
+            <a:srgbClr val="EEF4FF"/>
           </a:solidFill>
           <a:ln w="12700">
             <a:solidFill>
-              <a:srgbClr val="585ECE"/>
+              <a:srgbClr val="3182F6"/>
             </a:solidFill>
           </a:ln>
         </p:spPr>
@@ -7332,7 +7332,7 @@
             <a:pPr>
               <a:defRPr sz="1000" b="1">
                 <a:solidFill>
-                  <a:srgbClr val="585ECE"/>
+                  <a:srgbClr val="3182F6"/>
                 </a:solidFill>
                 <a:latin typeface="Pretendard"/>
               </a:defRPr>
@@ -7368,7 +7368,7 @@
             <a:pPr>
               <a:defRPr sz="2300" b="1">
                 <a:solidFill>
-                  <a:srgbClr val="0A0A0A"/>
+                  <a:srgbClr val="0F172A"/>
                 </a:solidFill>
                 <a:latin typeface="Pretendard"/>
               </a:defRPr>
@@ -7404,7 +7404,7 @@
             <a:pPr>
               <a:defRPr sz="1200">
                 <a:solidFill>
-                  <a:srgbClr val="52525B"/>
+                  <a:srgbClr val="475569"/>
                 </a:solidFill>
                 <a:latin typeface="Pretendard"/>
               </a:defRPr>
@@ -7440,7 +7440,7 @@
             <a:pPr>
               <a:defRPr sz="900">
                 <a:solidFill>
-                  <a:srgbClr val="71717A"/>
+                  <a:srgbClr val="64748B"/>
                 </a:solidFill>
                 <a:latin typeface="Pretendard"/>
               </a:defRPr>
@@ -7476,7 +7476,7 @@
             <a:pPr algn="r">
               <a:defRPr sz="1000" b="1">
                 <a:solidFill>
-                  <a:srgbClr val="585ECE"/>
+                  <a:srgbClr val="3182F6"/>
                 </a:solidFill>
                 <a:latin typeface="Pretendard"/>
               </a:defRPr>
@@ -7506,7 +7506,7 @@
           </a:solidFill>
           <a:ln w="15240">
             <a:solidFill>
-              <a:srgbClr val="E4E4E7"/>
+              <a:srgbClr val="E2E8F0"/>
             </a:solidFill>
           </a:ln>
         </p:spPr>
@@ -7557,7 +7557,7 @@
             <a:pPr>
               <a:defRPr sz="1200" b="1">
                 <a:solidFill>
-                  <a:srgbClr val="71717A"/>
+                  <a:srgbClr val="64748B"/>
                 </a:solidFill>
               </a:defRPr>
             </a:pPr>
@@ -7582,11 +7582,11 @@
             <a:avLst/>
           </a:prstGeom>
           <a:solidFill>
-            <a:srgbClr val="F4F4F6"/>
+            <a:srgbClr val="F8FAFC"/>
           </a:solidFill>
           <a:ln w="15240">
             <a:solidFill>
-              <a:srgbClr val="E4E4E7"/>
+              <a:srgbClr val="E2E8F0"/>
             </a:solidFill>
           </a:ln>
         </p:spPr>
@@ -7637,7 +7637,7 @@
             <a:pPr>
               <a:defRPr sz="1100" b="1">
                 <a:solidFill>
-                  <a:srgbClr val="18181B"/>
+                  <a:srgbClr val="1E293B"/>
                 </a:solidFill>
               </a:defRPr>
             </a:pPr>
@@ -7649,7 +7649,7 @@
             <a:pPr>
               <a:defRPr sz="950">
                 <a:solidFill>
-                  <a:srgbClr val="71717A"/>
+                  <a:srgbClr val="64748B"/>
                 </a:solidFill>
               </a:defRPr>
             </a:pPr>
@@ -7674,11 +7674,11 @@
             <a:avLst/>
           </a:prstGeom>
           <a:solidFill>
-            <a:srgbClr val="F4F4F6"/>
+            <a:srgbClr val="F8FAFC"/>
           </a:solidFill>
           <a:ln w="15240">
             <a:solidFill>
-              <a:srgbClr val="E4E4E7"/>
+              <a:srgbClr val="E2E8F0"/>
             </a:solidFill>
           </a:ln>
         </p:spPr>
@@ -7729,7 +7729,7 @@
             <a:pPr>
               <a:defRPr sz="1100" b="1">
                 <a:solidFill>
-                  <a:srgbClr val="18181B"/>
+                  <a:srgbClr val="1E293B"/>
                 </a:solidFill>
               </a:defRPr>
             </a:pPr>
@@ -7741,7 +7741,7 @@
             <a:pPr>
               <a:defRPr sz="950">
                 <a:solidFill>
-                  <a:srgbClr val="71717A"/>
+                  <a:srgbClr val="64748B"/>
                 </a:solidFill>
               </a:defRPr>
             </a:pPr>
@@ -7766,11 +7766,11 @@
             <a:avLst/>
           </a:prstGeom>
           <a:solidFill>
-            <a:srgbClr val="F4F4F6"/>
+            <a:srgbClr val="F8FAFC"/>
           </a:solidFill>
           <a:ln w="15240">
             <a:solidFill>
-              <a:srgbClr val="E4E4E7"/>
+              <a:srgbClr val="E2E8F0"/>
             </a:solidFill>
           </a:ln>
         </p:spPr>
@@ -7821,7 +7821,7 @@
             <a:pPr>
               <a:defRPr sz="1100" b="1">
                 <a:solidFill>
-                  <a:srgbClr val="18181B"/>
+                  <a:srgbClr val="1E293B"/>
                 </a:solidFill>
               </a:defRPr>
             </a:pPr>
@@ -7833,7 +7833,7 @@
             <a:pPr>
               <a:defRPr sz="950">
                 <a:solidFill>
-                  <a:srgbClr val="71717A"/>
+                  <a:srgbClr val="64748B"/>
                 </a:solidFill>
               </a:defRPr>
             </a:pPr>
@@ -7858,11 +7858,11 @@
             <a:avLst/>
           </a:prstGeom>
           <a:solidFill>
-            <a:srgbClr val="F4F4F6"/>
+            <a:srgbClr val="F8FAFC"/>
           </a:solidFill>
           <a:ln w="15240">
             <a:solidFill>
-              <a:srgbClr val="E4E4E7"/>
+              <a:srgbClr val="E2E8F0"/>
             </a:solidFill>
           </a:ln>
         </p:spPr>
@@ -7913,7 +7913,7 @@
             <a:pPr>
               <a:defRPr sz="1100" b="1">
                 <a:solidFill>
-                  <a:srgbClr val="18181B"/>
+                  <a:srgbClr val="1E293B"/>
                 </a:solidFill>
               </a:defRPr>
             </a:pPr>
@@ -7925,7 +7925,7 @@
             <a:pPr>
               <a:defRPr sz="950">
                 <a:solidFill>
-                  <a:srgbClr val="71717A"/>
+                  <a:srgbClr val="64748B"/>
                 </a:solidFill>
               </a:defRPr>
             </a:pPr>
@@ -7950,11 +7950,11 @@
             <a:avLst/>
           </a:prstGeom>
           <a:solidFill>
-            <a:srgbClr val="F4F4F6"/>
+            <a:srgbClr val="F8FAFC"/>
           </a:solidFill>
           <a:ln w="15240">
             <a:solidFill>
-              <a:srgbClr val="E4E4E7"/>
+              <a:srgbClr val="E2E8F0"/>
             </a:solidFill>
           </a:ln>
         </p:spPr>
@@ -8005,7 +8005,7 @@
             <a:pPr>
               <a:defRPr sz="1100" b="1">
                 <a:solidFill>
-                  <a:srgbClr val="18181B"/>
+                  <a:srgbClr val="1E293B"/>
                 </a:solidFill>
               </a:defRPr>
             </a:pPr>
@@ -8017,7 +8017,7 @@
             <a:pPr>
               <a:defRPr sz="950">
                 <a:solidFill>
-                  <a:srgbClr val="71717A"/>
+                  <a:srgbClr val="64748B"/>
                 </a:solidFill>
               </a:defRPr>
             </a:pPr>
@@ -8046,7 +8046,7 @@
           </a:solidFill>
           <a:ln w="27940">
             <a:solidFill>
-              <a:srgbClr val="585ECE"/>
+              <a:srgbClr val="3182F6"/>
             </a:solidFill>
           </a:ln>
         </p:spPr>
@@ -8097,7 +8097,7 @@
             <a:pPr>
               <a:defRPr sz="1250" b="1">
                 <a:solidFill>
-                  <a:srgbClr val="585ECE"/>
+                  <a:srgbClr val="3182F6"/>
                 </a:solidFill>
               </a:defRPr>
             </a:pPr>
@@ -8122,11 +8122,11 @@
             <a:avLst/>
           </a:prstGeom>
           <a:solidFill>
-            <a:srgbClr val="F4F5FF"/>
+            <a:srgbClr val="EEF4FF"/>
           </a:solidFill>
           <a:ln w="15240">
             <a:solidFill>
-              <a:srgbClr val="585ECE"/>
+              <a:srgbClr val="3182F6"/>
             </a:solidFill>
           </a:ln>
         </p:spPr>
@@ -8177,7 +8177,7 @@
             <a:pPr>
               <a:defRPr sz="1100" b="1">
                 <a:solidFill>
-                  <a:srgbClr val="585ECE"/>
+                  <a:srgbClr val="3182F6"/>
                 </a:solidFill>
               </a:defRPr>
             </a:pPr>
@@ -8189,7 +8189,7 @@
             <a:pPr>
               <a:defRPr sz="950">
                 <a:solidFill>
-                  <a:srgbClr val="18181B"/>
+                  <a:srgbClr val="1E293B"/>
                 </a:solidFill>
               </a:defRPr>
             </a:pPr>
@@ -8214,11 +8214,11 @@
             <a:avLst/>
           </a:prstGeom>
           <a:solidFill>
-            <a:srgbClr val="F4F5FF"/>
+            <a:srgbClr val="EEF4FF"/>
           </a:solidFill>
           <a:ln w="15240">
             <a:solidFill>
-              <a:srgbClr val="585ECE"/>
+              <a:srgbClr val="3182F6"/>
             </a:solidFill>
           </a:ln>
         </p:spPr>
@@ -8269,7 +8269,7 @@
             <a:pPr>
               <a:defRPr sz="1100" b="1">
                 <a:solidFill>
-                  <a:srgbClr val="585ECE"/>
+                  <a:srgbClr val="3182F6"/>
                 </a:solidFill>
               </a:defRPr>
             </a:pPr>
@@ -8281,7 +8281,7 @@
             <a:pPr>
               <a:defRPr sz="950">
                 <a:solidFill>
-                  <a:srgbClr val="18181B"/>
+                  <a:srgbClr val="1E293B"/>
                 </a:solidFill>
               </a:defRPr>
             </a:pPr>
@@ -8306,7 +8306,7 @@
             <a:avLst/>
           </a:prstGeom>
           <a:solidFill>
-            <a:srgbClr val="EBEBFC"/>
+            <a:srgbClr val="F5F3FF"/>
           </a:solidFill>
           <a:ln w="15240">
             <a:solidFill>
@@ -8373,7 +8373,7 @@
             <a:pPr>
               <a:defRPr sz="950">
                 <a:solidFill>
-                  <a:srgbClr val="18181B"/>
+                  <a:srgbClr val="1E293B"/>
                 </a:solidFill>
               </a:defRPr>
             </a:pPr>
@@ -8465,7 +8465,7 @@
             <a:pPr>
               <a:defRPr sz="950">
                 <a:solidFill>
-                  <a:srgbClr val="18181B"/>
+                  <a:srgbClr val="1E293B"/>
                 </a:solidFill>
               </a:defRPr>
             </a:pPr>
@@ -8557,7 +8557,7 @@
             <a:pPr>
               <a:defRPr sz="950">
                 <a:solidFill>
-                  <a:srgbClr val="18181B"/>
+                  <a:srgbClr val="1E293B"/>
                 </a:solidFill>
               </a:defRPr>
             </a:pPr>
@@ -8600,7 +8600,7 @@
             <a:avLst/>
           </a:prstGeom>
           <a:solidFill>
-            <a:srgbClr val="F4F4F6"/>
+            <a:srgbClr val="F8FAFC"/>
           </a:solidFill>
           <a:ln>
             <a:noFill/>
@@ -8643,11 +8643,11 @@
             <a:avLst/>
           </a:prstGeom>
           <a:solidFill>
-            <a:srgbClr val="F4F5FF"/>
+            <a:srgbClr val="EEF4FF"/>
           </a:solidFill>
           <a:ln w="12700">
             <a:solidFill>
-              <a:srgbClr val="585ECE"/>
+              <a:srgbClr val="3182F6"/>
             </a:solidFill>
           </a:ln>
         </p:spPr>
@@ -8698,7 +8698,7 @@
             <a:pPr>
               <a:defRPr sz="1000" b="1">
                 <a:solidFill>
-                  <a:srgbClr val="585ECE"/>
+                  <a:srgbClr val="3182F6"/>
                 </a:solidFill>
                 <a:latin typeface="Pretendard"/>
               </a:defRPr>
@@ -8734,7 +8734,7 @@
             <a:pPr>
               <a:defRPr sz="2300" b="1">
                 <a:solidFill>
-                  <a:srgbClr val="0A0A0A"/>
+                  <a:srgbClr val="0F172A"/>
                 </a:solidFill>
                 <a:latin typeface="Pretendard"/>
               </a:defRPr>
@@ -8770,7 +8770,7 @@
             <a:pPr>
               <a:defRPr sz="1200">
                 <a:solidFill>
-                  <a:srgbClr val="52525B"/>
+                  <a:srgbClr val="475569"/>
                 </a:solidFill>
                 <a:latin typeface="Pretendard"/>
               </a:defRPr>
@@ -8806,7 +8806,7 @@
             <a:pPr>
               <a:defRPr sz="900">
                 <a:solidFill>
-                  <a:srgbClr val="71717A"/>
+                  <a:srgbClr val="64748B"/>
                 </a:solidFill>
                 <a:latin typeface="Pretendard"/>
               </a:defRPr>
@@ -8842,7 +8842,7 @@
             <a:pPr algn="r">
               <a:defRPr sz="1000" b="1">
                 <a:solidFill>
-                  <a:srgbClr val="585ECE"/>
+                  <a:srgbClr val="3182F6"/>
                 </a:solidFill>
                 <a:latin typeface="Pretendard"/>
               </a:defRPr>
@@ -8872,7 +8872,7 @@
           </a:solidFill>
           <a:ln w="19050">
             <a:solidFill>
-              <a:srgbClr val="585ECE"/>
+              <a:srgbClr val="3182F6"/>
             </a:solidFill>
           </a:ln>
         </p:spPr>
@@ -8923,7 +8923,7 @@
             <a:pPr>
               <a:defRPr sz="1200" b="1">
                 <a:solidFill>
-                  <a:srgbClr val="0A0A0A"/>
+                  <a:srgbClr val="0F172A"/>
                 </a:solidFill>
               </a:defRPr>
             </a:pPr>
@@ -8948,7 +8948,7 @@
             <a:avLst/>
           </a:prstGeom>
           <a:solidFill>
-            <a:srgbClr val="F4F4F6"/>
+            <a:srgbClr val="F8FAFC"/>
           </a:solidFill>
           <a:ln>
             <a:noFill/>
@@ -9001,7 +9001,7 @@
             <a:pPr>
               <a:defRPr sz="1100" b="1">
                 <a:solidFill>
-                  <a:srgbClr val="71717A"/>
+                  <a:srgbClr val="64748B"/>
                 </a:solidFill>
               </a:defRPr>
             </a:pPr>
@@ -9026,7 +9026,7 @@
             <a:avLst/>
           </a:prstGeom>
           <a:solidFill>
-            <a:srgbClr val="71717A"/>
+            <a:srgbClr val="64748B"/>
           </a:solidFill>
           <a:ln>
             <a:noFill/>
@@ -9069,7 +9069,7 @@
             <a:avLst/>
           </a:prstGeom>
           <a:solidFill>
-            <a:srgbClr val="F4F5FF"/>
+            <a:srgbClr val="EEF4FF"/>
           </a:solidFill>
           <a:ln>
             <a:noFill/>
@@ -9122,7 +9122,7 @@
             <a:pPr>
               <a:defRPr sz="1150" b="1">
                 <a:solidFill>
-                  <a:srgbClr val="585ECE"/>
+                  <a:srgbClr val="3182F6"/>
                 </a:solidFill>
               </a:defRPr>
             </a:pPr>
@@ -9147,7 +9147,7 @@
             <a:avLst/>
           </a:prstGeom>
           <a:solidFill>
-            <a:srgbClr val="585ECE"/>
+            <a:srgbClr val="3182F6"/>
           </a:solidFill>
           <a:ln>
             <a:noFill/>
@@ -9225,7 +9225,7 @@
             <a:avLst/>
           </a:prstGeom>
           <a:solidFill>
-            <a:srgbClr val="EBEBFC"/>
+            <a:srgbClr val="F5F3FF"/>
           </a:solidFill>
           <a:ln w="15240">
             <a:solidFill>
@@ -9292,7 +9292,7 @@
             <a:pPr>
               <a:defRPr sz="1000">
                 <a:solidFill>
-                  <a:srgbClr val="52525B"/>
+                  <a:srgbClr val="475569"/>
                 </a:solidFill>
               </a:defRPr>
             </a:pPr>
@@ -9384,7 +9384,7 @@
             <a:pPr>
               <a:defRPr sz="1250" b="1">
                 <a:solidFill>
-                  <a:srgbClr val="0A0A0A"/>
+                  <a:srgbClr val="0F172A"/>
                 </a:solidFill>
               </a:defRPr>
             </a:pPr>
@@ -9396,7 +9396,7 @@
             <a:pPr>
               <a:defRPr sz="1000">
                 <a:solidFill>
-                  <a:srgbClr val="52525B"/>
+                  <a:srgbClr val="475569"/>
                 </a:solidFill>
               </a:defRPr>
             </a:pPr>
@@ -9488,7 +9488,7 @@
             <a:pPr>
               <a:defRPr sz="1250" b="1">
                 <a:solidFill>
-                  <a:srgbClr val="0A0A0A"/>
+                  <a:srgbClr val="0F172A"/>
                 </a:solidFill>
               </a:defRPr>
             </a:pPr>
@@ -9500,7 +9500,7 @@
             <a:pPr>
               <a:defRPr sz="1000">
                 <a:solidFill>
-                  <a:srgbClr val="52525B"/>
+                  <a:srgbClr val="475569"/>
                 </a:solidFill>
               </a:defRPr>
             </a:pPr>
@@ -9592,7 +9592,7 @@
             <a:pPr>
               <a:defRPr sz="1250" b="1">
                 <a:solidFill>
-                  <a:srgbClr val="0A0A0A"/>
+                  <a:srgbClr val="0F172A"/>
                 </a:solidFill>
               </a:defRPr>
             </a:pPr>
@@ -9604,7 +9604,7 @@
             <a:pPr>
               <a:defRPr sz="1000">
                 <a:solidFill>
-                  <a:srgbClr val="52525B"/>
+                  <a:srgbClr val="475569"/>
                 </a:solidFill>
               </a:defRPr>
             </a:pPr>
@@ -9647,7 +9647,7 @@
             <a:avLst/>
           </a:prstGeom>
           <a:solidFill>
-            <a:srgbClr val="F4F4F6"/>
+            <a:srgbClr val="F8FAFC"/>
           </a:solidFill>
           <a:ln>
             <a:noFill/>
@@ -9690,11 +9690,11 @@
             <a:avLst/>
           </a:prstGeom>
           <a:solidFill>
-            <a:srgbClr val="F4F5FF"/>
+            <a:srgbClr val="EEF4FF"/>
           </a:solidFill>
           <a:ln w="12700">
             <a:solidFill>
-              <a:srgbClr val="585ECE"/>
+              <a:srgbClr val="3182F6"/>
             </a:solidFill>
           </a:ln>
         </p:spPr>
@@ -9745,7 +9745,7 @@
             <a:pPr>
               <a:defRPr sz="1000" b="1">
                 <a:solidFill>
-                  <a:srgbClr val="585ECE"/>
+                  <a:srgbClr val="3182F6"/>
                 </a:solidFill>
                 <a:latin typeface="Pretendard"/>
               </a:defRPr>
@@ -9781,7 +9781,7 @@
             <a:pPr>
               <a:defRPr sz="2300" b="1">
                 <a:solidFill>
-                  <a:srgbClr val="0A0A0A"/>
+                  <a:srgbClr val="0F172A"/>
                 </a:solidFill>
                 <a:latin typeface="Pretendard"/>
               </a:defRPr>
@@ -9817,7 +9817,7 @@
             <a:pPr>
               <a:defRPr sz="1200">
                 <a:solidFill>
-                  <a:srgbClr val="52525B"/>
+                  <a:srgbClr val="475569"/>
                 </a:solidFill>
                 <a:latin typeface="Pretendard"/>
               </a:defRPr>
@@ -9853,7 +9853,7 @@
             <a:pPr>
               <a:defRPr sz="900">
                 <a:solidFill>
-                  <a:srgbClr val="71717A"/>
+                  <a:srgbClr val="64748B"/>
                 </a:solidFill>
                 <a:latin typeface="Pretendard"/>
               </a:defRPr>
@@ -9889,7 +9889,7 @@
             <a:pPr algn="r">
               <a:defRPr sz="1000" b="1">
                 <a:solidFill>
-                  <a:srgbClr val="585ECE"/>
+                  <a:srgbClr val="3182F6"/>
                 </a:solidFill>
                 <a:latin typeface="Pretendard"/>
               </a:defRPr>
@@ -9919,7 +9919,7 @@
           </a:solidFill>
           <a:ln w="22860">
             <a:solidFill>
-              <a:srgbClr val="585ECE"/>
+              <a:srgbClr val="3182F6"/>
             </a:solidFill>
           </a:ln>
         </p:spPr>
@@ -9960,7 +9960,7 @@
             <a:avLst/>
           </a:prstGeom>
           <a:solidFill>
-            <a:srgbClr val="585ECE"/>
+            <a:srgbClr val="3182F6"/>
           </a:solidFill>
           <a:ln>
             <a:noFill/>
@@ -10048,7 +10048,7 @@
             <a:pPr>
               <a:defRPr sz="1500" b="1">
                 <a:solidFill>
-                  <a:srgbClr val="0A0A0A"/>
+                  <a:srgbClr val="0F172A"/>
                 </a:solidFill>
               </a:defRPr>
             </a:pPr>
@@ -10063,7 +10063,7 @@
               </a:lnSpc>
               <a:defRPr sz="1100">
                 <a:solidFill>
-                  <a:srgbClr val="52525B"/>
+                  <a:srgbClr val="475569"/>
                 </a:solidFill>
               </a:defRPr>
             </a:pPr>
@@ -10225,7 +10225,7 @@
             <a:pPr>
               <a:defRPr sz="1500" b="1">
                 <a:solidFill>
-                  <a:srgbClr val="0A0A0A"/>
+                  <a:srgbClr val="0F172A"/>
                 </a:solidFill>
               </a:defRPr>
             </a:pPr>
@@ -10240,7 +10240,7 @@
               </a:lnSpc>
               <a:defRPr sz="1100">
                 <a:solidFill>
-                  <a:srgbClr val="52525B"/>
+                  <a:srgbClr val="475569"/>
                 </a:solidFill>
               </a:defRPr>
             </a:pPr>
@@ -10398,7 +10398,7 @@
             <a:pPr>
               <a:defRPr sz="1500" b="1">
                 <a:solidFill>
-                  <a:srgbClr val="0A0A0A"/>
+                  <a:srgbClr val="0F172A"/>
                 </a:solidFill>
               </a:defRPr>
             </a:pPr>
@@ -10413,7 +10413,7 @@
               </a:lnSpc>
               <a:defRPr sz="1100">
                 <a:solidFill>
-                  <a:srgbClr val="52525B"/>
+                  <a:srgbClr val="475569"/>
                 </a:solidFill>
               </a:defRPr>
             </a:pPr>
@@ -10571,7 +10571,7 @@
             <a:pPr>
               <a:defRPr sz="1500" b="1">
                 <a:solidFill>
-                  <a:srgbClr val="0A0A0A"/>
+                  <a:srgbClr val="0F172A"/>
                 </a:solidFill>
               </a:defRPr>
             </a:pPr>
@@ -10586,7 +10586,7 @@
               </a:lnSpc>
               <a:defRPr sz="1100">
                 <a:solidFill>
-                  <a:srgbClr val="52525B"/>
+                  <a:srgbClr val="475569"/>
                 </a:solidFill>
               </a:defRPr>
             </a:pPr>
@@ -10629,7 +10629,7 @@
             <a:avLst/>
           </a:prstGeom>
           <a:solidFill>
-            <a:srgbClr val="F4F4F6"/>
+            <a:srgbClr val="F8FAFC"/>
           </a:solidFill>
           <a:ln>
             <a:noFill/>
@@ -10672,11 +10672,11 @@
             <a:avLst/>
           </a:prstGeom>
           <a:solidFill>
-            <a:srgbClr val="F4F5FF"/>
+            <a:srgbClr val="EEF4FF"/>
           </a:solidFill>
           <a:ln w="12700">
             <a:solidFill>
-              <a:srgbClr val="585ECE"/>
+              <a:srgbClr val="3182F6"/>
             </a:solidFill>
           </a:ln>
         </p:spPr>
@@ -10727,7 +10727,7 @@
             <a:pPr>
               <a:defRPr sz="1000" b="1">
                 <a:solidFill>
-                  <a:srgbClr val="585ECE"/>
+                  <a:srgbClr val="3182F6"/>
                 </a:solidFill>
                 <a:latin typeface="Pretendard"/>
               </a:defRPr>
@@ -10763,7 +10763,7 @@
             <a:pPr>
               <a:defRPr sz="2300" b="1">
                 <a:solidFill>
-                  <a:srgbClr val="0A0A0A"/>
+                  <a:srgbClr val="0F172A"/>
                 </a:solidFill>
                 <a:latin typeface="Pretendard"/>
               </a:defRPr>
@@ -10799,7 +10799,7 @@
             <a:pPr>
               <a:defRPr sz="1200">
                 <a:solidFill>
-                  <a:srgbClr val="52525B"/>
+                  <a:srgbClr val="475569"/>
                 </a:solidFill>
                 <a:latin typeface="Pretendard"/>
               </a:defRPr>
@@ -10835,7 +10835,7 @@
             <a:pPr>
               <a:defRPr sz="900">
                 <a:solidFill>
-                  <a:srgbClr val="71717A"/>
+                  <a:srgbClr val="64748B"/>
                 </a:solidFill>
                 <a:latin typeface="Pretendard"/>
               </a:defRPr>
@@ -10871,7 +10871,7 @@
             <a:pPr algn="r">
               <a:defRPr sz="1000" b="1">
                 <a:solidFill>
-                  <a:srgbClr val="585ECE"/>
+                  <a:srgbClr val="3182F6"/>
                 </a:solidFill>
                 <a:latin typeface="Pretendard"/>
               </a:defRPr>
@@ -10901,7 +10901,7 @@
           </a:solidFill>
           <a:ln w="15240">
             <a:solidFill>
-              <a:srgbClr val="E4E4E7"/>
+              <a:srgbClr val="E2E8F0"/>
             </a:solidFill>
           </a:ln>
         </p:spPr>
@@ -10942,7 +10942,7 @@
             <a:avLst/>
           </a:prstGeom>
           <a:solidFill>
-            <a:srgbClr val="F4F4F6"/>
+            <a:srgbClr val="F8FAFC"/>
           </a:solidFill>
           <a:ln>
             <a:noFill/>
@@ -10995,7 +10995,7 @@
             <a:pPr algn="ctr">
               <a:defRPr sz="1100" b="1">
                 <a:solidFill>
-                  <a:srgbClr val="0A0A0A"/>
+                  <a:srgbClr val="0F172A"/>
                 </a:solidFill>
               </a:defRPr>
             </a:pPr>
@@ -11030,7 +11030,7 @@
             <a:pPr algn="ctr">
               <a:defRPr sz="1100" b="1">
                 <a:solidFill>
-                  <a:srgbClr val="0A0A0A"/>
+                  <a:srgbClr val="0F172A"/>
                 </a:solidFill>
               </a:defRPr>
             </a:pPr>
@@ -11065,7 +11065,7 @@
             <a:pPr algn="ctr">
               <a:defRPr sz="1100" b="1">
                 <a:solidFill>
-                  <a:srgbClr val="0A0A0A"/>
+                  <a:srgbClr val="0F172A"/>
                 </a:solidFill>
               </a:defRPr>
             </a:pPr>
@@ -11100,7 +11100,7 @@
             <a:pPr algn="ctr">
               <a:defRPr sz="1100" b="1">
                 <a:solidFill>
-                  <a:srgbClr val="0A0A0A"/>
+                  <a:srgbClr val="0F172A"/>
                 </a:solidFill>
               </a:defRPr>
             </a:pPr>
@@ -11135,7 +11135,7 @@
             <a:pPr algn="ctr">
               <a:defRPr sz="1100" b="1">
                 <a:solidFill>
-                  <a:srgbClr val="585ECE"/>
+                  <a:srgbClr val="3182F6"/>
                 </a:solidFill>
               </a:defRPr>
             </a:pPr>
@@ -11160,11 +11160,11 @@
             <a:avLst/>
           </a:prstGeom>
           <a:solidFill>
-            <a:srgbClr val="F4F5FF"/>
+            <a:srgbClr val="EEF4FF"/>
           </a:solidFill>
           <a:ln w="15240">
             <a:solidFill>
-              <a:srgbClr val="585ECE"/>
+              <a:srgbClr val="3182F6"/>
             </a:solidFill>
           </a:ln>
         </p:spPr>
@@ -11215,7 +11215,7 @@
             <a:pPr algn="l">
               <a:defRPr sz="1050" b="1">
                 <a:solidFill>
-                  <a:srgbClr val="18181B"/>
+                  <a:srgbClr val="1E293B"/>
                 </a:solidFill>
               </a:defRPr>
             </a:pPr>
@@ -11250,7 +11250,7 @@
             <a:pPr algn="ctr">
               <a:defRPr sz="1050">
                 <a:solidFill>
-                  <a:srgbClr val="52525B"/>
+                  <a:srgbClr val="475569"/>
                 </a:solidFill>
               </a:defRPr>
             </a:pPr>
@@ -11285,7 +11285,7 @@
             <a:pPr algn="ctr">
               <a:defRPr sz="1050">
                 <a:solidFill>
-                  <a:srgbClr val="52525B"/>
+                  <a:srgbClr val="475569"/>
                 </a:solidFill>
               </a:defRPr>
             </a:pPr>
@@ -11320,7 +11320,7 @@
             <a:pPr algn="ctr">
               <a:defRPr sz="1050">
                 <a:solidFill>
-                  <a:srgbClr val="52525B"/>
+                  <a:srgbClr val="475569"/>
                 </a:solidFill>
               </a:defRPr>
             </a:pPr>
@@ -11355,7 +11355,7 @@
             <a:pPr algn="ctr">
               <a:defRPr sz="1050" b="1">
                 <a:solidFill>
-                  <a:srgbClr val="585ECE"/>
+                  <a:srgbClr val="3182F6"/>
                 </a:solidFill>
               </a:defRPr>
             </a:pPr>
@@ -11380,11 +11380,11 @@
             <a:avLst/>
           </a:prstGeom>
           <a:solidFill>
-            <a:srgbClr val="F4F5FF"/>
+            <a:srgbClr val="EEF4FF"/>
           </a:solidFill>
           <a:ln w="15240">
             <a:solidFill>
-              <a:srgbClr val="585ECE"/>
+              <a:srgbClr val="3182F6"/>
             </a:solidFill>
           </a:ln>
         </p:spPr>
@@ -11435,7 +11435,7 @@
             <a:pPr algn="l">
               <a:defRPr sz="1050" b="1">
                 <a:solidFill>
-                  <a:srgbClr val="18181B"/>
+                  <a:srgbClr val="1E293B"/>
                 </a:solidFill>
               </a:defRPr>
             </a:pPr>
@@ -11470,7 +11470,7 @@
             <a:pPr algn="ctr">
               <a:defRPr sz="1050">
                 <a:solidFill>
-                  <a:srgbClr val="52525B"/>
+                  <a:srgbClr val="475569"/>
                 </a:solidFill>
               </a:defRPr>
             </a:pPr>
@@ -11505,7 +11505,7 @@
             <a:pPr algn="ctr">
               <a:defRPr sz="1050">
                 <a:solidFill>
-                  <a:srgbClr val="52525B"/>
+                  <a:srgbClr val="475569"/>
                 </a:solidFill>
               </a:defRPr>
             </a:pPr>
@@ -11540,7 +11540,7 @@
             <a:pPr algn="ctr">
               <a:defRPr sz="1050">
                 <a:solidFill>
-                  <a:srgbClr val="52525B"/>
+                  <a:srgbClr val="475569"/>
                 </a:solidFill>
               </a:defRPr>
             </a:pPr>
@@ -11575,7 +11575,7 @@
             <a:pPr algn="ctr">
               <a:defRPr sz="1050" b="1">
                 <a:solidFill>
-                  <a:srgbClr val="585ECE"/>
+                  <a:srgbClr val="3182F6"/>
                 </a:solidFill>
               </a:defRPr>
             </a:pPr>
@@ -11600,11 +11600,11 @@
             <a:avLst/>
           </a:prstGeom>
           <a:solidFill>
-            <a:srgbClr val="F4F5FF"/>
+            <a:srgbClr val="EEF4FF"/>
           </a:solidFill>
           <a:ln w="15240">
             <a:solidFill>
-              <a:srgbClr val="585ECE"/>
+              <a:srgbClr val="3182F6"/>
             </a:solidFill>
           </a:ln>
         </p:spPr>
@@ -11655,7 +11655,7 @@
             <a:pPr algn="l">
               <a:defRPr sz="1050" b="1">
                 <a:solidFill>
-                  <a:srgbClr val="18181B"/>
+                  <a:srgbClr val="1E293B"/>
                 </a:solidFill>
               </a:defRPr>
             </a:pPr>
@@ -11690,7 +11690,7 @@
             <a:pPr algn="ctr">
               <a:defRPr sz="1050">
                 <a:solidFill>
-                  <a:srgbClr val="52525B"/>
+                  <a:srgbClr val="475569"/>
                 </a:solidFill>
               </a:defRPr>
             </a:pPr>
@@ -11725,7 +11725,7 @@
             <a:pPr algn="ctr">
               <a:defRPr sz="1050">
                 <a:solidFill>
-                  <a:srgbClr val="52525B"/>
+                  <a:srgbClr val="475569"/>
                 </a:solidFill>
               </a:defRPr>
             </a:pPr>
@@ -11760,7 +11760,7 @@
             <a:pPr algn="ctr">
               <a:defRPr sz="1050">
                 <a:solidFill>
-                  <a:srgbClr val="52525B"/>
+                  <a:srgbClr val="475569"/>
                 </a:solidFill>
               </a:defRPr>
             </a:pPr>
@@ -11795,7 +11795,7 @@
             <a:pPr algn="ctr">
               <a:defRPr sz="1050" b="1">
                 <a:solidFill>
-                  <a:srgbClr val="585ECE"/>
+                  <a:srgbClr val="3182F6"/>
                 </a:solidFill>
               </a:defRPr>
             </a:pPr>
@@ -11820,11 +11820,11 @@
             <a:avLst/>
           </a:prstGeom>
           <a:solidFill>
-            <a:srgbClr val="F4F5FF"/>
+            <a:srgbClr val="EEF4FF"/>
           </a:solidFill>
           <a:ln w="15240">
             <a:solidFill>
-              <a:srgbClr val="585ECE"/>
+              <a:srgbClr val="3182F6"/>
             </a:solidFill>
           </a:ln>
         </p:spPr>
@@ -11875,7 +11875,7 @@
             <a:pPr algn="l">
               <a:defRPr sz="1050" b="1">
                 <a:solidFill>
-                  <a:srgbClr val="18181B"/>
+                  <a:srgbClr val="1E293B"/>
                 </a:solidFill>
               </a:defRPr>
             </a:pPr>
@@ -11910,7 +11910,7 @@
             <a:pPr algn="ctr">
               <a:defRPr sz="1050">
                 <a:solidFill>
-                  <a:srgbClr val="52525B"/>
+                  <a:srgbClr val="475569"/>
                 </a:solidFill>
               </a:defRPr>
             </a:pPr>
@@ -11945,7 +11945,7 @@
             <a:pPr algn="ctr">
               <a:defRPr sz="1050">
                 <a:solidFill>
-                  <a:srgbClr val="52525B"/>
+                  <a:srgbClr val="475569"/>
                 </a:solidFill>
               </a:defRPr>
             </a:pPr>
@@ -11980,7 +11980,7 @@
             <a:pPr algn="ctr">
               <a:defRPr sz="1050">
                 <a:solidFill>
-                  <a:srgbClr val="52525B"/>
+                  <a:srgbClr val="475569"/>
                 </a:solidFill>
               </a:defRPr>
             </a:pPr>
@@ -12015,7 +12015,7 @@
             <a:pPr algn="ctr">
               <a:defRPr sz="1050" b="1">
                 <a:solidFill>
-                  <a:srgbClr val="585ECE"/>
+                  <a:srgbClr val="3182F6"/>
                 </a:solidFill>
               </a:defRPr>
             </a:pPr>
@@ -12040,11 +12040,11 @@
             <a:avLst/>
           </a:prstGeom>
           <a:solidFill>
-            <a:srgbClr val="F4F5FF"/>
+            <a:srgbClr val="EEF4FF"/>
           </a:solidFill>
           <a:ln w="15240">
             <a:solidFill>
-              <a:srgbClr val="585ECE"/>
+              <a:srgbClr val="3182F6"/>
             </a:solidFill>
           </a:ln>
         </p:spPr>
@@ -12095,7 +12095,7 @@
             <a:pPr algn="l">
               <a:defRPr sz="1050" b="1">
                 <a:solidFill>
-                  <a:srgbClr val="18181B"/>
+                  <a:srgbClr val="1E293B"/>
                 </a:solidFill>
               </a:defRPr>
             </a:pPr>
@@ -12130,7 +12130,7 @@
             <a:pPr algn="ctr">
               <a:defRPr sz="1050">
                 <a:solidFill>
-                  <a:srgbClr val="52525B"/>
+                  <a:srgbClr val="475569"/>
                 </a:solidFill>
               </a:defRPr>
             </a:pPr>
@@ -12165,7 +12165,7 @@
             <a:pPr algn="ctr">
               <a:defRPr sz="1050">
                 <a:solidFill>
-                  <a:srgbClr val="52525B"/>
+                  <a:srgbClr val="475569"/>
                 </a:solidFill>
               </a:defRPr>
             </a:pPr>
@@ -12200,7 +12200,7 @@
             <a:pPr algn="ctr">
               <a:defRPr sz="1050">
                 <a:solidFill>
-                  <a:srgbClr val="52525B"/>
+                  <a:srgbClr val="475569"/>
                 </a:solidFill>
               </a:defRPr>
             </a:pPr>
@@ -12235,7 +12235,7 @@
             <a:pPr algn="ctr">
               <a:defRPr sz="1050" b="1">
                 <a:solidFill>
-                  <a:srgbClr val="585ECE"/>
+                  <a:srgbClr val="3182F6"/>
                 </a:solidFill>
               </a:defRPr>
             </a:pPr>
@@ -12278,7 +12278,7 @@
             <a:avLst/>
           </a:prstGeom>
           <a:solidFill>
-            <a:srgbClr val="F4F4F6"/>
+            <a:srgbClr val="F8FAFC"/>
           </a:solidFill>
           <a:ln>
             <a:noFill/>
@@ -12321,11 +12321,11 @@
             <a:avLst/>
           </a:prstGeom>
           <a:solidFill>
-            <a:srgbClr val="F4F5FF"/>
+            <a:srgbClr val="EEF4FF"/>
           </a:solidFill>
           <a:ln w="12700">
             <a:solidFill>
-              <a:srgbClr val="585ECE"/>
+              <a:srgbClr val="3182F6"/>
             </a:solidFill>
           </a:ln>
         </p:spPr>
@@ -12376,7 +12376,7 @@
             <a:pPr>
               <a:defRPr sz="1000" b="1">
                 <a:solidFill>
-                  <a:srgbClr val="585ECE"/>
+                  <a:srgbClr val="3182F6"/>
                 </a:solidFill>
                 <a:latin typeface="Pretendard"/>
               </a:defRPr>
@@ -12412,7 +12412,7 @@
             <a:pPr>
               <a:defRPr sz="2300" b="1">
                 <a:solidFill>
-                  <a:srgbClr val="0A0A0A"/>
+                  <a:srgbClr val="0F172A"/>
                 </a:solidFill>
                 <a:latin typeface="Pretendard"/>
               </a:defRPr>
@@ -12448,7 +12448,7 @@
             <a:pPr>
               <a:defRPr sz="1200">
                 <a:solidFill>
-                  <a:srgbClr val="52525B"/>
+                  <a:srgbClr val="475569"/>
                 </a:solidFill>
                 <a:latin typeface="Pretendard"/>
               </a:defRPr>
@@ -12484,7 +12484,7 @@
             <a:pPr>
               <a:defRPr sz="900">
                 <a:solidFill>
-                  <a:srgbClr val="71717A"/>
+                  <a:srgbClr val="64748B"/>
                 </a:solidFill>
                 <a:latin typeface="Pretendard"/>
               </a:defRPr>
@@ -12520,7 +12520,7 @@
             <a:pPr algn="r">
               <a:defRPr sz="1000" b="1">
                 <a:solidFill>
-                  <a:srgbClr val="585ECE"/>
+                  <a:srgbClr val="3182F6"/>
                 </a:solidFill>
                 <a:latin typeface="Pretendard"/>
               </a:defRPr>
@@ -12550,7 +12550,7 @@
           </a:solidFill>
           <a:ln w="22860">
             <a:solidFill>
-              <a:srgbClr val="585ECE"/>
+              <a:srgbClr val="3182F6"/>
             </a:solidFill>
           </a:ln>
         </p:spPr>
@@ -12591,7 +12591,7 @@
             <a:avLst/>
           </a:prstGeom>
           <a:solidFill>
-            <a:srgbClr val="585ECE"/>
+            <a:srgbClr val="3182F6"/>
           </a:solidFill>
           <a:ln>
             <a:noFill/>
@@ -12679,7 +12679,7 @@
             <a:pPr>
               <a:defRPr sz="1600" b="1">
                 <a:solidFill>
-                  <a:srgbClr val="0A0A0A"/>
+                  <a:srgbClr val="0F172A"/>
                 </a:solidFill>
               </a:defRPr>
             </a:pPr>
@@ -12714,7 +12714,7 @@
             <a:pPr>
               <a:defRPr sz="1200" b="1">
                 <a:solidFill>
-                  <a:srgbClr val="585ECE"/>
+                  <a:srgbClr val="3182F6"/>
                 </a:solidFill>
               </a:defRPr>
             </a:pPr>
@@ -12752,7 +12752,7 @@
               </a:lnSpc>
               <a:defRPr sz="1100">
                 <a:solidFill>
-                  <a:srgbClr val="52525B"/>
+                  <a:srgbClr val="475569"/>
                 </a:solidFill>
               </a:defRPr>
             </a:pPr>
@@ -12910,7 +12910,7 @@
             <a:pPr>
               <a:defRPr sz="1600" b="1">
                 <a:solidFill>
-                  <a:srgbClr val="0A0A0A"/>
+                  <a:srgbClr val="0F172A"/>
                 </a:solidFill>
               </a:defRPr>
             </a:pPr>
@@ -12983,7 +12983,7 @@
               </a:lnSpc>
               <a:defRPr sz="1100">
                 <a:solidFill>
-                  <a:srgbClr val="52525B"/>
+                  <a:srgbClr val="475569"/>
                 </a:solidFill>
               </a:defRPr>
             </a:pPr>
@@ -13141,7 +13141,7 @@
             <a:pPr>
               <a:defRPr sz="1600" b="1">
                 <a:solidFill>
-                  <a:srgbClr val="0A0A0A"/>
+                  <a:srgbClr val="0F172A"/>
                 </a:solidFill>
               </a:defRPr>
             </a:pPr>
@@ -13214,7 +13214,7 @@
               </a:lnSpc>
               <a:defRPr sz="1100">
                 <a:solidFill>
-                  <a:srgbClr val="52525B"/>
+                  <a:srgbClr val="475569"/>
                 </a:solidFill>
               </a:defRPr>
             </a:pPr>
@@ -13243,7 +13243,7 @@
           </a:solidFill>
           <a:ln w="19050">
             <a:solidFill>
-              <a:srgbClr val="585ECE"/>
+              <a:srgbClr val="3182F6"/>
             </a:solidFill>
           </a:ln>
         </p:spPr>
@@ -13294,7 +13294,7 @@
             <a:pPr>
               <a:defRPr sz="1100" b="1">
                 <a:solidFill>
-                  <a:srgbClr val="585ECE"/>
+                  <a:srgbClr val="3182F6"/>
                 </a:solidFill>
               </a:defRPr>
             </a:pPr>
@@ -13306,7 +13306,7 @@
             <a:pPr>
               <a:defRPr sz="950">
                 <a:solidFill>
-                  <a:srgbClr val="52525B"/>
+                  <a:srgbClr val="475569"/>
                 </a:solidFill>
               </a:defRPr>
             </a:pPr>
@@ -13353,7 +13353,7 @@
             <a:avLst/>
           </a:prstGeom>
           <a:solidFill>
-            <a:srgbClr val="F4F4F6"/>
+            <a:srgbClr val="F8FAFC"/>
           </a:solidFill>
           <a:ln>
             <a:noFill/>
@@ -13396,11 +13396,11 @@
             <a:avLst/>
           </a:prstGeom>
           <a:solidFill>
-            <a:srgbClr val="F4F5FF"/>
+            <a:srgbClr val="EEF4FF"/>
           </a:solidFill>
           <a:ln w="12700">
             <a:solidFill>
-              <a:srgbClr val="585ECE"/>
+              <a:srgbClr val="3182F6"/>
             </a:solidFill>
           </a:ln>
         </p:spPr>
@@ -13451,7 +13451,7 @@
             <a:pPr>
               <a:defRPr sz="1000" b="1">
                 <a:solidFill>
-                  <a:srgbClr val="585ECE"/>
+                  <a:srgbClr val="3182F6"/>
                 </a:solidFill>
                 <a:latin typeface="Pretendard"/>
               </a:defRPr>
@@ -13487,7 +13487,7 @@
             <a:pPr>
               <a:defRPr sz="2300" b="1">
                 <a:solidFill>
-                  <a:srgbClr val="0A0A0A"/>
+                  <a:srgbClr val="0F172A"/>
                 </a:solidFill>
                 <a:latin typeface="Pretendard"/>
               </a:defRPr>
@@ -13523,7 +13523,7 @@
             <a:pPr>
               <a:defRPr sz="1200">
                 <a:solidFill>
-                  <a:srgbClr val="52525B"/>
+                  <a:srgbClr val="475569"/>
                 </a:solidFill>
                 <a:latin typeface="Pretendard"/>
               </a:defRPr>
@@ -13559,7 +13559,7 @@
             <a:pPr>
               <a:defRPr sz="900">
                 <a:solidFill>
-                  <a:srgbClr val="71717A"/>
+                  <a:srgbClr val="64748B"/>
                 </a:solidFill>
                 <a:latin typeface="Pretendard"/>
               </a:defRPr>
@@ -13595,7 +13595,7 @@
             <a:pPr algn="r">
               <a:defRPr sz="1000" b="1">
                 <a:solidFill>
-                  <a:srgbClr val="585ECE"/>
+                  <a:srgbClr val="3182F6"/>
                 </a:solidFill>
                 <a:latin typeface="Pretendard"/>
               </a:defRPr>
@@ -13625,7 +13625,7 @@
           </a:solidFill>
           <a:ln w="15240">
             <a:solidFill>
-              <a:srgbClr val="585ECE"/>
+              <a:srgbClr val="3182F6"/>
             </a:solidFill>
           </a:ln>
         </p:spPr>
@@ -13666,7 +13666,7 @@
             <a:avLst/>
           </a:prstGeom>
           <a:solidFill>
-            <a:srgbClr val="585ECE"/>
+            <a:srgbClr val="3182F6"/>
           </a:solidFill>
           <a:ln>
             <a:noFill/>
@@ -13754,7 +13754,7 @@
             <a:pPr>
               <a:defRPr sz="1300" b="1">
                 <a:solidFill>
-                  <a:srgbClr val="0A0A0A"/>
+                  <a:srgbClr val="0F172A"/>
                 </a:solidFill>
               </a:defRPr>
             </a:pPr>
@@ -13766,7 +13766,7 @@
             <a:pPr>
               <a:defRPr sz="1000">
                 <a:solidFill>
-                  <a:srgbClr val="71717A"/>
+                  <a:srgbClr val="64748B"/>
                 </a:solidFill>
               </a:defRPr>
             </a:pPr>
@@ -13791,11 +13791,11 @@
             <a:avLst/>
           </a:prstGeom>
           <a:solidFill>
-            <a:srgbClr val="F4F5FF"/>
+            <a:srgbClr val="EEF4FF"/>
           </a:solidFill>
           <a:ln w="12700">
             <a:solidFill>
-              <a:srgbClr val="585ECE"/>
+              <a:srgbClr val="3182F6"/>
             </a:solidFill>
           </a:ln>
         </p:spPr>
@@ -13846,7 +13846,7 @@
             <a:pPr algn="ctr">
               <a:defRPr sz="1100" b="1">
                 <a:solidFill>
-                  <a:srgbClr val="585ECE"/>
+                  <a:srgbClr val="3182F6"/>
                 </a:solidFill>
               </a:defRPr>
             </a:pPr>
@@ -13871,7 +13871,7 @@
             <a:avLst/>
           </a:prstGeom>
           <a:solidFill>
-            <a:srgbClr val="F4F4F6"/>
+            <a:srgbClr val="F8FAFC"/>
           </a:solidFill>
           <a:ln>
             <a:noFill/>
@@ -13924,7 +13924,7 @@
             <a:pPr algn="ctr">
               <a:defRPr sz="950" b="1">
                 <a:solidFill>
-                  <a:srgbClr val="585ECE"/>
+                  <a:srgbClr val="3182F6"/>
                 </a:solidFill>
               </a:defRPr>
             </a:pPr>
@@ -13962,7 +13962,7 @@
               </a:lnSpc>
               <a:defRPr sz="1000">
                 <a:solidFill>
-                  <a:srgbClr val="52525B"/>
+                  <a:srgbClr val="475569"/>
                 </a:solidFill>
               </a:defRPr>
             </a:pPr>
@@ -14124,7 +14124,7 @@
             <a:pPr>
               <a:defRPr sz="1300" b="1">
                 <a:solidFill>
-                  <a:srgbClr val="0A0A0A"/>
+                  <a:srgbClr val="0F172A"/>
                 </a:solidFill>
               </a:defRPr>
             </a:pPr>
@@ -14136,7 +14136,7 @@
             <a:pPr>
               <a:defRPr sz="1000">
                 <a:solidFill>
-                  <a:srgbClr val="71717A"/>
+                  <a:srgbClr val="64748B"/>
                 </a:solidFill>
               </a:defRPr>
             </a:pPr>
@@ -14161,7 +14161,7 @@
             <a:avLst/>
           </a:prstGeom>
           <a:solidFill>
-            <a:srgbClr val="EBEBFC"/>
+            <a:srgbClr val="F5F3FF"/>
           </a:solidFill>
           <a:ln w="12700">
             <a:solidFill>
@@ -14241,7 +14241,7 @@
             <a:avLst/>
           </a:prstGeom>
           <a:solidFill>
-            <a:srgbClr val="F4F4F6"/>
+            <a:srgbClr val="F8FAFC"/>
           </a:solidFill>
           <a:ln>
             <a:noFill/>
@@ -14332,7 +14332,7 @@
               </a:lnSpc>
               <a:defRPr sz="1000">
                 <a:solidFill>
-                  <a:srgbClr val="52525B"/>
+                  <a:srgbClr val="475569"/>
                 </a:solidFill>
               </a:defRPr>
             </a:pPr>
@@ -14494,7 +14494,7 @@
             <a:pPr>
               <a:defRPr sz="1300" b="1">
                 <a:solidFill>
-                  <a:srgbClr val="0A0A0A"/>
+                  <a:srgbClr val="0F172A"/>
                 </a:solidFill>
               </a:defRPr>
             </a:pPr>
@@ -14506,7 +14506,7 @@
             <a:pPr>
               <a:defRPr sz="1000">
                 <a:solidFill>
-                  <a:srgbClr val="71717A"/>
+                  <a:srgbClr val="64748B"/>
                 </a:solidFill>
               </a:defRPr>
             </a:pPr>
@@ -14611,7 +14611,7 @@
             <a:avLst/>
           </a:prstGeom>
           <a:solidFill>
-            <a:srgbClr val="F4F4F6"/>
+            <a:srgbClr val="F8FAFC"/>
           </a:solidFill>
           <a:ln>
             <a:noFill/>
@@ -14702,7 +14702,7 @@
               </a:lnSpc>
               <a:defRPr sz="1000">
                 <a:solidFill>
-                  <a:srgbClr val="52525B"/>
+                  <a:srgbClr val="475569"/>
                 </a:solidFill>
               </a:defRPr>
             </a:pPr>
@@ -14864,7 +14864,7 @@
             <a:pPr>
               <a:defRPr sz="1300" b="1">
                 <a:solidFill>
-                  <a:srgbClr val="0A0A0A"/>
+                  <a:srgbClr val="0F172A"/>
                 </a:solidFill>
               </a:defRPr>
             </a:pPr>
@@ -14876,7 +14876,7 @@
             <a:pPr>
               <a:defRPr sz="1000">
                 <a:solidFill>
-                  <a:srgbClr val="71717A"/>
+                  <a:srgbClr val="64748B"/>
                 </a:solidFill>
               </a:defRPr>
             </a:pPr>
@@ -14901,7 +14901,7 @@
             <a:avLst/>
           </a:prstGeom>
           <a:solidFill>
-            <a:srgbClr val="EBEBFC"/>
+            <a:srgbClr val="F5F3FF"/>
           </a:solidFill>
           <a:ln w="12700">
             <a:solidFill>
@@ -14981,7 +14981,7 @@
             <a:avLst/>
           </a:prstGeom>
           <a:solidFill>
-            <a:srgbClr val="F4F4F6"/>
+            <a:srgbClr val="F8FAFC"/>
           </a:solidFill>
           <a:ln>
             <a:noFill/>
@@ -15072,7 +15072,7 @@
               </a:lnSpc>
               <a:defRPr sz="1000">
                 <a:solidFill>
-                  <a:srgbClr val="52525B"/>
+                  <a:srgbClr val="475569"/>
                 </a:solidFill>
               </a:defRPr>
             </a:pPr>
@@ -15105,7 +15105,7 @@
           </a:solidFill>
           <a:ln w="15240">
             <a:solidFill>
-              <a:srgbClr val="71717A"/>
+              <a:srgbClr val="64748B"/>
             </a:solidFill>
           </a:ln>
         </p:spPr>
@@ -15146,7 +15146,7 @@
             <a:avLst/>
           </a:prstGeom>
           <a:solidFill>
-            <a:srgbClr val="71717A"/>
+            <a:srgbClr val="64748B"/>
           </a:solidFill>
           <a:ln>
             <a:noFill/>
@@ -15234,7 +15234,7 @@
             <a:pPr>
               <a:defRPr sz="1300" b="1">
                 <a:solidFill>
-                  <a:srgbClr val="0A0A0A"/>
+                  <a:srgbClr val="0F172A"/>
                 </a:solidFill>
               </a:defRPr>
             </a:pPr>
@@ -15246,7 +15246,7 @@
             <a:pPr>
               <a:defRPr sz="1000">
                 <a:solidFill>
-                  <a:srgbClr val="71717A"/>
+                  <a:srgbClr val="64748B"/>
                 </a:solidFill>
               </a:defRPr>
             </a:pPr>
@@ -15271,11 +15271,11 @@
             <a:avLst/>
           </a:prstGeom>
           <a:solidFill>
-            <a:srgbClr val="EBEBFC"/>
+            <a:srgbClr val="F5F3FF"/>
           </a:solidFill>
           <a:ln w="12700">
             <a:solidFill>
-              <a:srgbClr val="71717A"/>
+              <a:srgbClr val="64748B"/>
             </a:solidFill>
           </a:ln>
         </p:spPr>
@@ -15326,7 +15326,7 @@
             <a:pPr algn="ctr">
               <a:defRPr sz="1100" b="1">
                 <a:solidFill>
-                  <a:srgbClr val="71717A"/>
+                  <a:srgbClr val="64748B"/>
                 </a:solidFill>
               </a:defRPr>
             </a:pPr>
@@ -15351,7 +15351,7 @@
             <a:avLst/>
           </a:prstGeom>
           <a:solidFill>
-            <a:srgbClr val="F4F4F6"/>
+            <a:srgbClr val="F8FAFC"/>
           </a:solidFill>
           <a:ln>
             <a:noFill/>
@@ -15404,7 +15404,7 @@
             <a:pPr algn="ctr">
               <a:defRPr sz="950" b="1">
                 <a:solidFill>
-                  <a:srgbClr val="71717A"/>
+                  <a:srgbClr val="64748B"/>
                 </a:solidFill>
               </a:defRPr>
             </a:pPr>
@@ -15442,7 +15442,7 @@
               </a:lnSpc>
               <a:defRPr sz="1000">
                 <a:solidFill>
-                  <a:srgbClr val="52525B"/>
+                  <a:srgbClr val="475569"/>
                 </a:solidFill>
               </a:defRPr>
             </a:pPr>
@@ -15489,7 +15489,7 @@
             <a:avLst/>
           </a:prstGeom>
           <a:solidFill>
-            <a:srgbClr val="F4F4F6"/>
+            <a:srgbClr val="F8FAFC"/>
           </a:solidFill>
           <a:ln>
             <a:noFill/>
@@ -15532,11 +15532,11 @@
             <a:avLst/>
           </a:prstGeom>
           <a:solidFill>
-            <a:srgbClr val="F4F5FF"/>
+            <a:srgbClr val="EEF4FF"/>
           </a:solidFill>
           <a:ln w="12700">
             <a:solidFill>
-              <a:srgbClr val="585ECE"/>
+              <a:srgbClr val="3182F6"/>
             </a:solidFill>
           </a:ln>
         </p:spPr>
@@ -15587,7 +15587,7 @@
             <a:pPr>
               <a:defRPr sz="1000" b="1">
                 <a:solidFill>
-                  <a:srgbClr val="585ECE"/>
+                  <a:srgbClr val="3182F6"/>
                 </a:solidFill>
                 <a:latin typeface="Pretendard"/>
               </a:defRPr>
@@ -15623,7 +15623,7 @@
             <a:pPr>
               <a:defRPr sz="2300" b="1">
                 <a:solidFill>
-                  <a:srgbClr val="0A0A0A"/>
+                  <a:srgbClr val="0F172A"/>
                 </a:solidFill>
                 <a:latin typeface="Pretendard"/>
               </a:defRPr>
@@ -15659,7 +15659,7 @@
             <a:pPr>
               <a:defRPr sz="1200">
                 <a:solidFill>
-                  <a:srgbClr val="52525B"/>
+                  <a:srgbClr val="475569"/>
                 </a:solidFill>
                 <a:latin typeface="Pretendard"/>
               </a:defRPr>
@@ -15695,7 +15695,7 @@
             <a:pPr>
               <a:defRPr sz="900">
                 <a:solidFill>
-                  <a:srgbClr val="71717A"/>
+                  <a:srgbClr val="64748B"/>
                 </a:solidFill>
                 <a:latin typeface="Pretendard"/>
               </a:defRPr>
@@ -15731,7 +15731,7 @@
             <a:pPr algn="r">
               <a:defRPr sz="1000" b="1">
                 <a:solidFill>
-                  <a:srgbClr val="585ECE"/>
+                  <a:srgbClr val="3182F6"/>
                 </a:solidFill>
                 <a:latin typeface="Pretendard"/>
               </a:defRPr>
@@ -15761,7 +15761,7 @@
           </a:solidFill>
           <a:ln w="22860">
             <a:solidFill>
-              <a:srgbClr val="585ECE"/>
+              <a:srgbClr val="3182F6"/>
             </a:solidFill>
           </a:ln>
         </p:spPr>
@@ -15802,7 +15802,7 @@
             <a:avLst/>
           </a:prstGeom>
           <a:solidFill>
-            <a:srgbClr val="585ECE"/>
+            <a:srgbClr val="3182F6"/>
           </a:solidFill>
           <a:ln>
             <a:noFill/>
@@ -15890,7 +15890,7 @@
             <a:pPr>
               <a:defRPr sz="1700" b="1">
                 <a:solidFill>
-                  <a:srgbClr val="0A0A0A"/>
+                  <a:srgbClr val="0F172A"/>
                 </a:solidFill>
               </a:defRPr>
             </a:pPr>
@@ -15925,7 +15925,7 @@
             <a:pPr>
               <a:defRPr sz="1200" b="1">
                 <a:solidFill>
-                  <a:srgbClr val="585ECE"/>
+                  <a:srgbClr val="3182F6"/>
                 </a:solidFill>
               </a:defRPr>
             </a:pPr>
@@ -15963,7 +15963,7 @@
               </a:lnSpc>
               <a:defRPr sz="1150">
                 <a:solidFill>
-                  <a:srgbClr val="52525B"/>
+                  <a:srgbClr val="475569"/>
                 </a:solidFill>
               </a:defRPr>
             </a:pPr>
@@ -16126,7 +16126,7 @@
             <a:pPr>
               <a:defRPr sz="1700" b="1">
                 <a:solidFill>
-                  <a:srgbClr val="0A0A0A"/>
+                  <a:srgbClr val="0F172A"/>
                 </a:solidFill>
               </a:defRPr>
             </a:pPr>
@@ -16199,7 +16199,7 @@
               </a:lnSpc>
               <a:defRPr sz="1150">
                 <a:solidFill>
-                  <a:srgbClr val="52525B"/>
+                  <a:srgbClr val="475569"/>
                 </a:solidFill>
               </a:defRPr>
             </a:pPr>
@@ -16362,7 +16362,7 @@
             <a:pPr>
               <a:defRPr sz="1700" b="1">
                 <a:solidFill>
-                  <a:srgbClr val="0A0A0A"/>
+                  <a:srgbClr val="0F172A"/>
                 </a:solidFill>
               </a:defRPr>
             </a:pPr>
@@ -16435,7 +16435,7 @@
               </a:lnSpc>
               <a:defRPr sz="1150">
                 <a:solidFill>
-                  <a:srgbClr val="52525B"/>
+                  <a:srgbClr val="475569"/>
                 </a:solidFill>
               </a:defRPr>
             </a:pPr>
